--- a/docs/pipeline.pptx
+++ b/docs/pipeline.pptx
@@ -6,6 +6,9 @@
   </p:sldMasterIdLst>
   <p:sldIdLst>
     <p:sldId id="256" r:id="rId2"/>
+    <p:sldId id="257" r:id="rId3"/>
+    <p:sldId id="258" r:id="rId4"/>
+    <p:sldId id="259" r:id="rId5"/>
   </p:sldIdLst>
   <p:sldSz cx="12192000" cy="6858000"/>
   <p:notesSz cx="6858000" cy="9144000"/>
@@ -107,12 +110,12 @@
   <p:extLst>
     <p:ext uri="{EFAFB233-063F-42B5-8137-9DF3F51BA10A}">
       <p15:sldGuideLst xmlns:p15="http://schemas.microsoft.com/office/powerpoint/2012/main">
-        <p15:guide id="1" orient="horz" pos="2160" userDrawn="1">
+        <p15:guide id="1" orient="horz" pos="2150" userDrawn="1">
           <p15:clr>
             <a:srgbClr val="A4A3A4"/>
           </p15:clr>
         </p15:guide>
-        <p15:guide id="2" pos="3840" userDrawn="1">
+        <p15:guide id="2" pos="3876" userDrawn="1">
           <p15:clr>
             <a:srgbClr val="A4A3A4"/>
           </p15:clr>
@@ -252,7 +255,7 @@
           <a:p>
             <a:fld id="{D997B5FA-0921-464F-AAE1-844C04324D75}" type="datetimeFigureOut">
               <a:rPr lang="zh-CN" altLang="en-US" smtClean="0"/>
-              <a:t>2026/6/6</a:t>
+              <a:t>2026/6/18</a:t>
             </a:fld>
             <a:endParaRPr lang="zh-CN" altLang="en-US"/>
           </a:p>
@@ -415,7 +418,7 @@
           <a:p>
             <a:fld id="{D997B5FA-0921-464F-AAE1-844C04324D75}" type="datetimeFigureOut">
               <a:rPr lang="zh-CN" altLang="en-US" smtClean="0"/>
-              <a:t>2026/6/6</a:t>
+              <a:t>2026/6/18</a:t>
             </a:fld>
             <a:endParaRPr lang="zh-CN" altLang="en-US"/>
           </a:p>
@@ -588,7 +591,7 @@
           <a:p>
             <a:fld id="{D997B5FA-0921-464F-AAE1-844C04324D75}" type="datetimeFigureOut">
               <a:rPr lang="zh-CN" altLang="en-US" smtClean="0"/>
-              <a:t>2026/6/6</a:t>
+              <a:t>2026/6/18</a:t>
             </a:fld>
             <a:endParaRPr lang="zh-CN" altLang="en-US"/>
           </a:p>
@@ -751,7 +754,7 @@
           <a:p>
             <a:fld id="{D997B5FA-0921-464F-AAE1-844C04324D75}" type="datetimeFigureOut">
               <a:rPr lang="zh-CN" altLang="en-US" smtClean="0"/>
-              <a:t>2026/6/6</a:t>
+              <a:t>2026/6/18</a:t>
             </a:fld>
             <a:endParaRPr lang="zh-CN" altLang="en-US"/>
           </a:p>
@@ -991,7 +994,7 @@
           <a:p>
             <a:fld id="{D997B5FA-0921-464F-AAE1-844C04324D75}" type="datetimeFigureOut">
               <a:rPr lang="zh-CN" altLang="en-US" smtClean="0"/>
-              <a:t>2026/6/6</a:t>
+              <a:t>2026/6/18</a:t>
             </a:fld>
             <a:endParaRPr lang="zh-CN" altLang="en-US"/>
           </a:p>
@@ -1215,7 +1218,7 @@
           <a:p>
             <a:fld id="{D997B5FA-0921-464F-AAE1-844C04324D75}" type="datetimeFigureOut">
               <a:rPr lang="zh-CN" altLang="en-US" smtClean="0"/>
-              <a:t>2026/6/6</a:t>
+              <a:t>2026/6/18</a:t>
             </a:fld>
             <a:endParaRPr lang="zh-CN" altLang="en-US"/>
           </a:p>
@@ -1574,7 +1577,7 @@
           <a:p>
             <a:fld id="{D997B5FA-0921-464F-AAE1-844C04324D75}" type="datetimeFigureOut">
               <a:rPr lang="zh-CN" altLang="en-US" smtClean="0"/>
-              <a:t>2026/6/6</a:t>
+              <a:t>2026/6/18</a:t>
             </a:fld>
             <a:endParaRPr lang="zh-CN" altLang="en-US"/>
           </a:p>
@@ -1686,7 +1689,7 @@
           <a:p>
             <a:fld id="{D997B5FA-0921-464F-AAE1-844C04324D75}" type="datetimeFigureOut">
               <a:rPr lang="zh-CN" altLang="en-US" smtClean="0"/>
-              <a:t>2026/6/6</a:t>
+              <a:t>2026/6/18</a:t>
             </a:fld>
             <a:endParaRPr lang="zh-CN" altLang="en-US"/>
           </a:p>
@@ -1776,7 +1779,7 @@
           <a:p>
             <a:fld id="{D997B5FA-0921-464F-AAE1-844C04324D75}" type="datetimeFigureOut">
               <a:rPr lang="zh-CN" altLang="en-US" smtClean="0"/>
-              <a:t>2026/6/6</a:t>
+              <a:t>2026/6/18</a:t>
             </a:fld>
             <a:endParaRPr lang="zh-CN" altLang="en-US"/>
           </a:p>
@@ -2046,7 +2049,7 @@
           <a:p>
             <a:fld id="{D997B5FA-0921-464F-AAE1-844C04324D75}" type="datetimeFigureOut">
               <a:rPr lang="zh-CN" altLang="en-US" smtClean="0"/>
-              <a:t>2026/6/6</a:t>
+              <a:t>2026/6/18</a:t>
             </a:fld>
             <a:endParaRPr lang="zh-CN" altLang="en-US"/>
           </a:p>
@@ -2293,7 +2296,7 @@
           <a:p>
             <a:fld id="{D997B5FA-0921-464F-AAE1-844C04324D75}" type="datetimeFigureOut">
               <a:rPr lang="zh-CN" altLang="en-US" smtClean="0"/>
-              <a:t>2026/6/6</a:t>
+              <a:t>2026/6/18</a:t>
             </a:fld>
             <a:endParaRPr lang="zh-CN" altLang="en-US"/>
           </a:p>
@@ -2499,7 +2502,7 @@
           <a:p>
             <a:fld id="{D997B5FA-0921-464F-AAE1-844C04324D75}" type="datetimeFigureOut">
               <a:rPr lang="zh-CN" altLang="en-US" smtClean="0"/>
-              <a:t>2026/6/6</a:t>
+              <a:t>2026/6/18</a:t>
             </a:fld>
             <a:endParaRPr lang="zh-CN" altLang="en-US"/>
           </a:p>
@@ -2899,99 +2902,9 @@
           <a:chExt cx="0" cy="0"/>
         </a:xfrm>
       </p:grpSpPr>
-      <p:pic>
-        <p:nvPicPr>
-          <p:cNvPr id="4" name="Picture 3">
-            <a:extLst>
-              <a:ext uri="{FF2B5EF4-FFF2-40B4-BE49-F238E27FC236}">
-                <a16:creationId xmlns:a16="http://schemas.microsoft.com/office/drawing/2014/main" id="{C265DCCF-4FF4-68A3-450B-E434AFCAE844}"/>
-              </a:ext>
-            </a:extLst>
-          </p:cNvPr>
-          <p:cNvPicPr>
-            <a:picLocks noChangeAspect="1"/>
-          </p:cNvPicPr>
-          <p:nvPr/>
-        </p:nvPicPr>
-        <p:blipFill>
-          <a:blip r:embed="rId2"/>
-          <a:stretch>
-            <a:fillRect/>
-          </a:stretch>
-        </p:blipFill>
-        <p:spPr>
-          <a:xfrm>
-            <a:off x="0" y="1191536"/>
-            <a:ext cx="12192000" cy="4621937"/>
-          </a:xfrm>
-          <a:prstGeom prst="rect">
-            <a:avLst/>
-          </a:prstGeom>
-        </p:spPr>
-      </p:pic>
       <p:sp>
         <p:nvSpPr>
-          <p:cNvPr id="5" name="Rectangle 4">
-            <a:extLst>
-              <a:ext uri="{FF2B5EF4-FFF2-40B4-BE49-F238E27FC236}">
-                <a16:creationId xmlns:a16="http://schemas.microsoft.com/office/drawing/2014/main" id="{4743390D-0281-D7AD-45E9-A76795D0105C}"/>
-              </a:ext>
-            </a:extLst>
-          </p:cNvPr>
-          <p:cNvSpPr/>
-          <p:nvPr/>
-        </p:nvSpPr>
-        <p:spPr>
-          <a:xfrm>
-            <a:off x="1313419" y="1044526"/>
-            <a:ext cx="6401317" cy="4118369"/>
-          </a:xfrm>
-          <a:prstGeom prst="rect">
-            <a:avLst/>
-          </a:prstGeom>
-          <a:solidFill>
-            <a:schemeClr val="bg1"/>
-          </a:solidFill>
-          <a:ln>
-            <a:solidFill>
-              <a:schemeClr val="bg1"/>
-            </a:solidFill>
-          </a:ln>
-        </p:spPr>
-        <p:style>
-          <a:lnRef idx="2">
-            <a:schemeClr val="accent1">
-              <a:shade val="15000"/>
-            </a:schemeClr>
-          </a:lnRef>
-          <a:fillRef idx="1">
-            <a:schemeClr val="accent1"/>
-          </a:fillRef>
-          <a:effectRef idx="0">
-            <a:schemeClr val="accent1"/>
-          </a:effectRef>
-          <a:fontRef idx="minor">
-            <a:schemeClr val="lt1"/>
-          </a:fontRef>
-        </p:style>
-        <p:txBody>
-          <a:bodyPr rtlCol="0" anchor="ctr"/>
-          <a:lstStyle/>
-          <a:p>
-            <a:pPr algn="ctr"/>
-            <a:endParaRPr lang="en-US"/>
-          </a:p>
-        </p:txBody>
-      </p:sp>
-      <p:sp>
-        <p:nvSpPr>
-          <p:cNvPr id="6" name="Rectangle 5">
-            <a:extLst>
-              <a:ext uri="{FF2B5EF4-FFF2-40B4-BE49-F238E27FC236}">
-                <a16:creationId xmlns:a16="http://schemas.microsoft.com/office/drawing/2014/main" id="{191F33BF-36D8-B07B-0209-1987B3F07B90}"/>
-              </a:ext>
-            </a:extLst>
-          </p:cNvPr>
+          <p:cNvPr id="6" name="Rectangle 5"/>
           <p:cNvSpPr/>
           <p:nvPr/>
         </p:nvSpPr>
@@ -3059,13 +2972,7 @@
       </p:sp>
       <p:sp>
         <p:nvSpPr>
-          <p:cNvPr id="7" name="Rectangle 6">
-            <a:extLst>
-              <a:ext uri="{FF2B5EF4-FFF2-40B4-BE49-F238E27FC236}">
-                <a16:creationId xmlns:a16="http://schemas.microsoft.com/office/drawing/2014/main" id="{20DE2C02-D291-A820-0177-1D3F5F6056C9}"/>
-              </a:ext>
-            </a:extLst>
-          </p:cNvPr>
+          <p:cNvPr id="7" name="Rectangle 6"/>
           <p:cNvSpPr/>
           <p:nvPr/>
         </p:nvSpPr>
@@ -3131,17 +3038,11 @@
           </a:p>
         </p:txBody>
       </p:sp>
-      <mc:AlternateContent xmlns:mc="http://schemas.openxmlformats.org/markup-compatibility/2006">
-        <mc:Choice xmlns:a14="http://schemas.microsoft.com/office/drawing/2010/main" Requires="a14">
+      <mc:AlternateContent xmlns:mc="http://schemas.openxmlformats.org/markup-compatibility/2006" xmlns:a14="http://schemas.microsoft.com/office/drawing/2010/main">
+        <mc:Choice Requires="a14">
           <p:sp>
             <p:nvSpPr>
-              <p:cNvPr id="8" name="Rectangle 7">
-                <a:extLst>
-                  <a:ext uri="{FF2B5EF4-FFF2-40B4-BE49-F238E27FC236}">
-                    <a16:creationId xmlns:a16="http://schemas.microsoft.com/office/drawing/2014/main" id="{55D88FF2-2E40-5F4C-459A-B6A2FB5334FF}"/>
-                  </a:ext>
-                </a:extLst>
-              </p:cNvPr>
+              <p:cNvPr id="8" name="Rectangle 7"/>
               <p:cNvSpPr/>
               <p:nvPr/>
             </p:nvSpPr>
@@ -3243,16 +3144,10 @@
             </p:txBody>
           </p:sp>
         </mc:Choice>
-        <mc:Fallback>
+        <mc:Fallback xmlns="">
           <p:sp>
             <p:nvSpPr>
-              <p:cNvPr id="8" name="Rectangle 7">
-                <a:extLst>
-                  <a:ext uri="{FF2B5EF4-FFF2-40B4-BE49-F238E27FC236}">
-                    <a16:creationId xmlns:a16="http://schemas.microsoft.com/office/drawing/2014/main" id="{55D88FF2-2E40-5F4C-459A-B6A2FB5334FF}"/>
-                  </a:ext>
-                </a:extLst>
-              </p:cNvPr>
+              <p:cNvPr id="8" name="Rectangle 7"/>
               <p:cNvSpPr>
                 <a:spLocks noRot="1" noChangeAspect="1" noMove="1" noResize="1" noEditPoints="1" noAdjustHandles="1" noChangeArrowheads="1" noChangeShapeType="1" noTextEdit="1"/>
               </p:cNvSpPr>
@@ -3266,10 +3161,10 @@
               <a:prstGeom prst="rect">
                 <a:avLst/>
               </a:prstGeom>
-              <a:blipFill>
+              <a:blipFill rotWithShape="1">
                 <a:blip r:embed="rId3"/>
                 <a:stretch>
-                  <a:fillRect t="-7407" b="-24074"/>
+                  <a:fillRect l="-208" t="-2109" r="-188" b="-1836"/>
                 </a:stretch>
               </a:blipFill>
               <a:ln>
@@ -3278,12 +3173,28 @@
                 </a:solidFill>
               </a:ln>
             </p:spPr>
+            <p:style>
+              <a:lnRef idx="2">
+                <a:schemeClr val="accent1">
+                  <a:shade val="15000"/>
+                </a:schemeClr>
+              </a:lnRef>
+              <a:fillRef idx="1">
+                <a:schemeClr val="accent1"/>
+              </a:fillRef>
+              <a:effectRef idx="0">
+                <a:schemeClr val="accent1"/>
+              </a:effectRef>
+              <a:fontRef idx="minor">
+                <a:schemeClr val="lt1"/>
+              </a:fontRef>
+            </p:style>
             <p:txBody>
               <a:bodyPr/>
               <a:lstStyle/>
               <a:p>
                 <a:r>
-                  <a:rPr lang="en-US">
+                  <a:rPr lang="zh-CN" altLang="en-US">
                     <a:noFill/>
                   </a:rPr>
                   <a:t> </a:t>
@@ -3295,13 +3206,7 @@
       </mc:AlternateContent>
       <p:sp>
         <p:nvSpPr>
-          <p:cNvPr id="9" name="Rectangle 8">
-            <a:extLst>
-              <a:ext uri="{FF2B5EF4-FFF2-40B4-BE49-F238E27FC236}">
-                <a16:creationId xmlns:a16="http://schemas.microsoft.com/office/drawing/2014/main" id="{07CE7EA9-35E4-A2E9-B7F5-D38F7C1DA667}"/>
-              </a:ext>
-            </a:extLst>
-          </p:cNvPr>
+          <p:cNvPr id="9" name="Rectangle 8"/>
           <p:cNvSpPr/>
           <p:nvPr/>
         </p:nvSpPr>
@@ -3347,17 +3252,11 @@
           </a:p>
         </p:txBody>
       </p:sp>
-      <mc:AlternateContent xmlns:mc="http://schemas.openxmlformats.org/markup-compatibility/2006">
-        <mc:Choice xmlns:a14="http://schemas.microsoft.com/office/drawing/2010/main" Requires="a14">
+      <mc:AlternateContent xmlns:mc="http://schemas.openxmlformats.org/markup-compatibility/2006" xmlns:a14="http://schemas.microsoft.com/office/drawing/2010/main">
+        <mc:Choice Requires="a14">
           <p:sp>
             <p:nvSpPr>
-              <p:cNvPr id="10" name="Rectangle 9">
-                <a:extLst>
-                  <a:ext uri="{FF2B5EF4-FFF2-40B4-BE49-F238E27FC236}">
-                    <a16:creationId xmlns:a16="http://schemas.microsoft.com/office/drawing/2014/main" id="{0B8E2FF4-17AA-C13D-B837-9FCF2379CB8E}"/>
-                  </a:ext>
-                </a:extLst>
-              </p:cNvPr>
+              <p:cNvPr id="10" name="Rectangle 9"/>
               <p:cNvSpPr/>
               <p:nvPr/>
             </p:nvSpPr>
@@ -3732,16 +3631,10 @@
             </p:txBody>
           </p:sp>
         </mc:Choice>
-        <mc:Fallback>
+        <mc:Fallback xmlns="">
           <p:sp>
             <p:nvSpPr>
-              <p:cNvPr id="10" name="Rectangle 9">
-                <a:extLst>
-                  <a:ext uri="{FF2B5EF4-FFF2-40B4-BE49-F238E27FC236}">
-                    <a16:creationId xmlns:a16="http://schemas.microsoft.com/office/drawing/2014/main" id="{0B8E2FF4-17AA-C13D-B837-9FCF2379CB8E}"/>
-                  </a:ext>
-                </a:extLst>
-              </p:cNvPr>
+              <p:cNvPr id="10" name="Rectangle 9"/>
               <p:cNvSpPr>
                 <a:spLocks noRot="1" noChangeAspect="1" noMove="1" noResize="1" noEditPoints="1" noAdjustHandles="1" noChangeArrowheads="1" noChangeShapeType="1" noTextEdit="1"/>
               </p:cNvSpPr>
@@ -3755,10 +3648,10 @@
               <a:prstGeom prst="rect">
                 <a:avLst/>
               </a:prstGeom>
-              <a:blipFill>
+              <a:blipFill rotWithShape="1">
                 <a:blip r:embed="rId4"/>
                 <a:stretch>
-                  <a:fillRect/>
+                  <a:fillRect l="-260" t="-515" r="-225" b="-447"/>
                 </a:stretch>
               </a:blipFill>
               <a:ln>
@@ -3767,12 +3660,28 @@
                 </a:solidFill>
               </a:ln>
             </p:spPr>
+            <p:style>
+              <a:lnRef idx="2">
+                <a:schemeClr val="accent1">
+                  <a:shade val="15000"/>
+                </a:schemeClr>
+              </a:lnRef>
+              <a:fillRef idx="1">
+                <a:schemeClr val="accent1"/>
+              </a:fillRef>
+              <a:effectRef idx="0">
+                <a:schemeClr val="accent1"/>
+              </a:effectRef>
+              <a:fontRef idx="minor">
+                <a:schemeClr val="lt1"/>
+              </a:fontRef>
+            </p:style>
             <p:txBody>
               <a:bodyPr/>
               <a:lstStyle/>
               <a:p>
                 <a:r>
-                  <a:rPr lang="en-US">
+                  <a:rPr lang="zh-CN" altLang="en-US">
                     <a:noFill/>
                   </a:rPr>
                   <a:t> </a:t>
@@ -3784,13 +3693,7 @@
       </mc:AlternateContent>
       <p:sp>
         <p:nvSpPr>
-          <p:cNvPr id="11" name="Rectangle 10">
-            <a:extLst>
-              <a:ext uri="{FF2B5EF4-FFF2-40B4-BE49-F238E27FC236}">
-                <a16:creationId xmlns:a16="http://schemas.microsoft.com/office/drawing/2014/main" id="{B87376AC-A89C-97F5-2752-A94E0C57185C}"/>
-              </a:ext>
-            </a:extLst>
-          </p:cNvPr>
+          <p:cNvPr id="11" name="Rectangle 10"/>
           <p:cNvSpPr/>
           <p:nvPr/>
         </p:nvSpPr>
@@ -3845,13 +3748,7 @@
       </p:sp>
       <p:sp>
         <p:nvSpPr>
-          <p:cNvPr id="12" name="Rectangle: Rounded Corners 11">
-            <a:extLst>
-              <a:ext uri="{FF2B5EF4-FFF2-40B4-BE49-F238E27FC236}">
-                <a16:creationId xmlns:a16="http://schemas.microsoft.com/office/drawing/2014/main" id="{FAFB44D1-FB22-5DF8-D4B6-9F42D2AE7DD8}"/>
-              </a:ext>
-            </a:extLst>
-          </p:cNvPr>
+          <p:cNvPr id="12" name="Rectangle: Rounded Corners 11"/>
           <p:cNvSpPr/>
           <p:nvPr/>
         </p:nvSpPr>
@@ -3899,13 +3796,7 @@
       </p:sp>
       <p:sp>
         <p:nvSpPr>
-          <p:cNvPr id="13" name="Rectangle 12">
-            <a:extLst>
-              <a:ext uri="{FF2B5EF4-FFF2-40B4-BE49-F238E27FC236}">
-                <a16:creationId xmlns:a16="http://schemas.microsoft.com/office/drawing/2014/main" id="{71B17BC0-3302-74E6-11A8-3C3E8E31908E}"/>
-              </a:ext>
-            </a:extLst>
-          </p:cNvPr>
+          <p:cNvPr id="13" name="Rectangle 12"/>
           <p:cNvSpPr/>
           <p:nvPr/>
         </p:nvSpPr>
@@ -3960,13 +3851,7 @@
       </p:sp>
       <p:sp>
         <p:nvSpPr>
-          <p:cNvPr id="14" name="Rectangle 13">
-            <a:extLst>
-              <a:ext uri="{FF2B5EF4-FFF2-40B4-BE49-F238E27FC236}">
-                <a16:creationId xmlns:a16="http://schemas.microsoft.com/office/drawing/2014/main" id="{1EECF2A5-312C-5EE0-A029-FCDB83DAE3B1}"/>
-              </a:ext>
-            </a:extLst>
-          </p:cNvPr>
+          <p:cNvPr id="14" name="Rectangle 13"/>
           <p:cNvSpPr/>
           <p:nvPr/>
         </p:nvSpPr>
@@ -4021,13 +3906,7 @@
       </p:sp>
       <p:grpSp>
         <p:nvGrpSpPr>
-          <p:cNvPr id="15" name="Group 14">
-            <a:extLst>
-              <a:ext uri="{FF2B5EF4-FFF2-40B4-BE49-F238E27FC236}">
-                <a16:creationId xmlns:a16="http://schemas.microsoft.com/office/drawing/2014/main" id="{53CE4D39-431D-B7B0-DFF3-EB76D63D2311}"/>
-              </a:ext>
-            </a:extLst>
-          </p:cNvPr>
+          <p:cNvPr id="15" name="Group 14"/>
           <p:cNvGrpSpPr/>
           <p:nvPr/>
         </p:nvGrpSpPr>
@@ -4041,13 +3920,7 @@
         </p:grpSpPr>
         <p:sp>
           <p:nvSpPr>
-            <p:cNvPr id="16" name="Rectangle 15">
-              <a:extLst>
-                <a:ext uri="{FF2B5EF4-FFF2-40B4-BE49-F238E27FC236}">
-                  <a16:creationId xmlns:a16="http://schemas.microsoft.com/office/drawing/2014/main" id="{480DFF85-529A-E8AC-89DE-E075297CB589}"/>
-                </a:ext>
-              </a:extLst>
-            </p:cNvPr>
+            <p:cNvPr id="16" name="Rectangle 15"/>
             <p:cNvSpPr/>
             <p:nvPr/>
           </p:nvSpPr>
@@ -4098,13 +3971,7 @@
         </p:sp>
         <p:grpSp>
           <p:nvGrpSpPr>
-            <p:cNvPr id="17" name="Group 16">
-              <a:extLst>
-                <a:ext uri="{FF2B5EF4-FFF2-40B4-BE49-F238E27FC236}">
-                  <a16:creationId xmlns:a16="http://schemas.microsoft.com/office/drawing/2014/main" id="{AA4F8A32-8F77-CA16-378F-E892F7500008}"/>
-                </a:ext>
-              </a:extLst>
-            </p:cNvPr>
+            <p:cNvPr id="17" name="Group 16"/>
             <p:cNvGrpSpPr/>
             <p:nvPr/>
           </p:nvGrpSpPr>
@@ -4118,13 +3985,7 @@
           </p:grpSpPr>
           <p:grpSp>
             <p:nvGrpSpPr>
-              <p:cNvPr id="18" name="Group 17">
-                <a:extLst>
-                  <a:ext uri="{FF2B5EF4-FFF2-40B4-BE49-F238E27FC236}">
-                    <a16:creationId xmlns:a16="http://schemas.microsoft.com/office/drawing/2014/main" id="{0C296404-FA25-B256-AFFE-87EC545B590F}"/>
-                  </a:ext>
-                </a:extLst>
-              </p:cNvPr>
+              <p:cNvPr id="18" name="Group 17"/>
               <p:cNvGrpSpPr/>
               <p:nvPr/>
             </p:nvGrpSpPr>
@@ -4138,13 +3999,7 @@
             </p:grpSpPr>
             <p:sp>
               <p:nvSpPr>
-                <p:cNvPr id="20" name="Rectangle: Rounded Corners 19">
-                  <a:extLst>
-                    <a:ext uri="{FF2B5EF4-FFF2-40B4-BE49-F238E27FC236}">
-                      <a16:creationId xmlns:a16="http://schemas.microsoft.com/office/drawing/2014/main" id="{DDA83FE1-A7B0-9869-FCA4-2CAE4DA5E82E}"/>
-                    </a:ext>
-                  </a:extLst>
-                </p:cNvPr>
+                <p:cNvPr id="20" name="Rectangle: Rounded Corners 19"/>
                 <p:cNvSpPr/>
                 <p:nvPr/>
               </p:nvSpPr>
@@ -4198,13 +4053,7 @@
             </p:sp>
             <p:grpSp>
               <p:nvGrpSpPr>
-                <p:cNvPr id="21" name="Group 20">
-                  <a:extLst>
-                    <a:ext uri="{FF2B5EF4-FFF2-40B4-BE49-F238E27FC236}">
-                      <a16:creationId xmlns:a16="http://schemas.microsoft.com/office/drawing/2014/main" id="{DF175F77-997A-4168-FFC1-5A584AF857D2}"/>
-                    </a:ext>
-                  </a:extLst>
-                </p:cNvPr>
+                <p:cNvPr id="21" name="Group 20"/>
                 <p:cNvGrpSpPr/>
                 <p:nvPr/>
               </p:nvGrpSpPr>
@@ -4218,13 +4067,7 @@
               </p:grpSpPr>
               <p:grpSp>
                 <p:nvGrpSpPr>
-                  <p:cNvPr id="29" name="Group 28">
-                    <a:extLst>
-                      <a:ext uri="{FF2B5EF4-FFF2-40B4-BE49-F238E27FC236}">
-                        <a16:creationId xmlns:a16="http://schemas.microsoft.com/office/drawing/2014/main" id="{2CE07C34-A560-FCAE-4496-4402C6815750}"/>
-                      </a:ext>
-                    </a:extLst>
-                  </p:cNvPr>
+                  <p:cNvPr id="29" name="Group 28"/>
                   <p:cNvGrpSpPr/>
                   <p:nvPr/>
                 </p:nvGrpSpPr>
@@ -4238,15 +4081,8 @@
                 </p:grpSpPr>
                 <p:cxnSp>
                   <p:nvCxnSpPr>
-                    <p:cNvPr id="52" name="Straight Arrow Connector 51">
-                      <a:extLst>
-                        <a:ext uri="{FF2B5EF4-FFF2-40B4-BE49-F238E27FC236}">
-                          <a16:creationId xmlns:a16="http://schemas.microsoft.com/office/drawing/2014/main" id="{16675648-9D9A-71D9-E3E8-F48629BB22E1}"/>
-                        </a:ext>
-                      </a:extLst>
-                    </p:cNvPr>
+                    <p:cNvPr id="52" name="Straight Arrow Connector 51"/>
                     <p:cNvCxnSpPr>
-                      <a:cxnSpLocks/>
                       <a:stCxn id="58" idx="3"/>
                     </p:cNvCxnSpPr>
                     <p:nvPr/>
@@ -4283,15 +4119,8 @@
                 </p:cxnSp>
                 <p:cxnSp>
                   <p:nvCxnSpPr>
-                    <p:cNvPr id="53" name="Straight Arrow Connector 52">
-                      <a:extLst>
-                        <a:ext uri="{FF2B5EF4-FFF2-40B4-BE49-F238E27FC236}">
-                          <a16:creationId xmlns:a16="http://schemas.microsoft.com/office/drawing/2014/main" id="{14F4D0C9-A1F7-CD9A-87DF-D3EE4DAFFB67}"/>
-                        </a:ext>
-                      </a:extLst>
-                    </p:cNvPr>
+                    <p:cNvPr id="53" name="Straight Arrow Connector 52"/>
                     <p:cNvCxnSpPr>
-                      <a:cxnSpLocks/>
                       <a:stCxn id="58" idx="3"/>
                     </p:cNvCxnSpPr>
                     <p:nvPr/>
@@ -4328,15 +4157,8 @@
                 </p:cxnSp>
                 <p:cxnSp>
                   <p:nvCxnSpPr>
-                    <p:cNvPr id="54" name="Straight Arrow Connector 53">
-                      <a:extLst>
-                        <a:ext uri="{FF2B5EF4-FFF2-40B4-BE49-F238E27FC236}">
-                          <a16:creationId xmlns:a16="http://schemas.microsoft.com/office/drawing/2014/main" id="{787904D7-1483-1281-E5C6-FBA3FBA9B01A}"/>
-                        </a:ext>
-                      </a:extLst>
-                    </p:cNvPr>
+                    <p:cNvPr id="54" name="Straight Arrow Connector 53"/>
                     <p:cNvCxnSpPr>
-                      <a:cxnSpLocks/>
                       <a:stCxn id="58" idx="3"/>
                     </p:cNvCxnSpPr>
                     <p:nvPr/>
@@ -4373,15 +4195,8 @@
                 </p:cxnSp>
                 <p:cxnSp>
                   <p:nvCxnSpPr>
-                    <p:cNvPr id="55" name="Straight Arrow Connector 54">
-                      <a:extLst>
-                        <a:ext uri="{FF2B5EF4-FFF2-40B4-BE49-F238E27FC236}">
-                          <a16:creationId xmlns:a16="http://schemas.microsoft.com/office/drawing/2014/main" id="{62469662-FF21-3675-3239-CC82EC0E0161}"/>
-                        </a:ext>
-                      </a:extLst>
-                    </p:cNvPr>
+                    <p:cNvPr id="55" name="Straight Arrow Connector 54"/>
                     <p:cNvCxnSpPr>
-                      <a:cxnSpLocks/>
                       <a:stCxn id="58" idx="3"/>
                     </p:cNvCxnSpPr>
                     <p:nvPr/>
@@ -4418,15 +4233,8 @@
                 </p:cxnSp>
                 <p:cxnSp>
                   <p:nvCxnSpPr>
-                    <p:cNvPr id="56" name="Straight Arrow Connector 55">
-                      <a:extLst>
-                        <a:ext uri="{FF2B5EF4-FFF2-40B4-BE49-F238E27FC236}">
-                          <a16:creationId xmlns:a16="http://schemas.microsoft.com/office/drawing/2014/main" id="{E48F6D72-04AA-C3DE-6A4F-DCD488232D78}"/>
-                        </a:ext>
-                      </a:extLst>
-                    </p:cNvPr>
+                    <p:cNvPr id="56" name="Straight Arrow Connector 55"/>
                     <p:cNvCxnSpPr>
-                      <a:cxnSpLocks/>
                       <a:stCxn id="58" idx="3"/>
                     </p:cNvCxnSpPr>
                     <p:nvPr/>
@@ -4463,13 +4271,7 @@
                 </p:cxnSp>
                 <p:grpSp>
                   <p:nvGrpSpPr>
-                    <p:cNvPr id="57" name="Group 56">
-                      <a:extLst>
-                        <a:ext uri="{FF2B5EF4-FFF2-40B4-BE49-F238E27FC236}">
-                          <a16:creationId xmlns:a16="http://schemas.microsoft.com/office/drawing/2014/main" id="{83C5E678-01DC-349C-75B3-322F36A54E75}"/>
-                        </a:ext>
-                      </a:extLst>
-                    </p:cNvPr>
+                    <p:cNvPr id="57" name="Group 56"/>
                     <p:cNvGrpSpPr/>
                     <p:nvPr/>
                   </p:nvGrpSpPr>
@@ -4483,13 +4285,7 @@
                   </p:grpSpPr>
                   <p:sp>
                     <p:nvSpPr>
-                      <p:cNvPr id="70" name="Rectangle: Rounded Corners 69">
-                        <a:extLst>
-                          <a:ext uri="{FF2B5EF4-FFF2-40B4-BE49-F238E27FC236}">
-                            <a16:creationId xmlns:a16="http://schemas.microsoft.com/office/drawing/2014/main" id="{EC5127C9-7B39-BD13-9E9A-ECFEA6854AB9}"/>
-                          </a:ext>
-                        </a:extLst>
-                      </p:cNvPr>
+                      <p:cNvPr id="70" name="Rectangle: Rounded Corners 69"/>
                       <p:cNvSpPr/>
                       <p:nvPr/>
                     </p:nvSpPr>
@@ -4542,13 +4338,7 @@
                     <mc:Choice Requires="a14">
                       <p:sp>
                         <p:nvSpPr>
-                          <p:cNvPr id="71" name="Rectangle 70">
-                            <a:extLst>
-                              <a:ext uri="{FF2B5EF4-FFF2-40B4-BE49-F238E27FC236}">
-                                <a16:creationId xmlns:a16="http://schemas.microsoft.com/office/drawing/2014/main" id="{C35291C0-470D-CBB9-5501-F5C85D7FC292}"/>
-                              </a:ext>
-                            </a:extLst>
-                          </p:cNvPr>
+                          <p:cNvPr id="71" name="Rectangle 70"/>
                           <p:cNvSpPr/>
                           <p:nvPr/>
                         </p:nvSpPr>
@@ -4641,13 +4431,7 @@
                     <mc:Fallback xmlns="">
                       <p:sp>
                         <p:nvSpPr>
-                          <p:cNvPr id="18" name="Rectangle 17">
-                            <a:extLst>
-                              <a:ext uri="{FF2B5EF4-FFF2-40B4-BE49-F238E27FC236}">
-                                <a16:creationId xmlns:a16="http://schemas.microsoft.com/office/drawing/2014/main" id="{286086DA-F529-4532-4C6D-A2BF30891FBA}"/>
-                              </a:ext>
-                            </a:extLst>
-                          </p:cNvPr>
+                          <p:cNvPr id="71" name="Rectangle 70"/>
                           <p:cNvSpPr>
                             <a:spLocks noRot="1" noChangeAspect="1" noMove="1" noResize="1" noEditPoints="1" noAdjustHandles="1" noChangeArrowheads="1" noChangeShapeType="1" noTextEdit="1"/>
                           </p:cNvSpPr>
@@ -4661,22 +4445,35 @@
                           <a:prstGeom prst="rect">
                             <a:avLst/>
                           </a:prstGeom>
-                          <a:blipFill>
+                          <a:blipFill rotWithShape="1">
                             <a:blip r:embed="rId5"/>
-                            <a:stretch>
-                              <a:fillRect l="-18919"/>
-                            </a:stretch>
                           </a:blipFill>
                           <a:ln>
                             <a:noFill/>
                           </a:ln>
                         </p:spPr>
+                        <p:style>
+                          <a:lnRef idx="2">
+                            <a:schemeClr val="accent1">
+                              <a:shade val="15000"/>
+                            </a:schemeClr>
+                          </a:lnRef>
+                          <a:fillRef idx="1">
+                            <a:schemeClr val="accent1"/>
+                          </a:fillRef>
+                          <a:effectRef idx="0">
+                            <a:schemeClr val="accent1"/>
+                          </a:effectRef>
+                          <a:fontRef idx="minor">
+                            <a:schemeClr val="lt1"/>
+                          </a:fontRef>
+                        </p:style>
                         <p:txBody>
                           <a:bodyPr/>
                           <a:lstStyle/>
                           <a:p>
                             <a:r>
-                              <a:rPr lang="en-US">
+                              <a:rPr lang="zh-CN" altLang="en-US">
                                 <a:noFill/>
                               </a:rPr>
                               <a:t> </a:t>
@@ -4690,13 +4487,7 @@
                     <mc:Choice Requires="a14">
                       <p:sp>
                         <p:nvSpPr>
-                          <p:cNvPr id="72" name="Rectangle 71">
-                            <a:extLst>
-                              <a:ext uri="{FF2B5EF4-FFF2-40B4-BE49-F238E27FC236}">
-                                <a16:creationId xmlns:a16="http://schemas.microsoft.com/office/drawing/2014/main" id="{74D75A6F-345E-5F41-9536-AA62572ACEBF}"/>
-                              </a:ext>
-                            </a:extLst>
-                          </p:cNvPr>
+                          <p:cNvPr id="72" name="Rectangle 71"/>
                           <p:cNvSpPr/>
                           <p:nvPr/>
                         </p:nvSpPr>
@@ -4789,13 +4580,7 @@
                     <mc:Fallback xmlns="">
                       <p:sp>
                         <p:nvSpPr>
-                          <p:cNvPr id="19" name="Rectangle 18">
-                            <a:extLst>
-                              <a:ext uri="{FF2B5EF4-FFF2-40B4-BE49-F238E27FC236}">
-                                <a16:creationId xmlns:a16="http://schemas.microsoft.com/office/drawing/2014/main" id="{E38BCA38-CA09-7D9F-3905-B40D83C603D2}"/>
-                              </a:ext>
-                            </a:extLst>
-                          </p:cNvPr>
+                          <p:cNvPr id="72" name="Rectangle 71"/>
                           <p:cNvSpPr>
                             <a:spLocks noRot="1" noChangeAspect="1" noMove="1" noResize="1" noEditPoints="1" noAdjustHandles="1" noChangeArrowheads="1" noChangeShapeType="1" noTextEdit="1"/>
                           </p:cNvSpPr>
@@ -4809,22 +4594,35 @@
                           <a:prstGeom prst="rect">
                             <a:avLst/>
                           </a:prstGeom>
-                          <a:blipFill>
+                          <a:blipFill rotWithShape="1">
                             <a:blip r:embed="rId5"/>
-                            <a:stretch>
-                              <a:fillRect l="-18919"/>
-                            </a:stretch>
                           </a:blipFill>
                           <a:ln>
                             <a:noFill/>
                           </a:ln>
                         </p:spPr>
+                        <p:style>
+                          <a:lnRef idx="2">
+                            <a:schemeClr val="accent1">
+                              <a:shade val="15000"/>
+                            </a:schemeClr>
+                          </a:lnRef>
+                          <a:fillRef idx="1">
+                            <a:schemeClr val="accent1"/>
+                          </a:fillRef>
+                          <a:effectRef idx="0">
+                            <a:schemeClr val="accent1"/>
+                          </a:effectRef>
+                          <a:fontRef idx="minor">
+                            <a:schemeClr val="lt1"/>
+                          </a:fontRef>
+                        </p:style>
                         <p:txBody>
                           <a:bodyPr/>
                           <a:lstStyle/>
                           <a:p>
                             <a:r>
-                              <a:rPr lang="en-US">
+                              <a:rPr lang="zh-CN" altLang="en-US">
                                 <a:noFill/>
                               </a:rPr>
                               <a:t> </a:t>
@@ -4837,13 +4635,7 @@
                 </p:grpSp>
                 <p:sp>
                   <p:nvSpPr>
-                    <p:cNvPr id="58" name="Rectangle: Rounded Corners 57">
-                      <a:extLst>
-                        <a:ext uri="{FF2B5EF4-FFF2-40B4-BE49-F238E27FC236}">
-                          <a16:creationId xmlns:a16="http://schemas.microsoft.com/office/drawing/2014/main" id="{0EA5E404-BC8D-6A83-E042-F76E7AEE58C2}"/>
-                        </a:ext>
-                      </a:extLst>
-                    </p:cNvPr>
+                    <p:cNvPr id="58" name="Rectangle: Rounded Corners 57"/>
                     <p:cNvSpPr/>
                     <p:nvPr/>
                   </p:nvSpPr>
@@ -4900,13 +4692,7 @@
                 </p:sp>
                 <p:grpSp>
                   <p:nvGrpSpPr>
-                    <p:cNvPr id="59" name="Group 58">
-                      <a:extLst>
-                        <a:ext uri="{FF2B5EF4-FFF2-40B4-BE49-F238E27FC236}">
-                          <a16:creationId xmlns:a16="http://schemas.microsoft.com/office/drawing/2014/main" id="{144B0633-DBEF-6FC0-E241-28E624DE228C}"/>
-                        </a:ext>
-                      </a:extLst>
-                    </p:cNvPr>
+                    <p:cNvPr id="59" name="Group 58"/>
                     <p:cNvGrpSpPr/>
                     <p:nvPr/>
                   </p:nvGrpSpPr>
@@ -4920,13 +4706,7 @@
                   </p:grpSpPr>
                   <p:sp>
                     <p:nvSpPr>
-                      <p:cNvPr id="68" name="Rectangle: Rounded Corners 67">
-                        <a:extLst>
-                          <a:ext uri="{FF2B5EF4-FFF2-40B4-BE49-F238E27FC236}">
-                            <a16:creationId xmlns:a16="http://schemas.microsoft.com/office/drawing/2014/main" id="{F2266F13-31A8-F763-8240-7A23E5711CC5}"/>
-                          </a:ext>
-                        </a:extLst>
-                      </p:cNvPr>
+                      <p:cNvPr id="68" name="Rectangle: Rounded Corners 67"/>
                       <p:cNvSpPr/>
                       <p:nvPr/>
                     </p:nvSpPr>
@@ -4976,13 +4756,7 @@
                     <mc:Choice Requires="a14">
                       <p:sp>
                         <p:nvSpPr>
-                          <p:cNvPr id="69" name="Rectangle 68">
-                            <a:extLst>
-                              <a:ext uri="{FF2B5EF4-FFF2-40B4-BE49-F238E27FC236}">
-                                <a16:creationId xmlns:a16="http://schemas.microsoft.com/office/drawing/2014/main" id="{E4889DD5-3E3B-970A-A42E-969E043E839C}"/>
-                              </a:ext>
-                            </a:extLst>
-                          </p:cNvPr>
+                          <p:cNvPr id="69" name="Rectangle 68"/>
                           <p:cNvSpPr/>
                           <p:nvPr/>
                         </p:nvSpPr>
@@ -5075,13 +4849,7 @@
                     <mc:Fallback xmlns="">
                       <p:sp>
                         <p:nvSpPr>
-                          <p:cNvPr id="56" name="Rectangle 55">
-                            <a:extLst>
-                              <a:ext uri="{FF2B5EF4-FFF2-40B4-BE49-F238E27FC236}">
-                                <a16:creationId xmlns:a16="http://schemas.microsoft.com/office/drawing/2014/main" id="{B58C7265-051D-87F0-10DE-4AE57D12B092}"/>
-                              </a:ext>
-                            </a:extLst>
-                          </p:cNvPr>
+                          <p:cNvPr id="69" name="Rectangle 68"/>
                           <p:cNvSpPr>
                             <a:spLocks noRot="1" noChangeAspect="1" noMove="1" noResize="1" noEditPoints="1" noAdjustHandles="1" noChangeArrowheads="1" noChangeShapeType="1" noTextEdit="1"/>
                           </p:cNvSpPr>
@@ -5095,22 +4863,35 @@
                           <a:prstGeom prst="rect">
                             <a:avLst/>
                           </a:prstGeom>
-                          <a:blipFill>
+                          <a:blipFill rotWithShape="1">
                             <a:blip r:embed="rId6"/>
-                            <a:stretch>
-                              <a:fillRect l="-21053"/>
-                            </a:stretch>
                           </a:blipFill>
                           <a:ln>
                             <a:noFill/>
                           </a:ln>
                         </p:spPr>
+                        <p:style>
+                          <a:lnRef idx="2">
+                            <a:schemeClr val="accent1">
+                              <a:shade val="15000"/>
+                            </a:schemeClr>
+                          </a:lnRef>
+                          <a:fillRef idx="1">
+                            <a:schemeClr val="accent1"/>
+                          </a:fillRef>
+                          <a:effectRef idx="0">
+                            <a:schemeClr val="accent1"/>
+                          </a:effectRef>
+                          <a:fontRef idx="minor">
+                            <a:schemeClr val="lt1"/>
+                          </a:fontRef>
+                        </p:style>
                         <p:txBody>
                           <a:bodyPr/>
                           <a:lstStyle/>
                           <a:p>
                             <a:r>
-                              <a:rPr lang="en-US">
+                              <a:rPr lang="zh-CN" altLang="en-US">
                                 <a:noFill/>
                               </a:rPr>
                               <a:t> </a:t>
@@ -5123,15 +4904,8 @@
                 </p:grpSp>
                 <p:cxnSp>
                   <p:nvCxnSpPr>
-                    <p:cNvPr id="60" name="Straight Arrow Connector 59">
-                      <a:extLst>
-                        <a:ext uri="{FF2B5EF4-FFF2-40B4-BE49-F238E27FC236}">
-                          <a16:creationId xmlns:a16="http://schemas.microsoft.com/office/drawing/2014/main" id="{46126AEC-57D2-BA18-D647-84B97F0282BC}"/>
-                        </a:ext>
-                      </a:extLst>
-                    </p:cNvPr>
+                    <p:cNvPr id="60" name="Straight Arrow Connector 59"/>
                     <p:cNvCxnSpPr>
-                      <a:cxnSpLocks/>
                       <a:stCxn id="58" idx="3"/>
                     </p:cNvCxnSpPr>
                     <p:nvPr/>
@@ -5168,13 +4942,7 @@
                 </p:cxnSp>
                 <p:grpSp>
                   <p:nvGrpSpPr>
-                    <p:cNvPr id="61" name="Group 60">
-                      <a:extLst>
-                        <a:ext uri="{FF2B5EF4-FFF2-40B4-BE49-F238E27FC236}">
-                          <a16:creationId xmlns:a16="http://schemas.microsoft.com/office/drawing/2014/main" id="{13A8E6FB-6A16-10EA-62B1-3D8006ADA3BA}"/>
-                        </a:ext>
-                      </a:extLst>
-                    </p:cNvPr>
+                    <p:cNvPr id="61" name="Group 60"/>
                     <p:cNvGrpSpPr/>
                     <p:nvPr/>
                   </p:nvGrpSpPr>
@@ -5188,13 +4956,7 @@
                   </p:grpSpPr>
                   <p:sp>
                     <p:nvSpPr>
-                      <p:cNvPr id="65" name="Rectangle: Rounded Corners 64">
-                        <a:extLst>
-                          <a:ext uri="{FF2B5EF4-FFF2-40B4-BE49-F238E27FC236}">
-                            <a16:creationId xmlns:a16="http://schemas.microsoft.com/office/drawing/2014/main" id="{CD77AA72-A7B3-5152-994D-6F887B61BBC8}"/>
-                          </a:ext>
-                        </a:extLst>
-                      </p:cNvPr>
+                      <p:cNvPr id="65" name="Rectangle: Rounded Corners 64"/>
                       <p:cNvSpPr/>
                       <p:nvPr/>
                     </p:nvSpPr>
@@ -5247,13 +5009,7 @@
                     <mc:Choice Requires="a14">
                       <p:sp>
                         <p:nvSpPr>
-                          <p:cNvPr id="66" name="Rectangle 65">
-                            <a:extLst>
-                              <a:ext uri="{FF2B5EF4-FFF2-40B4-BE49-F238E27FC236}">
-                                <a16:creationId xmlns:a16="http://schemas.microsoft.com/office/drawing/2014/main" id="{D5528A41-D7EA-7396-C074-4E4E627F0C2A}"/>
-                              </a:ext>
-                            </a:extLst>
-                          </p:cNvPr>
+                          <p:cNvPr id="66" name="Rectangle 65"/>
                           <p:cNvSpPr/>
                           <p:nvPr/>
                         </p:nvSpPr>
@@ -5346,13 +5102,7 @@
                     <mc:Fallback xmlns="">
                       <p:sp>
                         <p:nvSpPr>
-                          <p:cNvPr id="84" name="Rectangle 83">
-                            <a:extLst>
-                              <a:ext uri="{FF2B5EF4-FFF2-40B4-BE49-F238E27FC236}">
-                                <a16:creationId xmlns:a16="http://schemas.microsoft.com/office/drawing/2014/main" id="{8D3DB30C-6A2D-007F-87CB-1ED73685D711}"/>
-                              </a:ext>
-                            </a:extLst>
-                          </p:cNvPr>
+                          <p:cNvPr id="66" name="Rectangle 65"/>
                           <p:cNvSpPr>
                             <a:spLocks noRot="1" noChangeAspect="1" noMove="1" noResize="1" noEditPoints="1" noAdjustHandles="1" noChangeArrowheads="1" noChangeShapeType="1" noTextEdit="1"/>
                           </p:cNvSpPr>
@@ -5366,22 +5116,35 @@
                           <a:prstGeom prst="rect">
                             <a:avLst/>
                           </a:prstGeom>
-                          <a:blipFill>
+                          <a:blipFill rotWithShape="1">
                             <a:blip r:embed="rId7"/>
-                            <a:stretch>
-                              <a:fillRect l="-21622"/>
-                            </a:stretch>
                           </a:blipFill>
                           <a:ln>
                             <a:noFill/>
                           </a:ln>
                         </p:spPr>
+                        <p:style>
+                          <a:lnRef idx="2">
+                            <a:schemeClr val="accent1">
+                              <a:shade val="15000"/>
+                            </a:schemeClr>
+                          </a:lnRef>
+                          <a:fillRef idx="1">
+                            <a:schemeClr val="accent1"/>
+                          </a:fillRef>
+                          <a:effectRef idx="0">
+                            <a:schemeClr val="accent1"/>
+                          </a:effectRef>
+                          <a:fontRef idx="minor">
+                            <a:schemeClr val="lt1"/>
+                          </a:fontRef>
+                        </p:style>
                         <p:txBody>
                           <a:bodyPr/>
                           <a:lstStyle/>
                           <a:p>
                             <a:r>
-                              <a:rPr lang="en-US">
+                              <a:rPr lang="zh-CN" altLang="en-US">
                                 <a:noFill/>
                               </a:rPr>
                               <a:t> </a:t>
@@ -5395,13 +5158,7 @@
                     <mc:Choice Requires="a14">
                       <p:sp>
                         <p:nvSpPr>
-                          <p:cNvPr id="67" name="Rectangle 66">
-                            <a:extLst>
-                              <a:ext uri="{FF2B5EF4-FFF2-40B4-BE49-F238E27FC236}">
-                                <a16:creationId xmlns:a16="http://schemas.microsoft.com/office/drawing/2014/main" id="{413E65AC-7895-2350-BF5E-7C829CAAFAB7}"/>
-                              </a:ext>
-                            </a:extLst>
-                          </p:cNvPr>
+                          <p:cNvPr id="67" name="Rectangle 66"/>
                           <p:cNvSpPr/>
                           <p:nvPr/>
                         </p:nvSpPr>
@@ -5494,13 +5251,7 @@
                     <mc:Fallback xmlns="">
                       <p:sp>
                         <p:nvSpPr>
-                          <p:cNvPr id="85" name="Rectangle 84">
-                            <a:extLst>
-                              <a:ext uri="{FF2B5EF4-FFF2-40B4-BE49-F238E27FC236}">
-                                <a16:creationId xmlns:a16="http://schemas.microsoft.com/office/drawing/2014/main" id="{AEF3E290-5B38-027E-4D7C-27EC0A12E0D3}"/>
-                              </a:ext>
-                            </a:extLst>
-                          </p:cNvPr>
+                          <p:cNvPr id="67" name="Rectangle 66"/>
                           <p:cNvSpPr>
                             <a:spLocks noRot="1" noChangeAspect="1" noMove="1" noResize="1" noEditPoints="1" noAdjustHandles="1" noChangeArrowheads="1" noChangeShapeType="1" noTextEdit="1"/>
                           </p:cNvSpPr>
@@ -5514,22 +5265,35 @@
                           <a:prstGeom prst="rect">
                             <a:avLst/>
                           </a:prstGeom>
-                          <a:blipFill>
+                          <a:blipFill rotWithShape="1">
                             <a:blip r:embed="rId7"/>
-                            <a:stretch>
-                              <a:fillRect l="-21622"/>
-                            </a:stretch>
                           </a:blipFill>
                           <a:ln>
                             <a:noFill/>
                           </a:ln>
                         </p:spPr>
+                        <p:style>
+                          <a:lnRef idx="2">
+                            <a:schemeClr val="accent1">
+                              <a:shade val="15000"/>
+                            </a:schemeClr>
+                          </a:lnRef>
+                          <a:fillRef idx="1">
+                            <a:schemeClr val="accent1"/>
+                          </a:fillRef>
+                          <a:effectRef idx="0">
+                            <a:schemeClr val="accent1"/>
+                          </a:effectRef>
+                          <a:fontRef idx="minor">
+                            <a:schemeClr val="lt1"/>
+                          </a:fontRef>
+                        </p:style>
                         <p:txBody>
                           <a:bodyPr/>
                           <a:lstStyle/>
                           <a:p>
                             <a:r>
-                              <a:rPr lang="en-US">
+                              <a:rPr lang="zh-CN" altLang="en-US">
                                 <a:noFill/>
                               </a:rPr>
                               <a:t> </a:t>
@@ -5542,13 +5306,7 @@
                 </p:grpSp>
                 <p:grpSp>
                   <p:nvGrpSpPr>
-                    <p:cNvPr id="62" name="Group 61">
-                      <a:extLst>
-                        <a:ext uri="{FF2B5EF4-FFF2-40B4-BE49-F238E27FC236}">
-                          <a16:creationId xmlns:a16="http://schemas.microsoft.com/office/drawing/2014/main" id="{90F09A62-09AF-1DE4-4D76-6110E5D5692E}"/>
-                        </a:ext>
-                      </a:extLst>
-                    </p:cNvPr>
+                    <p:cNvPr id="62" name="Group 61"/>
                     <p:cNvGrpSpPr/>
                     <p:nvPr/>
                   </p:nvGrpSpPr>
@@ -5562,13 +5320,7 @@
                   </p:grpSpPr>
                   <p:sp>
                     <p:nvSpPr>
-                      <p:cNvPr id="63" name="Rectangle: Rounded Corners 62">
-                        <a:extLst>
-                          <a:ext uri="{FF2B5EF4-FFF2-40B4-BE49-F238E27FC236}">
-                            <a16:creationId xmlns:a16="http://schemas.microsoft.com/office/drawing/2014/main" id="{32B035CA-CEC7-F431-0296-7785EBA9AA00}"/>
-                          </a:ext>
-                        </a:extLst>
-                      </p:cNvPr>
+                      <p:cNvPr id="63" name="Rectangle: Rounded Corners 62"/>
                       <p:cNvSpPr/>
                       <p:nvPr/>
                     </p:nvSpPr>
@@ -5618,13 +5370,7 @@
                     <mc:Choice Requires="a14">
                       <p:sp>
                         <p:nvSpPr>
-                          <p:cNvPr id="64" name="Rectangle 63">
-                            <a:extLst>
-                              <a:ext uri="{FF2B5EF4-FFF2-40B4-BE49-F238E27FC236}">
-                                <a16:creationId xmlns:a16="http://schemas.microsoft.com/office/drawing/2014/main" id="{630B3089-F590-D349-5BD5-AE441AC44F7B}"/>
-                              </a:ext>
-                            </a:extLst>
-                          </p:cNvPr>
+                          <p:cNvPr id="64" name="Rectangle 63"/>
                           <p:cNvSpPr/>
                           <p:nvPr/>
                         </p:nvSpPr>
@@ -5717,13 +5463,7 @@
                     <mc:Fallback xmlns="">
                       <p:sp>
                         <p:nvSpPr>
-                          <p:cNvPr id="90" name="Rectangle 89">
-                            <a:extLst>
-                              <a:ext uri="{FF2B5EF4-FFF2-40B4-BE49-F238E27FC236}">
-                                <a16:creationId xmlns:a16="http://schemas.microsoft.com/office/drawing/2014/main" id="{2776551F-A17F-8C1B-ED82-F710BAC994FC}"/>
-                              </a:ext>
-                            </a:extLst>
-                          </p:cNvPr>
+                          <p:cNvPr id="64" name="Rectangle 63"/>
                           <p:cNvSpPr>
                             <a:spLocks noRot="1" noChangeAspect="1" noMove="1" noResize="1" noEditPoints="1" noAdjustHandles="1" noChangeArrowheads="1" noChangeShapeType="1" noTextEdit="1"/>
                           </p:cNvSpPr>
@@ -5737,22 +5477,35 @@
                           <a:prstGeom prst="rect">
                             <a:avLst/>
                           </a:prstGeom>
-                          <a:blipFill>
+                          <a:blipFill rotWithShape="1">
                             <a:blip r:embed="rId8"/>
-                            <a:stretch>
-                              <a:fillRect l="-21053"/>
-                            </a:stretch>
                           </a:blipFill>
                           <a:ln>
                             <a:noFill/>
                           </a:ln>
                         </p:spPr>
+                        <p:style>
+                          <a:lnRef idx="2">
+                            <a:schemeClr val="accent1">
+                              <a:shade val="15000"/>
+                            </a:schemeClr>
+                          </a:lnRef>
+                          <a:fillRef idx="1">
+                            <a:schemeClr val="accent1"/>
+                          </a:fillRef>
+                          <a:effectRef idx="0">
+                            <a:schemeClr val="accent1"/>
+                          </a:effectRef>
+                          <a:fontRef idx="minor">
+                            <a:schemeClr val="lt1"/>
+                          </a:fontRef>
+                        </p:style>
                         <p:txBody>
                           <a:bodyPr/>
                           <a:lstStyle/>
                           <a:p>
                             <a:r>
-                              <a:rPr lang="en-US">
+                              <a:rPr lang="zh-CN" altLang="en-US">
                                 <a:noFill/>
                               </a:rPr>
                               <a:t> </a:t>
@@ -5766,13 +5519,7 @@
               </p:grpSp>
               <p:sp>
                 <p:nvSpPr>
-                  <p:cNvPr id="30" name="Rectangle 29">
-                    <a:extLst>
-                      <a:ext uri="{FF2B5EF4-FFF2-40B4-BE49-F238E27FC236}">
-                        <a16:creationId xmlns:a16="http://schemas.microsoft.com/office/drawing/2014/main" id="{842DE318-CE96-3560-CF2C-32BF41F98A87}"/>
-                      </a:ext>
-                    </a:extLst>
-                  </p:cNvPr>
+                  <p:cNvPr id="30" name="Rectangle 29"/>
                   <p:cNvSpPr/>
                   <p:nvPr/>
                 </p:nvSpPr>
@@ -5839,13 +5586,7 @@
               </p:sp>
               <p:sp>
                 <p:nvSpPr>
-                  <p:cNvPr id="31" name="Right Brace 30">
-                    <a:extLst>
-                      <a:ext uri="{FF2B5EF4-FFF2-40B4-BE49-F238E27FC236}">
-                        <a16:creationId xmlns:a16="http://schemas.microsoft.com/office/drawing/2014/main" id="{6B421540-254F-7003-AE4E-D3E4830A5BB8}"/>
-                      </a:ext>
-                    </a:extLst>
-                  </p:cNvPr>
+                  <p:cNvPr id="31" name="Right Brace 30"/>
                   <p:cNvSpPr/>
                   <p:nvPr/>
                 </p:nvSpPr>
@@ -5891,13 +5632,7 @@
               </p:sp>
               <p:grpSp>
                 <p:nvGrpSpPr>
-                  <p:cNvPr id="32" name="Group 31">
-                    <a:extLst>
-                      <a:ext uri="{FF2B5EF4-FFF2-40B4-BE49-F238E27FC236}">
-                        <a16:creationId xmlns:a16="http://schemas.microsoft.com/office/drawing/2014/main" id="{857621EF-9219-27F9-61D6-1F80823F36FC}"/>
-                      </a:ext>
-                    </a:extLst>
-                  </p:cNvPr>
+                  <p:cNvPr id="32" name="Group 31"/>
                   <p:cNvGrpSpPr/>
                   <p:nvPr/>
                 </p:nvGrpSpPr>
@@ -5911,15 +5646,8 @@
                 </p:grpSpPr>
                 <p:cxnSp>
                   <p:nvCxnSpPr>
-                    <p:cNvPr id="48" name="Straight Arrow Connector 47">
-                      <a:extLst>
-                        <a:ext uri="{FF2B5EF4-FFF2-40B4-BE49-F238E27FC236}">
-                          <a16:creationId xmlns:a16="http://schemas.microsoft.com/office/drawing/2014/main" id="{B3AD21FF-57A3-EB31-3755-CEF4482E9029}"/>
-                        </a:ext>
-                      </a:extLst>
-                    </p:cNvPr>
+                    <p:cNvPr id="48" name="Straight Arrow Connector 47"/>
                     <p:cNvCxnSpPr>
-                      <a:cxnSpLocks/>
                       <a:endCxn id="43" idx="2"/>
                     </p:cNvCxnSpPr>
                     <p:nvPr/>
@@ -5956,13 +5684,7 @@
                 </p:cxnSp>
                 <p:grpSp>
                   <p:nvGrpSpPr>
-                    <p:cNvPr id="49" name="Group 48">
-                      <a:extLst>
-                        <a:ext uri="{FF2B5EF4-FFF2-40B4-BE49-F238E27FC236}">
-                          <a16:creationId xmlns:a16="http://schemas.microsoft.com/office/drawing/2014/main" id="{5866EF34-23A0-AA45-8F7F-5839709ECCA6}"/>
-                        </a:ext>
-                      </a:extLst>
-                    </p:cNvPr>
+                    <p:cNvPr id="49" name="Group 48"/>
                     <p:cNvGrpSpPr/>
                     <p:nvPr/>
                   </p:nvGrpSpPr>
@@ -5976,13 +5698,7 @@
                   </p:grpSpPr>
                   <p:sp>
                     <p:nvSpPr>
-                      <p:cNvPr id="50" name="Rectangle 49">
-                        <a:extLst>
-                          <a:ext uri="{FF2B5EF4-FFF2-40B4-BE49-F238E27FC236}">
-                            <a16:creationId xmlns:a16="http://schemas.microsoft.com/office/drawing/2014/main" id="{583AE0ED-3F89-80BE-1CC2-2B13097836AA}"/>
-                          </a:ext>
-                        </a:extLst>
-                      </p:cNvPr>
+                      <p:cNvPr id="50" name="Rectangle 49"/>
                       <p:cNvSpPr/>
                       <p:nvPr/>
                     </p:nvSpPr>
@@ -6033,13 +5749,7 @@
                   </p:sp>
                   <p:sp>
                     <p:nvSpPr>
-                      <p:cNvPr id="51" name="Rectangle 50">
-                        <a:extLst>
-                          <a:ext uri="{FF2B5EF4-FFF2-40B4-BE49-F238E27FC236}">
-                            <a16:creationId xmlns:a16="http://schemas.microsoft.com/office/drawing/2014/main" id="{2C569802-EEA5-331D-DA87-76B6C9732351}"/>
-                          </a:ext>
-                        </a:extLst>
-                      </p:cNvPr>
+                      <p:cNvPr id="51" name="Rectangle 50"/>
                       <p:cNvSpPr/>
                       <p:nvPr/>
                     </p:nvSpPr>
@@ -6105,13 +5815,7 @@
               </p:grpSp>
               <p:grpSp>
                 <p:nvGrpSpPr>
-                  <p:cNvPr id="33" name="Group 32">
-                    <a:extLst>
-                      <a:ext uri="{FF2B5EF4-FFF2-40B4-BE49-F238E27FC236}">
-                        <a16:creationId xmlns:a16="http://schemas.microsoft.com/office/drawing/2014/main" id="{5E93B317-7C5A-E57E-C58F-8B69D41F8FC7}"/>
-                      </a:ext>
-                    </a:extLst>
-                  </p:cNvPr>
+                  <p:cNvPr id="33" name="Group 32"/>
                   <p:cNvGrpSpPr/>
                   <p:nvPr/>
                 </p:nvGrpSpPr>
@@ -6125,13 +5829,7 @@
                 </p:grpSpPr>
                 <p:sp>
                   <p:nvSpPr>
-                    <p:cNvPr id="43" name="Oval 42">
-                      <a:extLst>
-                        <a:ext uri="{FF2B5EF4-FFF2-40B4-BE49-F238E27FC236}">
-                          <a16:creationId xmlns:a16="http://schemas.microsoft.com/office/drawing/2014/main" id="{508F6939-3878-8A5A-4972-64C16529A12D}"/>
-                        </a:ext>
-                      </a:extLst>
-                    </p:cNvPr>
+                    <p:cNvPr id="43" name="Oval 42"/>
                     <p:cNvSpPr/>
                     <p:nvPr/>
                   </p:nvSpPr>
@@ -6175,15 +5873,8 @@
                 </p:sp>
                 <p:cxnSp>
                   <p:nvCxnSpPr>
-                    <p:cNvPr id="44" name="Straight Connector 43">
-                      <a:extLst>
-                        <a:ext uri="{FF2B5EF4-FFF2-40B4-BE49-F238E27FC236}">
-                          <a16:creationId xmlns:a16="http://schemas.microsoft.com/office/drawing/2014/main" id="{0738F84A-E159-BADF-B9EE-9DC72D3FEEF1}"/>
-                        </a:ext>
-                      </a:extLst>
-                    </p:cNvPr>
+                    <p:cNvPr id="44" name="Straight Connector 43"/>
                     <p:cNvCxnSpPr>
-                      <a:cxnSpLocks/>
                       <a:stCxn id="43" idx="6"/>
                     </p:cNvCxnSpPr>
                     <p:nvPr/>
@@ -6219,13 +5910,7 @@
                 </p:cxnSp>
                 <p:sp>
                   <p:nvSpPr>
-                    <p:cNvPr id="45" name="Oval 44">
-                      <a:extLst>
-                        <a:ext uri="{FF2B5EF4-FFF2-40B4-BE49-F238E27FC236}">
-                          <a16:creationId xmlns:a16="http://schemas.microsoft.com/office/drawing/2014/main" id="{2F932930-56B9-9B42-2735-FB3A461F6D60}"/>
-                        </a:ext>
-                      </a:extLst>
-                    </p:cNvPr>
+                    <p:cNvPr id="45" name="Oval 44"/>
                     <p:cNvSpPr/>
                     <p:nvPr/>
                   </p:nvSpPr>
@@ -6269,13 +5954,7 @@
                 </p:sp>
                 <p:sp>
                   <p:nvSpPr>
-                    <p:cNvPr id="46" name="Oval 45">
-                      <a:extLst>
-                        <a:ext uri="{FF2B5EF4-FFF2-40B4-BE49-F238E27FC236}">
-                          <a16:creationId xmlns:a16="http://schemas.microsoft.com/office/drawing/2014/main" id="{95153D97-20D1-AE08-726C-384FFA7DDA8B}"/>
-                        </a:ext>
-                      </a:extLst>
-                    </p:cNvPr>
+                    <p:cNvPr id="46" name="Oval 45"/>
                     <p:cNvSpPr/>
                     <p:nvPr/>
                   </p:nvSpPr>
@@ -6319,13 +5998,7 @@
                 </p:sp>
                 <p:pic>
                   <p:nvPicPr>
-                    <p:cNvPr id="47" name="Picture 46">
-                      <a:extLst>
-                        <a:ext uri="{FF2B5EF4-FFF2-40B4-BE49-F238E27FC236}">
-                          <a16:creationId xmlns:a16="http://schemas.microsoft.com/office/drawing/2014/main" id="{3D45F686-BE8E-0599-A422-290B16154D60}"/>
-                        </a:ext>
-                      </a:extLst>
-                    </p:cNvPr>
+                    <p:cNvPr id="47" name="Picture 46"/>
                     <p:cNvPicPr>
                       <a:picLocks noChangeAspect="1"/>
                     </p:cNvPicPr>
@@ -6351,13 +6024,7 @@
               </p:grpSp>
               <p:pic>
                 <p:nvPicPr>
-                  <p:cNvPr id="34" name="Picture 33">
-                    <a:extLst>
-                      <a:ext uri="{FF2B5EF4-FFF2-40B4-BE49-F238E27FC236}">
-                        <a16:creationId xmlns:a16="http://schemas.microsoft.com/office/drawing/2014/main" id="{0609738F-087A-082E-7E9F-B6CC330AF95A}"/>
-                      </a:ext>
-                    </a:extLst>
-                  </p:cNvPr>
+                  <p:cNvPr id="34" name="Picture 33"/>
                   <p:cNvPicPr>
                     <a:picLocks noChangeAspect="1"/>
                   </p:cNvPicPr>
@@ -6381,13 +6048,7 @@
               </p:pic>
               <p:grpSp>
                 <p:nvGrpSpPr>
-                  <p:cNvPr id="35" name="Group 34">
-                    <a:extLst>
-                      <a:ext uri="{FF2B5EF4-FFF2-40B4-BE49-F238E27FC236}">
-                        <a16:creationId xmlns:a16="http://schemas.microsoft.com/office/drawing/2014/main" id="{FB09D888-F89B-5A8C-7C03-B1CD1F4EE839}"/>
-                      </a:ext>
-                    </a:extLst>
-                  </p:cNvPr>
+                  <p:cNvPr id="35" name="Group 34"/>
                   <p:cNvGrpSpPr/>
                   <p:nvPr/>
                 </p:nvGrpSpPr>
@@ -6401,13 +6062,7 @@
                 </p:grpSpPr>
                 <p:sp>
                   <p:nvSpPr>
-                    <p:cNvPr id="40" name="Rectangle 39">
-                      <a:extLst>
-                        <a:ext uri="{FF2B5EF4-FFF2-40B4-BE49-F238E27FC236}">
-                          <a16:creationId xmlns:a16="http://schemas.microsoft.com/office/drawing/2014/main" id="{92DC5017-9750-0333-1F40-C10FE190CCD6}"/>
-                        </a:ext>
-                      </a:extLst>
-                    </p:cNvPr>
+                    <p:cNvPr id="40" name="Rectangle 39"/>
                     <p:cNvSpPr/>
                     <p:nvPr/>
                   </p:nvSpPr>
@@ -6458,13 +6113,7 @@
                 </p:sp>
                 <p:sp>
                   <p:nvSpPr>
-                    <p:cNvPr id="41" name="Rectangle 40">
-                      <a:extLst>
-                        <a:ext uri="{FF2B5EF4-FFF2-40B4-BE49-F238E27FC236}">
-                          <a16:creationId xmlns:a16="http://schemas.microsoft.com/office/drawing/2014/main" id="{8175D4CF-132E-C847-61E7-21242E960542}"/>
-                        </a:ext>
-                      </a:extLst>
-                    </p:cNvPr>
+                    <p:cNvPr id="41" name="Rectangle 40"/>
                     <p:cNvSpPr/>
                     <p:nvPr/>
                   </p:nvSpPr>
@@ -6528,13 +6177,7 @@
                 </p:sp>
                 <p:pic>
                   <p:nvPicPr>
-                    <p:cNvPr id="42" name="Picture 41">
-                      <a:extLst>
-                        <a:ext uri="{FF2B5EF4-FFF2-40B4-BE49-F238E27FC236}">
-                          <a16:creationId xmlns:a16="http://schemas.microsoft.com/office/drawing/2014/main" id="{4CABD8D9-6DB9-8DF3-3B22-A354897F4FBA}"/>
-                        </a:ext>
-                      </a:extLst>
-                    </p:cNvPr>
+                    <p:cNvPr id="42" name="Picture 41"/>
                     <p:cNvPicPr>
                       <a:picLocks noChangeAspect="1"/>
                     </p:cNvPicPr>
@@ -6571,13 +6214,7 @@
               </p:grpSp>
               <p:sp>
                 <p:nvSpPr>
-                  <p:cNvPr id="36" name="Rectangle 35">
-                    <a:extLst>
-                      <a:ext uri="{FF2B5EF4-FFF2-40B4-BE49-F238E27FC236}">
-                        <a16:creationId xmlns:a16="http://schemas.microsoft.com/office/drawing/2014/main" id="{A3DA45AA-59F9-8E0B-C38F-E211FAB63375}"/>
-                      </a:ext>
-                    </a:extLst>
-                  </p:cNvPr>
+                  <p:cNvPr id="36" name="Rectangle 35"/>
                   <p:cNvSpPr/>
                   <p:nvPr/>
                 </p:nvSpPr>
@@ -6628,13 +6265,7 @@
               </p:sp>
               <p:pic>
                 <p:nvPicPr>
-                  <p:cNvPr id="37" name="Picture 36">
-                    <a:extLst>
-                      <a:ext uri="{FF2B5EF4-FFF2-40B4-BE49-F238E27FC236}">
-                        <a16:creationId xmlns:a16="http://schemas.microsoft.com/office/drawing/2014/main" id="{611EA675-7877-AA25-28C1-B281C0B5113B}"/>
-                      </a:ext>
-                    </a:extLst>
-                  </p:cNvPr>
+                  <p:cNvPr id="37" name="Picture 36"/>
                   <p:cNvPicPr>
                     <a:picLocks noChangeAspect="1"/>
                   </p:cNvPicPr>
@@ -6658,13 +6289,7 @@
               </p:pic>
               <p:sp>
                 <p:nvSpPr>
-                  <p:cNvPr id="38" name="Rectangle 37">
-                    <a:extLst>
-                      <a:ext uri="{FF2B5EF4-FFF2-40B4-BE49-F238E27FC236}">
-                        <a16:creationId xmlns:a16="http://schemas.microsoft.com/office/drawing/2014/main" id="{5C24C7C9-04EF-F374-9B0D-45C81A950610}"/>
-                      </a:ext>
-                    </a:extLst>
-                  </p:cNvPr>
+                  <p:cNvPr id="38" name="Rectangle 37"/>
                   <p:cNvSpPr/>
                   <p:nvPr/>
                 </p:nvSpPr>
@@ -6715,13 +6340,7 @@
               </p:sp>
               <p:pic>
                 <p:nvPicPr>
-                  <p:cNvPr id="39" name="Picture 38">
-                    <a:extLst>
-                      <a:ext uri="{FF2B5EF4-FFF2-40B4-BE49-F238E27FC236}">
-                        <a16:creationId xmlns:a16="http://schemas.microsoft.com/office/drawing/2014/main" id="{71101FC3-BD0C-FC62-CD4E-4A520713AD89}"/>
-                      </a:ext>
-                    </a:extLst>
-                  </p:cNvPr>
+                  <p:cNvPr id="39" name="Picture 38"/>
                   <p:cNvPicPr>
                     <a:picLocks noChangeAspect="1"/>
                   </p:cNvPicPr>
@@ -6763,13 +6382,7 @@
             </p:grpSp>
             <p:grpSp>
               <p:nvGrpSpPr>
-                <p:cNvPr id="22" name="Group 21">
-                  <a:extLst>
-                    <a:ext uri="{FF2B5EF4-FFF2-40B4-BE49-F238E27FC236}">
-                      <a16:creationId xmlns:a16="http://schemas.microsoft.com/office/drawing/2014/main" id="{F8781B7E-02EC-0AAC-58D8-7CDBA3EDEA51}"/>
-                    </a:ext>
-                  </a:extLst>
-                </p:cNvPr>
+                <p:cNvPr id="22" name="Group 21"/>
                 <p:cNvGrpSpPr/>
                 <p:nvPr/>
               </p:nvGrpSpPr>
@@ -6783,15 +6396,8 @@
               </p:grpSpPr>
               <p:cxnSp>
                 <p:nvCxnSpPr>
-                  <p:cNvPr id="23" name="Straight Arrow Connector 22">
-                    <a:extLst>
-                      <a:ext uri="{FF2B5EF4-FFF2-40B4-BE49-F238E27FC236}">
-                        <a16:creationId xmlns:a16="http://schemas.microsoft.com/office/drawing/2014/main" id="{EF7239CD-7A47-D8E4-180A-0EB0C46A1636}"/>
-                      </a:ext>
-                    </a:extLst>
-                  </p:cNvPr>
+                  <p:cNvPr id="23" name="Straight Arrow Connector 22"/>
                   <p:cNvCxnSpPr>
-                    <a:cxnSpLocks/>
                     <a:endCxn id="24" idx="2"/>
                   </p:cNvCxnSpPr>
                   <p:nvPr/>
@@ -6828,13 +6434,7 @@
               </p:cxnSp>
               <p:sp>
                 <p:nvSpPr>
-                  <p:cNvPr id="24" name="Oval 23">
-                    <a:extLst>
-                      <a:ext uri="{FF2B5EF4-FFF2-40B4-BE49-F238E27FC236}">
-                        <a16:creationId xmlns:a16="http://schemas.microsoft.com/office/drawing/2014/main" id="{02D94CF3-5155-A1FC-0F62-BCFA9688F3FF}"/>
-                      </a:ext>
-                    </a:extLst>
-                  </p:cNvPr>
+                  <p:cNvPr id="24" name="Oval 23"/>
                   <p:cNvSpPr/>
                   <p:nvPr/>
                 </p:nvSpPr>
@@ -6878,15 +6478,8 @@
               </p:sp>
               <p:cxnSp>
                 <p:nvCxnSpPr>
-                  <p:cNvPr id="25" name="Straight Connector 24">
-                    <a:extLst>
-                      <a:ext uri="{FF2B5EF4-FFF2-40B4-BE49-F238E27FC236}">
-                        <a16:creationId xmlns:a16="http://schemas.microsoft.com/office/drawing/2014/main" id="{659DD9A6-2148-EAED-B11E-D6C37A7ACA25}"/>
-                      </a:ext>
-                    </a:extLst>
-                  </p:cNvPr>
+                  <p:cNvPr id="25" name="Straight Connector 24"/>
                   <p:cNvCxnSpPr>
-                    <a:cxnSpLocks/>
                     <a:stCxn id="24" idx="6"/>
                   </p:cNvCxnSpPr>
                   <p:nvPr/>
@@ -6922,13 +6515,7 @@
               </p:cxnSp>
               <p:sp>
                 <p:nvSpPr>
-                  <p:cNvPr id="26" name="Oval 25">
-                    <a:extLst>
-                      <a:ext uri="{FF2B5EF4-FFF2-40B4-BE49-F238E27FC236}">
-                        <a16:creationId xmlns:a16="http://schemas.microsoft.com/office/drawing/2014/main" id="{979FC2BC-D8F0-F0DC-7042-B1E5C761D47A}"/>
-                      </a:ext>
-                    </a:extLst>
-                  </p:cNvPr>
+                  <p:cNvPr id="26" name="Oval 25"/>
                   <p:cNvSpPr/>
                   <p:nvPr/>
                 </p:nvSpPr>
@@ -6972,13 +6559,7 @@
               </p:sp>
               <p:sp>
                 <p:nvSpPr>
-                  <p:cNvPr id="27" name="Oval 26">
-                    <a:extLst>
-                      <a:ext uri="{FF2B5EF4-FFF2-40B4-BE49-F238E27FC236}">
-                        <a16:creationId xmlns:a16="http://schemas.microsoft.com/office/drawing/2014/main" id="{EAB959A1-713A-3885-5D8F-F07EDAB8CDD7}"/>
-                      </a:ext>
-                    </a:extLst>
-                  </p:cNvPr>
+                  <p:cNvPr id="27" name="Oval 26"/>
                   <p:cNvSpPr/>
                   <p:nvPr/>
                 </p:nvSpPr>
@@ -7022,13 +6603,7 @@
               </p:sp>
               <p:pic>
                 <p:nvPicPr>
-                  <p:cNvPr id="28" name="Picture 27">
-                    <a:extLst>
-                      <a:ext uri="{FF2B5EF4-FFF2-40B4-BE49-F238E27FC236}">
-                        <a16:creationId xmlns:a16="http://schemas.microsoft.com/office/drawing/2014/main" id="{D765CAFD-9A45-113F-F1E6-0E62156AC337}"/>
-                      </a:ext>
-                    </a:extLst>
-                  </p:cNvPr>
+                  <p:cNvPr id="28" name="Picture 27"/>
                   <p:cNvPicPr>
                     <a:picLocks noChangeAspect="1"/>
                   </p:cNvPicPr>
@@ -7055,13 +6630,7 @@
           </p:grpSp>
           <p:pic>
             <p:nvPicPr>
-              <p:cNvPr id="19" name="Picture 18">
-                <a:extLst>
-                  <a:ext uri="{FF2B5EF4-FFF2-40B4-BE49-F238E27FC236}">
-                    <a16:creationId xmlns:a16="http://schemas.microsoft.com/office/drawing/2014/main" id="{A90A8F06-4607-F31E-45CE-3789BA3D4293}"/>
-                  </a:ext>
-                </a:extLst>
-              </p:cNvPr>
+              <p:cNvPr id="19" name="Picture 18"/>
               <p:cNvPicPr>
                 <a:picLocks noChangeAspect="1"/>
               </p:cNvPicPr>
@@ -7099,13 +6668,7 @@
       </p:grpSp>
       <p:grpSp>
         <p:nvGrpSpPr>
-          <p:cNvPr id="73" name="Group 72">
-            <a:extLst>
-              <a:ext uri="{FF2B5EF4-FFF2-40B4-BE49-F238E27FC236}">
-                <a16:creationId xmlns:a16="http://schemas.microsoft.com/office/drawing/2014/main" id="{9EDC45E2-8F83-1DD5-359D-D9B657739E80}"/>
-              </a:ext>
-            </a:extLst>
-          </p:cNvPr>
+          <p:cNvPr id="73" name="Group 72"/>
           <p:cNvGrpSpPr/>
           <p:nvPr/>
         </p:nvGrpSpPr>
@@ -7119,13 +6682,7 @@
         </p:grpSpPr>
         <p:grpSp>
           <p:nvGrpSpPr>
-            <p:cNvPr id="74" name="Group 73">
-              <a:extLst>
-                <a:ext uri="{FF2B5EF4-FFF2-40B4-BE49-F238E27FC236}">
-                  <a16:creationId xmlns:a16="http://schemas.microsoft.com/office/drawing/2014/main" id="{0623045A-961C-7971-9D87-23C19FC5899D}"/>
-                </a:ext>
-              </a:extLst>
-            </p:cNvPr>
+            <p:cNvPr id="74" name="Group 73"/>
             <p:cNvGrpSpPr/>
             <p:nvPr/>
           </p:nvGrpSpPr>
@@ -7139,13 +6696,7 @@
           </p:grpSpPr>
           <p:sp>
             <p:nvSpPr>
-              <p:cNvPr id="76" name="Rectangle 75">
-                <a:extLst>
-                  <a:ext uri="{FF2B5EF4-FFF2-40B4-BE49-F238E27FC236}">
-                    <a16:creationId xmlns:a16="http://schemas.microsoft.com/office/drawing/2014/main" id="{6B2B081E-7D64-1407-BDBA-2DDA0370C408}"/>
-                  </a:ext>
-                </a:extLst>
-              </p:cNvPr>
+              <p:cNvPr id="76" name="Rectangle 75"/>
               <p:cNvSpPr/>
               <p:nvPr/>
             </p:nvSpPr>
@@ -7193,13 +6744,7 @@
           </p:sp>
           <p:sp>
             <p:nvSpPr>
-              <p:cNvPr id="77" name="Rectangle 76">
-                <a:extLst>
-                  <a:ext uri="{FF2B5EF4-FFF2-40B4-BE49-F238E27FC236}">
-                    <a16:creationId xmlns:a16="http://schemas.microsoft.com/office/drawing/2014/main" id="{77704669-69A8-A4DD-EE95-2B86FF66A3F6}"/>
-                  </a:ext>
-                </a:extLst>
-              </p:cNvPr>
+              <p:cNvPr id="77" name="Rectangle 76"/>
               <p:cNvSpPr/>
               <p:nvPr/>
             </p:nvSpPr>
@@ -7283,13 +6828,7 @@
           </p:sp>
           <p:sp>
             <p:nvSpPr>
-              <p:cNvPr id="78" name="Rectangle 77">
-                <a:extLst>
-                  <a:ext uri="{FF2B5EF4-FFF2-40B4-BE49-F238E27FC236}">
-                    <a16:creationId xmlns:a16="http://schemas.microsoft.com/office/drawing/2014/main" id="{D48708C4-1E0F-02BE-9111-2FAFCD1BD1F1}"/>
-                  </a:ext>
-                </a:extLst>
-              </p:cNvPr>
+              <p:cNvPr id="78" name="Rectangle 77"/>
               <p:cNvSpPr/>
               <p:nvPr/>
             </p:nvSpPr>
@@ -7358,13 +6897,7 @@
         </p:grpSp>
         <p:sp>
           <p:nvSpPr>
-            <p:cNvPr id="75" name="Rectangle: Rounded Corners 74">
-              <a:extLst>
-                <a:ext uri="{FF2B5EF4-FFF2-40B4-BE49-F238E27FC236}">
-                  <a16:creationId xmlns:a16="http://schemas.microsoft.com/office/drawing/2014/main" id="{5781074A-F3D0-4632-F842-3806F32C6DF5}"/>
-                </a:ext>
-              </a:extLst>
-            </p:cNvPr>
+            <p:cNvPr id="75" name="Rectangle: Rounded Corners 74"/>
             <p:cNvSpPr/>
             <p:nvPr/>
           </p:nvSpPr>
@@ -7411,32 +6944,146 @@
           </p:txBody>
         </p:sp>
       </p:grpSp>
+      <p:cxnSp>
+        <p:nvCxnSpPr>
+          <p:cNvPr id="82" name="Straight Arrow Connector 81"/>
+          <p:cNvCxnSpPr/>
+          <p:nvPr/>
+        </p:nvCxnSpPr>
+        <p:spPr>
+          <a:xfrm>
+            <a:off x="7667596" y="2184826"/>
+            <a:ext cx="204717" cy="0"/>
+          </a:xfrm>
+          <a:prstGeom prst="straightConnector1">
+            <a:avLst/>
+          </a:prstGeom>
+          <a:ln w="25400">
+            <a:solidFill>
+              <a:schemeClr val="tx1"/>
+            </a:solidFill>
+            <a:tailEnd type="arrow"/>
+          </a:ln>
+        </p:spPr>
+        <p:style>
+          <a:lnRef idx="1">
+            <a:schemeClr val="accent1"/>
+          </a:lnRef>
+          <a:fillRef idx="0">
+            <a:schemeClr val="accent1"/>
+          </a:fillRef>
+          <a:effectRef idx="0">
+            <a:schemeClr val="accent1"/>
+          </a:effectRef>
+          <a:fontRef idx="minor">
+            <a:schemeClr val="tx1"/>
+          </a:fontRef>
+        </p:style>
+      </p:cxnSp>
+      <p:cxnSp>
+        <p:nvCxnSpPr>
+          <p:cNvPr id="83" name="Straight Arrow Connector 82"/>
+          <p:cNvCxnSpPr/>
+          <p:nvPr/>
+        </p:nvCxnSpPr>
+        <p:spPr>
+          <a:xfrm>
+            <a:off x="9192332" y="3105452"/>
+            <a:ext cx="0" cy="197618"/>
+          </a:xfrm>
+          <a:prstGeom prst="straightConnector1">
+            <a:avLst/>
+          </a:prstGeom>
+          <a:ln w="25400">
+            <a:solidFill>
+              <a:schemeClr val="tx1"/>
+            </a:solidFill>
+            <a:tailEnd type="arrow"/>
+          </a:ln>
+        </p:spPr>
+        <p:style>
+          <a:lnRef idx="1">
+            <a:schemeClr val="accent1"/>
+          </a:lnRef>
+          <a:fillRef idx="0">
+            <a:schemeClr val="accent1"/>
+          </a:fillRef>
+          <a:effectRef idx="0">
+            <a:schemeClr val="accent1"/>
+          </a:effectRef>
+          <a:fontRef idx="minor">
+            <a:schemeClr val="tx1"/>
+          </a:fontRef>
+        </p:style>
+      </p:cxnSp>
+      <p:pic>
+        <p:nvPicPr>
+          <p:cNvPr id="84" name="Picture 83"/>
+          <p:cNvPicPr>
+            <a:picLocks noChangeAspect="1"/>
+          </p:cNvPicPr>
+          <p:nvPr/>
+        </p:nvPicPr>
+        <p:blipFill>
+          <a:blip r:embed="rId16"/>
+          <a:stretch>
+            <a:fillRect/>
+          </a:stretch>
+        </p:blipFill>
+        <p:spPr>
+          <a:xfrm>
+            <a:off x="7963772" y="4404400"/>
+            <a:ext cx="2515316" cy="504250"/>
+          </a:xfrm>
+          <a:prstGeom prst="rect">
+            <a:avLst/>
+          </a:prstGeom>
+        </p:spPr>
+      </p:pic>
+      <p:pic>
+        <p:nvPicPr>
+          <p:cNvPr id="85" name="Picture 84"/>
+          <p:cNvPicPr>
+            <a:picLocks noChangeAspect="1"/>
+          </p:cNvPicPr>
+          <p:nvPr/>
+        </p:nvPicPr>
+        <p:blipFill>
+          <a:blip r:embed="rId17"/>
+          <a:stretch>
+            <a:fillRect/>
+          </a:stretch>
+        </p:blipFill>
+        <p:spPr>
+          <a:xfrm>
+            <a:off x="8076486" y="2477262"/>
+            <a:ext cx="2247042" cy="490148"/>
+          </a:xfrm>
+          <a:prstGeom prst="rect">
+            <a:avLst/>
+          </a:prstGeom>
+        </p:spPr>
+      </p:pic>
       <p:sp>
         <p:nvSpPr>
-          <p:cNvPr id="79" name="Rectangle 78">
-            <a:extLst>
-              <a:ext uri="{FF2B5EF4-FFF2-40B4-BE49-F238E27FC236}">
-                <a16:creationId xmlns:a16="http://schemas.microsoft.com/office/drawing/2014/main" id="{9EC3451D-214B-C240-1542-CC9F1199F3F5}"/>
-              </a:ext>
-            </a:extLst>
-          </p:cNvPr>
+          <p:cNvPr id="86" name="Rectangle: Rounded Corners 85"/>
           <p:cNvSpPr/>
           <p:nvPr/>
         </p:nvSpPr>
         <p:spPr>
           <a:xfrm>
-            <a:off x="7685577" y="1944910"/>
-            <a:ext cx="155589" cy="1985306"/>
-          </a:xfrm>
-          <a:prstGeom prst="rect">
-            <a:avLst/>
-          </a:prstGeom>
-          <a:solidFill>
-            <a:schemeClr val="bg1"/>
-          </a:solidFill>
-          <a:ln>
+            <a:off x="1428750" y="1277580"/>
+            <a:ext cx="6244680" cy="3756298"/>
+          </a:xfrm>
+          <a:prstGeom prst="roundRect">
+            <a:avLst>
+              <a:gd name="adj" fmla="val 2750"/>
+            </a:avLst>
+          </a:prstGeom>
+          <a:noFill/>
+          <a:ln w="19050">
             <a:solidFill>
-              <a:schemeClr val="bg1"/>
+              <a:srgbClr val="0E17C8"/>
             </a:solidFill>
           </a:ln>
         </p:spPr>
@@ -7461,319 +7108,13 @@
           <a:lstStyle/>
           <a:p>
             <a:pPr algn="ctr"/>
-            <a:endParaRPr lang="en-US"/>
+            <a:endParaRPr lang="en-US" dirty="0"/>
           </a:p>
         </p:txBody>
       </p:sp>
       <p:sp>
         <p:nvSpPr>
-          <p:cNvPr id="80" name="Rectangle 79">
-            <a:extLst>
-              <a:ext uri="{FF2B5EF4-FFF2-40B4-BE49-F238E27FC236}">
-                <a16:creationId xmlns:a16="http://schemas.microsoft.com/office/drawing/2014/main" id="{3467EC73-E9B8-6D1D-B22D-60FDC74DFB6C}"/>
-              </a:ext>
-            </a:extLst>
-          </p:cNvPr>
-          <p:cNvSpPr/>
-          <p:nvPr/>
-        </p:nvSpPr>
-        <p:spPr>
-          <a:xfrm>
-            <a:off x="1212864" y="2003062"/>
-            <a:ext cx="173346" cy="1985306"/>
-          </a:xfrm>
-          <a:prstGeom prst="rect">
-            <a:avLst/>
-          </a:prstGeom>
-          <a:solidFill>
-            <a:schemeClr val="bg1"/>
-          </a:solidFill>
-          <a:ln>
-            <a:solidFill>
-              <a:schemeClr val="bg1"/>
-            </a:solidFill>
-          </a:ln>
-        </p:spPr>
-        <p:style>
-          <a:lnRef idx="2">
-            <a:schemeClr val="accent1">
-              <a:shade val="15000"/>
-            </a:schemeClr>
-          </a:lnRef>
-          <a:fillRef idx="1">
-            <a:schemeClr val="accent1"/>
-          </a:fillRef>
-          <a:effectRef idx="0">
-            <a:schemeClr val="accent1"/>
-          </a:effectRef>
-          <a:fontRef idx="minor">
-            <a:schemeClr val="lt1"/>
-          </a:fontRef>
-        </p:style>
-        <p:txBody>
-          <a:bodyPr rtlCol="0" anchor="ctr"/>
-          <a:lstStyle/>
-          <a:p>
-            <a:pPr algn="ctr"/>
-            <a:endParaRPr lang="en-US"/>
-          </a:p>
-        </p:txBody>
-      </p:sp>
-      <p:cxnSp>
-        <p:nvCxnSpPr>
-          <p:cNvPr id="81" name="Straight Arrow Connector 80">
-            <a:extLst>
-              <a:ext uri="{FF2B5EF4-FFF2-40B4-BE49-F238E27FC236}">
-                <a16:creationId xmlns:a16="http://schemas.microsoft.com/office/drawing/2014/main" id="{F987DD18-CD59-4686-B002-73DE0E696FF0}"/>
-              </a:ext>
-            </a:extLst>
-          </p:cNvPr>
-          <p:cNvCxnSpPr>
-            <a:cxnSpLocks/>
-          </p:cNvCxnSpPr>
-          <p:nvPr/>
-        </p:nvCxnSpPr>
-        <p:spPr>
-          <a:xfrm>
-            <a:off x="1192340" y="3181193"/>
-            <a:ext cx="236410" cy="0"/>
-          </a:xfrm>
-          <a:prstGeom prst="straightConnector1">
-            <a:avLst/>
-          </a:prstGeom>
-          <a:ln w="25400">
-            <a:solidFill>
-              <a:schemeClr val="tx1"/>
-            </a:solidFill>
-            <a:tailEnd type="arrow"/>
-          </a:ln>
-        </p:spPr>
-        <p:style>
-          <a:lnRef idx="1">
-            <a:schemeClr val="accent1"/>
-          </a:lnRef>
-          <a:fillRef idx="0">
-            <a:schemeClr val="accent1"/>
-          </a:fillRef>
-          <a:effectRef idx="0">
-            <a:schemeClr val="accent1"/>
-          </a:effectRef>
-          <a:fontRef idx="minor">
-            <a:schemeClr val="tx1"/>
-          </a:fontRef>
-        </p:style>
-      </p:cxnSp>
-      <p:cxnSp>
-        <p:nvCxnSpPr>
-          <p:cNvPr id="82" name="Straight Arrow Connector 81">
-            <a:extLst>
-              <a:ext uri="{FF2B5EF4-FFF2-40B4-BE49-F238E27FC236}">
-                <a16:creationId xmlns:a16="http://schemas.microsoft.com/office/drawing/2014/main" id="{216A3EAA-D803-125F-20E4-D4D934BB170A}"/>
-              </a:ext>
-            </a:extLst>
-          </p:cNvPr>
-          <p:cNvCxnSpPr>
-            <a:cxnSpLocks/>
-          </p:cNvCxnSpPr>
-          <p:nvPr/>
-        </p:nvCxnSpPr>
-        <p:spPr>
-          <a:xfrm>
-            <a:off x="7667596" y="2184826"/>
-            <a:ext cx="204717" cy="0"/>
-          </a:xfrm>
-          <a:prstGeom prst="straightConnector1">
-            <a:avLst/>
-          </a:prstGeom>
-          <a:ln w="25400">
-            <a:solidFill>
-              <a:schemeClr val="tx1"/>
-            </a:solidFill>
-            <a:tailEnd type="arrow"/>
-          </a:ln>
-        </p:spPr>
-        <p:style>
-          <a:lnRef idx="1">
-            <a:schemeClr val="accent1"/>
-          </a:lnRef>
-          <a:fillRef idx="0">
-            <a:schemeClr val="accent1"/>
-          </a:fillRef>
-          <a:effectRef idx="0">
-            <a:schemeClr val="accent1"/>
-          </a:effectRef>
-          <a:fontRef idx="minor">
-            <a:schemeClr val="tx1"/>
-          </a:fontRef>
-        </p:style>
-      </p:cxnSp>
-      <p:cxnSp>
-        <p:nvCxnSpPr>
-          <p:cNvPr id="83" name="Straight Arrow Connector 82">
-            <a:extLst>
-              <a:ext uri="{FF2B5EF4-FFF2-40B4-BE49-F238E27FC236}">
-                <a16:creationId xmlns:a16="http://schemas.microsoft.com/office/drawing/2014/main" id="{7611B114-0A7D-44E2-4280-FA285DA30994}"/>
-              </a:ext>
-            </a:extLst>
-          </p:cNvPr>
-          <p:cNvCxnSpPr>
-            <a:cxnSpLocks/>
-          </p:cNvCxnSpPr>
-          <p:nvPr/>
-        </p:nvCxnSpPr>
-        <p:spPr>
-          <a:xfrm>
-            <a:off x="9192332" y="3105452"/>
-            <a:ext cx="0" cy="197618"/>
-          </a:xfrm>
-          <a:prstGeom prst="straightConnector1">
-            <a:avLst/>
-          </a:prstGeom>
-          <a:ln w="25400">
-            <a:solidFill>
-              <a:schemeClr val="tx1"/>
-            </a:solidFill>
-            <a:tailEnd type="arrow"/>
-          </a:ln>
-        </p:spPr>
-        <p:style>
-          <a:lnRef idx="1">
-            <a:schemeClr val="accent1"/>
-          </a:lnRef>
-          <a:fillRef idx="0">
-            <a:schemeClr val="accent1"/>
-          </a:fillRef>
-          <a:effectRef idx="0">
-            <a:schemeClr val="accent1"/>
-          </a:effectRef>
-          <a:fontRef idx="minor">
-            <a:schemeClr val="tx1"/>
-          </a:fontRef>
-        </p:style>
-      </p:cxnSp>
-      <p:pic>
-        <p:nvPicPr>
-          <p:cNvPr id="84" name="Picture 83">
-            <a:extLst>
-              <a:ext uri="{FF2B5EF4-FFF2-40B4-BE49-F238E27FC236}">
-                <a16:creationId xmlns:a16="http://schemas.microsoft.com/office/drawing/2014/main" id="{C872FAB2-212E-F2F2-82DB-EBD4C1D86520}"/>
-              </a:ext>
-            </a:extLst>
-          </p:cNvPr>
-          <p:cNvPicPr>
-            <a:picLocks noChangeAspect="1"/>
-          </p:cNvPicPr>
-          <p:nvPr/>
-        </p:nvPicPr>
-        <p:blipFill>
-          <a:blip r:embed="rId16"/>
-          <a:stretch>
-            <a:fillRect/>
-          </a:stretch>
-        </p:blipFill>
-        <p:spPr>
-          <a:xfrm>
-            <a:off x="7963772" y="4404400"/>
-            <a:ext cx="2515316" cy="504250"/>
-          </a:xfrm>
-          <a:prstGeom prst="rect">
-            <a:avLst/>
-          </a:prstGeom>
-        </p:spPr>
-      </p:pic>
-      <p:pic>
-        <p:nvPicPr>
-          <p:cNvPr id="85" name="Picture 84">
-            <a:extLst>
-              <a:ext uri="{FF2B5EF4-FFF2-40B4-BE49-F238E27FC236}">
-                <a16:creationId xmlns:a16="http://schemas.microsoft.com/office/drawing/2014/main" id="{837C0209-36B5-29F9-4262-25535B2C1F6D}"/>
-              </a:ext>
-            </a:extLst>
-          </p:cNvPr>
-          <p:cNvPicPr>
-            <a:picLocks noChangeAspect="1"/>
-          </p:cNvPicPr>
-          <p:nvPr/>
-        </p:nvPicPr>
-        <p:blipFill>
-          <a:blip r:embed="rId17"/>
-          <a:stretch>
-            <a:fillRect/>
-          </a:stretch>
-        </p:blipFill>
-        <p:spPr>
-          <a:xfrm>
-            <a:off x="8076486" y="2477262"/>
-            <a:ext cx="2247042" cy="490148"/>
-          </a:xfrm>
-          <a:prstGeom prst="rect">
-            <a:avLst/>
-          </a:prstGeom>
-        </p:spPr>
-      </p:pic>
-      <p:sp>
-        <p:nvSpPr>
-          <p:cNvPr id="86" name="Rectangle: Rounded Corners 85">
-            <a:extLst>
-              <a:ext uri="{FF2B5EF4-FFF2-40B4-BE49-F238E27FC236}">
-                <a16:creationId xmlns:a16="http://schemas.microsoft.com/office/drawing/2014/main" id="{77C85C92-40BE-196A-0554-DD1B0CD1D283}"/>
-              </a:ext>
-            </a:extLst>
-          </p:cNvPr>
-          <p:cNvSpPr/>
-          <p:nvPr/>
-        </p:nvSpPr>
-        <p:spPr>
-          <a:xfrm>
-            <a:off x="1428750" y="1277580"/>
-            <a:ext cx="6244680" cy="3756298"/>
-          </a:xfrm>
-          <a:prstGeom prst="roundRect">
-            <a:avLst>
-              <a:gd name="adj" fmla="val 2750"/>
-            </a:avLst>
-          </a:prstGeom>
-          <a:noFill/>
-          <a:ln w="19050">
-            <a:solidFill>
-              <a:srgbClr val="0E17C8"/>
-            </a:solidFill>
-          </a:ln>
-        </p:spPr>
-        <p:style>
-          <a:lnRef idx="2">
-            <a:schemeClr val="accent1">
-              <a:shade val="15000"/>
-            </a:schemeClr>
-          </a:lnRef>
-          <a:fillRef idx="1">
-            <a:schemeClr val="accent1"/>
-          </a:fillRef>
-          <a:effectRef idx="0">
-            <a:schemeClr val="accent1"/>
-          </a:effectRef>
-          <a:fontRef idx="minor">
-            <a:schemeClr val="lt1"/>
-          </a:fontRef>
-        </p:style>
-        <p:txBody>
-          <a:bodyPr rtlCol="0" anchor="ctr"/>
-          <a:lstStyle/>
-          <a:p>
-            <a:pPr algn="ctr"/>
-            <a:endParaRPr lang="en-US" dirty="0"/>
-          </a:p>
-        </p:txBody>
-      </p:sp>
-      <p:sp>
-        <p:nvSpPr>
-          <p:cNvPr id="87" name="Rectangle: Rounded Corners 86">
-            <a:extLst>
-              <a:ext uri="{FF2B5EF4-FFF2-40B4-BE49-F238E27FC236}">
-                <a16:creationId xmlns:a16="http://schemas.microsoft.com/office/drawing/2014/main" id="{AAFB68BB-0263-24E8-DA47-D1F3B6C7FA16}"/>
-              </a:ext>
-            </a:extLst>
-          </p:cNvPr>
+          <p:cNvPr id="87" name="Rectangle: Rounded Corners 86"/>
           <p:cNvSpPr/>
           <p:nvPr/>
         </p:nvSpPr>
@@ -7868,29 +7209,1140 @@
           </a:p>
         </p:txBody>
       </p:sp>
-      <p:cxnSp>
-        <p:nvCxnSpPr>
-          <p:cNvPr id="88" name="Straight Arrow Connector 87">
+      <p:sp>
+        <p:nvSpPr>
+          <p:cNvPr id="89" name="Rectangle 88"/>
+          <p:cNvSpPr/>
+          <p:nvPr/>
+        </p:nvSpPr>
+        <p:spPr>
+          <a:xfrm>
+            <a:off x="10123331" y="3131466"/>
+            <a:ext cx="552971" cy="67392"/>
+          </a:xfrm>
+          <a:prstGeom prst="rect">
+            <a:avLst/>
+          </a:prstGeom>
+          <a:solidFill>
+            <a:schemeClr val="bg1"/>
+          </a:solidFill>
+          <a:ln>
+            <a:solidFill>
+              <a:schemeClr val="bg1"/>
+            </a:solidFill>
+          </a:ln>
+        </p:spPr>
+        <p:style>
+          <a:lnRef idx="2">
+            <a:schemeClr val="accent1">
+              <a:shade val="15000"/>
+            </a:schemeClr>
+          </a:lnRef>
+          <a:fillRef idx="1">
+            <a:schemeClr val="accent1"/>
+          </a:fillRef>
+          <a:effectRef idx="0">
+            <a:schemeClr val="accent1"/>
+          </a:effectRef>
+          <a:fontRef idx="minor">
+            <a:schemeClr val="lt1"/>
+          </a:fontRef>
+        </p:style>
+        <p:txBody>
+          <a:bodyPr rtlCol="0" anchor="ctr"/>
+          <a:lstStyle/>
+          <a:p>
+            <a:pPr algn="ctr"/>
+            <a:endParaRPr lang="en-US"/>
+          </a:p>
+        </p:txBody>
+      </p:sp>
+    </p:spTree>
+  </p:cSld>
+  <p:clrMapOvr>
+    <a:masterClrMapping/>
+  </p:clrMapOvr>
+</p:sld>
+</file>
+
+<file path=ppt/slides/slide2.xml><?xml version="1.0" encoding="utf-8"?>
+<p:sld xmlns:a="http://schemas.openxmlformats.org/drawingml/2006/main" xmlns:r="http://schemas.openxmlformats.org/officeDocument/2006/relationships" xmlns:p="http://schemas.openxmlformats.org/presentationml/2006/main">
+  <p:cSld>
+    <p:spTree>
+      <p:nvGrpSpPr>
+        <p:cNvPr id="1" name=""/>
+        <p:cNvGrpSpPr/>
+        <p:nvPr/>
+      </p:nvGrpSpPr>
+      <p:grpSpPr>
+        <a:xfrm>
+          <a:off x="0" y="0"/>
+          <a:ext cx="0" cy="0"/>
+          <a:chOff x="0" y="0"/>
+          <a:chExt cx="0" cy="0"/>
+        </a:xfrm>
+      </p:grpSpPr>
+      <p:sp>
+        <p:nvSpPr>
+          <p:cNvPr id="86" name="Rectangle: Rounded Corners 85"/>
+          <p:cNvSpPr/>
+          <p:nvPr/>
+        </p:nvSpPr>
+        <p:spPr>
+          <a:xfrm>
+            <a:off x="1824977" y="3382394"/>
+            <a:ext cx="4841875" cy="1865900"/>
+          </a:xfrm>
+          <a:prstGeom prst="roundRect">
+            <a:avLst>
+              <a:gd name="adj" fmla="val 4707"/>
+            </a:avLst>
+          </a:prstGeom>
+          <a:solidFill>
+            <a:schemeClr val="accent5">
+              <a:lumMod val="20000"/>
+              <a:lumOff val="80000"/>
+            </a:schemeClr>
+          </a:solidFill>
+          <a:ln w="19050">
+            <a:noFill/>
+          </a:ln>
+        </p:spPr>
+        <p:style>
+          <a:lnRef idx="2">
+            <a:schemeClr val="accent1">
+              <a:shade val="15000"/>
+            </a:schemeClr>
+          </a:lnRef>
+          <a:fillRef idx="1">
+            <a:schemeClr val="accent1"/>
+          </a:fillRef>
+          <a:effectRef idx="0">
+            <a:schemeClr val="accent1"/>
+          </a:effectRef>
+          <a:fontRef idx="minor">
+            <a:schemeClr val="lt1"/>
+          </a:fontRef>
+        </p:style>
+        <p:txBody>
+          <a:bodyPr rtlCol="0" anchor="ctr"/>
+          <a:lstStyle/>
+          <a:p>
+            <a:pPr algn="ctr"/>
+            <a:endParaRPr lang="en-US" dirty="0"/>
+          </a:p>
+        </p:txBody>
+      </p:sp>
+      <p:sp>
+        <p:nvSpPr>
+          <p:cNvPr id="49" name="Rectangle: Rounded Corners 85">
             <a:extLst>
               <a:ext uri="{FF2B5EF4-FFF2-40B4-BE49-F238E27FC236}">
-                <a16:creationId xmlns:a16="http://schemas.microsoft.com/office/drawing/2014/main" id="{B7C48476-82C8-F761-1225-7A74B371C6D3}"/>
+                <a16:creationId xmlns:a16="http://schemas.microsoft.com/office/drawing/2014/main" id="{76FEAC4B-0716-C295-CCC4-9A9BC4F2D1E6}"/>
               </a:ext>
             </a:extLst>
           </p:cNvPr>
+          <p:cNvSpPr/>
+          <p:nvPr/>
+        </p:nvSpPr>
+        <p:spPr>
+          <a:xfrm>
+            <a:off x="7057591" y="3382395"/>
+            <a:ext cx="1446316" cy="1865900"/>
+          </a:xfrm>
+          <a:prstGeom prst="roundRect">
+            <a:avLst>
+              <a:gd name="adj" fmla="val 4707"/>
+            </a:avLst>
+          </a:prstGeom>
+          <a:solidFill>
+            <a:schemeClr val="accent3">
+              <a:lumMod val="20000"/>
+              <a:lumOff val="80000"/>
+            </a:schemeClr>
+          </a:solidFill>
+          <a:ln w="19050">
+            <a:noFill/>
+          </a:ln>
+        </p:spPr>
+        <p:style>
+          <a:lnRef idx="2">
+            <a:schemeClr val="accent1">
+              <a:shade val="15000"/>
+            </a:schemeClr>
+          </a:lnRef>
+          <a:fillRef idx="1">
+            <a:schemeClr val="accent1"/>
+          </a:fillRef>
+          <a:effectRef idx="0">
+            <a:schemeClr val="accent1"/>
+          </a:effectRef>
+          <a:fontRef idx="minor">
+            <a:schemeClr val="lt1"/>
+          </a:fontRef>
+        </p:style>
+        <p:txBody>
+          <a:bodyPr rtlCol="0" anchor="ctr"/>
+          <a:lstStyle/>
+          <a:p>
+            <a:pPr algn="ctr"/>
+            <a:endParaRPr lang="en-US" dirty="0"/>
+          </a:p>
+        </p:txBody>
+      </p:sp>
+      <p:sp>
+        <p:nvSpPr>
+          <p:cNvPr id="76" name="Rectangle: Rounded Corners 85"/>
+          <p:cNvSpPr/>
+          <p:nvPr/>
+        </p:nvSpPr>
+        <p:spPr>
+          <a:xfrm>
+            <a:off x="1824977" y="1888943"/>
+            <a:ext cx="6678930" cy="1374763"/>
+          </a:xfrm>
+          <a:prstGeom prst="roundRect">
+            <a:avLst>
+              <a:gd name="adj" fmla="val 4707"/>
+            </a:avLst>
+          </a:prstGeom>
+          <a:solidFill>
+            <a:schemeClr val="accent3">
+              <a:lumMod val="20000"/>
+              <a:lumOff val="80000"/>
+            </a:schemeClr>
+          </a:solidFill>
+          <a:ln w="19050">
+            <a:noFill/>
+          </a:ln>
+        </p:spPr>
+        <p:style>
+          <a:lnRef idx="2">
+            <a:schemeClr val="accent1">
+              <a:shade val="15000"/>
+            </a:schemeClr>
+          </a:lnRef>
+          <a:fillRef idx="1">
+            <a:schemeClr val="accent1"/>
+          </a:fillRef>
+          <a:effectRef idx="0">
+            <a:schemeClr val="accent1"/>
+          </a:effectRef>
+          <a:fontRef idx="minor">
+            <a:schemeClr val="lt1"/>
+          </a:fontRef>
+        </p:style>
+        <p:txBody>
+          <a:bodyPr rtlCol="0" anchor="ctr"/>
+          <a:lstStyle/>
+          <a:p>
+            <a:pPr algn="ctr"/>
+            <a:endParaRPr lang="en-US" dirty="0"/>
+          </a:p>
+        </p:txBody>
+      </p:sp>
+      <p:cxnSp>
+        <p:nvCxnSpPr>
+          <p:cNvPr id="52" name="Straight Arrow Connector 51"/>
           <p:cNvCxnSpPr>
-            <a:cxnSpLocks/>
+            <a:stCxn id="58" idx="3"/>
           </p:cNvCxnSpPr>
           <p:nvPr/>
         </p:nvCxnSpPr>
         <p:spPr>
-          <a:xfrm>
-            <a:off x="10528733" y="3795949"/>
-            <a:ext cx="168168" cy="0"/>
+          <a:xfrm flipV="1">
+            <a:off x="2866377" y="3728762"/>
+            <a:ext cx="499745" cy="595630"/>
           </a:xfrm>
           <a:prstGeom prst="straightConnector1">
             <a:avLst/>
           </a:prstGeom>
-          <a:ln w="25400">
+          <a:ln w="15875">
+            <a:solidFill>
+              <a:schemeClr val="tx1"/>
+            </a:solidFill>
+            <a:tailEnd type="arrow"/>
+          </a:ln>
+        </p:spPr>
+        <p:style>
+          <a:lnRef idx="1">
+            <a:schemeClr val="accent1"/>
+          </a:lnRef>
+          <a:fillRef idx="0">
+            <a:schemeClr val="accent1"/>
+          </a:fillRef>
+          <a:effectRef idx="0">
+            <a:schemeClr val="accent1"/>
+          </a:effectRef>
+          <a:fontRef idx="minor">
+            <a:schemeClr val="tx1"/>
+          </a:fontRef>
+        </p:style>
+      </p:cxnSp>
+      <p:cxnSp>
+        <p:nvCxnSpPr>
+          <p:cNvPr id="53" name="Straight Arrow Connector 52"/>
+          <p:cNvCxnSpPr>
+            <a:stCxn id="58" idx="3"/>
+          </p:cNvCxnSpPr>
+          <p:nvPr/>
+        </p:nvCxnSpPr>
+        <p:spPr>
+          <a:xfrm flipV="1">
+            <a:off x="2866377" y="4089442"/>
+            <a:ext cx="511810" cy="234315"/>
+          </a:xfrm>
+          <a:prstGeom prst="straightConnector1">
+            <a:avLst/>
+          </a:prstGeom>
+          <a:ln w="15875">
+            <a:solidFill>
+              <a:schemeClr val="tx1"/>
+            </a:solidFill>
+            <a:tailEnd type="arrow"/>
+          </a:ln>
+        </p:spPr>
+        <p:style>
+          <a:lnRef idx="1">
+            <a:schemeClr val="accent1"/>
+          </a:lnRef>
+          <a:fillRef idx="0">
+            <a:schemeClr val="accent1"/>
+          </a:fillRef>
+          <a:effectRef idx="0">
+            <a:schemeClr val="accent1"/>
+          </a:effectRef>
+          <a:fontRef idx="minor">
+            <a:schemeClr val="tx1"/>
+          </a:fontRef>
+        </p:style>
+      </p:cxnSp>
+      <p:cxnSp>
+        <p:nvCxnSpPr>
+          <p:cNvPr id="54" name="Straight Arrow Connector 53"/>
+          <p:cNvCxnSpPr>
+            <a:stCxn id="58" idx="3"/>
+          </p:cNvCxnSpPr>
+          <p:nvPr/>
+        </p:nvCxnSpPr>
+        <p:spPr>
+          <a:xfrm>
+            <a:off x="2866377" y="4323757"/>
+            <a:ext cx="520065" cy="223520"/>
+          </a:xfrm>
+          <a:prstGeom prst="straightConnector1">
+            <a:avLst/>
+          </a:prstGeom>
+          <a:ln w="15875">
+            <a:solidFill>
+              <a:schemeClr val="tx1"/>
+            </a:solidFill>
+            <a:tailEnd type="arrow"/>
+          </a:ln>
+        </p:spPr>
+        <p:style>
+          <a:lnRef idx="1">
+            <a:schemeClr val="accent1"/>
+          </a:lnRef>
+          <a:fillRef idx="0">
+            <a:schemeClr val="accent1"/>
+          </a:fillRef>
+          <a:effectRef idx="0">
+            <a:schemeClr val="accent1"/>
+          </a:effectRef>
+          <a:fontRef idx="minor">
+            <a:schemeClr val="tx1"/>
+          </a:fontRef>
+        </p:style>
+      </p:cxnSp>
+      <p:grpSp>
+        <p:nvGrpSpPr>
+          <p:cNvPr id="57" name="Group 56"/>
+          <p:cNvGrpSpPr/>
+          <p:nvPr/>
+        </p:nvGrpSpPr>
+        <p:grpSpPr>
+          <a:xfrm>
+            <a:off x="3474072" y="3503337"/>
+            <a:ext cx="469265" cy="771525"/>
+            <a:chOff x="3388441" y="2303431"/>
+            <a:chExt cx="464766" cy="771815"/>
+          </a:xfrm>
+        </p:grpSpPr>
+        <p:sp>
+          <p:nvSpPr>
+            <p:cNvPr id="70" name="Rectangle: Rounded Corners 69"/>
+            <p:cNvSpPr/>
+            <p:nvPr/>
+          </p:nvSpPr>
+          <p:spPr>
+            <a:xfrm>
+              <a:off x="3388441" y="2314087"/>
+              <a:ext cx="464766" cy="761159"/>
+            </a:xfrm>
+            <a:prstGeom prst="roundRect">
+              <a:avLst>
+                <a:gd name="adj" fmla="val 14513"/>
+              </a:avLst>
+            </a:prstGeom>
+            <a:solidFill>
+              <a:schemeClr val="accent4">
+                <a:lumMod val="40000"/>
+                <a:lumOff val="60000"/>
+              </a:schemeClr>
+            </a:solidFill>
+            <a:ln>
+              <a:noFill/>
+            </a:ln>
+          </p:spPr>
+          <p:style>
+            <a:lnRef idx="2">
+              <a:schemeClr val="accent1">
+                <a:shade val="15000"/>
+              </a:schemeClr>
+            </a:lnRef>
+            <a:fillRef idx="1">
+              <a:schemeClr val="accent1"/>
+            </a:fillRef>
+            <a:effectRef idx="0">
+              <a:schemeClr val="accent1"/>
+            </a:effectRef>
+            <a:fontRef idx="minor">
+              <a:schemeClr val="lt1"/>
+            </a:fontRef>
+          </p:style>
+          <p:txBody>
+            <a:bodyPr rtlCol="0" anchor="ctr"/>
+            <a:lstStyle/>
+            <a:p>
+              <a:pPr algn="ctr"/>
+              <a:endParaRPr lang="en-US"/>
+            </a:p>
+          </p:txBody>
+        </p:sp>
+        <mc:AlternateContent xmlns:mc="http://schemas.openxmlformats.org/markup-compatibility/2006" xmlns:a14="http://schemas.microsoft.com/office/drawing/2010/main">
+          <mc:Choice Requires="a14">
+            <p:sp>
+              <p:nvSpPr>
+                <p:cNvPr id="71" name="Rectangle 70"/>
+                <p:cNvSpPr/>
+                <p:nvPr/>
+              </p:nvSpPr>
+              <p:spPr>
+                <a:xfrm>
+                  <a:off x="3543316" y="2303431"/>
+                  <a:ext cx="227807" cy="371819"/>
+                </a:xfrm>
+                <a:prstGeom prst="rect">
+                  <a:avLst/>
+                </a:prstGeom>
+                <a:noFill/>
+                <a:ln>
+                  <a:noFill/>
+                </a:ln>
+              </p:spPr>
+              <p:style>
+                <a:lnRef idx="2">
+                  <a:schemeClr val="accent1">
+                    <a:shade val="15000"/>
+                  </a:schemeClr>
+                </a:lnRef>
+                <a:fillRef idx="1">
+                  <a:schemeClr val="accent1"/>
+                </a:fillRef>
+                <a:effectRef idx="0">
+                  <a:schemeClr val="accent1"/>
+                </a:effectRef>
+                <a:fontRef idx="minor">
+                  <a:schemeClr val="lt1"/>
+                </a:fontRef>
+              </p:style>
+              <p:txBody>
+                <a:bodyPr rtlCol="0" anchor="ctr"/>
+                <a:lstStyle/>
+                <a:p>
+                  <a:pPr algn="ctr"/>
+                  <a14:m>
+                    <m:oMathPara xmlns:m="http://schemas.openxmlformats.org/officeDocument/2006/math">
+                      <m:oMathParaPr>
+                        <m:jc m:val="centerGroup"/>
+                      </m:oMathParaPr>
+                      <m:oMath xmlns:m="http://schemas.openxmlformats.org/officeDocument/2006/math">
+                        <m:sSub>
+                          <m:sSubPr>
+                            <m:ctrlPr>
+                              <a:rPr lang="en-US" sz="1400" i="1" smtClean="0">
+                                <a:solidFill>
+                                  <a:schemeClr val="tx1"/>
+                                </a:solidFill>
+                                <a:latin typeface="Cambria Math" panose="02040503050406030204" pitchFamily="18" charset="0"/>
+                              </a:rPr>
+                            </m:ctrlPr>
+                          </m:sSubPr>
+                          <m:e>
+                            <m:r>
+                              <a:rPr lang="en-US" sz="1400" b="0" i="1" smtClean="0">
+                                <a:solidFill>
+                                  <a:schemeClr val="tx1"/>
+                                </a:solidFill>
+                                <a:latin typeface="Cambria Math" panose="02040503050406030204" pitchFamily="18" charset="0"/>
+                              </a:rPr>
+                              <m:t>𝑎</m:t>
+                            </m:r>
+                          </m:e>
+                          <m:sub>
+                            <m:r>
+                              <a:rPr lang="en-US" sz="1400" b="0" i="1" smtClean="0">
+                                <a:solidFill>
+                                  <a:schemeClr val="tx1"/>
+                                </a:solidFill>
+                                <a:latin typeface="Cambria Math" panose="02040503050406030204" pitchFamily="18" charset="0"/>
+                              </a:rPr>
+                              <m:t>1</m:t>
+                            </m:r>
+                          </m:sub>
+                        </m:sSub>
+                      </m:oMath>
+                    </m:oMathPara>
+                  </a14:m>
+                  <a:endParaRPr lang="en-US" sz="1200" dirty="0">
+                    <a:solidFill>
+                      <a:srgbClr val="444FCD"/>
+                    </a:solidFill>
+                  </a:endParaRPr>
+                </a:p>
+              </p:txBody>
+            </p:sp>
+          </mc:Choice>
+          <mc:Fallback xmlns="">
+            <p:sp>
+              <p:nvSpPr>
+                <p:cNvPr id="71" name="Rectangle 70"/>
+                <p:cNvSpPr>
+                  <a:spLocks noRot="1" noChangeAspect="1" noMove="1" noResize="1" noEditPoints="1" noAdjustHandles="1" noChangeArrowheads="1" noChangeShapeType="1" noTextEdit="1"/>
+                </p:cNvSpPr>
+                <p:nvPr/>
+              </p:nvSpPr>
+              <p:spPr>
+                <a:xfrm>
+                  <a:off x="3543316" y="2303431"/>
+                  <a:ext cx="227807" cy="371819"/>
+                </a:xfrm>
+                <a:prstGeom prst="rect">
+                  <a:avLst/>
+                </a:prstGeom>
+                <a:blipFill>
+                  <a:blip r:embed="rId2"/>
+                  <a:stretch>
+                    <a:fillRect l="-18919"/>
+                  </a:stretch>
+                </a:blipFill>
+                <a:ln>
+                  <a:noFill/>
+                </a:ln>
+              </p:spPr>
+              <p:txBody>
+                <a:bodyPr/>
+                <a:lstStyle/>
+                <a:p>
+                  <a:r>
+                    <a:rPr lang="en-US">
+                      <a:noFill/>
+                    </a:rPr>
+                    <a:t> </a:t>
+                  </a:r>
+                </a:p>
+              </p:txBody>
+            </p:sp>
+          </mc:Fallback>
+        </mc:AlternateContent>
+        <mc:AlternateContent xmlns:mc="http://schemas.openxmlformats.org/markup-compatibility/2006" xmlns:a14="http://schemas.microsoft.com/office/drawing/2010/main">
+          <mc:Choice Requires="a14">
+            <p:sp>
+              <p:nvSpPr>
+                <p:cNvPr id="72" name="Rectangle 71"/>
+                <p:cNvSpPr/>
+                <p:nvPr/>
+              </p:nvSpPr>
+              <p:spPr>
+                <a:xfrm>
+                  <a:off x="3543316" y="2672959"/>
+                  <a:ext cx="227807" cy="371819"/>
+                </a:xfrm>
+                <a:prstGeom prst="rect">
+                  <a:avLst/>
+                </a:prstGeom>
+                <a:noFill/>
+                <a:ln>
+                  <a:noFill/>
+                </a:ln>
+              </p:spPr>
+              <p:style>
+                <a:lnRef idx="2">
+                  <a:schemeClr val="accent1">
+                    <a:shade val="15000"/>
+                  </a:schemeClr>
+                </a:lnRef>
+                <a:fillRef idx="1">
+                  <a:schemeClr val="accent1"/>
+                </a:fillRef>
+                <a:effectRef idx="0">
+                  <a:schemeClr val="accent1"/>
+                </a:effectRef>
+                <a:fontRef idx="minor">
+                  <a:schemeClr val="lt1"/>
+                </a:fontRef>
+              </p:style>
+              <p:txBody>
+                <a:bodyPr rtlCol="0" anchor="ctr"/>
+                <a:lstStyle/>
+                <a:p>
+                  <a:pPr algn="ctr"/>
+                  <a14:m>
+                    <m:oMathPara xmlns:m="http://schemas.openxmlformats.org/officeDocument/2006/math">
+                      <m:oMathParaPr>
+                        <m:jc m:val="centerGroup"/>
+                      </m:oMathParaPr>
+                      <m:oMath xmlns:m="http://schemas.openxmlformats.org/officeDocument/2006/math">
+                        <m:sSub>
+                          <m:sSubPr>
+                            <m:ctrlPr>
+                              <a:rPr lang="en-US" sz="1400" i="1" smtClean="0">
+                                <a:solidFill>
+                                  <a:schemeClr val="tx1"/>
+                                </a:solidFill>
+                                <a:latin typeface="Cambria Math" panose="02040503050406030204" pitchFamily="18" charset="0"/>
+                              </a:rPr>
+                            </m:ctrlPr>
+                          </m:sSubPr>
+                          <m:e>
+                            <m:r>
+                              <a:rPr lang="en-US" sz="1400" b="0" i="1" smtClean="0">
+                                <a:solidFill>
+                                  <a:schemeClr val="tx1"/>
+                                </a:solidFill>
+                                <a:latin typeface="Cambria Math" panose="02040503050406030204" pitchFamily="18" charset="0"/>
+                              </a:rPr>
+                              <m:t>𝑎</m:t>
+                            </m:r>
+                          </m:e>
+                          <m:sub>
+                            <m:r>
+                              <a:rPr lang="en-US" sz="1400" b="0" i="1" smtClean="0">
+                                <a:solidFill>
+                                  <a:schemeClr val="tx1"/>
+                                </a:solidFill>
+                                <a:latin typeface="Cambria Math" panose="02040503050406030204" pitchFamily="18" charset="0"/>
+                              </a:rPr>
+                              <m:t>1</m:t>
+                            </m:r>
+                          </m:sub>
+                        </m:sSub>
+                      </m:oMath>
+                    </m:oMathPara>
+                  </a14:m>
+                  <a:endParaRPr lang="en-US" sz="1200" dirty="0">
+                    <a:solidFill>
+                      <a:srgbClr val="444FCD"/>
+                    </a:solidFill>
+                  </a:endParaRPr>
+                </a:p>
+              </p:txBody>
+            </p:sp>
+          </mc:Choice>
+          <mc:Fallback xmlns="">
+            <p:sp>
+              <p:nvSpPr>
+                <p:cNvPr id="72" name="Rectangle 71"/>
+                <p:cNvSpPr>
+                  <a:spLocks noRot="1" noChangeAspect="1" noMove="1" noResize="1" noEditPoints="1" noAdjustHandles="1" noChangeArrowheads="1" noChangeShapeType="1" noTextEdit="1"/>
+                </p:cNvSpPr>
+                <p:nvPr/>
+              </p:nvSpPr>
+              <p:spPr>
+                <a:xfrm>
+                  <a:off x="3543316" y="2672959"/>
+                  <a:ext cx="227807" cy="371819"/>
+                </a:xfrm>
+                <a:prstGeom prst="rect">
+                  <a:avLst/>
+                </a:prstGeom>
+                <a:blipFill>
+                  <a:blip r:embed="rId2"/>
+                  <a:stretch>
+                    <a:fillRect l="-18919"/>
+                  </a:stretch>
+                </a:blipFill>
+                <a:ln>
+                  <a:noFill/>
+                </a:ln>
+              </p:spPr>
+              <p:txBody>
+                <a:bodyPr/>
+                <a:lstStyle/>
+                <a:p>
+                  <a:r>
+                    <a:rPr lang="en-US">
+                      <a:noFill/>
+                    </a:rPr>
+                    <a:t> </a:t>
+                  </a:r>
+                </a:p>
+              </p:txBody>
+            </p:sp>
+          </mc:Fallback>
+        </mc:AlternateContent>
+      </p:grpSp>
+      <p:sp>
+        <p:nvSpPr>
+          <p:cNvPr id="58" name="Rectangle: Rounded Corners 57"/>
+          <p:cNvSpPr/>
+          <p:nvPr/>
+        </p:nvSpPr>
+        <p:spPr>
+          <a:xfrm>
+            <a:off x="2004047" y="3975777"/>
+            <a:ext cx="862330" cy="695325"/>
+          </a:xfrm>
+          <a:prstGeom prst="roundRect">
+            <a:avLst>
+              <a:gd name="adj" fmla="val 12775"/>
+            </a:avLst>
+          </a:prstGeom>
+          <a:solidFill>
+            <a:srgbClr val="B6D5F9"/>
+          </a:solidFill>
+          <a:ln>
+            <a:solidFill>
+              <a:schemeClr val="tx1"/>
+            </a:solidFill>
+          </a:ln>
+        </p:spPr>
+        <p:style>
+          <a:lnRef idx="2">
+            <a:schemeClr val="accent1">
+              <a:shade val="15000"/>
+            </a:schemeClr>
+          </a:lnRef>
+          <a:fillRef idx="1">
+            <a:schemeClr val="accent1"/>
+          </a:fillRef>
+          <a:effectRef idx="0">
+            <a:schemeClr val="accent1"/>
+          </a:effectRef>
+          <a:fontRef idx="minor">
+            <a:schemeClr val="lt1"/>
+          </a:fontRef>
+        </p:style>
+        <p:txBody>
+          <a:bodyPr rtlCol="0" anchor="ctr"/>
+          <a:lstStyle/>
+          <a:p>
+            <a:pPr algn="ctr"/>
+            <a:r>
+              <a:rPr lang="en-US" sz="1400" b="1" dirty="0">
+                <a:solidFill>
+                  <a:schemeClr val="tx1"/>
+                </a:solidFill>
+              </a:rPr>
+              <a:t>Same Prompt</a:t>
+            </a:r>
+          </a:p>
+        </p:txBody>
+      </p:sp>
+      <p:cxnSp>
+        <p:nvCxnSpPr>
+          <p:cNvPr id="60" name="Straight Arrow Connector 59"/>
+          <p:cNvCxnSpPr>
+            <a:stCxn id="58" idx="3"/>
+          </p:cNvCxnSpPr>
+          <p:nvPr/>
+        </p:nvCxnSpPr>
+        <p:spPr>
+          <a:xfrm>
+            <a:off x="2866377" y="4323757"/>
+            <a:ext cx="511810" cy="595630"/>
+          </a:xfrm>
+          <a:prstGeom prst="straightConnector1">
+            <a:avLst/>
+          </a:prstGeom>
+          <a:ln w="15875">
+            <a:solidFill>
+              <a:schemeClr val="tx1"/>
+            </a:solidFill>
+            <a:tailEnd type="arrow"/>
+          </a:ln>
+        </p:spPr>
+        <p:style>
+          <a:lnRef idx="1">
+            <a:schemeClr val="accent1"/>
+          </a:lnRef>
+          <a:fillRef idx="0">
+            <a:schemeClr val="accent1"/>
+          </a:fillRef>
+          <a:effectRef idx="0">
+            <a:schemeClr val="accent1"/>
+          </a:effectRef>
+          <a:fontRef idx="minor">
+            <a:schemeClr val="tx1"/>
+          </a:fontRef>
+        </p:style>
+      </p:cxnSp>
+      <p:grpSp>
+        <p:nvGrpSpPr>
+          <p:cNvPr id="61" name="Group 60"/>
+          <p:cNvGrpSpPr/>
+          <p:nvPr/>
+        </p:nvGrpSpPr>
+        <p:grpSpPr>
+          <a:xfrm>
+            <a:off x="3474072" y="4363762"/>
+            <a:ext cx="469265" cy="771525"/>
+            <a:chOff x="3388441" y="2303431"/>
+            <a:chExt cx="464766" cy="771815"/>
+          </a:xfrm>
+        </p:grpSpPr>
+        <p:sp>
+          <p:nvSpPr>
+            <p:cNvPr id="65" name="Rectangle: Rounded Corners 64"/>
+            <p:cNvSpPr/>
+            <p:nvPr/>
+          </p:nvSpPr>
+          <p:spPr>
+            <a:xfrm>
+              <a:off x="3388441" y="2314087"/>
+              <a:ext cx="464766" cy="761159"/>
+            </a:xfrm>
+            <a:prstGeom prst="roundRect">
+              <a:avLst>
+                <a:gd name="adj" fmla="val 14513"/>
+              </a:avLst>
+            </a:prstGeom>
+            <a:solidFill>
+              <a:schemeClr val="accent4">
+                <a:lumMod val="40000"/>
+                <a:lumOff val="60000"/>
+              </a:schemeClr>
+            </a:solidFill>
+            <a:ln>
+              <a:noFill/>
+            </a:ln>
+          </p:spPr>
+          <p:style>
+            <a:lnRef idx="2">
+              <a:schemeClr val="accent1">
+                <a:shade val="15000"/>
+              </a:schemeClr>
+            </a:lnRef>
+            <a:fillRef idx="1">
+              <a:schemeClr val="accent1"/>
+            </a:fillRef>
+            <a:effectRef idx="0">
+              <a:schemeClr val="accent1"/>
+            </a:effectRef>
+            <a:fontRef idx="minor">
+              <a:schemeClr val="lt1"/>
+            </a:fontRef>
+          </p:style>
+          <p:txBody>
+            <a:bodyPr rtlCol="0" anchor="ctr"/>
+            <a:lstStyle/>
+            <a:p>
+              <a:pPr algn="ctr"/>
+              <a:endParaRPr lang="en-US"/>
+            </a:p>
+          </p:txBody>
+        </p:sp>
+        <mc:AlternateContent xmlns:mc="http://schemas.openxmlformats.org/markup-compatibility/2006" xmlns:a14="http://schemas.microsoft.com/office/drawing/2010/main">
+          <mc:Choice Requires="a14">
+            <p:sp>
+              <p:nvSpPr>
+                <p:cNvPr id="66" name="Rectangle 65"/>
+                <p:cNvSpPr/>
+                <p:nvPr/>
+              </p:nvSpPr>
+              <p:spPr>
+                <a:xfrm>
+                  <a:off x="3538592" y="2303431"/>
+                  <a:ext cx="227807" cy="371819"/>
+                </a:xfrm>
+                <a:prstGeom prst="rect">
+                  <a:avLst/>
+                </a:prstGeom>
+                <a:noFill/>
+                <a:ln>
+                  <a:noFill/>
+                </a:ln>
+              </p:spPr>
+              <p:style>
+                <a:lnRef idx="2">
+                  <a:schemeClr val="accent1">
+                    <a:shade val="15000"/>
+                  </a:schemeClr>
+                </a:lnRef>
+                <a:fillRef idx="1">
+                  <a:schemeClr val="accent1"/>
+                </a:fillRef>
+                <a:effectRef idx="0">
+                  <a:schemeClr val="accent1"/>
+                </a:effectRef>
+                <a:fontRef idx="minor">
+                  <a:schemeClr val="lt1"/>
+                </a:fontRef>
+              </p:style>
+              <p:txBody>
+                <a:bodyPr rtlCol="0" anchor="ctr"/>
+                <a:lstStyle/>
+                <a:p>
+                  <a:pPr algn="ctr"/>
+                  <a14:m>
+                    <m:oMathPara xmlns:m="http://schemas.openxmlformats.org/officeDocument/2006/math">
+                      <m:oMathParaPr>
+                        <m:jc m:val="centerGroup"/>
+                      </m:oMathParaPr>
+                      <m:oMath xmlns:m="http://schemas.openxmlformats.org/officeDocument/2006/math">
+                        <m:sSub>
+                          <m:sSubPr>
+                            <m:ctrlPr>
+                              <a:rPr lang="en-US" sz="1400" i="1" smtClean="0">
+                                <a:solidFill>
+                                  <a:schemeClr val="tx1"/>
+                                </a:solidFill>
+                                <a:latin typeface="Cambria Math" panose="02040503050406030204" pitchFamily="18" charset="0"/>
+                              </a:rPr>
+                            </m:ctrlPr>
+                          </m:sSubPr>
+                          <m:e>
+                            <m:r>
+                              <a:rPr lang="en-US" sz="1400" b="0" i="1" smtClean="0">
+                                <a:solidFill>
+                                  <a:schemeClr val="tx1"/>
+                                </a:solidFill>
+                                <a:latin typeface="Cambria Math" panose="02040503050406030204" pitchFamily="18" charset="0"/>
+                              </a:rPr>
+                              <m:t>𝑎</m:t>
+                            </m:r>
+                          </m:e>
+                          <m:sub>
+                            <m:r>
+                              <a:rPr lang="en-US" sz="1400" b="0" i="1" smtClean="0">
+                                <a:solidFill>
+                                  <a:schemeClr val="tx1"/>
+                                </a:solidFill>
+                                <a:latin typeface="Cambria Math" panose="02040503050406030204" pitchFamily="18" charset="0"/>
+                              </a:rPr>
+                              <m:t>2</m:t>
+                            </m:r>
+                          </m:sub>
+                        </m:sSub>
+                      </m:oMath>
+                    </m:oMathPara>
+                  </a14:m>
+                  <a:endParaRPr lang="en-US" sz="1200" dirty="0">
+                    <a:solidFill>
+                      <a:srgbClr val="444FCD"/>
+                    </a:solidFill>
+                  </a:endParaRPr>
+                </a:p>
+              </p:txBody>
+            </p:sp>
+          </mc:Choice>
+          <mc:Fallback xmlns="">
+            <p:sp>
+              <p:nvSpPr>
+                <p:cNvPr id="66" name="Rectangle 65"/>
+                <p:cNvSpPr>
+                  <a:spLocks noRot="1" noChangeAspect="1" noMove="1" noResize="1" noEditPoints="1" noAdjustHandles="1" noChangeArrowheads="1" noChangeShapeType="1" noTextEdit="1"/>
+                </p:cNvSpPr>
+                <p:nvPr/>
+              </p:nvSpPr>
+              <p:spPr>
+                <a:xfrm>
+                  <a:off x="3538592" y="2303431"/>
+                  <a:ext cx="227807" cy="371819"/>
+                </a:xfrm>
+                <a:prstGeom prst="rect">
+                  <a:avLst/>
+                </a:prstGeom>
+                <a:blipFill>
+                  <a:blip r:embed="rId3"/>
+                  <a:stretch>
+                    <a:fillRect l="-18919"/>
+                  </a:stretch>
+                </a:blipFill>
+                <a:ln>
+                  <a:noFill/>
+                </a:ln>
+              </p:spPr>
+              <p:txBody>
+                <a:bodyPr/>
+                <a:lstStyle/>
+                <a:p>
+                  <a:r>
+                    <a:rPr lang="en-US">
+                      <a:noFill/>
+                    </a:rPr>
+                    <a:t> </a:t>
+                  </a:r>
+                </a:p>
+              </p:txBody>
+            </p:sp>
+          </mc:Fallback>
+        </mc:AlternateContent>
+        <mc:AlternateContent xmlns:mc="http://schemas.openxmlformats.org/markup-compatibility/2006" xmlns:a14="http://schemas.microsoft.com/office/drawing/2010/main">
+          <mc:Choice Requires="a14">
+            <p:sp>
+              <p:nvSpPr>
+                <p:cNvPr id="67" name="Rectangle 66"/>
+                <p:cNvSpPr/>
+                <p:nvPr/>
+              </p:nvSpPr>
+              <p:spPr>
+                <a:xfrm>
+                  <a:off x="3538594" y="2680846"/>
+                  <a:ext cx="227807" cy="371819"/>
+                </a:xfrm>
+                <a:prstGeom prst="rect">
+                  <a:avLst/>
+                </a:prstGeom>
+                <a:noFill/>
+                <a:ln>
+                  <a:noFill/>
+                </a:ln>
+              </p:spPr>
+              <p:style>
+                <a:lnRef idx="2">
+                  <a:schemeClr val="accent1">
+                    <a:shade val="15000"/>
+                  </a:schemeClr>
+                </a:lnRef>
+                <a:fillRef idx="1">
+                  <a:schemeClr val="accent1"/>
+                </a:fillRef>
+                <a:effectRef idx="0">
+                  <a:schemeClr val="accent1"/>
+                </a:effectRef>
+                <a:fontRef idx="minor">
+                  <a:schemeClr val="lt1"/>
+                </a:fontRef>
+              </p:style>
+              <p:txBody>
+                <a:bodyPr rtlCol="0" anchor="ctr"/>
+                <a:lstStyle/>
+                <a:p>
+                  <a:pPr algn="ctr"/>
+                  <a14:m>
+                    <m:oMathPara xmlns:m="http://schemas.openxmlformats.org/officeDocument/2006/math">
+                      <m:oMathParaPr>
+                        <m:jc m:val="centerGroup"/>
+                      </m:oMathParaPr>
+                      <m:oMath xmlns:m="http://schemas.openxmlformats.org/officeDocument/2006/math">
+                        <m:sSub>
+                          <m:sSubPr>
+                            <m:ctrlPr>
+                              <a:rPr lang="en-US" sz="1400" i="1" smtClean="0">
+                                <a:solidFill>
+                                  <a:schemeClr val="tx1"/>
+                                </a:solidFill>
+                                <a:latin typeface="Cambria Math" panose="02040503050406030204" pitchFamily="18" charset="0"/>
+                              </a:rPr>
+                            </m:ctrlPr>
+                          </m:sSubPr>
+                          <m:e>
+                            <m:r>
+                              <a:rPr lang="en-US" sz="1400" b="0" i="1" smtClean="0">
+                                <a:solidFill>
+                                  <a:schemeClr val="tx1"/>
+                                </a:solidFill>
+                                <a:latin typeface="Cambria Math" panose="02040503050406030204" pitchFamily="18" charset="0"/>
+                              </a:rPr>
+                              <m:t>𝑎</m:t>
+                            </m:r>
+                          </m:e>
+                          <m:sub>
+                            <m:r>
+                              <a:rPr lang="en-US" sz="1400" b="0" i="1" smtClean="0">
+                                <a:solidFill>
+                                  <a:schemeClr val="tx1"/>
+                                </a:solidFill>
+                                <a:latin typeface="Cambria Math" panose="02040503050406030204" pitchFamily="18" charset="0"/>
+                              </a:rPr>
+                              <m:t>2</m:t>
+                            </m:r>
+                          </m:sub>
+                        </m:sSub>
+                      </m:oMath>
+                    </m:oMathPara>
+                  </a14:m>
+                  <a:endParaRPr lang="en-US" sz="1200" dirty="0">
+                    <a:solidFill>
+                      <a:srgbClr val="444FCD"/>
+                    </a:solidFill>
+                  </a:endParaRPr>
+                </a:p>
+              </p:txBody>
+            </p:sp>
+          </mc:Choice>
+          <mc:Fallback xmlns="">
+            <p:sp>
+              <p:nvSpPr>
+                <p:cNvPr id="67" name="Rectangle 66"/>
+                <p:cNvSpPr>
+                  <a:spLocks noRot="1" noChangeAspect="1" noMove="1" noResize="1" noEditPoints="1" noAdjustHandles="1" noChangeArrowheads="1" noChangeShapeType="1" noTextEdit="1"/>
+                </p:cNvSpPr>
+                <p:nvPr/>
+              </p:nvSpPr>
+              <p:spPr>
+                <a:xfrm>
+                  <a:off x="3538594" y="2680846"/>
+                  <a:ext cx="227807" cy="371819"/>
+                </a:xfrm>
+                <a:prstGeom prst="rect">
+                  <a:avLst/>
+                </a:prstGeom>
+                <a:blipFill>
+                  <a:blip r:embed="rId3"/>
+                  <a:stretch>
+                    <a:fillRect l="-18919"/>
+                  </a:stretch>
+                </a:blipFill>
+                <a:ln>
+                  <a:noFill/>
+                </a:ln>
+              </p:spPr>
+              <p:txBody>
+                <a:bodyPr/>
+                <a:lstStyle/>
+                <a:p>
+                  <a:r>
+                    <a:rPr lang="en-US">
+                      <a:noFill/>
+                    </a:rPr>
+                    <a:t> </a:t>
+                  </a:r>
+                </a:p>
+              </p:txBody>
+            </p:sp>
+          </mc:Fallback>
+        </mc:AlternateContent>
+      </p:grpSp>
+      <p:cxnSp>
+        <p:nvCxnSpPr>
+          <p:cNvPr id="48" name="Straight Arrow Connector 47"/>
+          <p:cNvCxnSpPr>
+            <a:endCxn id="43" idx="2"/>
+          </p:cNvCxnSpPr>
+          <p:nvPr/>
+        </p:nvCxnSpPr>
+        <p:spPr>
+          <a:xfrm>
+            <a:off x="4051287" y="3879257"/>
+            <a:ext cx="739775" cy="0"/>
+          </a:xfrm>
+          <a:prstGeom prst="straightConnector1">
+            <a:avLst/>
+          </a:prstGeom>
+          <a:ln w="15875">
             <a:solidFill>
               <a:schemeClr val="tx1"/>
             </a:solidFill>
@@ -7914,10 +8366,2770 @@
       </p:cxnSp>
       <p:sp>
         <p:nvSpPr>
-          <p:cNvPr id="89" name="Rectangle 88">
+          <p:cNvPr id="51" name="Rectangle 50"/>
+          <p:cNvSpPr/>
+          <p:nvPr/>
+        </p:nvSpPr>
+        <p:spPr>
+          <a:xfrm>
+            <a:off x="4045572" y="4070392"/>
+            <a:ext cx="1042035" cy="465455"/>
+          </a:xfrm>
+          <a:prstGeom prst="rect">
+            <a:avLst/>
+          </a:prstGeom>
+          <a:noFill/>
+          <a:ln>
+            <a:noFill/>
+          </a:ln>
+        </p:spPr>
+        <p:style>
+          <a:lnRef idx="2">
+            <a:schemeClr val="accent1">
+              <a:shade val="15000"/>
+            </a:schemeClr>
+          </a:lnRef>
+          <a:fillRef idx="1">
+            <a:schemeClr val="accent1"/>
+          </a:fillRef>
+          <a:effectRef idx="0">
+            <a:schemeClr val="accent1"/>
+          </a:effectRef>
+          <a:fontRef idx="minor">
+            <a:schemeClr val="lt1"/>
+          </a:fontRef>
+        </p:style>
+        <p:txBody>
+          <a:bodyPr rtlCol="0" anchor="ctr"/>
+          <a:lstStyle/>
+          <a:p>
+            <a:pPr algn="ctr"/>
+            <a:r>
+              <a:rPr lang="en-US" sz="1400" b="1" dirty="0">
+                <a:solidFill>
+                  <a:schemeClr val="tx1"/>
+                </a:solidFill>
+              </a:rPr>
+              <a:t>B</a:t>
+            </a:r>
+            <a:r>
+              <a:rPr lang="en-US" altLang="zh-CN" sz="1400" b="1" dirty="0">
+                <a:solidFill>
+                  <a:schemeClr val="tx1"/>
+                </a:solidFill>
+              </a:rPr>
+              <a:t>ranching</a:t>
+            </a:r>
+            <a:endParaRPr lang="en-US" sz="1400" b="1" dirty="0">
+              <a:solidFill>
+                <a:schemeClr val="tx1"/>
+              </a:solidFill>
+            </a:endParaRPr>
+          </a:p>
+        </p:txBody>
+      </p:sp>
+      <p:sp>
+        <p:nvSpPr>
+          <p:cNvPr id="43" name="Oval 42"/>
+          <p:cNvSpPr/>
+          <p:nvPr/>
+        </p:nvSpPr>
+        <p:spPr>
+          <a:xfrm>
+            <a:off x="4791062" y="3782737"/>
+            <a:ext cx="194310" cy="192405"/>
+          </a:xfrm>
+          <a:prstGeom prst="ellipse">
+            <a:avLst/>
+          </a:prstGeom>
+          <a:solidFill>
+            <a:srgbClr val="B6D5F9"/>
+          </a:solidFill>
+          <a:ln w="15875"/>
+        </p:spPr>
+        <p:style>
+          <a:lnRef idx="2">
+            <a:schemeClr val="accent1">
+              <a:shade val="15000"/>
+            </a:schemeClr>
+          </a:lnRef>
+          <a:fillRef idx="1">
+            <a:schemeClr val="accent1"/>
+          </a:fillRef>
+          <a:effectRef idx="0">
+            <a:schemeClr val="accent1"/>
+          </a:effectRef>
+          <a:fontRef idx="minor">
+            <a:schemeClr val="lt1"/>
+          </a:fontRef>
+        </p:style>
+        <p:txBody>
+          <a:bodyPr rtlCol="0" anchor="ctr"/>
+          <a:lstStyle/>
+          <a:p>
+            <a:pPr algn="ctr"/>
+            <a:endParaRPr lang="en-US"/>
+          </a:p>
+        </p:txBody>
+      </p:sp>
+      <p:sp>
+        <p:nvSpPr>
+          <p:cNvPr id="45" name="Oval 44"/>
+          <p:cNvSpPr/>
+          <p:nvPr/>
+        </p:nvSpPr>
+        <p:spPr>
+          <a:xfrm>
+            <a:off x="5395582" y="3590967"/>
+            <a:ext cx="194310" cy="192405"/>
+          </a:xfrm>
+          <a:prstGeom prst="ellipse">
+            <a:avLst/>
+          </a:prstGeom>
+          <a:solidFill>
+            <a:srgbClr val="B6D5F9"/>
+          </a:solidFill>
+          <a:ln w="15875"/>
+        </p:spPr>
+        <p:style>
+          <a:lnRef idx="2">
+            <a:schemeClr val="accent1">
+              <a:shade val="15000"/>
+            </a:schemeClr>
+          </a:lnRef>
+          <a:fillRef idx="1">
+            <a:schemeClr val="accent1"/>
+          </a:fillRef>
+          <a:effectRef idx="0">
+            <a:schemeClr val="accent1"/>
+          </a:effectRef>
+          <a:fontRef idx="minor">
+            <a:schemeClr val="lt1"/>
+          </a:fontRef>
+        </p:style>
+        <p:txBody>
+          <a:bodyPr rtlCol="0" anchor="ctr"/>
+          <a:lstStyle/>
+          <a:p>
+            <a:pPr algn="ctr"/>
+            <a:endParaRPr lang="en-US"/>
+          </a:p>
+        </p:txBody>
+      </p:sp>
+      <p:sp>
+        <p:nvSpPr>
+          <p:cNvPr id="46" name="Oval 45"/>
+          <p:cNvSpPr/>
+          <p:nvPr/>
+        </p:nvSpPr>
+        <p:spPr>
+          <a:xfrm>
+            <a:off x="5850242" y="3590967"/>
+            <a:ext cx="194310" cy="192405"/>
+          </a:xfrm>
+          <a:prstGeom prst="ellipse">
+            <a:avLst/>
+          </a:prstGeom>
+          <a:solidFill>
+            <a:srgbClr val="B6D5F9"/>
+          </a:solidFill>
+          <a:ln w="15875"/>
+        </p:spPr>
+        <p:style>
+          <a:lnRef idx="2">
+            <a:schemeClr val="accent1">
+              <a:shade val="15000"/>
+            </a:schemeClr>
+          </a:lnRef>
+          <a:fillRef idx="1">
+            <a:schemeClr val="accent1"/>
+          </a:fillRef>
+          <a:effectRef idx="0">
+            <a:schemeClr val="accent1"/>
+          </a:effectRef>
+          <a:fontRef idx="minor">
+            <a:schemeClr val="lt1"/>
+          </a:fontRef>
+        </p:style>
+        <p:txBody>
+          <a:bodyPr rtlCol="0" anchor="ctr"/>
+          <a:lstStyle/>
+          <a:p>
+            <a:pPr algn="ctr"/>
+            <a:endParaRPr lang="en-US"/>
+          </a:p>
+        </p:txBody>
+      </p:sp>
+      <p:cxnSp>
+        <p:nvCxnSpPr>
+          <p:cNvPr id="23" name="Straight Arrow Connector 22"/>
+          <p:cNvCxnSpPr>
+            <a:endCxn id="24" idx="2"/>
+          </p:cNvCxnSpPr>
+          <p:nvPr/>
+        </p:nvCxnSpPr>
+        <p:spPr>
+          <a:xfrm>
+            <a:off x="4045572" y="4767622"/>
+            <a:ext cx="734060" cy="0"/>
+          </a:xfrm>
+          <a:prstGeom prst="straightConnector1">
+            <a:avLst/>
+          </a:prstGeom>
+          <a:ln w="15875">
+            <a:solidFill>
+              <a:schemeClr val="tx1"/>
+            </a:solidFill>
+            <a:tailEnd type="arrow"/>
+          </a:ln>
+        </p:spPr>
+        <p:style>
+          <a:lnRef idx="1">
+            <a:schemeClr val="accent1"/>
+          </a:lnRef>
+          <a:fillRef idx="0">
+            <a:schemeClr val="accent1"/>
+          </a:fillRef>
+          <a:effectRef idx="0">
+            <a:schemeClr val="accent1"/>
+          </a:effectRef>
+          <a:fontRef idx="minor">
+            <a:schemeClr val="tx1"/>
+          </a:fontRef>
+        </p:style>
+      </p:cxnSp>
+      <p:sp>
+        <p:nvSpPr>
+          <p:cNvPr id="24" name="Oval 23"/>
+          <p:cNvSpPr/>
+          <p:nvPr/>
+        </p:nvSpPr>
+        <p:spPr>
+          <a:xfrm>
+            <a:off x="4779632" y="4671102"/>
+            <a:ext cx="194310" cy="192405"/>
+          </a:xfrm>
+          <a:prstGeom prst="ellipse">
+            <a:avLst/>
+          </a:prstGeom>
+          <a:solidFill>
+            <a:srgbClr val="B6D5F9"/>
+          </a:solidFill>
+          <a:ln w="15875"/>
+        </p:spPr>
+        <p:style>
+          <a:lnRef idx="2">
+            <a:schemeClr val="accent1">
+              <a:shade val="15000"/>
+            </a:schemeClr>
+          </a:lnRef>
+          <a:fillRef idx="1">
+            <a:schemeClr val="accent1"/>
+          </a:fillRef>
+          <a:effectRef idx="0">
+            <a:schemeClr val="accent1"/>
+          </a:effectRef>
+          <a:fontRef idx="minor">
+            <a:schemeClr val="lt1"/>
+          </a:fontRef>
+        </p:style>
+        <p:txBody>
+          <a:bodyPr rtlCol="0" anchor="ctr"/>
+          <a:lstStyle/>
+          <a:p>
+            <a:pPr algn="ctr"/>
+            <a:endParaRPr lang="en-US"/>
+          </a:p>
+        </p:txBody>
+      </p:sp>
+      <p:cxnSp>
+        <p:nvCxnSpPr>
+          <p:cNvPr id="97" name="Straight Arrow Connector 96"/>
+          <p:cNvCxnSpPr>
+            <a:stCxn id="43" idx="6"/>
+            <a:endCxn id="105" idx="2"/>
+          </p:cNvCxnSpPr>
+          <p:nvPr/>
+        </p:nvCxnSpPr>
+        <p:spPr>
+          <a:xfrm>
+            <a:off x="4985372" y="3879257"/>
+            <a:ext cx="414020" cy="182245"/>
+          </a:xfrm>
+          <a:prstGeom prst="straightConnector1">
+            <a:avLst/>
+          </a:prstGeom>
+          <a:ln w="15875">
+            <a:solidFill>
+              <a:schemeClr val="tx1"/>
+            </a:solidFill>
+            <a:tailEnd type="arrow"/>
+          </a:ln>
+        </p:spPr>
+        <p:style>
+          <a:lnRef idx="1">
+            <a:schemeClr val="accent1"/>
+          </a:lnRef>
+          <a:fillRef idx="0">
+            <a:schemeClr val="accent1"/>
+          </a:fillRef>
+          <a:effectRef idx="0">
+            <a:schemeClr val="accent1"/>
+          </a:effectRef>
+          <a:fontRef idx="minor">
+            <a:schemeClr val="tx1"/>
+          </a:fontRef>
+        </p:style>
+      </p:cxnSp>
+      <p:cxnSp>
+        <p:nvCxnSpPr>
+          <p:cNvPr id="99" name="Straight Arrow Connector 98"/>
+          <p:cNvCxnSpPr>
+            <a:stCxn id="43" idx="6"/>
+            <a:endCxn id="45" idx="2"/>
+          </p:cNvCxnSpPr>
+          <p:nvPr/>
+        </p:nvCxnSpPr>
+        <p:spPr>
+          <a:xfrm flipV="1">
+            <a:off x="4985372" y="3686852"/>
+            <a:ext cx="410210" cy="191770"/>
+          </a:xfrm>
+          <a:prstGeom prst="straightConnector1">
+            <a:avLst/>
+          </a:prstGeom>
+          <a:ln w="15875">
+            <a:solidFill>
+              <a:schemeClr val="tx1"/>
+            </a:solidFill>
+            <a:tailEnd type="arrow"/>
+          </a:ln>
+        </p:spPr>
+        <p:style>
+          <a:lnRef idx="1">
+            <a:schemeClr val="accent1"/>
+          </a:lnRef>
+          <a:fillRef idx="0">
+            <a:schemeClr val="accent1"/>
+          </a:fillRef>
+          <a:effectRef idx="0">
+            <a:schemeClr val="accent1"/>
+          </a:effectRef>
+          <a:fontRef idx="minor">
+            <a:schemeClr val="tx1"/>
+          </a:fontRef>
+        </p:style>
+      </p:cxnSp>
+      <p:sp>
+        <p:nvSpPr>
+          <p:cNvPr id="105" name="Oval 104"/>
+          <p:cNvSpPr/>
+          <p:nvPr/>
+        </p:nvSpPr>
+        <p:spPr>
+          <a:xfrm>
+            <a:off x="5399392" y="3964982"/>
+            <a:ext cx="194310" cy="192405"/>
+          </a:xfrm>
+          <a:prstGeom prst="ellipse">
+            <a:avLst/>
+          </a:prstGeom>
+          <a:solidFill>
+            <a:srgbClr val="B6D5F9"/>
+          </a:solidFill>
+          <a:ln w="15875"/>
+        </p:spPr>
+        <p:style>
+          <a:lnRef idx="2">
+            <a:schemeClr val="accent1">
+              <a:shade val="15000"/>
+            </a:schemeClr>
+          </a:lnRef>
+          <a:fillRef idx="1">
+            <a:schemeClr val="accent1"/>
+          </a:fillRef>
+          <a:effectRef idx="0">
+            <a:schemeClr val="accent1"/>
+          </a:effectRef>
+          <a:fontRef idx="minor">
+            <a:schemeClr val="lt1"/>
+          </a:fontRef>
+        </p:style>
+        <p:txBody>
+          <a:bodyPr rtlCol="0" anchor="ctr"/>
+          <a:lstStyle/>
+          <a:p>
+            <a:pPr algn="ctr"/>
+            <a:endParaRPr lang="en-US"/>
+          </a:p>
+        </p:txBody>
+      </p:sp>
+      <p:sp>
+        <p:nvSpPr>
+          <p:cNvPr id="107" name="Oval 106"/>
+          <p:cNvSpPr/>
+          <p:nvPr/>
+        </p:nvSpPr>
+        <p:spPr>
+          <a:xfrm>
+            <a:off x="5854052" y="3964982"/>
+            <a:ext cx="194310" cy="192405"/>
+          </a:xfrm>
+          <a:prstGeom prst="ellipse">
+            <a:avLst/>
+          </a:prstGeom>
+          <a:solidFill>
+            <a:srgbClr val="B6D5F9"/>
+          </a:solidFill>
+          <a:ln w="15875"/>
+        </p:spPr>
+        <p:style>
+          <a:lnRef idx="2">
+            <a:schemeClr val="accent1">
+              <a:shade val="15000"/>
+            </a:schemeClr>
+          </a:lnRef>
+          <a:fillRef idx="1">
+            <a:schemeClr val="accent1"/>
+          </a:fillRef>
+          <a:effectRef idx="0">
+            <a:schemeClr val="accent1"/>
+          </a:effectRef>
+          <a:fontRef idx="minor">
+            <a:schemeClr val="lt1"/>
+          </a:fontRef>
+        </p:style>
+        <p:txBody>
+          <a:bodyPr rtlCol="0" anchor="ctr"/>
+          <a:lstStyle/>
+          <a:p>
+            <a:pPr algn="ctr"/>
+            <a:endParaRPr lang="en-US"/>
+          </a:p>
+        </p:txBody>
+      </p:sp>
+      <p:sp>
+        <p:nvSpPr>
+          <p:cNvPr id="129" name="Oval 128"/>
+          <p:cNvSpPr/>
+          <p:nvPr/>
+        </p:nvSpPr>
+        <p:spPr>
+          <a:xfrm>
+            <a:off x="5384152" y="4478697"/>
+            <a:ext cx="194310" cy="192405"/>
+          </a:xfrm>
+          <a:prstGeom prst="ellipse">
+            <a:avLst/>
+          </a:prstGeom>
+          <a:solidFill>
+            <a:srgbClr val="B6D5F9"/>
+          </a:solidFill>
+          <a:ln w="15875"/>
+        </p:spPr>
+        <p:style>
+          <a:lnRef idx="2">
+            <a:schemeClr val="accent1">
+              <a:shade val="15000"/>
+            </a:schemeClr>
+          </a:lnRef>
+          <a:fillRef idx="1">
+            <a:schemeClr val="accent1"/>
+          </a:fillRef>
+          <a:effectRef idx="0">
+            <a:schemeClr val="accent1"/>
+          </a:effectRef>
+          <a:fontRef idx="minor">
+            <a:schemeClr val="lt1"/>
+          </a:fontRef>
+        </p:style>
+        <p:txBody>
+          <a:bodyPr rtlCol="0" anchor="ctr"/>
+          <a:lstStyle/>
+          <a:p>
+            <a:pPr algn="ctr"/>
+            <a:endParaRPr lang="en-US"/>
+          </a:p>
+        </p:txBody>
+      </p:sp>
+      <p:sp>
+        <p:nvSpPr>
+          <p:cNvPr id="130" name="Oval 129"/>
+          <p:cNvSpPr/>
+          <p:nvPr/>
+        </p:nvSpPr>
+        <p:spPr>
+          <a:xfrm>
+            <a:off x="5838812" y="4478697"/>
+            <a:ext cx="194310" cy="192405"/>
+          </a:xfrm>
+          <a:prstGeom prst="ellipse">
+            <a:avLst/>
+          </a:prstGeom>
+          <a:solidFill>
+            <a:srgbClr val="B6D5F9"/>
+          </a:solidFill>
+          <a:ln w="15875"/>
+        </p:spPr>
+        <p:style>
+          <a:lnRef idx="2">
+            <a:schemeClr val="accent1">
+              <a:shade val="15000"/>
+            </a:schemeClr>
+          </a:lnRef>
+          <a:fillRef idx="1">
+            <a:schemeClr val="accent1"/>
+          </a:fillRef>
+          <a:effectRef idx="0">
+            <a:schemeClr val="accent1"/>
+          </a:effectRef>
+          <a:fontRef idx="minor">
+            <a:schemeClr val="lt1"/>
+          </a:fontRef>
+        </p:style>
+        <p:txBody>
+          <a:bodyPr rtlCol="0" anchor="ctr"/>
+          <a:lstStyle/>
+          <a:p>
+            <a:pPr algn="ctr"/>
+            <a:endParaRPr lang="en-US"/>
+          </a:p>
+        </p:txBody>
+      </p:sp>
+      <p:cxnSp>
+        <p:nvCxnSpPr>
+          <p:cNvPr id="134" name="Straight Arrow Connector 133"/>
+          <p:cNvCxnSpPr>
+            <a:endCxn id="136" idx="2"/>
+          </p:cNvCxnSpPr>
+          <p:nvPr/>
+        </p:nvCxnSpPr>
+        <p:spPr>
+          <a:xfrm>
+            <a:off x="4973942" y="4766987"/>
+            <a:ext cx="414020" cy="182245"/>
+          </a:xfrm>
+          <a:prstGeom prst="straightConnector1">
+            <a:avLst/>
+          </a:prstGeom>
+          <a:ln w="15875">
+            <a:solidFill>
+              <a:schemeClr val="tx1"/>
+            </a:solidFill>
+            <a:tailEnd type="arrow"/>
+          </a:ln>
+        </p:spPr>
+        <p:style>
+          <a:lnRef idx="1">
+            <a:schemeClr val="accent1"/>
+          </a:lnRef>
+          <a:fillRef idx="0">
+            <a:schemeClr val="accent1"/>
+          </a:fillRef>
+          <a:effectRef idx="0">
+            <a:schemeClr val="accent1"/>
+          </a:effectRef>
+          <a:fontRef idx="minor">
+            <a:schemeClr val="tx1"/>
+          </a:fontRef>
+        </p:style>
+      </p:cxnSp>
+      <p:cxnSp>
+        <p:nvCxnSpPr>
+          <p:cNvPr id="135" name="Straight Arrow Connector 134"/>
+          <p:cNvCxnSpPr>
+            <a:endCxn id="129" idx="2"/>
+          </p:cNvCxnSpPr>
+          <p:nvPr/>
+        </p:nvCxnSpPr>
+        <p:spPr>
+          <a:xfrm flipV="1">
+            <a:off x="4973942" y="4575217"/>
+            <a:ext cx="410210" cy="191770"/>
+          </a:xfrm>
+          <a:prstGeom prst="straightConnector1">
+            <a:avLst/>
+          </a:prstGeom>
+          <a:ln w="15875">
+            <a:solidFill>
+              <a:schemeClr val="tx1"/>
+            </a:solidFill>
+            <a:tailEnd type="arrow"/>
+          </a:ln>
+        </p:spPr>
+        <p:style>
+          <a:lnRef idx="1">
+            <a:schemeClr val="accent1"/>
+          </a:lnRef>
+          <a:fillRef idx="0">
+            <a:schemeClr val="accent1"/>
+          </a:fillRef>
+          <a:effectRef idx="0">
+            <a:schemeClr val="accent1"/>
+          </a:effectRef>
+          <a:fontRef idx="minor">
+            <a:schemeClr val="tx1"/>
+          </a:fontRef>
+        </p:style>
+      </p:cxnSp>
+      <p:sp>
+        <p:nvSpPr>
+          <p:cNvPr id="136" name="Oval 135"/>
+          <p:cNvSpPr/>
+          <p:nvPr/>
+        </p:nvSpPr>
+        <p:spPr>
+          <a:xfrm>
+            <a:off x="5387962" y="4853347"/>
+            <a:ext cx="194310" cy="192405"/>
+          </a:xfrm>
+          <a:prstGeom prst="ellipse">
+            <a:avLst/>
+          </a:prstGeom>
+          <a:solidFill>
+            <a:srgbClr val="B6D5F9"/>
+          </a:solidFill>
+          <a:ln w="15875"/>
+        </p:spPr>
+        <p:style>
+          <a:lnRef idx="2">
+            <a:schemeClr val="accent1">
+              <a:shade val="15000"/>
+            </a:schemeClr>
+          </a:lnRef>
+          <a:fillRef idx="1">
+            <a:schemeClr val="accent1"/>
+          </a:fillRef>
+          <a:effectRef idx="0">
+            <a:schemeClr val="accent1"/>
+          </a:effectRef>
+          <a:fontRef idx="minor">
+            <a:schemeClr val="lt1"/>
+          </a:fontRef>
+        </p:style>
+        <p:txBody>
+          <a:bodyPr rtlCol="0" anchor="ctr"/>
+          <a:lstStyle/>
+          <a:p>
+            <a:pPr algn="ctr"/>
+            <a:endParaRPr lang="en-US"/>
+          </a:p>
+        </p:txBody>
+      </p:sp>
+      <p:sp>
+        <p:nvSpPr>
+          <p:cNvPr id="137" name="Oval 136"/>
+          <p:cNvSpPr/>
+          <p:nvPr/>
+        </p:nvSpPr>
+        <p:spPr>
+          <a:xfrm>
+            <a:off x="5842622" y="4853347"/>
+            <a:ext cx="194310" cy="192405"/>
+          </a:xfrm>
+          <a:prstGeom prst="ellipse">
+            <a:avLst/>
+          </a:prstGeom>
+          <a:solidFill>
+            <a:srgbClr val="B6D5F9"/>
+          </a:solidFill>
+          <a:ln w="15875"/>
+        </p:spPr>
+        <p:style>
+          <a:lnRef idx="2">
+            <a:schemeClr val="accent1">
+              <a:shade val="15000"/>
+            </a:schemeClr>
+          </a:lnRef>
+          <a:fillRef idx="1">
+            <a:schemeClr val="accent1"/>
+          </a:fillRef>
+          <a:effectRef idx="0">
+            <a:schemeClr val="accent1"/>
+          </a:effectRef>
+          <a:fontRef idx="minor">
+            <a:schemeClr val="lt1"/>
+          </a:fontRef>
+        </p:style>
+        <p:txBody>
+          <a:bodyPr rtlCol="0" anchor="ctr"/>
+          <a:lstStyle/>
+          <a:p>
+            <a:pPr algn="ctr"/>
+            <a:endParaRPr lang="en-US"/>
+          </a:p>
+        </p:txBody>
+      </p:sp>
+      <p:cxnSp>
+        <p:nvCxnSpPr>
+          <p:cNvPr id="147" name="Straight Arrow Connector 146"/>
+          <p:cNvCxnSpPr/>
+          <p:nvPr/>
+        </p:nvCxnSpPr>
+        <p:spPr>
+          <a:xfrm flipV="1">
+            <a:off x="6048997" y="3685582"/>
+            <a:ext cx="1189990" cy="1905"/>
+          </a:xfrm>
+          <a:prstGeom prst="straightConnector1">
+            <a:avLst/>
+          </a:prstGeom>
+          <a:ln w="15875">
+            <a:solidFill>
+              <a:schemeClr val="tx1"/>
+            </a:solidFill>
+            <a:tailEnd type="arrow"/>
+          </a:ln>
+        </p:spPr>
+        <p:style>
+          <a:lnRef idx="1">
+            <a:schemeClr val="accent1"/>
+          </a:lnRef>
+          <a:fillRef idx="0">
+            <a:schemeClr val="accent1"/>
+          </a:fillRef>
+          <a:effectRef idx="0">
+            <a:schemeClr val="accent1"/>
+          </a:effectRef>
+          <a:fontRef idx="minor">
+            <a:schemeClr val="tx1"/>
+          </a:fontRef>
+        </p:style>
+      </p:cxnSp>
+      <p:cxnSp>
+        <p:nvCxnSpPr>
+          <p:cNvPr id="151" name="Straight Arrow Connector 150"/>
+          <p:cNvCxnSpPr>
+            <a:cxnSpLocks/>
+          </p:cNvCxnSpPr>
+          <p:nvPr/>
+        </p:nvCxnSpPr>
+        <p:spPr>
+          <a:xfrm flipV="1">
+            <a:off x="6048997" y="4057692"/>
+            <a:ext cx="428625" cy="1270"/>
+          </a:xfrm>
+          <a:prstGeom prst="straightConnector1">
+            <a:avLst/>
+          </a:prstGeom>
+          <a:ln w="15875">
+            <a:solidFill>
+              <a:schemeClr val="tx1"/>
+            </a:solidFill>
+            <a:tailEnd type="arrow"/>
+          </a:ln>
+        </p:spPr>
+        <p:style>
+          <a:lnRef idx="1">
+            <a:schemeClr val="accent1"/>
+          </a:lnRef>
+          <a:fillRef idx="0">
+            <a:schemeClr val="accent1"/>
+          </a:fillRef>
+          <a:effectRef idx="0">
+            <a:schemeClr val="accent1"/>
+          </a:effectRef>
+          <a:fontRef idx="minor">
+            <a:schemeClr val="tx1"/>
+          </a:fontRef>
+        </p:style>
+      </p:cxnSp>
+      <p:cxnSp>
+        <p:nvCxnSpPr>
+          <p:cNvPr id="157" name="Straight Arrow Connector 156"/>
+          <p:cNvCxnSpPr>
+            <a:cxnSpLocks/>
+            <a:stCxn id="137" idx="6"/>
+          </p:cNvCxnSpPr>
+          <p:nvPr/>
+        </p:nvCxnSpPr>
+        <p:spPr>
+          <a:xfrm flipV="1">
+            <a:off x="6036932" y="4940977"/>
+            <a:ext cx="440690" cy="8890"/>
+          </a:xfrm>
+          <a:prstGeom prst="straightConnector1">
+            <a:avLst/>
+          </a:prstGeom>
+          <a:ln w="15875">
+            <a:solidFill>
+              <a:schemeClr val="tx1"/>
+            </a:solidFill>
+            <a:tailEnd type="arrow"/>
+          </a:ln>
+        </p:spPr>
+        <p:style>
+          <a:lnRef idx="1">
+            <a:schemeClr val="accent1"/>
+          </a:lnRef>
+          <a:fillRef idx="0">
+            <a:schemeClr val="accent1"/>
+          </a:fillRef>
+          <a:effectRef idx="0">
+            <a:schemeClr val="accent1"/>
+          </a:effectRef>
+          <a:fontRef idx="minor">
+            <a:schemeClr val="tx1"/>
+          </a:fontRef>
+        </p:style>
+      </p:cxnSp>
+      <p:cxnSp>
+        <p:nvCxnSpPr>
+          <p:cNvPr id="163" name="Straight Connector 162"/>
+          <p:cNvCxnSpPr>
+            <a:cxnSpLocks/>
+            <a:stCxn id="130" idx="6"/>
+          </p:cNvCxnSpPr>
+          <p:nvPr/>
+        </p:nvCxnSpPr>
+        <p:spPr>
+          <a:xfrm>
+            <a:off x="6033122" y="4574900"/>
+            <a:ext cx="832166" cy="317"/>
+          </a:xfrm>
+          <a:prstGeom prst="line">
+            <a:avLst/>
+          </a:prstGeom>
+          <a:ln w="15875">
+            <a:solidFill>
+              <a:schemeClr val="tx1"/>
+            </a:solidFill>
+          </a:ln>
+        </p:spPr>
+        <p:style>
+          <a:lnRef idx="1">
+            <a:schemeClr val="accent1"/>
+          </a:lnRef>
+          <a:fillRef idx="0">
+            <a:schemeClr val="accent1"/>
+          </a:fillRef>
+          <a:effectRef idx="0">
+            <a:schemeClr val="accent1"/>
+          </a:effectRef>
+          <a:fontRef idx="minor">
+            <a:schemeClr val="tx1"/>
+          </a:fontRef>
+        </p:style>
+      </p:cxnSp>
+      <p:cxnSp>
+        <p:nvCxnSpPr>
+          <p:cNvPr id="167" name="Straight Connector 166"/>
+          <p:cNvCxnSpPr>
+            <a:cxnSpLocks/>
+          </p:cNvCxnSpPr>
+          <p:nvPr/>
+        </p:nvCxnSpPr>
+        <p:spPr>
+          <a:xfrm flipV="1">
+            <a:off x="6865288" y="4050707"/>
+            <a:ext cx="0" cy="524193"/>
+          </a:xfrm>
+          <a:prstGeom prst="line">
+            <a:avLst/>
+          </a:prstGeom>
+          <a:ln w="15875">
+            <a:solidFill>
+              <a:schemeClr val="tx1"/>
+            </a:solidFill>
+          </a:ln>
+        </p:spPr>
+        <p:style>
+          <a:lnRef idx="1">
+            <a:schemeClr val="accent1"/>
+          </a:lnRef>
+          <a:fillRef idx="0">
+            <a:schemeClr val="accent1"/>
+          </a:fillRef>
+          <a:effectRef idx="0">
+            <a:schemeClr val="accent1"/>
+          </a:effectRef>
+          <a:fontRef idx="minor">
+            <a:schemeClr val="tx1"/>
+          </a:fontRef>
+        </p:style>
+      </p:cxnSp>
+      <p:cxnSp>
+        <p:nvCxnSpPr>
+          <p:cNvPr id="170" name="Straight Arrow Connector 169"/>
+          <p:cNvCxnSpPr>
+            <a:cxnSpLocks/>
+          </p:cNvCxnSpPr>
+          <p:nvPr/>
+        </p:nvCxnSpPr>
+        <p:spPr>
+          <a:xfrm>
+            <a:off x="6865288" y="4050707"/>
+            <a:ext cx="374969" cy="0"/>
+          </a:xfrm>
+          <a:prstGeom prst="straightConnector1">
+            <a:avLst/>
+          </a:prstGeom>
+          <a:ln w="15875">
+            <a:solidFill>
+              <a:schemeClr val="tx1"/>
+            </a:solidFill>
+            <a:tailEnd type="arrow"/>
+          </a:ln>
+        </p:spPr>
+        <p:style>
+          <a:lnRef idx="1">
+            <a:schemeClr val="accent1"/>
+          </a:lnRef>
+          <a:fillRef idx="0">
+            <a:schemeClr val="accent1"/>
+          </a:fillRef>
+          <a:effectRef idx="0">
+            <a:schemeClr val="accent1"/>
+          </a:effectRef>
+          <a:fontRef idx="minor">
+            <a:schemeClr val="tx1"/>
+          </a:fontRef>
+        </p:style>
+      </p:cxnSp>
+      <p:sp>
+        <p:nvSpPr>
+          <p:cNvPr id="173" name="Rectangle: Rounded Corners 172"/>
+          <p:cNvSpPr/>
+          <p:nvPr/>
+        </p:nvSpPr>
+        <p:spPr>
+          <a:xfrm>
+            <a:off x="7241527" y="3509052"/>
+            <a:ext cx="1056640" cy="699770"/>
+          </a:xfrm>
+          <a:prstGeom prst="roundRect">
+            <a:avLst>
+              <a:gd name="adj" fmla="val 12775"/>
+            </a:avLst>
+          </a:prstGeom>
+          <a:solidFill>
+            <a:srgbClr val="B6D5F9"/>
+          </a:solidFill>
+          <a:ln>
+            <a:solidFill>
+              <a:schemeClr val="tx1"/>
+            </a:solidFill>
+          </a:ln>
+        </p:spPr>
+        <p:style>
+          <a:lnRef idx="2">
+            <a:schemeClr val="accent1">
+              <a:shade val="15000"/>
+            </a:schemeClr>
+          </a:lnRef>
+          <a:fillRef idx="1">
+            <a:schemeClr val="accent1"/>
+          </a:fillRef>
+          <a:effectRef idx="0">
+            <a:schemeClr val="accent1"/>
+          </a:effectRef>
+          <a:fontRef idx="minor">
+            <a:schemeClr val="lt1"/>
+          </a:fontRef>
+        </p:style>
+        <p:txBody>
+          <a:bodyPr rtlCol="0" anchor="ctr"/>
+          <a:lstStyle/>
+          <a:p>
+            <a:pPr algn="ctr"/>
+            <a:r>
+              <a:rPr lang="en-US" sz="1400" b="1" dirty="0">
+                <a:solidFill>
+                  <a:schemeClr val="tx1"/>
+                </a:solidFill>
+              </a:rPr>
+              <a:t>Weight</a:t>
+            </a:r>
+          </a:p>
+        </p:txBody>
+      </p:sp>
+      <p:sp>
+        <p:nvSpPr>
+          <p:cNvPr id="175" name="Rectangle: Rounded Corners 174"/>
+          <p:cNvSpPr/>
+          <p:nvPr/>
+        </p:nvSpPr>
+        <p:spPr>
+          <a:xfrm>
+            <a:off x="7241527" y="4436787"/>
+            <a:ext cx="1056640" cy="699770"/>
+          </a:xfrm>
+          <a:prstGeom prst="roundRect">
+            <a:avLst>
+              <a:gd name="adj" fmla="val 12775"/>
+            </a:avLst>
+          </a:prstGeom>
+          <a:solidFill>
+            <a:srgbClr val="B6D5F9"/>
+          </a:solidFill>
+          <a:ln>
+            <a:solidFill>
+              <a:schemeClr val="tx1"/>
+            </a:solidFill>
+          </a:ln>
+        </p:spPr>
+        <p:style>
+          <a:lnRef idx="2">
+            <a:schemeClr val="accent1">
+              <a:shade val="15000"/>
+            </a:schemeClr>
+          </a:lnRef>
+          <a:fillRef idx="1">
+            <a:schemeClr val="accent1"/>
+          </a:fillRef>
+          <a:effectRef idx="0">
+            <a:schemeClr val="accent1"/>
+          </a:effectRef>
+          <a:fontRef idx="minor">
+            <a:schemeClr val="lt1"/>
+          </a:fontRef>
+        </p:style>
+        <p:txBody>
+          <a:bodyPr rtlCol="0" anchor="ctr"/>
+          <a:lstStyle/>
+          <a:p>
+            <a:pPr algn="ctr"/>
+            <a:r>
+              <a:rPr lang="en-US" sz="1400" b="1" dirty="0">
+                <a:solidFill>
+                  <a:schemeClr val="tx1"/>
+                </a:solidFill>
+              </a:rPr>
+              <a:t>Supervised Fine-Tune</a:t>
+            </a:r>
+          </a:p>
+        </p:txBody>
+      </p:sp>
+      <p:cxnSp>
+        <p:nvCxnSpPr>
+          <p:cNvPr id="176" name="Straight Arrow Connector 175"/>
+          <p:cNvCxnSpPr>
+            <a:stCxn id="173" idx="2"/>
+            <a:endCxn id="175" idx="0"/>
+          </p:cNvCxnSpPr>
+          <p:nvPr/>
+        </p:nvCxnSpPr>
+        <p:spPr>
+          <a:xfrm>
+            <a:off x="7769847" y="4208822"/>
+            <a:ext cx="0" cy="227965"/>
+          </a:xfrm>
+          <a:prstGeom prst="straightConnector1">
+            <a:avLst/>
+          </a:prstGeom>
+          <a:ln w="15875">
+            <a:solidFill>
+              <a:schemeClr val="tx1"/>
+            </a:solidFill>
+            <a:tailEnd type="arrow"/>
+          </a:ln>
+        </p:spPr>
+        <p:style>
+          <a:lnRef idx="1">
+            <a:schemeClr val="accent1"/>
+          </a:lnRef>
+          <a:fillRef idx="0">
+            <a:schemeClr val="accent1"/>
+          </a:fillRef>
+          <a:effectRef idx="0">
+            <a:schemeClr val="accent1"/>
+          </a:effectRef>
+          <a:fontRef idx="minor">
+            <a:schemeClr val="tx1"/>
+          </a:fontRef>
+        </p:style>
+      </p:cxnSp>
+      <p:sp>
+        <p:nvSpPr>
+          <p:cNvPr id="3" name="Oval 44"/>
+          <p:cNvSpPr/>
+          <p:nvPr/>
+        </p:nvSpPr>
+        <p:spPr>
+          <a:xfrm>
+            <a:off x="3366469" y="2056884"/>
+            <a:ext cx="194310" cy="192405"/>
+          </a:xfrm>
+          <a:prstGeom prst="ellipse">
+            <a:avLst/>
+          </a:prstGeom>
+          <a:solidFill>
+            <a:srgbClr val="B6D5F9"/>
+          </a:solidFill>
+          <a:ln w="15875"/>
+        </p:spPr>
+        <p:style>
+          <a:lnRef idx="2">
+            <a:schemeClr val="accent1">
+              <a:shade val="15000"/>
+            </a:schemeClr>
+          </a:lnRef>
+          <a:fillRef idx="1">
+            <a:schemeClr val="accent1"/>
+          </a:fillRef>
+          <a:effectRef idx="0">
+            <a:schemeClr val="accent1"/>
+          </a:effectRef>
+          <a:fontRef idx="minor">
+            <a:schemeClr val="lt1"/>
+          </a:fontRef>
+        </p:style>
+        <p:txBody>
+          <a:bodyPr rtlCol="0" anchor="ctr"/>
+          <a:lstStyle/>
+          <a:p>
+            <a:pPr algn="ctr"/>
+            <a:endParaRPr lang="en-US"/>
+          </a:p>
+        </p:txBody>
+      </p:sp>
+      <p:sp>
+        <p:nvSpPr>
+          <p:cNvPr id="4" name="Oval 45"/>
+          <p:cNvSpPr/>
+          <p:nvPr/>
+        </p:nvSpPr>
+        <p:spPr>
+          <a:xfrm>
+            <a:off x="4655519" y="2059424"/>
+            <a:ext cx="194310" cy="192405"/>
+          </a:xfrm>
+          <a:prstGeom prst="ellipse">
+            <a:avLst/>
+          </a:prstGeom>
+          <a:solidFill>
+            <a:srgbClr val="B6D5F9"/>
+          </a:solidFill>
+          <a:ln w="15875"/>
+        </p:spPr>
+        <p:style>
+          <a:lnRef idx="2">
+            <a:schemeClr val="accent1">
+              <a:shade val="15000"/>
+            </a:schemeClr>
+          </a:lnRef>
+          <a:fillRef idx="1">
+            <a:schemeClr val="accent1"/>
+          </a:fillRef>
+          <a:effectRef idx="0">
+            <a:schemeClr val="accent1"/>
+          </a:effectRef>
+          <a:fontRef idx="minor">
+            <a:schemeClr val="lt1"/>
+          </a:fontRef>
+        </p:style>
+        <p:txBody>
+          <a:bodyPr rtlCol="0" anchor="ctr"/>
+          <a:lstStyle/>
+          <a:p>
+            <a:pPr algn="ctr"/>
+            <a:endParaRPr lang="en-US"/>
+          </a:p>
+        </p:txBody>
+      </p:sp>
+      <p:pic>
+        <p:nvPicPr>
+          <p:cNvPr id="5" name="Picture 46"/>
+          <p:cNvPicPr>
+            <a:picLocks noChangeAspect="1"/>
+          </p:cNvPicPr>
+          <p:nvPr/>
+        </p:nvPicPr>
+        <p:blipFill>
+          <a:blip r:embed="rId4">
+            <a:extLst>
+              <a:ext uri="{BEBA8EAE-BF5A-486C-A8C5-ECC9F3942E4B}">
+                <a14:imgProps xmlns:a14="http://schemas.microsoft.com/office/drawing/2010/main">
+                  <a14:imgLayer r:embed="rId5">
+                    <a14:imgEffect>
+                      <a14:backgroundRemoval t="16212" b="90690" l="16437" r="90715">
+                        <a14:foregroundMark x1="18841" y1="56061" x2="18841" y2="56061"/>
+                        <a14:foregroundMark x1="78261" y1="57576" x2="78261" y2="57576"/>
+                      </a14:backgroundRemoval>
+                    </a14:imgEffect>
+                  </a14:imgLayer>
+                </a14:imgProps>
+              </a:ext>
+            </a:extLst>
+          </a:blip>
+          <a:srcRect l="7153" t="6902" b="-1"/>
+          <a:stretch>
+            <a:fillRect/>
+          </a:stretch>
+        </p:blipFill>
+        <p:spPr>
+          <a:xfrm>
+            <a:off x="4438349" y="2110224"/>
+            <a:ext cx="180340" cy="85725"/>
+          </a:xfrm>
+          <a:prstGeom prst="rect">
+            <a:avLst/>
+          </a:prstGeom>
+        </p:spPr>
+      </p:pic>
+      <p:sp>
+        <p:nvSpPr>
+          <p:cNvPr id="6" name="Rectangle: Rounded Corners 57"/>
+          <p:cNvSpPr/>
+          <p:nvPr/>
+        </p:nvSpPr>
+        <p:spPr>
+          <a:xfrm>
+            <a:off x="2004048" y="2246749"/>
+            <a:ext cx="830292" cy="549275"/>
+          </a:xfrm>
+          <a:prstGeom prst="roundRect">
+            <a:avLst>
+              <a:gd name="adj" fmla="val 12775"/>
+            </a:avLst>
+          </a:prstGeom>
+          <a:solidFill>
+            <a:srgbClr val="B6D5F9"/>
+          </a:solidFill>
+          <a:ln>
+            <a:solidFill>
+              <a:schemeClr val="tx1"/>
+            </a:solidFill>
+          </a:ln>
+        </p:spPr>
+        <p:style>
+          <a:lnRef idx="2">
+            <a:schemeClr val="accent1">
+              <a:shade val="15000"/>
+            </a:schemeClr>
+          </a:lnRef>
+          <a:fillRef idx="1">
+            <a:schemeClr val="accent1"/>
+          </a:fillRef>
+          <a:effectRef idx="0">
+            <a:schemeClr val="accent1"/>
+          </a:effectRef>
+          <a:fontRef idx="minor">
+            <a:schemeClr val="lt1"/>
+          </a:fontRef>
+        </p:style>
+        <p:txBody>
+          <a:bodyPr rtlCol="0" anchor="ctr"/>
+          <a:lstStyle/>
+          <a:p>
+            <a:pPr algn="ctr"/>
+            <a:r>
+              <a:rPr lang="en-US" sz="1400" b="1" dirty="0">
+                <a:solidFill>
+                  <a:schemeClr val="tx1"/>
+                </a:solidFill>
+              </a:rPr>
+              <a:t>Rollout</a:t>
+            </a:r>
+          </a:p>
+        </p:txBody>
+      </p:sp>
+      <p:cxnSp>
+        <p:nvCxnSpPr>
+          <p:cNvPr id="8" name="Straight Arrow Connector 51"/>
+          <p:cNvCxnSpPr>
+            <a:cxnSpLocks/>
+            <a:stCxn id="6" idx="3"/>
+            <a:endCxn id="3" idx="2"/>
+          </p:cNvCxnSpPr>
+          <p:nvPr/>
+        </p:nvCxnSpPr>
+        <p:spPr>
+          <a:xfrm flipV="1">
+            <a:off x="2834340" y="2153087"/>
+            <a:ext cx="532129" cy="368300"/>
+          </a:xfrm>
+          <a:prstGeom prst="straightConnector1">
+            <a:avLst/>
+          </a:prstGeom>
+          <a:ln w="15875">
+            <a:solidFill>
+              <a:schemeClr val="tx1"/>
+            </a:solidFill>
+            <a:tailEnd type="arrow"/>
+          </a:ln>
+        </p:spPr>
+        <p:style>
+          <a:lnRef idx="1">
+            <a:schemeClr val="accent1"/>
+          </a:lnRef>
+          <a:fillRef idx="0">
+            <a:schemeClr val="accent1"/>
+          </a:fillRef>
+          <a:effectRef idx="0">
+            <a:schemeClr val="accent1"/>
+          </a:effectRef>
+          <a:fontRef idx="minor">
+            <a:schemeClr val="tx1"/>
+          </a:fontRef>
+        </p:style>
+      </p:cxnSp>
+      <p:cxnSp>
+        <p:nvCxnSpPr>
+          <p:cNvPr id="9" name="Straight Arrow Connector 52"/>
+          <p:cNvCxnSpPr>
+            <a:cxnSpLocks/>
+            <a:stCxn id="6" idx="3"/>
+            <a:endCxn id="12" idx="2"/>
+          </p:cNvCxnSpPr>
+          <p:nvPr/>
+        </p:nvCxnSpPr>
+        <p:spPr>
+          <a:xfrm>
+            <a:off x="2834340" y="2521387"/>
+            <a:ext cx="532129" cy="3175"/>
+          </a:xfrm>
+          <a:prstGeom prst="straightConnector1">
+            <a:avLst/>
+          </a:prstGeom>
+          <a:ln w="15875">
+            <a:solidFill>
+              <a:schemeClr val="tx1"/>
+            </a:solidFill>
+            <a:tailEnd type="arrow"/>
+          </a:ln>
+        </p:spPr>
+        <p:style>
+          <a:lnRef idx="1">
+            <a:schemeClr val="accent1"/>
+          </a:lnRef>
+          <a:fillRef idx="0">
+            <a:schemeClr val="accent1"/>
+          </a:fillRef>
+          <a:effectRef idx="0">
+            <a:schemeClr val="accent1"/>
+          </a:effectRef>
+          <a:fontRef idx="minor">
+            <a:schemeClr val="tx1"/>
+          </a:fontRef>
+        </p:style>
+      </p:cxnSp>
+      <p:cxnSp>
+        <p:nvCxnSpPr>
+          <p:cNvPr id="10" name="Straight Arrow Connector 53"/>
+          <p:cNvCxnSpPr>
+            <a:cxnSpLocks/>
+            <a:stCxn id="6" idx="3"/>
+            <a:endCxn id="15" idx="2"/>
+          </p:cNvCxnSpPr>
+          <p:nvPr/>
+        </p:nvCxnSpPr>
+        <p:spPr>
+          <a:xfrm>
+            <a:off x="2834340" y="2521387"/>
+            <a:ext cx="532129" cy="381000"/>
+          </a:xfrm>
+          <a:prstGeom prst="straightConnector1">
+            <a:avLst/>
+          </a:prstGeom>
+          <a:ln w="15875">
+            <a:solidFill>
+              <a:schemeClr val="tx1"/>
+            </a:solidFill>
+            <a:tailEnd type="arrow"/>
+          </a:ln>
+        </p:spPr>
+        <p:style>
+          <a:lnRef idx="1">
+            <a:schemeClr val="accent1"/>
+          </a:lnRef>
+          <a:fillRef idx="0">
+            <a:schemeClr val="accent1"/>
+          </a:fillRef>
+          <a:effectRef idx="0">
+            <a:schemeClr val="accent1"/>
+          </a:effectRef>
+          <a:fontRef idx="minor">
+            <a:schemeClr val="tx1"/>
+          </a:fontRef>
+        </p:style>
+      </p:cxnSp>
+      <p:sp>
+        <p:nvSpPr>
+          <p:cNvPr id="12" name="Oval 44"/>
+          <p:cNvSpPr/>
+          <p:nvPr/>
+        </p:nvSpPr>
+        <p:spPr>
+          <a:xfrm>
+            <a:off x="3366469" y="2428359"/>
+            <a:ext cx="194310" cy="192405"/>
+          </a:xfrm>
+          <a:prstGeom prst="ellipse">
+            <a:avLst/>
+          </a:prstGeom>
+          <a:solidFill>
+            <a:srgbClr val="B6D5F9"/>
+          </a:solidFill>
+          <a:ln w="15875"/>
+        </p:spPr>
+        <p:style>
+          <a:lnRef idx="2">
+            <a:schemeClr val="accent1">
+              <a:shade val="15000"/>
+            </a:schemeClr>
+          </a:lnRef>
+          <a:fillRef idx="1">
+            <a:schemeClr val="accent1"/>
+          </a:fillRef>
+          <a:effectRef idx="0">
+            <a:schemeClr val="accent1"/>
+          </a:effectRef>
+          <a:fontRef idx="minor">
+            <a:schemeClr val="lt1"/>
+          </a:fontRef>
+        </p:style>
+        <p:txBody>
+          <a:bodyPr rtlCol="0" anchor="ctr"/>
+          <a:lstStyle/>
+          <a:p>
+            <a:pPr algn="ctr"/>
+            <a:endParaRPr lang="en-US"/>
+          </a:p>
+        </p:txBody>
+      </p:sp>
+      <p:sp>
+        <p:nvSpPr>
+          <p:cNvPr id="13" name="Oval 45"/>
+          <p:cNvSpPr/>
+          <p:nvPr/>
+        </p:nvSpPr>
+        <p:spPr>
+          <a:xfrm>
+            <a:off x="4655519" y="2430899"/>
+            <a:ext cx="194310" cy="192405"/>
+          </a:xfrm>
+          <a:prstGeom prst="ellipse">
+            <a:avLst/>
+          </a:prstGeom>
+          <a:solidFill>
+            <a:srgbClr val="B6D5F9"/>
+          </a:solidFill>
+          <a:ln w="15875"/>
+        </p:spPr>
+        <p:style>
+          <a:lnRef idx="2">
+            <a:schemeClr val="accent1">
+              <a:shade val="15000"/>
+            </a:schemeClr>
+          </a:lnRef>
+          <a:fillRef idx="1">
+            <a:schemeClr val="accent1"/>
+          </a:fillRef>
+          <a:effectRef idx="0">
+            <a:schemeClr val="accent1"/>
+          </a:effectRef>
+          <a:fontRef idx="minor">
+            <a:schemeClr val="lt1"/>
+          </a:fontRef>
+        </p:style>
+        <p:txBody>
+          <a:bodyPr rtlCol="0" anchor="ctr"/>
+          <a:lstStyle/>
+          <a:p>
+            <a:pPr algn="ctr"/>
+            <a:endParaRPr lang="en-US"/>
+          </a:p>
+        </p:txBody>
+      </p:sp>
+      <p:sp>
+        <p:nvSpPr>
+          <p:cNvPr id="15" name="Oval 44"/>
+          <p:cNvSpPr/>
+          <p:nvPr/>
+        </p:nvSpPr>
+        <p:spPr>
+          <a:xfrm>
+            <a:off x="3366469" y="2806184"/>
+            <a:ext cx="194310" cy="192405"/>
+          </a:xfrm>
+          <a:prstGeom prst="ellipse">
+            <a:avLst/>
+          </a:prstGeom>
+          <a:solidFill>
+            <a:srgbClr val="B6D5F9"/>
+          </a:solidFill>
+          <a:ln w="15875"/>
+        </p:spPr>
+        <p:style>
+          <a:lnRef idx="2">
+            <a:schemeClr val="accent1">
+              <a:shade val="15000"/>
+            </a:schemeClr>
+          </a:lnRef>
+          <a:fillRef idx="1">
+            <a:schemeClr val="accent1"/>
+          </a:fillRef>
+          <a:effectRef idx="0">
+            <a:schemeClr val="accent1"/>
+          </a:effectRef>
+          <a:fontRef idx="minor">
+            <a:schemeClr val="lt1"/>
+          </a:fontRef>
+        </p:style>
+        <p:txBody>
+          <a:bodyPr rtlCol="0" anchor="ctr"/>
+          <a:lstStyle/>
+          <a:p>
+            <a:pPr algn="ctr"/>
+            <a:endParaRPr lang="en-US"/>
+          </a:p>
+        </p:txBody>
+      </p:sp>
+      <p:sp>
+        <p:nvSpPr>
+          <p:cNvPr id="16" name="Oval 45"/>
+          <p:cNvSpPr/>
+          <p:nvPr/>
+        </p:nvSpPr>
+        <p:spPr>
+          <a:xfrm>
+            <a:off x="4655519" y="2808724"/>
+            <a:ext cx="194310" cy="192405"/>
+          </a:xfrm>
+          <a:prstGeom prst="ellipse">
+            <a:avLst/>
+          </a:prstGeom>
+          <a:solidFill>
+            <a:srgbClr val="B6D5F9"/>
+          </a:solidFill>
+          <a:ln w="15875"/>
+        </p:spPr>
+        <p:style>
+          <a:lnRef idx="2">
+            <a:schemeClr val="accent1">
+              <a:shade val="15000"/>
+            </a:schemeClr>
+          </a:lnRef>
+          <a:fillRef idx="1">
+            <a:schemeClr val="accent1"/>
+          </a:fillRef>
+          <a:effectRef idx="0">
+            <a:schemeClr val="accent1"/>
+          </a:effectRef>
+          <a:fontRef idx="minor">
+            <a:schemeClr val="lt1"/>
+          </a:fontRef>
+        </p:style>
+        <p:txBody>
+          <a:bodyPr rtlCol="0" anchor="ctr"/>
+          <a:lstStyle/>
+          <a:p>
+            <a:pPr algn="ctr"/>
+            <a:endParaRPr lang="en-US"/>
+          </a:p>
+        </p:txBody>
+      </p:sp>
+      <p:cxnSp>
+        <p:nvCxnSpPr>
+          <p:cNvPr id="44" name="Straight Connector 43"/>
+          <p:cNvCxnSpPr>
+            <a:stCxn id="3" idx="6"/>
+            <a:endCxn id="21" idx="2"/>
+          </p:cNvCxnSpPr>
+          <p:nvPr/>
+        </p:nvCxnSpPr>
+        <p:spPr>
+          <a:xfrm flipV="1">
+            <a:off x="3560843" y="2152477"/>
+            <a:ext cx="226695" cy="635"/>
+          </a:xfrm>
+          <a:prstGeom prst="line">
+            <a:avLst/>
+          </a:prstGeom>
+          <a:ln w="15875">
+            <a:solidFill>
+              <a:schemeClr val="tx1"/>
+            </a:solidFill>
+          </a:ln>
+        </p:spPr>
+        <p:style>
+          <a:lnRef idx="1">
+            <a:schemeClr val="accent1"/>
+          </a:lnRef>
+          <a:fillRef idx="0">
+            <a:schemeClr val="accent1"/>
+          </a:fillRef>
+          <a:effectRef idx="0">
+            <a:schemeClr val="accent1"/>
+          </a:effectRef>
+          <a:fontRef idx="minor">
+            <a:schemeClr val="tx1"/>
+          </a:fontRef>
+        </p:style>
+      </p:cxnSp>
+      <p:sp>
+        <p:nvSpPr>
+          <p:cNvPr id="21" name="Oval 44"/>
+          <p:cNvSpPr/>
+          <p:nvPr/>
+        </p:nvSpPr>
+        <p:spPr>
+          <a:xfrm>
+            <a:off x="3787606" y="2056883"/>
+            <a:ext cx="194414" cy="192457"/>
+          </a:xfrm>
+          <a:prstGeom prst="ellipse">
+            <a:avLst/>
+          </a:prstGeom>
+          <a:solidFill>
+            <a:srgbClr val="B6D5F9"/>
+          </a:solidFill>
+          <a:ln w="15875"/>
+        </p:spPr>
+        <p:style>
+          <a:lnRef idx="2">
+            <a:schemeClr val="accent1">
+              <a:shade val="15000"/>
+            </a:schemeClr>
+          </a:lnRef>
+          <a:fillRef idx="1">
+            <a:schemeClr val="accent1"/>
+          </a:fillRef>
+          <a:effectRef idx="0">
+            <a:schemeClr val="accent1"/>
+          </a:effectRef>
+          <a:fontRef idx="minor">
+            <a:schemeClr val="lt1"/>
+          </a:fontRef>
+        </p:style>
+        <p:txBody>
+          <a:bodyPr rtlCol="0" anchor="ctr"/>
+          <a:lstStyle/>
+          <a:p>
+            <a:pPr algn="ctr"/>
+            <a:endParaRPr lang="en-US"/>
+          </a:p>
+        </p:txBody>
+      </p:sp>
+      <p:cxnSp>
+        <p:nvCxnSpPr>
+          <p:cNvPr id="25" name="Straight Connector 24"/>
+          <p:cNvCxnSpPr/>
+          <p:nvPr/>
+        </p:nvCxnSpPr>
+        <p:spPr>
+          <a:xfrm>
+            <a:off x="3567162" y="2527311"/>
+            <a:ext cx="221303" cy="0"/>
+          </a:xfrm>
+          <a:prstGeom prst="line">
+            <a:avLst/>
+          </a:prstGeom>
+          <a:ln w="15875">
+            <a:solidFill>
+              <a:schemeClr val="tx1"/>
+            </a:solidFill>
+          </a:ln>
+        </p:spPr>
+        <p:style>
+          <a:lnRef idx="1">
+            <a:schemeClr val="accent1"/>
+          </a:lnRef>
+          <a:fillRef idx="0">
+            <a:schemeClr val="accent1"/>
+          </a:fillRef>
+          <a:effectRef idx="0">
+            <a:schemeClr val="accent1"/>
+          </a:effectRef>
+          <a:fontRef idx="minor">
+            <a:schemeClr val="tx1"/>
+          </a:fontRef>
+        </p:style>
+      </p:cxnSp>
+      <p:sp>
+        <p:nvSpPr>
+          <p:cNvPr id="26" name="Oval 25"/>
+          <p:cNvSpPr/>
+          <p:nvPr/>
+        </p:nvSpPr>
+        <p:spPr>
+          <a:xfrm>
+            <a:off x="3787576" y="2431082"/>
+            <a:ext cx="194414" cy="192457"/>
+          </a:xfrm>
+          <a:prstGeom prst="ellipse">
+            <a:avLst/>
+          </a:prstGeom>
+          <a:solidFill>
+            <a:srgbClr val="B6D5F9"/>
+          </a:solidFill>
+          <a:ln w="15875"/>
+        </p:spPr>
+        <p:style>
+          <a:lnRef idx="2">
+            <a:schemeClr val="accent1">
+              <a:shade val="15000"/>
+            </a:schemeClr>
+          </a:lnRef>
+          <a:fillRef idx="1">
+            <a:schemeClr val="accent1"/>
+          </a:fillRef>
+          <a:effectRef idx="0">
+            <a:schemeClr val="accent1"/>
+          </a:effectRef>
+          <a:fontRef idx="minor">
+            <a:schemeClr val="lt1"/>
+          </a:fontRef>
+        </p:style>
+        <p:txBody>
+          <a:bodyPr rtlCol="0" anchor="ctr"/>
+          <a:lstStyle/>
+          <a:p>
+            <a:pPr algn="ctr"/>
+            <a:endParaRPr lang="en-US"/>
+          </a:p>
+        </p:txBody>
+      </p:sp>
+      <p:cxnSp>
+        <p:nvCxnSpPr>
+          <p:cNvPr id="22" name="Straight Connector 43"/>
+          <p:cNvCxnSpPr>
+            <a:endCxn id="27" idx="2"/>
+          </p:cNvCxnSpPr>
+          <p:nvPr/>
+        </p:nvCxnSpPr>
+        <p:spPr>
+          <a:xfrm flipV="1">
+            <a:off x="3562113" y="2902412"/>
+            <a:ext cx="226695" cy="635"/>
+          </a:xfrm>
+          <a:prstGeom prst="line">
+            <a:avLst/>
+          </a:prstGeom>
+          <a:ln w="15875">
+            <a:solidFill>
+              <a:schemeClr val="tx1"/>
+            </a:solidFill>
+          </a:ln>
+        </p:spPr>
+        <p:style>
+          <a:lnRef idx="1">
+            <a:schemeClr val="accent1"/>
+          </a:lnRef>
+          <a:fillRef idx="0">
+            <a:schemeClr val="accent1"/>
+          </a:fillRef>
+          <a:effectRef idx="0">
+            <a:schemeClr val="accent1"/>
+          </a:effectRef>
+          <a:fontRef idx="minor">
+            <a:schemeClr val="tx1"/>
+          </a:fontRef>
+        </p:style>
+      </p:cxnSp>
+      <p:sp>
+        <p:nvSpPr>
+          <p:cNvPr id="27" name="Oval 44"/>
+          <p:cNvSpPr/>
+          <p:nvPr/>
+        </p:nvSpPr>
+        <p:spPr>
+          <a:xfrm>
+            <a:off x="3788876" y="2806183"/>
+            <a:ext cx="194414" cy="192457"/>
+          </a:xfrm>
+          <a:prstGeom prst="ellipse">
+            <a:avLst/>
+          </a:prstGeom>
+          <a:solidFill>
+            <a:srgbClr val="B6D5F9"/>
+          </a:solidFill>
+          <a:ln w="15875"/>
+        </p:spPr>
+        <p:style>
+          <a:lnRef idx="2">
+            <a:schemeClr val="accent1">
+              <a:shade val="15000"/>
+            </a:schemeClr>
+          </a:lnRef>
+          <a:fillRef idx="1">
+            <a:schemeClr val="accent1"/>
+          </a:fillRef>
+          <a:effectRef idx="0">
+            <a:schemeClr val="accent1"/>
+          </a:effectRef>
+          <a:fontRef idx="minor">
+            <a:schemeClr val="lt1"/>
+          </a:fontRef>
+        </p:style>
+        <p:txBody>
+          <a:bodyPr rtlCol="0" anchor="ctr"/>
+          <a:lstStyle/>
+          <a:p>
+            <a:pPr algn="ctr"/>
+            <a:endParaRPr lang="en-US"/>
+          </a:p>
+        </p:txBody>
+      </p:sp>
+      <p:cxnSp>
+        <p:nvCxnSpPr>
+          <p:cNvPr id="30" name="Straight Connector 43"/>
+          <p:cNvCxnSpPr>
+            <a:endCxn id="31" idx="2"/>
+          </p:cNvCxnSpPr>
+          <p:nvPr/>
+        </p:nvCxnSpPr>
+        <p:spPr>
+          <a:xfrm flipV="1">
+            <a:off x="3973593" y="2150572"/>
+            <a:ext cx="226695" cy="635"/>
+          </a:xfrm>
+          <a:prstGeom prst="line">
+            <a:avLst/>
+          </a:prstGeom>
+          <a:ln w="15875">
+            <a:solidFill>
+              <a:schemeClr val="tx1"/>
+            </a:solidFill>
+          </a:ln>
+        </p:spPr>
+        <p:style>
+          <a:lnRef idx="1">
+            <a:schemeClr val="accent1"/>
+          </a:lnRef>
+          <a:fillRef idx="0">
+            <a:schemeClr val="accent1"/>
+          </a:fillRef>
+          <a:effectRef idx="0">
+            <a:schemeClr val="accent1"/>
+          </a:effectRef>
+          <a:fontRef idx="minor">
+            <a:schemeClr val="tx1"/>
+          </a:fontRef>
+        </p:style>
+      </p:cxnSp>
+      <p:sp>
+        <p:nvSpPr>
+          <p:cNvPr id="31" name="Oval 44"/>
+          <p:cNvSpPr/>
+          <p:nvPr/>
+        </p:nvSpPr>
+        <p:spPr>
+          <a:xfrm>
+            <a:off x="4200356" y="2054343"/>
+            <a:ext cx="194414" cy="192457"/>
+          </a:xfrm>
+          <a:prstGeom prst="ellipse">
+            <a:avLst/>
+          </a:prstGeom>
+          <a:solidFill>
+            <a:srgbClr val="B6D5F9"/>
+          </a:solidFill>
+          <a:ln w="15875"/>
+        </p:spPr>
+        <p:style>
+          <a:lnRef idx="2">
+            <a:schemeClr val="accent1">
+              <a:shade val="15000"/>
+            </a:schemeClr>
+          </a:lnRef>
+          <a:fillRef idx="1">
+            <a:schemeClr val="accent1"/>
+          </a:fillRef>
+          <a:effectRef idx="0">
+            <a:schemeClr val="accent1"/>
+          </a:effectRef>
+          <a:fontRef idx="minor">
+            <a:schemeClr val="lt1"/>
+          </a:fontRef>
+        </p:style>
+        <p:txBody>
+          <a:bodyPr rtlCol="0" anchor="ctr"/>
+          <a:lstStyle/>
+          <a:p>
+            <a:pPr algn="ctr"/>
+            <a:endParaRPr lang="en-US"/>
+          </a:p>
+        </p:txBody>
+      </p:sp>
+      <p:cxnSp>
+        <p:nvCxnSpPr>
+          <p:cNvPr id="32" name="Straight Connector 24"/>
+          <p:cNvCxnSpPr/>
+          <p:nvPr/>
+        </p:nvCxnSpPr>
+        <p:spPr>
+          <a:xfrm>
+            <a:off x="3979912" y="2524771"/>
+            <a:ext cx="221303" cy="0"/>
+          </a:xfrm>
+          <a:prstGeom prst="line">
+            <a:avLst/>
+          </a:prstGeom>
+          <a:ln w="15875">
+            <a:solidFill>
+              <a:schemeClr val="tx1"/>
+            </a:solidFill>
+          </a:ln>
+        </p:spPr>
+        <p:style>
+          <a:lnRef idx="1">
+            <a:schemeClr val="accent1"/>
+          </a:lnRef>
+          <a:fillRef idx="0">
+            <a:schemeClr val="accent1"/>
+          </a:fillRef>
+          <a:effectRef idx="0">
+            <a:schemeClr val="accent1"/>
+          </a:effectRef>
+          <a:fontRef idx="minor">
+            <a:schemeClr val="tx1"/>
+          </a:fontRef>
+        </p:style>
+      </p:cxnSp>
+      <p:sp>
+        <p:nvSpPr>
+          <p:cNvPr id="33" name="Oval 25"/>
+          <p:cNvSpPr/>
+          <p:nvPr/>
+        </p:nvSpPr>
+        <p:spPr>
+          <a:xfrm>
+            <a:off x="4200326" y="2428542"/>
+            <a:ext cx="194414" cy="192457"/>
+          </a:xfrm>
+          <a:prstGeom prst="ellipse">
+            <a:avLst/>
+          </a:prstGeom>
+          <a:solidFill>
+            <a:srgbClr val="B6D5F9"/>
+          </a:solidFill>
+          <a:ln w="15875"/>
+        </p:spPr>
+        <p:style>
+          <a:lnRef idx="2">
+            <a:schemeClr val="accent1">
+              <a:shade val="15000"/>
+            </a:schemeClr>
+          </a:lnRef>
+          <a:fillRef idx="1">
+            <a:schemeClr val="accent1"/>
+          </a:fillRef>
+          <a:effectRef idx="0">
+            <a:schemeClr val="accent1"/>
+          </a:effectRef>
+          <a:fontRef idx="minor">
+            <a:schemeClr val="lt1"/>
+          </a:fontRef>
+        </p:style>
+        <p:txBody>
+          <a:bodyPr rtlCol="0" anchor="ctr"/>
+          <a:lstStyle/>
+          <a:p>
+            <a:pPr algn="ctr"/>
+            <a:endParaRPr lang="en-US"/>
+          </a:p>
+        </p:txBody>
+      </p:sp>
+      <p:cxnSp>
+        <p:nvCxnSpPr>
+          <p:cNvPr id="34" name="Straight Connector 43"/>
+          <p:cNvCxnSpPr>
+            <a:endCxn id="35" idx="2"/>
+          </p:cNvCxnSpPr>
+          <p:nvPr/>
+        </p:nvCxnSpPr>
+        <p:spPr>
+          <a:xfrm flipV="1">
+            <a:off x="3974863" y="2899872"/>
+            <a:ext cx="226695" cy="635"/>
+          </a:xfrm>
+          <a:prstGeom prst="line">
+            <a:avLst/>
+          </a:prstGeom>
+          <a:ln w="15875">
+            <a:solidFill>
+              <a:schemeClr val="tx1"/>
+            </a:solidFill>
+          </a:ln>
+        </p:spPr>
+        <p:style>
+          <a:lnRef idx="1">
+            <a:schemeClr val="accent1"/>
+          </a:lnRef>
+          <a:fillRef idx="0">
+            <a:schemeClr val="accent1"/>
+          </a:fillRef>
+          <a:effectRef idx="0">
+            <a:schemeClr val="accent1"/>
+          </a:effectRef>
+          <a:fontRef idx="minor">
+            <a:schemeClr val="tx1"/>
+          </a:fontRef>
+        </p:style>
+      </p:cxnSp>
+      <p:sp>
+        <p:nvSpPr>
+          <p:cNvPr id="35" name="Oval 44"/>
+          <p:cNvSpPr/>
+          <p:nvPr/>
+        </p:nvSpPr>
+        <p:spPr>
+          <a:xfrm>
+            <a:off x="4201626" y="2803643"/>
+            <a:ext cx="194414" cy="192457"/>
+          </a:xfrm>
+          <a:prstGeom prst="ellipse">
+            <a:avLst/>
+          </a:prstGeom>
+          <a:solidFill>
+            <a:srgbClr val="B6D5F9"/>
+          </a:solidFill>
+          <a:ln w="15875"/>
+        </p:spPr>
+        <p:style>
+          <a:lnRef idx="2">
+            <a:schemeClr val="accent1">
+              <a:shade val="15000"/>
+            </a:schemeClr>
+          </a:lnRef>
+          <a:fillRef idx="1">
+            <a:schemeClr val="accent1"/>
+          </a:fillRef>
+          <a:effectRef idx="0">
+            <a:schemeClr val="accent1"/>
+          </a:effectRef>
+          <a:fontRef idx="minor">
+            <a:schemeClr val="lt1"/>
+          </a:fontRef>
+        </p:style>
+        <p:txBody>
+          <a:bodyPr rtlCol="0" anchor="ctr"/>
+          <a:lstStyle/>
+          <a:p>
+            <a:pPr algn="ctr"/>
+            <a:endParaRPr lang="en-US"/>
+          </a:p>
+        </p:txBody>
+      </p:sp>
+      <p:sp>
+        <p:nvSpPr>
+          <p:cNvPr id="38" name="Rectangle: Rounded Corners 172"/>
+          <p:cNvSpPr/>
+          <p:nvPr/>
+        </p:nvSpPr>
+        <p:spPr>
+          <a:xfrm>
+            <a:off x="5587352" y="2019358"/>
+            <a:ext cx="988314" cy="1024044"/>
+          </a:xfrm>
+          <a:prstGeom prst="roundRect">
+            <a:avLst>
+              <a:gd name="adj" fmla="val 8293"/>
+            </a:avLst>
+          </a:prstGeom>
+          <a:solidFill>
+            <a:srgbClr val="B6D5F9"/>
+          </a:solidFill>
+          <a:ln>
+            <a:solidFill>
+              <a:schemeClr val="tx1"/>
+            </a:solidFill>
+          </a:ln>
+        </p:spPr>
+        <p:style>
+          <a:lnRef idx="2">
+            <a:schemeClr val="accent1">
+              <a:shade val="15000"/>
+            </a:schemeClr>
+          </a:lnRef>
+          <a:fillRef idx="1">
+            <a:schemeClr val="accent1"/>
+          </a:fillRef>
+          <a:effectRef idx="0">
+            <a:schemeClr val="accent1"/>
+          </a:effectRef>
+          <a:fontRef idx="minor">
+            <a:schemeClr val="lt1"/>
+          </a:fontRef>
+        </p:style>
+        <p:txBody>
+          <a:bodyPr rtlCol="0" anchor="ctr"/>
+          <a:lstStyle/>
+          <a:p>
+            <a:pPr algn="ctr"/>
+            <a:r>
+              <a:rPr lang="en-US" sz="1400" b="1" dirty="0">
+                <a:solidFill>
+                  <a:schemeClr val="tx1"/>
+                </a:solidFill>
+              </a:rPr>
+              <a:t>Policy Update</a:t>
+            </a:r>
+          </a:p>
+        </p:txBody>
+      </p:sp>
+      <p:cxnSp>
+        <p:nvCxnSpPr>
+          <p:cNvPr id="42" name="Straight Arrow Connector 156"/>
+          <p:cNvCxnSpPr>
+            <a:cxnSpLocks/>
+            <a:stCxn id="16" idx="6"/>
+          </p:cNvCxnSpPr>
+          <p:nvPr/>
+        </p:nvCxnSpPr>
+        <p:spPr>
+          <a:xfrm>
+            <a:off x="4849829" y="2904927"/>
+            <a:ext cx="740063" cy="317"/>
+          </a:xfrm>
+          <a:prstGeom prst="straightConnector1">
+            <a:avLst/>
+          </a:prstGeom>
+          <a:ln w="15875">
+            <a:solidFill>
+              <a:schemeClr val="tx1"/>
+            </a:solidFill>
+            <a:tailEnd type="arrow"/>
+          </a:ln>
+        </p:spPr>
+        <p:style>
+          <a:lnRef idx="1">
+            <a:schemeClr val="accent1"/>
+          </a:lnRef>
+          <a:fillRef idx="0">
+            <a:schemeClr val="accent1"/>
+          </a:fillRef>
+          <a:effectRef idx="0">
+            <a:schemeClr val="accent1"/>
+          </a:effectRef>
+          <a:fontRef idx="minor">
+            <a:schemeClr val="tx1"/>
+          </a:fontRef>
+        </p:style>
+      </p:cxnSp>
+      <p:cxnSp>
+        <p:nvCxnSpPr>
+          <p:cNvPr id="55" name="Straight Arrow Connector 156"/>
+          <p:cNvCxnSpPr>
+            <a:cxnSpLocks/>
+            <a:stCxn id="4" idx="6"/>
+          </p:cNvCxnSpPr>
+          <p:nvPr/>
+        </p:nvCxnSpPr>
+        <p:spPr>
+          <a:xfrm flipV="1">
+            <a:off x="4849829" y="2150572"/>
+            <a:ext cx="740063" cy="5055"/>
+          </a:xfrm>
+          <a:prstGeom prst="straightConnector1">
+            <a:avLst/>
+          </a:prstGeom>
+          <a:ln w="15875">
+            <a:solidFill>
+              <a:schemeClr val="tx1"/>
+            </a:solidFill>
+            <a:tailEnd type="arrow"/>
+          </a:ln>
+        </p:spPr>
+        <p:style>
+          <a:lnRef idx="1">
+            <a:schemeClr val="accent1"/>
+          </a:lnRef>
+          <a:fillRef idx="0">
+            <a:schemeClr val="accent1"/>
+          </a:fillRef>
+          <a:effectRef idx="0">
+            <a:schemeClr val="accent1"/>
+          </a:effectRef>
+          <a:fontRef idx="minor">
+            <a:schemeClr val="tx1"/>
+          </a:fontRef>
+        </p:style>
+      </p:cxnSp>
+      <p:pic>
+        <p:nvPicPr>
+          <p:cNvPr id="56" name="Picture 18"/>
+          <p:cNvPicPr>
+            <a:picLocks noChangeAspect="1"/>
+          </p:cNvPicPr>
+          <p:nvPr/>
+        </p:nvPicPr>
+        <p:blipFill>
+          <a:blip r:embed="rId6">
+            <a:extLst>
+              <a:ext uri="{BEBA8EAE-BF5A-486C-A8C5-ECC9F3942E4B}">
+                <a14:imgProps xmlns:a14="http://schemas.microsoft.com/office/drawing/2010/main">
+                  <a14:imgLayer r:embed="rId7">
+                    <a14:imgEffect>
+                      <a14:backgroundRemoval t="10000" b="90000" l="10000" r="90000"/>
+                    </a14:imgEffect>
+                  </a14:imgLayer>
+                </a14:imgProps>
+              </a:ext>
+            </a:extLst>
+          </a:blip>
+          <a:stretch>
+            <a:fillRect/>
+          </a:stretch>
+        </p:blipFill>
+        <p:spPr>
+          <a:xfrm>
+            <a:off x="6209866" y="3525475"/>
+            <a:ext cx="300947" cy="313308"/>
+          </a:xfrm>
+          <a:prstGeom prst="rect">
+            <a:avLst/>
+          </a:prstGeom>
+        </p:spPr>
+      </p:pic>
+      <p:pic>
+        <p:nvPicPr>
+          <p:cNvPr id="59" name="Picture 18"/>
+          <p:cNvPicPr>
+            <a:picLocks noChangeAspect="1"/>
+          </p:cNvPicPr>
+          <p:nvPr/>
+        </p:nvPicPr>
+        <p:blipFill>
+          <a:blip r:embed="rId6">
+            <a:extLst>
+              <a:ext uri="{BEBA8EAE-BF5A-486C-A8C5-ECC9F3942E4B}">
+                <a14:imgProps xmlns:a14="http://schemas.microsoft.com/office/drawing/2010/main">
+                  <a14:imgLayer r:embed="rId7">
+                    <a14:imgEffect>
+                      <a14:backgroundRemoval t="10000" b="90000" l="10000" r="90000"/>
+                    </a14:imgEffect>
+                  </a14:imgLayer>
+                </a14:imgProps>
+              </a:ext>
+            </a:extLst>
+          </a:blip>
+          <a:stretch>
+            <a:fillRect/>
+          </a:stretch>
+        </p:blipFill>
+        <p:spPr>
+          <a:xfrm>
+            <a:off x="6209866" y="4422095"/>
+            <a:ext cx="300947" cy="313308"/>
+          </a:xfrm>
+          <a:prstGeom prst="rect">
+            <a:avLst/>
+          </a:prstGeom>
+        </p:spPr>
+      </p:pic>
+      <p:pic>
+        <p:nvPicPr>
+          <p:cNvPr id="63" name="Picture 38"/>
+          <p:cNvPicPr>
+            <a:picLocks noChangeAspect="1"/>
+          </p:cNvPicPr>
+          <p:nvPr/>
+        </p:nvPicPr>
+        <p:blipFill>
+          <a:blip r:embed="rId8">
+            <a:extLst>
+              <a:ext uri="{BEBA8EAE-BF5A-486C-A8C5-ECC9F3942E4B}">
+                <a14:imgProps xmlns:a14="http://schemas.microsoft.com/office/drawing/2010/main">
+                  <a14:imgLayer r:embed="rId9">
+                    <a14:imgEffect>
+                      <a14:backgroundRemoval t="10000" b="90000" l="10000" r="90000">
+                        <a14:foregroundMark x1="38571" y1="81250" x2="61429" y2="81250"/>
+                        <a14:foregroundMark x1="37143" y1="83750" x2="62857" y2="81250"/>
+                        <a14:foregroundMark x1="35714" y1="86250" x2="62857" y2="85000"/>
+                        <a14:foregroundMark x1="35714" y1="81250" x2="65714" y2="83750"/>
+                      </a14:backgroundRemoval>
+                    </a14:imgEffect>
+                  </a14:imgLayer>
+                </a14:imgProps>
+              </a:ext>
+            </a:extLst>
+          </a:blip>
+          <a:stretch>
+            <a:fillRect/>
+          </a:stretch>
+        </p:blipFill>
+        <p:spPr>
+          <a:xfrm>
+            <a:off x="6216985" y="3909959"/>
+            <a:ext cx="300947" cy="285890"/>
+          </a:xfrm>
+          <a:prstGeom prst="rect">
+            <a:avLst/>
+          </a:prstGeom>
+        </p:spPr>
+      </p:pic>
+      <p:pic>
+        <p:nvPicPr>
+          <p:cNvPr id="64" name="Picture 38"/>
+          <p:cNvPicPr>
+            <a:picLocks noChangeAspect="1"/>
+          </p:cNvPicPr>
+          <p:nvPr/>
+        </p:nvPicPr>
+        <p:blipFill>
+          <a:blip r:embed="rId8">
+            <a:extLst>
+              <a:ext uri="{BEBA8EAE-BF5A-486C-A8C5-ECC9F3942E4B}">
+                <a14:imgProps xmlns:a14="http://schemas.microsoft.com/office/drawing/2010/main">
+                  <a14:imgLayer r:embed="rId9">
+                    <a14:imgEffect>
+                      <a14:backgroundRemoval t="10000" b="90000" l="10000" r="90000">
+                        <a14:foregroundMark x1="38571" y1="81250" x2="61429" y2="81250"/>
+                        <a14:foregroundMark x1="37143" y1="83750" x2="62857" y2="81250"/>
+                        <a14:foregroundMark x1="35714" y1="86250" x2="62857" y2="85000"/>
+                        <a14:foregroundMark x1="35714" y1="81250" x2="65714" y2="83750"/>
+                      </a14:backgroundRemoval>
+                    </a14:imgEffect>
+                  </a14:imgLayer>
+                </a14:imgProps>
+              </a:ext>
+            </a:extLst>
+          </a:blip>
+          <a:stretch>
+            <a:fillRect/>
+          </a:stretch>
+        </p:blipFill>
+        <p:spPr>
+          <a:xfrm>
+            <a:off x="6216985" y="4802769"/>
+            <a:ext cx="300947" cy="285890"/>
+          </a:xfrm>
+          <a:prstGeom prst="rect">
+            <a:avLst/>
+          </a:prstGeom>
+        </p:spPr>
+      </p:pic>
+      <p:pic>
+        <p:nvPicPr>
+          <p:cNvPr id="68" name="Picture 18"/>
+          <p:cNvPicPr>
+            <a:picLocks noChangeAspect="1"/>
+          </p:cNvPicPr>
+          <p:nvPr/>
+        </p:nvPicPr>
+        <p:blipFill>
+          <a:blip r:embed="rId6">
+            <a:extLst>
+              <a:ext uri="{BEBA8EAE-BF5A-486C-A8C5-ECC9F3942E4B}">
+                <a14:imgProps xmlns:a14="http://schemas.microsoft.com/office/drawing/2010/main">
+                  <a14:imgLayer r:embed="rId7">
+                    <a14:imgEffect>
+                      <a14:backgroundRemoval t="10000" b="90000" l="10000" r="90000"/>
+                    </a14:imgEffect>
+                  </a14:imgLayer>
+                </a14:imgProps>
+              </a:ext>
+            </a:extLst>
+          </a:blip>
+          <a:stretch>
+            <a:fillRect/>
+          </a:stretch>
+        </p:blipFill>
+        <p:spPr>
+          <a:xfrm>
+            <a:off x="5015778" y="1987582"/>
+            <a:ext cx="300947" cy="313308"/>
+          </a:xfrm>
+          <a:prstGeom prst="rect">
+            <a:avLst/>
+          </a:prstGeom>
+        </p:spPr>
+      </p:pic>
+      <p:pic>
+        <p:nvPicPr>
+          <p:cNvPr id="73" name="Picture 38"/>
+          <p:cNvPicPr>
+            <a:picLocks noChangeAspect="1"/>
+          </p:cNvPicPr>
+          <p:nvPr/>
+        </p:nvPicPr>
+        <p:blipFill>
+          <a:blip r:embed="rId8">
+            <a:extLst>
+              <a:ext uri="{BEBA8EAE-BF5A-486C-A8C5-ECC9F3942E4B}">
+                <a14:imgProps xmlns:a14="http://schemas.microsoft.com/office/drawing/2010/main">
+                  <a14:imgLayer r:embed="rId9">
+                    <a14:imgEffect>
+                      <a14:backgroundRemoval t="10000" b="90000" l="10000" r="90000">
+                        <a14:foregroundMark x1="38571" y1="81250" x2="61429" y2="81250"/>
+                        <a14:foregroundMark x1="37143" y1="83750" x2="62857" y2="81250"/>
+                        <a14:foregroundMark x1="35714" y1="86250" x2="62857" y2="85000"/>
+                        <a14:foregroundMark x1="35714" y1="81250" x2="65714" y2="83750"/>
+                      </a14:backgroundRemoval>
+                    </a14:imgEffect>
+                  </a14:imgLayer>
+                </a14:imgProps>
+              </a:ext>
+            </a:extLst>
+          </a:blip>
+          <a:stretch>
+            <a:fillRect/>
+          </a:stretch>
+        </p:blipFill>
+        <p:spPr>
+          <a:xfrm>
+            <a:off x="5015277" y="2757511"/>
+            <a:ext cx="300947" cy="285890"/>
+          </a:xfrm>
+          <a:prstGeom prst="rect">
+            <a:avLst/>
+          </a:prstGeom>
+        </p:spPr>
+      </p:pic>
+      <p:cxnSp>
+        <p:nvCxnSpPr>
+          <p:cNvPr id="74" name="Straight Arrow Connector 156"/>
+          <p:cNvCxnSpPr>
+            <a:cxnSpLocks/>
+          </p:cNvCxnSpPr>
+          <p:nvPr/>
+        </p:nvCxnSpPr>
+        <p:spPr>
+          <a:xfrm flipV="1">
+            <a:off x="4855544" y="2521387"/>
+            <a:ext cx="734348" cy="6032"/>
+          </a:xfrm>
+          <a:prstGeom prst="straightConnector1">
+            <a:avLst/>
+          </a:prstGeom>
+          <a:ln w="15875">
+            <a:solidFill>
+              <a:schemeClr val="tx1"/>
+            </a:solidFill>
+            <a:tailEnd type="arrow"/>
+          </a:ln>
+        </p:spPr>
+        <p:style>
+          <a:lnRef idx="1">
+            <a:schemeClr val="accent1"/>
+          </a:lnRef>
+          <a:fillRef idx="0">
+            <a:schemeClr val="accent1"/>
+          </a:fillRef>
+          <a:effectRef idx="0">
+            <a:schemeClr val="accent1"/>
+          </a:effectRef>
+          <a:fontRef idx="minor">
+            <a:schemeClr val="tx1"/>
+          </a:fontRef>
+        </p:style>
+      </p:cxnSp>
+      <p:pic>
+        <p:nvPicPr>
+          <p:cNvPr id="69" name="Picture 38"/>
+          <p:cNvPicPr>
+            <a:picLocks noChangeAspect="1"/>
+          </p:cNvPicPr>
+          <p:nvPr/>
+        </p:nvPicPr>
+        <p:blipFill>
+          <a:blip r:embed="rId8">
+            <a:extLst>
+              <a:ext uri="{BEBA8EAE-BF5A-486C-A8C5-ECC9F3942E4B}">
+                <a14:imgProps xmlns:a14="http://schemas.microsoft.com/office/drawing/2010/main">
+                  <a14:imgLayer r:embed="rId9">
+                    <a14:imgEffect>
+                      <a14:backgroundRemoval t="10000" b="90000" l="10000" r="90000">
+                        <a14:foregroundMark x1="38571" y1="81250" x2="61429" y2="81250"/>
+                        <a14:foregroundMark x1="37143" y1="83750" x2="62857" y2="81250"/>
+                        <a14:foregroundMark x1="35714" y1="86250" x2="62857" y2="85000"/>
+                        <a14:foregroundMark x1="35714" y1="81250" x2="65714" y2="83750"/>
+                      </a14:backgroundRemoval>
+                    </a14:imgEffect>
+                  </a14:imgLayer>
+                </a14:imgProps>
+              </a:ext>
+            </a:extLst>
+          </a:blip>
+          <a:stretch>
+            <a:fillRect/>
+          </a:stretch>
+        </p:blipFill>
+        <p:spPr>
+          <a:xfrm>
+            <a:off x="5014642" y="2378416"/>
+            <a:ext cx="300947" cy="285890"/>
+          </a:xfrm>
+          <a:prstGeom prst="rect">
+            <a:avLst/>
+          </a:prstGeom>
+        </p:spPr>
+      </p:pic>
+      <p:pic>
+        <p:nvPicPr>
+          <p:cNvPr id="7" name="Picture 46">
             <a:extLst>
               <a:ext uri="{FF2B5EF4-FFF2-40B4-BE49-F238E27FC236}">
-                <a16:creationId xmlns:a16="http://schemas.microsoft.com/office/drawing/2014/main" id="{0FB5A448-AB23-19FA-5793-15DDFCEA755B}"/>
+                <a16:creationId xmlns:a16="http://schemas.microsoft.com/office/drawing/2014/main" id="{C50A7F63-7B7D-93CB-9646-1A4303E8F0B2}"/>
+              </a:ext>
+            </a:extLst>
+          </p:cNvPr>
+          <p:cNvPicPr>
+            <a:picLocks noChangeAspect="1"/>
+          </p:cNvPicPr>
+          <p:nvPr/>
+        </p:nvPicPr>
+        <p:blipFill>
+          <a:blip r:embed="rId4">
+            <a:extLst>
+              <a:ext uri="{BEBA8EAE-BF5A-486C-A8C5-ECC9F3942E4B}">
+                <a14:imgProps xmlns:a14="http://schemas.microsoft.com/office/drawing/2010/main">
+                  <a14:imgLayer r:embed="rId5">
+                    <a14:imgEffect>
+                      <a14:backgroundRemoval t="16212" b="90690" l="16437" r="90715">
+                        <a14:foregroundMark x1="18841" y1="56061" x2="18841" y2="56061"/>
+                        <a14:foregroundMark x1="78261" y1="57576" x2="78261" y2="57576"/>
+                      </a14:backgroundRemoval>
+                    </a14:imgEffect>
+                  </a14:imgLayer>
+                </a14:imgProps>
+              </a:ext>
+            </a:extLst>
+          </a:blip>
+          <a:srcRect l="7153" t="6902" b="-1"/>
+          <a:stretch>
+            <a:fillRect/>
+          </a:stretch>
+        </p:blipFill>
+        <p:spPr>
+          <a:xfrm>
+            <a:off x="4438349" y="2484239"/>
+            <a:ext cx="180340" cy="85725"/>
+          </a:xfrm>
+          <a:prstGeom prst="rect">
+            <a:avLst/>
+          </a:prstGeom>
+        </p:spPr>
+      </p:pic>
+      <p:pic>
+        <p:nvPicPr>
+          <p:cNvPr id="18" name="Picture 46">
+            <a:extLst>
+              <a:ext uri="{FF2B5EF4-FFF2-40B4-BE49-F238E27FC236}">
+                <a16:creationId xmlns:a16="http://schemas.microsoft.com/office/drawing/2014/main" id="{6A20B15A-3BD1-C15B-2D82-98399F0C02B9}"/>
+              </a:ext>
+            </a:extLst>
+          </p:cNvPr>
+          <p:cNvPicPr>
+            <a:picLocks noChangeAspect="1"/>
+          </p:cNvPicPr>
+          <p:nvPr/>
+        </p:nvPicPr>
+        <p:blipFill>
+          <a:blip r:embed="rId4">
+            <a:extLst>
+              <a:ext uri="{BEBA8EAE-BF5A-486C-A8C5-ECC9F3942E4B}">
+                <a14:imgProps xmlns:a14="http://schemas.microsoft.com/office/drawing/2010/main">
+                  <a14:imgLayer r:embed="rId5">
+                    <a14:imgEffect>
+                      <a14:backgroundRemoval t="16212" b="90690" l="16437" r="90715">
+                        <a14:foregroundMark x1="18841" y1="56061" x2="18841" y2="56061"/>
+                        <a14:foregroundMark x1="78261" y1="57576" x2="78261" y2="57576"/>
+                      </a14:backgroundRemoval>
+                    </a14:imgEffect>
+                  </a14:imgLayer>
+                </a14:imgProps>
+              </a:ext>
+            </a:extLst>
+          </a:blip>
+          <a:srcRect l="7153" t="6902" b="-1"/>
+          <a:stretch>
+            <a:fillRect/>
+          </a:stretch>
+        </p:blipFill>
+        <p:spPr>
+          <a:xfrm>
+            <a:off x="4438349" y="2863651"/>
+            <a:ext cx="180340" cy="85725"/>
+          </a:xfrm>
+          <a:prstGeom prst="rect">
+            <a:avLst/>
+          </a:prstGeom>
+        </p:spPr>
+      </p:pic>
+      <p:pic>
+        <p:nvPicPr>
+          <p:cNvPr id="20" name="Picture 46">
+            <a:extLst>
+              <a:ext uri="{FF2B5EF4-FFF2-40B4-BE49-F238E27FC236}">
+                <a16:creationId xmlns:a16="http://schemas.microsoft.com/office/drawing/2014/main" id="{790367B1-9C5A-F465-17B5-BAADF7AE9545}"/>
+              </a:ext>
+            </a:extLst>
+          </p:cNvPr>
+          <p:cNvPicPr>
+            <a:picLocks noChangeAspect="1"/>
+          </p:cNvPicPr>
+          <p:nvPr/>
+        </p:nvPicPr>
+        <p:blipFill>
+          <a:blip r:embed="rId4">
+            <a:extLst>
+              <a:ext uri="{BEBA8EAE-BF5A-486C-A8C5-ECC9F3942E4B}">
+                <a14:imgProps xmlns:a14="http://schemas.microsoft.com/office/drawing/2010/main">
+                  <a14:imgLayer r:embed="rId5">
+                    <a14:imgEffect>
+                      <a14:backgroundRemoval t="16212" b="90690" l="16437" r="90715">
+                        <a14:foregroundMark x1="18841" y1="56061" x2="18841" y2="56061"/>
+                        <a14:foregroundMark x1="78261" y1="57576" x2="78261" y2="57576"/>
+                      </a14:backgroundRemoval>
+                    </a14:imgEffect>
+                  </a14:imgLayer>
+                </a14:imgProps>
+              </a:ext>
+            </a:extLst>
+          </a:blip>
+          <a:srcRect l="7153" t="6902" b="-1"/>
+          <a:stretch>
+            <a:fillRect/>
+          </a:stretch>
+        </p:blipFill>
+        <p:spPr>
+          <a:xfrm>
+            <a:off x="5637040" y="3642402"/>
+            <a:ext cx="180340" cy="85725"/>
+          </a:xfrm>
+          <a:prstGeom prst="rect">
+            <a:avLst/>
+          </a:prstGeom>
+        </p:spPr>
+      </p:pic>
+      <p:pic>
+        <p:nvPicPr>
+          <p:cNvPr id="29" name="Picture 46">
+            <a:extLst>
+              <a:ext uri="{FF2B5EF4-FFF2-40B4-BE49-F238E27FC236}">
+                <a16:creationId xmlns:a16="http://schemas.microsoft.com/office/drawing/2014/main" id="{79FD6A55-7648-7C68-5D4B-D466C35B5ED4}"/>
+              </a:ext>
+            </a:extLst>
+          </p:cNvPr>
+          <p:cNvPicPr>
+            <a:picLocks noChangeAspect="1"/>
+          </p:cNvPicPr>
+          <p:nvPr/>
+        </p:nvPicPr>
+        <p:blipFill>
+          <a:blip r:embed="rId4">
+            <a:extLst>
+              <a:ext uri="{BEBA8EAE-BF5A-486C-A8C5-ECC9F3942E4B}">
+                <a14:imgProps xmlns:a14="http://schemas.microsoft.com/office/drawing/2010/main">
+                  <a14:imgLayer r:embed="rId5">
+                    <a14:imgEffect>
+                      <a14:backgroundRemoval t="16212" b="90690" l="16437" r="90715">
+                        <a14:foregroundMark x1="18841" y1="56061" x2="18841" y2="56061"/>
+                        <a14:foregroundMark x1="78261" y1="57576" x2="78261" y2="57576"/>
+                      </a14:backgroundRemoval>
+                    </a14:imgEffect>
+                  </a14:imgLayer>
+                </a14:imgProps>
+              </a:ext>
+            </a:extLst>
+          </a:blip>
+          <a:srcRect l="7153" t="6902" b="-1"/>
+          <a:stretch>
+            <a:fillRect/>
+          </a:stretch>
+        </p:blipFill>
+        <p:spPr>
+          <a:xfrm>
+            <a:off x="5636325" y="4016417"/>
+            <a:ext cx="180340" cy="85725"/>
+          </a:xfrm>
+          <a:prstGeom prst="rect">
+            <a:avLst/>
+          </a:prstGeom>
+        </p:spPr>
+      </p:pic>
+      <p:pic>
+        <p:nvPicPr>
+          <p:cNvPr id="37" name="Picture 46">
+            <a:extLst>
+              <a:ext uri="{FF2B5EF4-FFF2-40B4-BE49-F238E27FC236}">
+                <a16:creationId xmlns:a16="http://schemas.microsoft.com/office/drawing/2014/main" id="{384E161F-DC78-6382-A7A2-2406D977A49A}"/>
+              </a:ext>
+            </a:extLst>
+          </p:cNvPr>
+          <p:cNvPicPr>
+            <a:picLocks noChangeAspect="1"/>
+          </p:cNvPicPr>
+          <p:nvPr/>
+        </p:nvPicPr>
+        <p:blipFill>
+          <a:blip r:embed="rId4">
+            <a:extLst>
+              <a:ext uri="{BEBA8EAE-BF5A-486C-A8C5-ECC9F3942E4B}">
+                <a14:imgProps xmlns:a14="http://schemas.microsoft.com/office/drawing/2010/main">
+                  <a14:imgLayer r:embed="rId5">
+                    <a14:imgEffect>
+                      <a14:backgroundRemoval t="16212" b="90690" l="16437" r="90715">
+                        <a14:foregroundMark x1="18841" y1="56061" x2="18841" y2="56061"/>
+                        <a14:foregroundMark x1="78261" y1="57576" x2="78261" y2="57576"/>
+                      </a14:backgroundRemoval>
+                    </a14:imgEffect>
+                  </a14:imgLayer>
+                </a14:imgProps>
+              </a:ext>
+            </a:extLst>
+          </a:blip>
+          <a:srcRect l="7153" t="6902" b="-1"/>
+          <a:stretch>
+            <a:fillRect/>
+          </a:stretch>
+        </p:blipFill>
+        <p:spPr>
+          <a:xfrm>
+            <a:off x="5629658" y="4532354"/>
+            <a:ext cx="180340" cy="85725"/>
+          </a:xfrm>
+          <a:prstGeom prst="rect">
+            <a:avLst/>
+          </a:prstGeom>
+        </p:spPr>
+      </p:pic>
+      <p:pic>
+        <p:nvPicPr>
+          <p:cNvPr id="40" name="Picture 46">
+            <a:extLst>
+              <a:ext uri="{FF2B5EF4-FFF2-40B4-BE49-F238E27FC236}">
+                <a16:creationId xmlns:a16="http://schemas.microsoft.com/office/drawing/2014/main" id="{6DA6DF77-7C6F-CA05-542A-2FBF1378660E}"/>
+              </a:ext>
+            </a:extLst>
+          </p:cNvPr>
+          <p:cNvPicPr>
+            <a:picLocks noChangeAspect="1"/>
+          </p:cNvPicPr>
+          <p:nvPr/>
+        </p:nvPicPr>
+        <p:blipFill>
+          <a:blip r:embed="rId4">
+            <a:extLst>
+              <a:ext uri="{BEBA8EAE-BF5A-486C-A8C5-ECC9F3942E4B}">
+                <a14:imgProps xmlns:a14="http://schemas.microsoft.com/office/drawing/2010/main">
+                  <a14:imgLayer r:embed="rId5">
+                    <a14:imgEffect>
+                      <a14:backgroundRemoval t="16212" b="90690" l="16437" r="90715">
+                        <a14:foregroundMark x1="18841" y1="56061" x2="18841" y2="56061"/>
+                        <a14:foregroundMark x1="78261" y1="57576" x2="78261" y2="57576"/>
+                      </a14:backgroundRemoval>
+                    </a14:imgEffect>
+                  </a14:imgLayer>
+                </a14:imgProps>
+              </a:ext>
+            </a:extLst>
+          </a:blip>
+          <a:srcRect l="7153" t="6902" b="-1"/>
+          <a:stretch>
+            <a:fillRect/>
+          </a:stretch>
+        </p:blipFill>
+        <p:spPr>
+          <a:xfrm>
+            <a:off x="5624181" y="4906369"/>
+            <a:ext cx="180340" cy="85725"/>
+          </a:xfrm>
+          <a:prstGeom prst="rect">
+            <a:avLst/>
+          </a:prstGeom>
+        </p:spPr>
+      </p:pic>
+      <p:sp>
+        <p:nvSpPr>
+          <p:cNvPr id="82" name="Rectangle 81">
+            <a:extLst>
+              <a:ext uri="{FF2B5EF4-FFF2-40B4-BE49-F238E27FC236}">
+                <a16:creationId xmlns:a16="http://schemas.microsoft.com/office/drawing/2014/main" id="{7A0D0379-568E-CC2C-B771-EBDE7A814995}"/>
               </a:ext>
             </a:extLst>
           </p:cNvPr>
@@ -7926,8 +11138,65 @@
         </p:nvSpPr>
         <p:spPr>
           <a:xfrm>
-            <a:off x="10123331" y="3131466"/>
-            <a:ext cx="552971" cy="67392"/>
+            <a:off x="394692" y="2379407"/>
+            <a:ext cx="1354311" cy="318890"/>
+          </a:xfrm>
+          <a:prstGeom prst="rect">
+            <a:avLst/>
+          </a:prstGeom>
+          <a:noFill/>
+          <a:ln>
+            <a:noFill/>
+          </a:ln>
+        </p:spPr>
+        <p:style>
+          <a:lnRef idx="2">
+            <a:schemeClr val="accent1">
+              <a:shade val="15000"/>
+            </a:schemeClr>
+          </a:lnRef>
+          <a:fillRef idx="1">
+            <a:schemeClr val="accent1"/>
+          </a:fillRef>
+          <a:effectRef idx="0">
+            <a:schemeClr val="accent1"/>
+          </a:effectRef>
+          <a:fontRef idx="minor">
+            <a:schemeClr val="lt1"/>
+          </a:fontRef>
+        </p:style>
+        <p:txBody>
+          <a:bodyPr rtlCol="0" anchor="ctr"/>
+          <a:lstStyle/>
+          <a:p>
+            <a:pPr algn="ctr"/>
+            <a:r>
+              <a:rPr lang="en-US" sz="2000" b="1" dirty="0">
+                <a:solidFill>
+                  <a:schemeClr val="tx1"/>
+                </a:solidFill>
+              </a:rPr>
+              <a:t>Agentic RL</a:t>
+            </a:r>
+          </a:p>
+        </p:txBody>
+      </p:sp>
+      <p:sp>
+        <p:nvSpPr>
+          <p:cNvPr id="84" name="Rectangle 83">
+            <a:extLst>
+              <a:ext uri="{FF2B5EF4-FFF2-40B4-BE49-F238E27FC236}">
+                <a16:creationId xmlns:a16="http://schemas.microsoft.com/office/drawing/2014/main" id="{144EE931-6664-9B76-24CD-87372CA521ED}"/>
+              </a:ext>
+            </a:extLst>
+          </p:cNvPr>
+          <p:cNvSpPr/>
+          <p:nvPr/>
+        </p:nvSpPr>
+        <p:spPr>
+          <a:xfrm>
+            <a:off x="976524" y="4164312"/>
+            <a:ext cx="785412" cy="318890"/>
           </a:xfrm>
           <a:prstGeom prst="rect">
             <a:avLst/>
@@ -7962,16 +11231,155 @@
           <a:lstStyle/>
           <a:p>
             <a:pPr algn="ctr"/>
-            <a:endParaRPr lang="en-US"/>
+            <a:r>
+              <a:rPr lang="en-US" sz="2000" b="1" dirty="0">
+                <a:solidFill>
+                  <a:schemeClr val="tx1"/>
+                </a:solidFill>
+              </a:rPr>
+              <a:t>ENVS</a:t>
+            </a:r>
           </a:p>
         </p:txBody>
       </p:sp>
+      <p:cxnSp>
+        <p:nvCxnSpPr>
+          <p:cNvPr id="96" name="Straight Connector 95">
+            <a:extLst>
+              <a:ext uri="{FF2B5EF4-FFF2-40B4-BE49-F238E27FC236}">
+                <a16:creationId xmlns:a16="http://schemas.microsoft.com/office/drawing/2014/main" id="{4746E05D-EA64-035C-FB71-F77D81FC492F}"/>
+              </a:ext>
+            </a:extLst>
+          </p:cNvPr>
+          <p:cNvCxnSpPr>
+            <a:cxnSpLocks/>
+            <a:endCxn id="114" idx="2"/>
+          </p:cNvCxnSpPr>
+          <p:nvPr/>
+        </p:nvCxnSpPr>
+        <p:spPr>
+          <a:xfrm flipV="1">
+            <a:off x="7568870" y="2803643"/>
+            <a:ext cx="0" cy="349189"/>
+          </a:xfrm>
+          <a:prstGeom prst="line">
+            <a:avLst/>
+          </a:prstGeom>
+          <a:ln w="15875">
+            <a:solidFill>
+              <a:schemeClr val="tx1"/>
+            </a:solidFill>
+          </a:ln>
+        </p:spPr>
+        <p:style>
+          <a:lnRef idx="1">
+            <a:schemeClr val="accent1"/>
+          </a:lnRef>
+          <a:fillRef idx="0">
+            <a:schemeClr val="accent1"/>
+          </a:fillRef>
+          <a:effectRef idx="0">
+            <a:schemeClr val="accent1"/>
+          </a:effectRef>
+          <a:fontRef idx="minor">
+            <a:schemeClr val="tx1"/>
+          </a:fontRef>
+        </p:style>
+      </p:cxnSp>
+      <p:cxnSp>
+        <p:nvCxnSpPr>
+          <p:cNvPr id="98" name="Straight Arrow Connector 97">
+            <a:extLst>
+              <a:ext uri="{FF2B5EF4-FFF2-40B4-BE49-F238E27FC236}">
+                <a16:creationId xmlns:a16="http://schemas.microsoft.com/office/drawing/2014/main" id="{AB695F57-417B-769B-AA6F-2EF614065895}"/>
+              </a:ext>
+            </a:extLst>
+          </p:cNvPr>
+          <p:cNvCxnSpPr>
+            <a:cxnSpLocks/>
+            <a:endCxn id="6" idx="2"/>
+          </p:cNvCxnSpPr>
+          <p:nvPr/>
+        </p:nvCxnSpPr>
+        <p:spPr>
+          <a:xfrm flipV="1">
+            <a:off x="2419194" y="2796024"/>
+            <a:ext cx="0" cy="356808"/>
+          </a:xfrm>
+          <a:prstGeom prst="straightConnector1">
+            <a:avLst/>
+          </a:prstGeom>
+          <a:ln w="15875">
+            <a:solidFill>
+              <a:schemeClr val="tx1"/>
+            </a:solidFill>
+            <a:tailEnd type="arrow"/>
+          </a:ln>
+        </p:spPr>
+        <p:style>
+          <a:lnRef idx="1">
+            <a:schemeClr val="accent1"/>
+          </a:lnRef>
+          <a:fillRef idx="0">
+            <a:schemeClr val="accent1"/>
+          </a:fillRef>
+          <a:effectRef idx="0">
+            <a:schemeClr val="accent1"/>
+          </a:effectRef>
+          <a:fontRef idx="minor">
+            <a:schemeClr val="tx1"/>
+          </a:fontRef>
+        </p:style>
+      </p:cxnSp>
+      <p:cxnSp>
+        <p:nvCxnSpPr>
+          <p:cNvPr id="102" name="Straight Connector 101">
+            <a:extLst>
+              <a:ext uri="{FF2B5EF4-FFF2-40B4-BE49-F238E27FC236}">
+                <a16:creationId xmlns:a16="http://schemas.microsoft.com/office/drawing/2014/main" id="{9895BA75-5971-8BAA-2BC9-F0E8E53A9FDC}"/>
+              </a:ext>
+            </a:extLst>
+          </p:cNvPr>
+          <p:cNvCxnSpPr>
+            <a:cxnSpLocks/>
+          </p:cNvCxnSpPr>
+          <p:nvPr/>
+        </p:nvCxnSpPr>
+        <p:spPr>
+          <a:xfrm>
+            <a:off x="2411869" y="3150359"/>
+            <a:ext cx="5157001" cy="2473"/>
+          </a:xfrm>
+          <a:prstGeom prst="line">
+            <a:avLst/>
+          </a:prstGeom>
+          <a:ln w="15875">
+            <a:solidFill>
+              <a:schemeClr val="tx1"/>
+            </a:solidFill>
+          </a:ln>
+        </p:spPr>
+        <p:style>
+          <a:lnRef idx="1">
+            <a:schemeClr val="accent1"/>
+          </a:lnRef>
+          <a:fillRef idx="0">
+            <a:schemeClr val="accent1"/>
+          </a:fillRef>
+          <a:effectRef idx="0">
+            <a:schemeClr val="accent1"/>
+          </a:effectRef>
+          <a:fontRef idx="minor">
+            <a:schemeClr val="tx1"/>
+          </a:fontRef>
+        </p:style>
+      </p:cxnSp>
       <p:sp>
         <p:nvSpPr>
-          <p:cNvPr id="90" name="Rectangle: Rounded Corners 89">
+          <p:cNvPr id="114" name="Rectangle: Rounded Corners 172">
             <a:extLst>
               <a:ext uri="{FF2B5EF4-FFF2-40B4-BE49-F238E27FC236}">
-                <a16:creationId xmlns:a16="http://schemas.microsoft.com/office/drawing/2014/main" id="{21FA8B1F-6994-B2C6-D064-C78CFD417ABB}"/>
+                <a16:creationId xmlns:a16="http://schemas.microsoft.com/office/drawing/2014/main" id="{E9516B38-BE9F-6BA3-4AA3-4C0DEE4F6CA0}"/>
               </a:ext>
             </a:extLst>
           </p:cNvPr>
@@ -7980,16 +11388,18 @@
         </p:nvSpPr>
         <p:spPr>
           <a:xfrm>
-            <a:off x="10694517" y="2123365"/>
-            <a:ext cx="1171991" cy="2168838"/>
+            <a:off x="6839572" y="2256208"/>
+            <a:ext cx="1458595" cy="547435"/>
           </a:xfrm>
           <a:prstGeom prst="roundRect">
             <a:avLst>
-              <a:gd name="adj" fmla="val 5949"/>
+              <a:gd name="adj" fmla="val 8293"/>
             </a:avLst>
           </a:prstGeom>
-          <a:noFill/>
-          <a:ln w="19050">
+          <a:solidFill>
+            <a:srgbClr val="B6D5F9"/>
+          </a:solidFill>
+          <a:ln>
             <a:solidFill>
               <a:schemeClr val="tx1"/>
             </a:solidFill>
@@ -8016,14 +11426,3029 @@
           <a:lstStyle/>
           <a:p>
             <a:pPr algn="ctr"/>
+            <a:r>
+              <a:rPr lang="en-US" sz="1400" b="1" dirty="0">
+                <a:solidFill>
+                  <a:schemeClr val="tx1"/>
+                </a:solidFill>
+              </a:rPr>
+              <a:t>Finish All Steps?</a:t>
+            </a:r>
+          </a:p>
+        </p:txBody>
+      </p:sp>
+      <p:cxnSp>
+        <p:nvCxnSpPr>
+          <p:cNvPr id="124" name="Straight Arrow Connector 156">
+            <a:extLst>
+              <a:ext uri="{FF2B5EF4-FFF2-40B4-BE49-F238E27FC236}">
+                <a16:creationId xmlns:a16="http://schemas.microsoft.com/office/drawing/2014/main" id="{3E744B9C-B5FE-52D1-6C11-A09B9E318526}"/>
+              </a:ext>
+            </a:extLst>
+          </p:cNvPr>
+          <p:cNvCxnSpPr>
+            <a:cxnSpLocks/>
+            <a:stCxn id="38" idx="3"/>
+            <a:endCxn id="114" idx="1"/>
+          </p:cNvCxnSpPr>
+          <p:nvPr/>
+        </p:nvCxnSpPr>
+        <p:spPr>
+          <a:xfrm flipV="1">
+            <a:off x="6575666" y="2529926"/>
+            <a:ext cx="263906" cy="1454"/>
+          </a:xfrm>
+          <a:prstGeom prst="straightConnector1">
+            <a:avLst/>
+          </a:prstGeom>
+          <a:ln w="15875">
+            <a:solidFill>
+              <a:schemeClr val="tx1"/>
+            </a:solidFill>
+            <a:tailEnd type="arrow"/>
+          </a:ln>
+        </p:spPr>
+        <p:style>
+          <a:lnRef idx="1">
+            <a:schemeClr val="accent1"/>
+          </a:lnRef>
+          <a:fillRef idx="0">
+            <a:schemeClr val="accent1"/>
+          </a:fillRef>
+          <a:effectRef idx="0">
+            <a:schemeClr val="accent1"/>
+          </a:effectRef>
+          <a:fontRef idx="minor">
+            <a:schemeClr val="tx1"/>
+          </a:fontRef>
+        </p:style>
+      </p:cxnSp>
+      <p:sp>
+        <p:nvSpPr>
+          <p:cNvPr id="140" name="Rectangle: Rounded Corners 85">
+            <a:extLst>
+              <a:ext uri="{FF2B5EF4-FFF2-40B4-BE49-F238E27FC236}">
+                <a16:creationId xmlns:a16="http://schemas.microsoft.com/office/drawing/2014/main" id="{5F561C93-4F29-6EDA-5517-26AF6107428A}"/>
+              </a:ext>
+            </a:extLst>
+          </p:cNvPr>
+          <p:cNvSpPr/>
+          <p:nvPr/>
+        </p:nvSpPr>
+        <p:spPr>
+          <a:xfrm>
+            <a:off x="10867901" y="5305824"/>
+            <a:ext cx="515545" cy="403382"/>
+          </a:xfrm>
+          <a:prstGeom prst="roundRect">
+            <a:avLst>
+              <a:gd name="adj" fmla="val 13117"/>
+            </a:avLst>
+          </a:prstGeom>
+          <a:solidFill>
+            <a:schemeClr val="accent5">
+              <a:lumMod val="20000"/>
+              <a:lumOff val="80000"/>
+            </a:schemeClr>
+          </a:solidFill>
+          <a:ln w="15875">
+            <a:solidFill>
+              <a:schemeClr val="tx1"/>
+            </a:solidFill>
+          </a:ln>
+        </p:spPr>
+        <p:style>
+          <a:lnRef idx="2">
+            <a:schemeClr val="accent1">
+              <a:shade val="15000"/>
+            </a:schemeClr>
+          </a:lnRef>
+          <a:fillRef idx="1">
+            <a:schemeClr val="accent1"/>
+          </a:fillRef>
+          <a:effectRef idx="0">
+            <a:schemeClr val="accent1"/>
+          </a:effectRef>
+          <a:fontRef idx="minor">
+            <a:schemeClr val="lt1"/>
+          </a:fontRef>
+        </p:style>
+        <p:txBody>
+          <a:bodyPr rtlCol="0" anchor="ctr"/>
+          <a:lstStyle/>
+          <a:p>
+            <a:pPr algn="ctr"/>
             <a:endParaRPr lang="en-US" dirty="0"/>
+          </a:p>
+        </p:txBody>
+      </p:sp>
+      <p:sp>
+        <p:nvSpPr>
+          <p:cNvPr id="142" name="Rectangle 141">
+            <a:extLst>
+              <a:ext uri="{FF2B5EF4-FFF2-40B4-BE49-F238E27FC236}">
+                <a16:creationId xmlns:a16="http://schemas.microsoft.com/office/drawing/2014/main" id="{89FAD570-3FFE-F3AC-DE26-D54614CA5722}"/>
+              </a:ext>
+            </a:extLst>
+          </p:cNvPr>
+          <p:cNvSpPr/>
+          <p:nvPr/>
+        </p:nvSpPr>
+        <p:spPr>
+          <a:xfrm>
+            <a:off x="11291226" y="5188000"/>
+            <a:ext cx="1331840" cy="625278"/>
+          </a:xfrm>
+          <a:prstGeom prst="rect">
+            <a:avLst/>
+          </a:prstGeom>
+          <a:noFill/>
+          <a:ln>
+            <a:noFill/>
+          </a:ln>
+        </p:spPr>
+        <p:style>
+          <a:lnRef idx="2">
+            <a:schemeClr val="accent1">
+              <a:shade val="15000"/>
+            </a:schemeClr>
+          </a:lnRef>
+          <a:fillRef idx="1">
+            <a:schemeClr val="accent1"/>
+          </a:fillRef>
+          <a:effectRef idx="0">
+            <a:schemeClr val="accent1"/>
+          </a:effectRef>
+          <a:fontRef idx="minor">
+            <a:schemeClr val="lt1"/>
+          </a:fontRef>
+        </p:style>
+        <p:txBody>
+          <a:bodyPr rtlCol="0" anchor="ctr"/>
+          <a:lstStyle/>
+          <a:p>
+            <a:pPr algn="ctr"/>
+            <a:r>
+              <a:rPr lang="en-US" sz="1600" b="1" dirty="0">
+                <a:solidFill>
+                  <a:schemeClr val="tx1"/>
+                </a:solidFill>
+              </a:rPr>
+              <a:t>Data Collection</a:t>
+            </a:r>
+          </a:p>
+        </p:txBody>
+      </p:sp>
+      <p:sp>
+        <p:nvSpPr>
+          <p:cNvPr id="144" name="Rectangle: Rounded Corners 85">
+            <a:extLst>
+              <a:ext uri="{FF2B5EF4-FFF2-40B4-BE49-F238E27FC236}">
+                <a16:creationId xmlns:a16="http://schemas.microsoft.com/office/drawing/2014/main" id="{6AB1B630-D5FD-62CC-0A99-A4F21F8ED7C4}"/>
+              </a:ext>
+            </a:extLst>
+          </p:cNvPr>
+          <p:cNvSpPr/>
+          <p:nvPr/>
+        </p:nvSpPr>
+        <p:spPr>
+          <a:xfrm>
+            <a:off x="10863088" y="4631128"/>
+            <a:ext cx="515545" cy="403382"/>
+          </a:xfrm>
+          <a:prstGeom prst="roundRect">
+            <a:avLst>
+              <a:gd name="adj" fmla="val 13117"/>
+            </a:avLst>
+          </a:prstGeom>
+          <a:solidFill>
+            <a:schemeClr val="accent3">
+              <a:lumMod val="20000"/>
+              <a:lumOff val="80000"/>
+            </a:schemeClr>
+          </a:solidFill>
+          <a:ln w="15875">
+            <a:solidFill>
+              <a:schemeClr val="tx1"/>
+            </a:solidFill>
+          </a:ln>
+        </p:spPr>
+        <p:style>
+          <a:lnRef idx="2">
+            <a:schemeClr val="accent1">
+              <a:shade val="15000"/>
+            </a:schemeClr>
+          </a:lnRef>
+          <a:fillRef idx="1">
+            <a:schemeClr val="accent1"/>
+          </a:fillRef>
+          <a:effectRef idx="0">
+            <a:schemeClr val="accent1"/>
+          </a:effectRef>
+          <a:fontRef idx="minor">
+            <a:schemeClr val="lt1"/>
+          </a:fontRef>
+        </p:style>
+        <p:txBody>
+          <a:bodyPr rtlCol="0" anchor="ctr"/>
+          <a:lstStyle/>
+          <a:p>
+            <a:pPr algn="ctr"/>
+            <a:endParaRPr lang="en-US" dirty="0"/>
+          </a:p>
+        </p:txBody>
+      </p:sp>
+      <p:sp>
+        <p:nvSpPr>
+          <p:cNvPr id="146" name="Rectangle 145">
+            <a:extLst>
+              <a:ext uri="{FF2B5EF4-FFF2-40B4-BE49-F238E27FC236}">
+                <a16:creationId xmlns:a16="http://schemas.microsoft.com/office/drawing/2014/main" id="{50FF2D54-FF53-6E08-115E-8693CD851259}"/>
+              </a:ext>
+            </a:extLst>
+          </p:cNvPr>
+          <p:cNvSpPr/>
+          <p:nvPr/>
+        </p:nvSpPr>
+        <p:spPr>
+          <a:xfrm>
+            <a:off x="11286413" y="4513304"/>
+            <a:ext cx="1331840" cy="625278"/>
+          </a:xfrm>
+          <a:prstGeom prst="rect">
+            <a:avLst/>
+          </a:prstGeom>
+          <a:noFill/>
+          <a:ln>
+            <a:noFill/>
+          </a:ln>
+        </p:spPr>
+        <p:style>
+          <a:lnRef idx="2">
+            <a:schemeClr val="accent1">
+              <a:shade val="15000"/>
+            </a:schemeClr>
+          </a:lnRef>
+          <a:fillRef idx="1">
+            <a:schemeClr val="accent1"/>
+          </a:fillRef>
+          <a:effectRef idx="0">
+            <a:schemeClr val="accent1"/>
+          </a:effectRef>
+          <a:fontRef idx="minor">
+            <a:schemeClr val="lt1"/>
+          </a:fontRef>
+        </p:style>
+        <p:txBody>
+          <a:bodyPr rtlCol="0" anchor="ctr"/>
+          <a:lstStyle/>
+          <a:p>
+            <a:pPr algn="ctr"/>
+            <a:r>
+              <a:rPr lang="en-US" sz="1600" b="1" dirty="0">
+                <a:solidFill>
+                  <a:schemeClr val="tx1"/>
+                </a:solidFill>
+              </a:rPr>
+              <a:t>Model Training</a:t>
+            </a:r>
+          </a:p>
+        </p:txBody>
+      </p:sp>
+      <p:sp>
+        <p:nvSpPr>
+          <p:cNvPr id="174" name="Rectangle 173">
+            <a:extLst>
+              <a:ext uri="{FF2B5EF4-FFF2-40B4-BE49-F238E27FC236}">
+                <a16:creationId xmlns:a16="http://schemas.microsoft.com/office/drawing/2014/main" id="{473FB666-1EDC-D9E5-16B2-0EA732777D39}"/>
+              </a:ext>
+            </a:extLst>
+          </p:cNvPr>
+          <p:cNvSpPr/>
+          <p:nvPr/>
+        </p:nvSpPr>
+        <p:spPr>
+          <a:xfrm>
+            <a:off x="8242979" y="2202471"/>
+            <a:ext cx="521920" cy="318890"/>
+          </a:xfrm>
+          <a:prstGeom prst="rect">
+            <a:avLst/>
+          </a:prstGeom>
+          <a:noFill/>
+          <a:ln>
+            <a:noFill/>
+          </a:ln>
+        </p:spPr>
+        <p:style>
+          <a:lnRef idx="2">
+            <a:schemeClr val="accent1">
+              <a:shade val="15000"/>
+            </a:schemeClr>
+          </a:lnRef>
+          <a:fillRef idx="1">
+            <a:schemeClr val="accent1"/>
+          </a:fillRef>
+          <a:effectRef idx="0">
+            <a:schemeClr val="accent1"/>
+          </a:effectRef>
+          <a:fontRef idx="minor">
+            <a:schemeClr val="lt1"/>
+          </a:fontRef>
+        </p:style>
+        <p:txBody>
+          <a:bodyPr rtlCol="0" anchor="ctr"/>
+          <a:lstStyle/>
+          <a:p>
+            <a:pPr algn="ctr"/>
+            <a:r>
+              <a:rPr lang="en-US" sz="1400" b="1" dirty="0">
+                <a:solidFill>
+                  <a:schemeClr val="tx1"/>
+                </a:solidFill>
+              </a:rPr>
+              <a:t>Yes</a:t>
+            </a:r>
+          </a:p>
+        </p:txBody>
+      </p:sp>
+      <p:sp>
+        <p:nvSpPr>
+          <p:cNvPr id="179" name="Rectangle 178">
+            <a:extLst>
+              <a:ext uri="{FF2B5EF4-FFF2-40B4-BE49-F238E27FC236}">
+                <a16:creationId xmlns:a16="http://schemas.microsoft.com/office/drawing/2014/main" id="{34D9BA20-48CF-C236-8B2B-67FF4450D5A9}"/>
+              </a:ext>
+            </a:extLst>
+          </p:cNvPr>
+          <p:cNvSpPr/>
+          <p:nvPr/>
+        </p:nvSpPr>
+        <p:spPr>
+          <a:xfrm>
+            <a:off x="7062194" y="2798507"/>
+            <a:ext cx="521920" cy="318890"/>
+          </a:xfrm>
+          <a:prstGeom prst="rect">
+            <a:avLst/>
+          </a:prstGeom>
+          <a:noFill/>
+          <a:ln>
+            <a:noFill/>
+          </a:ln>
+        </p:spPr>
+        <p:style>
+          <a:lnRef idx="2">
+            <a:schemeClr val="accent1">
+              <a:shade val="15000"/>
+            </a:schemeClr>
+          </a:lnRef>
+          <a:fillRef idx="1">
+            <a:schemeClr val="accent1"/>
+          </a:fillRef>
+          <a:effectRef idx="0">
+            <a:schemeClr val="accent1"/>
+          </a:effectRef>
+          <a:fontRef idx="minor">
+            <a:schemeClr val="lt1"/>
+          </a:fontRef>
+        </p:style>
+        <p:txBody>
+          <a:bodyPr rtlCol="0" anchor="ctr"/>
+          <a:lstStyle/>
+          <a:p>
+            <a:pPr algn="ctr"/>
+            <a:r>
+              <a:rPr lang="en-US" sz="1400" b="1" dirty="0">
+                <a:solidFill>
+                  <a:schemeClr val="tx1"/>
+                </a:solidFill>
+              </a:rPr>
+              <a:t>No</a:t>
+            </a:r>
+          </a:p>
+        </p:txBody>
+      </p:sp>
+      <p:sp>
+        <p:nvSpPr>
+          <p:cNvPr id="187" name="Rectangle: Rounded Corners 85">
+            <a:extLst>
+              <a:ext uri="{FF2B5EF4-FFF2-40B4-BE49-F238E27FC236}">
+                <a16:creationId xmlns:a16="http://schemas.microsoft.com/office/drawing/2014/main" id="{37734C0E-4250-17FD-B656-B0C60F8E548F}"/>
+              </a:ext>
+            </a:extLst>
+          </p:cNvPr>
+          <p:cNvSpPr/>
+          <p:nvPr/>
+        </p:nvSpPr>
+        <p:spPr>
+          <a:xfrm>
+            <a:off x="10864289" y="5978666"/>
+            <a:ext cx="515545" cy="403382"/>
+          </a:xfrm>
+          <a:prstGeom prst="roundRect">
+            <a:avLst>
+              <a:gd name="adj" fmla="val 13117"/>
+            </a:avLst>
+          </a:prstGeom>
+          <a:solidFill>
+            <a:schemeClr val="accent4">
+              <a:lumMod val="20000"/>
+              <a:lumOff val="80000"/>
+            </a:schemeClr>
+          </a:solidFill>
+          <a:ln w="15875">
+            <a:solidFill>
+              <a:schemeClr val="tx1"/>
+            </a:solidFill>
+          </a:ln>
+        </p:spPr>
+        <p:style>
+          <a:lnRef idx="2">
+            <a:schemeClr val="accent1">
+              <a:shade val="15000"/>
+            </a:schemeClr>
+          </a:lnRef>
+          <a:fillRef idx="1">
+            <a:schemeClr val="accent1"/>
+          </a:fillRef>
+          <a:effectRef idx="0">
+            <a:schemeClr val="accent1"/>
+          </a:effectRef>
+          <a:fontRef idx="minor">
+            <a:schemeClr val="lt1"/>
+          </a:fontRef>
+        </p:style>
+        <p:txBody>
+          <a:bodyPr rtlCol="0" anchor="ctr"/>
+          <a:lstStyle/>
+          <a:p>
+            <a:pPr algn="ctr"/>
+            <a:endParaRPr lang="en-US" dirty="0"/>
+          </a:p>
+        </p:txBody>
+      </p:sp>
+      <p:sp>
+        <p:nvSpPr>
+          <p:cNvPr id="189" name="Rectangle 188">
+            <a:extLst>
+              <a:ext uri="{FF2B5EF4-FFF2-40B4-BE49-F238E27FC236}">
+                <a16:creationId xmlns:a16="http://schemas.microsoft.com/office/drawing/2014/main" id="{02016550-3D8E-356C-7587-707516D32C2F}"/>
+              </a:ext>
+            </a:extLst>
+          </p:cNvPr>
+          <p:cNvSpPr/>
+          <p:nvPr/>
+        </p:nvSpPr>
+        <p:spPr>
+          <a:xfrm>
+            <a:off x="11283958" y="5857895"/>
+            <a:ext cx="1331840" cy="625278"/>
+          </a:xfrm>
+          <a:prstGeom prst="rect">
+            <a:avLst/>
+          </a:prstGeom>
+          <a:noFill/>
+          <a:ln>
+            <a:noFill/>
+          </a:ln>
+        </p:spPr>
+        <p:style>
+          <a:lnRef idx="2">
+            <a:schemeClr val="accent1">
+              <a:shade val="15000"/>
+            </a:schemeClr>
+          </a:lnRef>
+          <a:fillRef idx="1">
+            <a:schemeClr val="accent1"/>
+          </a:fillRef>
+          <a:effectRef idx="0">
+            <a:schemeClr val="accent1"/>
+          </a:effectRef>
+          <a:fontRef idx="minor">
+            <a:schemeClr val="lt1"/>
+          </a:fontRef>
+        </p:style>
+        <p:txBody>
+          <a:bodyPr rtlCol="0" anchor="ctr"/>
+          <a:lstStyle/>
+          <a:p>
+            <a:pPr algn="ctr"/>
+            <a:r>
+              <a:rPr lang="en-US" sz="1600" b="1" dirty="0">
+                <a:solidFill>
+                  <a:schemeClr val="tx1"/>
+                </a:solidFill>
+              </a:rPr>
+              <a:t>Model Evaluation</a:t>
+            </a:r>
+          </a:p>
+        </p:txBody>
+      </p:sp>
+      <p:grpSp>
+        <p:nvGrpSpPr>
+          <p:cNvPr id="196" name="Group 195">
+            <a:extLst>
+              <a:ext uri="{FF2B5EF4-FFF2-40B4-BE49-F238E27FC236}">
+                <a16:creationId xmlns:a16="http://schemas.microsoft.com/office/drawing/2014/main" id="{1CB3B73F-C5FF-146E-A40F-972D7E958305}"/>
+              </a:ext>
+            </a:extLst>
+          </p:cNvPr>
+          <p:cNvGrpSpPr/>
+          <p:nvPr/>
+        </p:nvGrpSpPr>
+        <p:grpSpPr>
+          <a:xfrm>
+            <a:off x="8991318" y="2468309"/>
+            <a:ext cx="1418319" cy="2066905"/>
+            <a:chOff x="8661295" y="2101095"/>
+            <a:chExt cx="1418319" cy="2066905"/>
+          </a:xfrm>
+        </p:grpSpPr>
+        <p:sp>
+          <p:nvSpPr>
+            <p:cNvPr id="171" name="Rectangle: Rounded Corners 57">
+              <a:extLst>
+                <a:ext uri="{FF2B5EF4-FFF2-40B4-BE49-F238E27FC236}">
+                  <a16:creationId xmlns:a16="http://schemas.microsoft.com/office/drawing/2014/main" id="{9B74B3E6-CC01-BCDB-9A94-1C02D8698EF7}"/>
+                </a:ext>
+              </a:extLst>
+            </p:cNvPr>
+            <p:cNvSpPr/>
+            <p:nvPr/>
+          </p:nvSpPr>
+          <p:spPr>
+            <a:xfrm>
+              <a:off x="8661295" y="2101095"/>
+              <a:ext cx="1418319" cy="2066905"/>
+            </a:xfrm>
+            <a:prstGeom prst="roundRect">
+              <a:avLst>
+                <a:gd name="adj" fmla="val 6825"/>
+              </a:avLst>
+            </a:prstGeom>
+            <a:solidFill>
+              <a:schemeClr val="accent4">
+                <a:lumMod val="20000"/>
+                <a:lumOff val="80000"/>
+              </a:schemeClr>
+            </a:solidFill>
+            <a:ln>
+              <a:noFill/>
+            </a:ln>
+          </p:spPr>
+          <p:style>
+            <a:lnRef idx="2">
+              <a:schemeClr val="accent1">
+                <a:shade val="15000"/>
+              </a:schemeClr>
+            </a:lnRef>
+            <a:fillRef idx="1">
+              <a:schemeClr val="accent1"/>
+            </a:fillRef>
+            <a:effectRef idx="0">
+              <a:schemeClr val="accent1"/>
+            </a:effectRef>
+            <a:fontRef idx="minor">
+              <a:schemeClr val="lt1"/>
+            </a:fontRef>
+          </p:style>
+          <p:txBody>
+            <a:bodyPr rtlCol="0" anchor="ctr"/>
+            <a:lstStyle/>
+            <a:p>
+              <a:endParaRPr lang="en-US" sz="1400" b="1" dirty="0">
+                <a:solidFill>
+                  <a:schemeClr val="tx1"/>
+                </a:solidFill>
+              </a:endParaRPr>
+            </a:p>
+          </p:txBody>
+        </p:sp>
+        <p:sp>
+          <p:nvSpPr>
+            <p:cNvPr id="191" name="Rectangle 190">
+              <a:extLst>
+                <a:ext uri="{FF2B5EF4-FFF2-40B4-BE49-F238E27FC236}">
+                  <a16:creationId xmlns:a16="http://schemas.microsoft.com/office/drawing/2014/main" id="{F84E32DC-1E59-9E2B-4587-15CEFEE2D341}"/>
+                </a:ext>
+              </a:extLst>
+            </p:cNvPr>
+            <p:cNvSpPr/>
+            <p:nvPr/>
+          </p:nvSpPr>
+          <p:spPr>
+            <a:xfrm>
+              <a:off x="8701415" y="2268841"/>
+              <a:ext cx="1344811" cy="318890"/>
+            </a:xfrm>
+            <a:prstGeom prst="rect">
+              <a:avLst/>
+            </a:prstGeom>
+            <a:noFill/>
+            <a:ln>
+              <a:noFill/>
+            </a:ln>
+          </p:spPr>
+          <p:style>
+            <a:lnRef idx="2">
+              <a:schemeClr val="accent1">
+                <a:shade val="15000"/>
+              </a:schemeClr>
+            </a:lnRef>
+            <a:fillRef idx="1">
+              <a:schemeClr val="accent1"/>
+            </a:fillRef>
+            <a:effectRef idx="0">
+              <a:schemeClr val="accent1"/>
+            </a:effectRef>
+            <a:fontRef idx="minor">
+              <a:schemeClr val="lt1"/>
+            </a:fontRef>
+          </p:style>
+          <p:txBody>
+            <a:bodyPr rtlCol="0" anchor="ctr"/>
+            <a:lstStyle/>
+            <a:p>
+              <a:pPr algn="ctr"/>
+              <a:r>
+                <a:rPr lang="en-US" b="1" dirty="0">
+                  <a:solidFill>
+                    <a:schemeClr val="tx1"/>
+                  </a:solidFill>
+                </a:rPr>
+                <a:t>Evaluate</a:t>
+              </a:r>
+            </a:p>
+          </p:txBody>
+        </p:sp>
+        <p:sp>
+          <p:nvSpPr>
+            <p:cNvPr id="195" name="Rectangle 194">
+              <a:extLst>
+                <a:ext uri="{FF2B5EF4-FFF2-40B4-BE49-F238E27FC236}">
+                  <a16:creationId xmlns:a16="http://schemas.microsoft.com/office/drawing/2014/main" id="{1244A6CC-03BD-C7B2-EC8F-B18FAB4BBA3B}"/>
+                </a:ext>
+              </a:extLst>
+            </p:cNvPr>
+            <p:cNvSpPr/>
+            <p:nvPr/>
+          </p:nvSpPr>
+          <p:spPr>
+            <a:xfrm>
+              <a:off x="8692139" y="2521271"/>
+              <a:ext cx="1350912" cy="1602219"/>
+            </a:xfrm>
+            <a:prstGeom prst="rect">
+              <a:avLst/>
+            </a:prstGeom>
+            <a:noFill/>
+            <a:ln>
+              <a:noFill/>
+            </a:ln>
+          </p:spPr>
+          <p:style>
+            <a:lnRef idx="2">
+              <a:schemeClr val="accent1">
+                <a:shade val="15000"/>
+              </a:schemeClr>
+            </a:lnRef>
+            <a:fillRef idx="1">
+              <a:schemeClr val="accent1"/>
+            </a:fillRef>
+            <a:effectRef idx="0">
+              <a:schemeClr val="accent1"/>
+            </a:effectRef>
+            <a:fontRef idx="minor">
+              <a:schemeClr val="lt1"/>
+            </a:fontRef>
+          </p:style>
+          <p:txBody>
+            <a:bodyPr rtlCol="0" anchor="ctr"/>
+            <a:lstStyle/>
+            <a:p>
+              <a:pPr algn="ctr">
+                <a:lnSpc>
+                  <a:spcPct val="125000"/>
+                </a:lnSpc>
+                <a:spcBef>
+                  <a:spcPts val="600"/>
+                </a:spcBef>
+              </a:pPr>
+              <a:r>
+                <a:rPr lang="en-US" sz="1500" b="1" dirty="0">
+                  <a:solidFill>
+                    <a:schemeClr val="tx1"/>
+                  </a:solidFill>
+                </a:rPr>
+                <a:t>Full 300 tasks, Pass@8:</a:t>
+              </a:r>
+            </a:p>
+            <a:p>
+              <a:pPr algn="ctr">
+                <a:lnSpc>
+                  <a:spcPct val="125000"/>
+                </a:lnSpc>
+                <a:spcBef>
+                  <a:spcPts val="600"/>
+                </a:spcBef>
+              </a:pPr>
+              <a:r>
+                <a:rPr lang="en-US" sz="1400" b="1" dirty="0" err="1">
+                  <a:solidFill>
+                    <a:schemeClr val="tx1"/>
+                  </a:solidFill>
+                </a:rPr>
+                <a:t>OSWorld</a:t>
+              </a:r>
+              <a:endParaRPr lang="en-US" sz="1400" b="1" dirty="0">
+                <a:solidFill>
+                  <a:schemeClr val="tx1"/>
+                </a:solidFill>
+              </a:endParaRPr>
+            </a:p>
+            <a:p>
+              <a:pPr algn="ctr">
+                <a:lnSpc>
+                  <a:spcPct val="125000"/>
+                </a:lnSpc>
+                <a:spcBef>
+                  <a:spcPts val="600"/>
+                </a:spcBef>
+              </a:pPr>
+              <a:r>
+                <a:rPr lang="en-US" sz="1400" b="1" dirty="0" err="1">
+                  <a:solidFill>
+                    <a:schemeClr val="tx1"/>
+                  </a:solidFill>
+                </a:rPr>
+                <a:t>OSWorld</a:t>
+              </a:r>
+              <a:r>
+                <a:rPr lang="en-US" sz="1400" b="1" dirty="0">
+                  <a:solidFill>
+                    <a:schemeClr val="tx1"/>
+                  </a:solidFill>
+                </a:rPr>
+                <a:t>-Noisy</a:t>
+              </a:r>
+            </a:p>
+          </p:txBody>
+        </p:sp>
+      </p:grpSp>
+      <p:cxnSp>
+        <p:nvCxnSpPr>
+          <p:cNvPr id="197" name="Straight Connector 196">
+            <a:extLst>
+              <a:ext uri="{FF2B5EF4-FFF2-40B4-BE49-F238E27FC236}">
+                <a16:creationId xmlns:a16="http://schemas.microsoft.com/office/drawing/2014/main" id="{5E569E96-BDB8-FBF1-2510-71A23344FE76}"/>
+              </a:ext>
+            </a:extLst>
+          </p:cNvPr>
+          <p:cNvCxnSpPr>
+            <a:cxnSpLocks/>
+          </p:cNvCxnSpPr>
+          <p:nvPr/>
+        </p:nvCxnSpPr>
+        <p:spPr>
+          <a:xfrm>
+            <a:off x="8304893" y="4794270"/>
+            <a:ext cx="455329" cy="0"/>
+          </a:xfrm>
+          <a:prstGeom prst="line">
+            <a:avLst/>
+          </a:prstGeom>
+          <a:ln w="15875">
+            <a:solidFill>
+              <a:schemeClr val="tx1"/>
+            </a:solidFill>
+          </a:ln>
+        </p:spPr>
+        <p:style>
+          <a:lnRef idx="1">
+            <a:schemeClr val="accent1"/>
+          </a:lnRef>
+          <a:fillRef idx="0">
+            <a:schemeClr val="accent1"/>
+          </a:fillRef>
+          <a:effectRef idx="0">
+            <a:schemeClr val="accent1"/>
+          </a:effectRef>
+          <a:fontRef idx="minor">
+            <a:schemeClr val="tx1"/>
+          </a:fontRef>
+        </p:style>
+      </p:cxnSp>
+      <p:cxnSp>
+        <p:nvCxnSpPr>
+          <p:cNvPr id="198" name="Straight Connector 197">
+            <a:extLst>
+              <a:ext uri="{FF2B5EF4-FFF2-40B4-BE49-F238E27FC236}">
+                <a16:creationId xmlns:a16="http://schemas.microsoft.com/office/drawing/2014/main" id="{ECA31CC6-4E96-90D6-F7A2-3AD0A47062B0}"/>
+              </a:ext>
+            </a:extLst>
+          </p:cNvPr>
+          <p:cNvCxnSpPr>
+            <a:cxnSpLocks/>
+          </p:cNvCxnSpPr>
+          <p:nvPr/>
+        </p:nvCxnSpPr>
+        <p:spPr>
+          <a:xfrm flipV="1">
+            <a:off x="8763564" y="3838783"/>
+            <a:ext cx="0" cy="963986"/>
+          </a:xfrm>
+          <a:prstGeom prst="line">
+            <a:avLst/>
+          </a:prstGeom>
+          <a:ln w="15875">
+            <a:solidFill>
+              <a:schemeClr val="tx1"/>
+            </a:solidFill>
+          </a:ln>
+        </p:spPr>
+        <p:style>
+          <a:lnRef idx="1">
+            <a:schemeClr val="accent1"/>
+          </a:lnRef>
+          <a:fillRef idx="0">
+            <a:schemeClr val="accent1"/>
+          </a:fillRef>
+          <a:effectRef idx="0">
+            <a:schemeClr val="accent1"/>
+          </a:effectRef>
+          <a:fontRef idx="minor">
+            <a:schemeClr val="tx1"/>
+          </a:fontRef>
+        </p:style>
+      </p:cxnSp>
+      <p:cxnSp>
+        <p:nvCxnSpPr>
+          <p:cNvPr id="199" name="Straight Arrow Connector 198">
+            <a:extLst>
+              <a:ext uri="{FF2B5EF4-FFF2-40B4-BE49-F238E27FC236}">
+                <a16:creationId xmlns:a16="http://schemas.microsoft.com/office/drawing/2014/main" id="{4B20FCD5-AE78-7D43-AC2B-A5F97535DE56}"/>
+              </a:ext>
+            </a:extLst>
+          </p:cNvPr>
+          <p:cNvCxnSpPr>
+            <a:cxnSpLocks/>
+          </p:cNvCxnSpPr>
+          <p:nvPr/>
+        </p:nvCxnSpPr>
+        <p:spPr>
+          <a:xfrm>
+            <a:off x="8757927" y="3837800"/>
+            <a:ext cx="230895" cy="983"/>
+          </a:xfrm>
+          <a:prstGeom prst="straightConnector1">
+            <a:avLst/>
+          </a:prstGeom>
+          <a:ln w="15875">
+            <a:solidFill>
+              <a:schemeClr val="tx1"/>
+            </a:solidFill>
+            <a:tailEnd type="arrow"/>
+          </a:ln>
+        </p:spPr>
+        <p:style>
+          <a:lnRef idx="1">
+            <a:schemeClr val="accent1"/>
+          </a:lnRef>
+          <a:fillRef idx="0">
+            <a:schemeClr val="accent1"/>
+          </a:fillRef>
+          <a:effectRef idx="0">
+            <a:schemeClr val="accent1"/>
+          </a:effectRef>
+          <a:fontRef idx="minor">
+            <a:schemeClr val="tx1"/>
+          </a:fontRef>
+        </p:style>
+      </p:cxnSp>
+      <p:cxnSp>
+        <p:nvCxnSpPr>
+          <p:cNvPr id="205" name="Straight Connector 204">
+            <a:extLst>
+              <a:ext uri="{FF2B5EF4-FFF2-40B4-BE49-F238E27FC236}">
+                <a16:creationId xmlns:a16="http://schemas.microsoft.com/office/drawing/2014/main" id="{2F6D22CA-F2CB-93E3-438D-292618C5014A}"/>
+              </a:ext>
+            </a:extLst>
+          </p:cNvPr>
+          <p:cNvCxnSpPr>
+            <a:cxnSpLocks/>
+          </p:cNvCxnSpPr>
+          <p:nvPr/>
+        </p:nvCxnSpPr>
+        <p:spPr>
+          <a:xfrm>
+            <a:off x="8304893" y="2531702"/>
+            <a:ext cx="459377" cy="0"/>
+          </a:xfrm>
+          <a:prstGeom prst="line">
+            <a:avLst/>
+          </a:prstGeom>
+          <a:ln w="15875">
+            <a:solidFill>
+              <a:schemeClr val="tx1"/>
+            </a:solidFill>
+          </a:ln>
+        </p:spPr>
+        <p:style>
+          <a:lnRef idx="1">
+            <a:schemeClr val="accent1"/>
+          </a:lnRef>
+          <a:fillRef idx="0">
+            <a:schemeClr val="accent1"/>
+          </a:fillRef>
+          <a:effectRef idx="0">
+            <a:schemeClr val="accent1"/>
+          </a:effectRef>
+          <a:fontRef idx="minor">
+            <a:schemeClr val="tx1"/>
+          </a:fontRef>
+        </p:style>
+      </p:cxnSp>
+      <p:cxnSp>
+        <p:nvCxnSpPr>
+          <p:cNvPr id="206" name="Straight Connector 205">
+            <a:extLst>
+              <a:ext uri="{FF2B5EF4-FFF2-40B4-BE49-F238E27FC236}">
+                <a16:creationId xmlns:a16="http://schemas.microsoft.com/office/drawing/2014/main" id="{0D967ABF-AB4D-07DE-B40C-3792ED7423E5}"/>
+              </a:ext>
+            </a:extLst>
+          </p:cNvPr>
+          <p:cNvCxnSpPr>
+            <a:cxnSpLocks/>
+          </p:cNvCxnSpPr>
+          <p:nvPr/>
+        </p:nvCxnSpPr>
+        <p:spPr>
+          <a:xfrm flipV="1">
+            <a:off x="8771422" y="2521387"/>
+            <a:ext cx="0" cy="750129"/>
+          </a:xfrm>
+          <a:prstGeom prst="line">
+            <a:avLst/>
+          </a:prstGeom>
+          <a:ln w="15875">
+            <a:solidFill>
+              <a:schemeClr val="tx1"/>
+            </a:solidFill>
+          </a:ln>
+        </p:spPr>
+        <p:style>
+          <a:lnRef idx="1">
+            <a:schemeClr val="accent1"/>
+          </a:lnRef>
+          <a:fillRef idx="0">
+            <a:schemeClr val="accent1"/>
+          </a:fillRef>
+          <a:effectRef idx="0">
+            <a:schemeClr val="accent1"/>
+          </a:effectRef>
+          <a:fontRef idx="minor">
+            <a:schemeClr val="tx1"/>
+          </a:fontRef>
+        </p:style>
+      </p:cxnSp>
+      <p:cxnSp>
+        <p:nvCxnSpPr>
+          <p:cNvPr id="207" name="Straight Arrow Connector 206">
+            <a:extLst>
+              <a:ext uri="{FF2B5EF4-FFF2-40B4-BE49-F238E27FC236}">
+                <a16:creationId xmlns:a16="http://schemas.microsoft.com/office/drawing/2014/main" id="{3EB21787-5B5D-D8E1-9E4A-9C0A06C1769B}"/>
+              </a:ext>
+            </a:extLst>
+          </p:cNvPr>
+          <p:cNvCxnSpPr>
+            <a:cxnSpLocks/>
+          </p:cNvCxnSpPr>
+          <p:nvPr/>
+        </p:nvCxnSpPr>
+        <p:spPr>
+          <a:xfrm>
+            <a:off x="8767453" y="3273659"/>
+            <a:ext cx="220178" cy="0"/>
+          </a:xfrm>
+          <a:prstGeom prst="straightConnector1">
+            <a:avLst/>
+          </a:prstGeom>
+          <a:ln w="15875">
+            <a:solidFill>
+              <a:schemeClr val="tx1"/>
+            </a:solidFill>
+            <a:tailEnd type="arrow"/>
+          </a:ln>
+        </p:spPr>
+        <p:style>
+          <a:lnRef idx="1">
+            <a:schemeClr val="accent1"/>
+          </a:lnRef>
+          <a:fillRef idx="0">
+            <a:schemeClr val="accent1"/>
+          </a:fillRef>
+          <a:effectRef idx="0">
+            <a:schemeClr val="accent1"/>
+          </a:effectRef>
+          <a:fontRef idx="minor">
+            <a:schemeClr val="tx1"/>
+          </a:fontRef>
+        </p:style>
+      </p:cxnSp>
+    </p:spTree>
+  </p:cSld>
+  <p:clrMapOvr>
+    <a:masterClrMapping/>
+  </p:clrMapOvr>
+</p:sld>
+</file>
+
+<file path=ppt/slides/slide3.xml><?xml version="1.0" encoding="utf-8"?>
+<p:sld xmlns:a="http://schemas.openxmlformats.org/drawingml/2006/main" xmlns:r="http://schemas.openxmlformats.org/officeDocument/2006/relationships" xmlns:p="http://schemas.openxmlformats.org/presentationml/2006/main">
+  <p:cSld>
+    <p:spTree>
+      <p:nvGrpSpPr>
+        <p:cNvPr id="1" name=""/>
+        <p:cNvGrpSpPr/>
+        <p:nvPr/>
+      </p:nvGrpSpPr>
+      <p:grpSpPr>
+        <a:xfrm>
+          <a:off x="0" y="0"/>
+          <a:ext cx="0" cy="0"/>
+          <a:chOff x="0" y="0"/>
+          <a:chExt cx="0" cy="0"/>
+        </a:xfrm>
+      </p:grpSpPr>
+      <p:pic>
+        <p:nvPicPr>
+          <p:cNvPr id="5" name="Picture 4">
+            <a:extLst>
+              <a:ext uri="{FF2B5EF4-FFF2-40B4-BE49-F238E27FC236}">
+                <a16:creationId xmlns:a16="http://schemas.microsoft.com/office/drawing/2014/main" id="{40624ACC-0321-AAFF-025B-C59C814B0149}"/>
+              </a:ext>
+            </a:extLst>
+          </p:cNvPr>
+          <p:cNvPicPr>
+            <a:picLocks noChangeAspect="1"/>
+          </p:cNvPicPr>
+          <p:nvPr/>
+        </p:nvPicPr>
+        <p:blipFill>
+          <a:blip r:embed="rId2"/>
+          <a:stretch>
+            <a:fillRect/>
+          </a:stretch>
+        </p:blipFill>
+        <p:spPr>
+          <a:xfrm>
+            <a:off x="2272056" y="3383572"/>
+            <a:ext cx="2526485" cy="1565914"/>
+          </a:xfrm>
+          <a:prstGeom prst="rect">
+            <a:avLst/>
+          </a:prstGeom>
+        </p:spPr>
+      </p:pic>
+      <p:sp>
+        <p:nvSpPr>
+          <p:cNvPr id="9" name="Rectangle: Rounded Corners 8">
+            <a:extLst>
+              <a:ext uri="{FF2B5EF4-FFF2-40B4-BE49-F238E27FC236}">
+                <a16:creationId xmlns:a16="http://schemas.microsoft.com/office/drawing/2014/main" id="{786DCA99-EC04-4B6F-05C9-DEBD5B9198D0}"/>
+              </a:ext>
+            </a:extLst>
+          </p:cNvPr>
+          <p:cNvSpPr/>
+          <p:nvPr/>
+        </p:nvSpPr>
+        <p:spPr>
+          <a:xfrm>
+            <a:off x="2118178" y="790125"/>
+            <a:ext cx="7294336" cy="2241145"/>
+          </a:xfrm>
+          <a:prstGeom prst="roundRect">
+            <a:avLst>
+              <a:gd name="adj" fmla="val 2750"/>
+            </a:avLst>
+          </a:prstGeom>
+          <a:noFill/>
+          <a:ln w="19050">
+            <a:solidFill>
+              <a:schemeClr val="tx1"/>
+            </a:solidFill>
+          </a:ln>
+        </p:spPr>
+        <p:style>
+          <a:lnRef idx="2">
+            <a:schemeClr val="accent1">
+              <a:shade val="15000"/>
+            </a:schemeClr>
+          </a:lnRef>
+          <a:fillRef idx="1">
+            <a:schemeClr val="accent1"/>
+          </a:fillRef>
+          <a:effectRef idx="0">
+            <a:schemeClr val="accent1"/>
+          </a:effectRef>
+          <a:fontRef idx="minor">
+            <a:schemeClr val="lt1"/>
+          </a:fontRef>
+        </p:style>
+        <p:txBody>
+          <a:bodyPr rtlCol="0" anchor="ctr"/>
+          <a:lstStyle/>
+          <a:p>
+            <a:pPr algn="ctr"/>
+            <a:endParaRPr lang="en-US" dirty="0"/>
+          </a:p>
+        </p:txBody>
+      </p:sp>
+      <p:sp>
+        <p:nvSpPr>
+          <p:cNvPr id="11" name="Rectangle 10">
+            <a:extLst>
+              <a:ext uri="{FF2B5EF4-FFF2-40B4-BE49-F238E27FC236}">
+                <a16:creationId xmlns:a16="http://schemas.microsoft.com/office/drawing/2014/main" id="{6E2F583D-57F4-176B-5DAB-567F511100F4}"/>
+              </a:ext>
+            </a:extLst>
+          </p:cNvPr>
+          <p:cNvSpPr/>
+          <p:nvPr/>
+        </p:nvSpPr>
+        <p:spPr>
+          <a:xfrm>
+            <a:off x="2219296" y="790125"/>
+            <a:ext cx="6576408" cy="318890"/>
+          </a:xfrm>
+          <a:prstGeom prst="rect">
+            <a:avLst/>
+          </a:prstGeom>
+          <a:noFill/>
+          <a:ln>
+            <a:noFill/>
+          </a:ln>
+        </p:spPr>
+        <p:style>
+          <a:lnRef idx="2">
+            <a:schemeClr val="accent1">
+              <a:shade val="15000"/>
+            </a:schemeClr>
+          </a:lnRef>
+          <a:fillRef idx="1">
+            <a:schemeClr val="accent1"/>
+          </a:fillRef>
+          <a:effectRef idx="0">
+            <a:schemeClr val="accent1"/>
+          </a:effectRef>
+          <a:fontRef idx="minor">
+            <a:schemeClr val="lt1"/>
+          </a:fontRef>
+        </p:style>
+        <p:txBody>
+          <a:bodyPr rtlCol="0" anchor="ctr"/>
+          <a:lstStyle/>
+          <a:p>
+            <a:r>
+              <a:rPr lang="en-US" sz="1200" dirty="0">
+                <a:solidFill>
+                  <a:schemeClr val="tx1"/>
+                </a:solidFill>
+                <a:latin typeface="Times New Roman" panose="02020603050405020304" pitchFamily="18" charset="0"/>
+                <a:cs typeface="Times New Roman" panose="02020603050405020304" pitchFamily="18" charset="0"/>
+              </a:rPr>
+              <a:t>(a) ENVS vs. RL: Decoupling data collection from model training</a:t>
+            </a:r>
+          </a:p>
+        </p:txBody>
+      </p:sp>
+      <p:sp>
+        <p:nvSpPr>
+          <p:cNvPr id="13" name="Rectangle: Rounded Corners 12">
+            <a:extLst>
+              <a:ext uri="{FF2B5EF4-FFF2-40B4-BE49-F238E27FC236}">
+                <a16:creationId xmlns:a16="http://schemas.microsoft.com/office/drawing/2014/main" id="{37F9A84C-EB79-302C-CED5-2D3BFCF273D1}"/>
+              </a:ext>
+            </a:extLst>
+          </p:cNvPr>
+          <p:cNvSpPr/>
+          <p:nvPr/>
+        </p:nvSpPr>
+        <p:spPr>
+          <a:xfrm>
+            <a:off x="2118179" y="3120322"/>
+            <a:ext cx="2828980" cy="1890963"/>
+          </a:xfrm>
+          <a:prstGeom prst="roundRect">
+            <a:avLst>
+              <a:gd name="adj" fmla="val 2750"/>
+            </a:avLst>
+          </a:prstGeom>
+          <a:noFill/>
+          <a:ln w="19050">
+            <a:solidFill>
+              <a:schemeClr val="tx1"/>
+            </a:solidFill>
+          </a:ln>
+        </p:spPr>
+        <p:style>
+          <a:lnRef idx="2">
+            <a:schemeClr val="accent1">
+              <a:shade val="15000"/>
+            </a:schemeClr>
+          </a:lnRef>
+          <a:fillRef idx="1">
+            <a:schemeClr val="accent1"/>
+          </a:fillRef>
+          <a:effectRef idx="0">
+            <a:schemeClr val="accent1"/>
+          </a:effectRef>
+          <a:fontRef idx="minor">
+            <a:schemeClr val="lt1"/>
+          </a:fontRef>
+        </p:style>
+        <p:txBody>
+          <a:bodyPr rtlCol="0" anchor="ctr"/>
+          <a:lstStyle/>
+          <a:p>
+            <a:pPr algn="ctr"/>
+            <a:endParaRPr lang="en-US" dirty="0"/>
+          </a:p>
+        </p:txBody>
+      </p:sp>
+      <p:sp>
+        <p:nvSpPr>
+          <p:cNvPr id="17" name="Rectangle 16">
+            <a:extLst>
+              <a:ext uri="{FF2B5EF4-FFF2-40B4-BE49-F238E27FC236}">
+                <a16:creationId xmlns:a16="http://schemas.microsoft.com/office/drawing/2014/main" id="{37100636-92B0-78F9-7C57-88B1412CDDD7}"/>
+              </a:ext>
+            </a:extLst>
+          </p:cNvPr>
+          <p:cNvSpPr/>
+          <p:nvPr/>
+        </p:nvSpPr>
+        <p:spPr>
+          <a:xfrm>
+            <a:off x="2219296" y="3115747"/>
+            <a:ext cx="2286093" cy="318890"/>
+          </a:xfrm>
+          <a:prstGeom prst="rect">
+            <a:avLst/>
+          </a:prstGeom>
+          <a:noFill/>
+          <a:ln>
+            <a:noFill/>
+          </a:ln>
+        </p:spPr>
+        <p:style>
+          <a:lnRef idx="2">
+            <a:schemeClr val="accent1">
+              <a:shade val="15000"/>
+            </a:schemeClr>
+          </a:lnRef>
+          <a:fillRef idx="1">
+            <a:schemeClr val="accent1"/>
+          </a:fillRef>
+          <a:effectRef idx="0">
+            <a:schemeClr val="accent1"/>
+          </a:effectRef>
+          <a:fontRef idx="minor">
+            <a:schemeClr val="lt1"/>
+          </a:fontRef>
+        </p:style>
+        <p:txBody>
+          <a:bodyPr rtlCol="0" anchor="ctr"/>
+          <a:lstStyle/>
+          <a:p>
+            <a:r>
+              <a:rPr lang="en-US" sz="1200" dirty="0">
+                <a:solidFill>
+                  <a:schemeClr val="tx1"/>
+                </a:solidFill>
+                <a:latin typeface="Times New Roman" panose="02020603050405020304" pitchFamily="18" charset="0"/>
+                <a:cs typeface="Times New Roman" panose="02020603050405020304" pitchFamily="18" charset="0"/>
+              </a:rPr>
+              <a:t>(b) Compute accuracy frontier</a:t>
+            </a:r>
+          </a:p>
+        </p:txBody>
+      </p:sp>
+      <p:sp>
+        <p:nvSpPr>
+          <p:cNvPr id="21" name="Rectangle: Rounded Corners 20">
+            <a:extLst>
+              <a:ext uri="{FF2B5EF4-FFF2-40B4-BE49-F238E27FC236}">
+                <a16:creationId xmlns:a16="http://schemas.microsoft.com/office/drawing/2014/main" id="{4149D554-3809-99D0-371C-824B98608C2E}"/>
+              </a:ext>
+            </a:extLst>
+          </p:cNvPr>
+          <p:cNvSpPr/>
+          <p:nvPr/>
+        </p:nvSpPr>
+        <p:spPr>
+          <a:xfrm>
+            <a:off x="5048276" y="3121364"/>
+            <a:ext cx="4364239" cy="1889922"/>
+          </a:xfrm>
+          <a:prstGeom prst="roundRect">
+            <a:avLst>
+              <a:gd name="adj" fmla="val 2750"/>
+            </a:avLst>
+          </a:prstGeom>
+          <a:noFill/>
+          <a:ln w="19050">
+            <a:solidFill>
+              <a:schemeClr val="tx1"/>
+            </a:solidFill>
+          </a:ln>
+        </p:spPr>
+        <p:style>
+          <a:lnRef idx="2">
+            <a:schemeClr val="accent1">
+              <a:shade val="15000"/>
+            </a:schemeClr>
+          </a:lnRef>
+          <a:fillRef idx="1">
+            <a:schemeClr val="accent1"/>
+          </a:fillRef>
+          <a:effectRef idx="0">
+            <a:schemeClr val="accent1"/>
+          </a:effectRef>
+          <a:fontRef idx="minor">
+            <a:schemeClr val="lt1"/>
+          </a:fontRef>
+        </p:style>
+        <p:txBody>
+          <a:bodyPr rtlCol="0" anchor="ctr"/>
+          <a:lstStyle/>
+          <a:p>
+            <a:pPr algn="ctr"/>
+            <a:endParaRPr lang="en-US" dirty="0"/>
+          </a:p>
+        </p:txBody>
+      </p:sp>
+      <p:sp>
+        <p:nvSpPr>
+          <p:cNvPr id="23" name="Rectangle 22">
+            <a:extLst>
+              <a:ext uri="{FF2B5EF4-FFF2-40B4-BE49-F238E27FC236}">
+                <a16:creationId xmlns:a16="http://schemas.microsoft.com/office/drawing/2014/main" id="{D474C06F-EF93-593E-E28E-92E913B4CA99}"/>
+              </a:ext>
+            </a:extLst>
+          </p:cNvPr>
+          <p:cNvSpPr/>
+          <p:nvPr/>
+        </p:nvSpPr>
+        <p:spPr>
+          <a:xfrm>
+            <a:off x="5145761" y="3109908"/>
+            <a:ext cx="1842764" cy="318890"/>
+          </a:xfrm>
+          <a:prstGeom prst="rect">
+            <a:avLst/>
+          </a:prstGeom>
+          <a:noFill/>
+          <a:ln>
+            <a:noFill/>
+          </a:ln>
+        </p:spPr>
+        <p:style>
+          <a:lnRef idx="2">
+            <a:schemeClr val="accent1">
+              <a:shade val="15000"/>
+            </a:schemeClr>
+          </a:lnRef>
+          <a:fillRef idx="1">
+            <a:schemeClr val="accent1"/>
+          </a:fillRef>
+          <a:effectRef idx="0">
+            <a:schemeClr val="accent1"/>
+          </a:effectRef>
+          <a:fontRef idx="minor">
+            <a:schemeClr val="lt1"/>
+          </a:fontRef>
+        </p:style>
+        <p:txBody>
+          <a:bodyPr rtlCol="0" anchor="ctr"/>
+          <a:lstStyle/>
+          <a:p>
+            <a:r>
+              <a:rPr lang="en-US" sz="1200" dirty="0">
+                <a:solidFill>
+                  <a:schemeClr val="tx1"/>
+                </a:solidFill>
+                <a:latin typeface="Times New Roman" panose="02020603050405020304" pitchFamily="18" charset="0"/>
+                <a:cs typeface="Times New Roman" panose="02020603050405020304" pitchFamily="18" charset="0"/>
+              </a:rPr>
+              <a:t>(c) </a:t>
+            </a:r>
+            <a:r>
+              <a:rPr lang="en-US" sz="1200" dirty="0" err="1">
+                <a:solidFill>
+                  <a:schemeClr val="tx1"/>
+                </a:solidFill>
+                <a:latin typeface="Times New Roman" panose="02020603050405020304" pitchFamily="18" charset="0"/>
+                <a:cs typeface="Times New Roman" panose="02020603050405020304" pitchFamily="18" charset="0"/>
+              </a:rPr>
+              <a:t>OSWorld</a:t>
+            </a:r>
+            <a:r>
+              <a:rPr lang="en-US" sz="1200" dirty="0">
+                <a:solidFill>
+                  <a:schemeClr val="tx1"/>
+                </a:solidFill>
+                <a:latin typeface="Times New Roman" panose="02020603050405020304" pitchFamily="18" charset="0"/>
+                <a:cs typeface="Times New Roman" panose="02020603050405020304" pitchFamily="18" charset="0"/>
+              </a:rPr>
+              <a:t>-Noisy</a:t>
+            </a:r>
+          </a:p>
+        </p:txBody>
+      </p:sp>
+      <p:pic>
+        <p:nvPicPr>
+          <p:cNvPr id="27" name="Picture 26">
+            <a:extLst>
+              <a:ext uri="{FF2B5EF4-FFF2-40B4-BE49-F238E27FC236}">
+                <a16:creationId xmlns:a16="http://schemas.microsoft.com/office/drawing/2014/main" id="{3098C5B8-499D-7A3D-DBB8-205850046F53}"/>
+              </a:ext>
+            </a:extLst>
+          </p:cNvPr>
+          <p:cNvPicPr>
+            <a:picLocks noChangeAspect="1"/>
+          </p:cNvPicPr>
+          <p:nvPr/>
+        </p:nvPicPr>
+        <p:blipFill>
+          <a:blip r:embed="rId3"/>
+          <a:stretch>
+            <a:fillRect/>
+          </a:stretch>
+        </p:blipFill>
+        <p:spPr>
+          <a:xfrm>
+            <a:off x="5230590" y="3422011"/>
+            <a:ext cx="1559892" cy="877439"/>
+          </a:xfrm>
+          <a:prstGeom prst="rect">
+            <a:avLst/>
+          </a:prstGeom>
+          <a:ln w="15875">
+            <a:solidFill>
+              <a:schemeClr val="tx1"/>
+            </a:solidFill>
+          </a:ln>
+        </p:spPr>
+      </p:pic>
+      <p:sp>
+        <p:nvSpPr>
+          <p:cNvPr id="28" name="Rectangle 27">
+            <a:extLst>
+              <a:ext uri="{FF2B5EF4-FFF2-40B4-BE49-F238E27FC236}">
+                <a16:creationId xmlns:a16="http://schemas.microsoft.com/office/drawing/2014/main" id="{031093D2-FE22-BFAB-FD13-C13087861E42}"/>
+              </a:ext>
+            </a:extLst>
+          </p:cNvPr>
+          <p:cNvSpPr/>
+          <p:nvPr/>
+        </p:nvSpPr>
+        <p:spPr>
+          <a:xfrm>
+            <a:off x="5242173" y="3464934"/>
+            <a:ext cx="739007" cy="606260"/>
+          </a:xfrm>
+          <a:prstGeom prst="rect">
+            <a:avLst/>
+          </a:prstGeom>
+          <a:noFill/>
+          <a:ln w="22225">
+            <a:solidFill>
+              <a:srgbClr val="FF0000"/>
+            </a:solidFill>
+          </a:ln>
+        </p:spPr>
+        <p:style>
+          <a:lnRef idx="2">
+            <a:schemeClr val="accent1">
+              <a:shade val="15000"/>
+            </a:schemeClr>
+          </a:lnRef>
+          <a:fillRef idx="1">
+            <a:schemeClr val="accent1"/>
+          </a:fillRef>
+          <a:effectRef idx="0">
+            <a:schemeClr val="accent1"/>
+          </a:effectRef>
+          <a:fontRef idx="minor">
+            <a:schemeClr val="lt1"/>
+          </a:fontRef>
+        </p:style>
+        <p:txBody>
+          <a:bodyPr rtlCol="0" anchor="ctr"/>
+          <a:lstStyle/>
+          <a:p>
+            <a:pPr algn="ctr"/>
+            <a:endParaRPr lang="en-US"/>
+          </a:p>
+        </p:txBody>
+      </p:sp>
+      <p:sp>
+        <p:nvSpPr>
+          <p:cNvPr id="30" name="Rectangle 29">
+            <a:extLst>
+              <a:ext uri="{FF2B5EF4-FFF2-40B4-BE49-F238E27FC236}">
+                <a16:creationId xmlns:a16="http://schemas.microsoft.com/office/drawing/2014/main" id="{E1BB2485-B905-DA47-5FB2-4483D331BC80}"/>
+              </a:ext>
+            </a:extLst>
+          </p:cNvPr>
+          <p:cNvSpPr/>
+          <p:nvPr/>
+        </p:nvSpPr>
+        <p:spPr>
+          <a:xfrm>
+            <a:off x="6821452" y="3214270"/>
+            <a:ext cx="2184076" cy="442216"/>
+          </a:xfrm>
+          <a:prstGeom prst="rect">
+            <a:avLst/>
+          </a:prstGeom>
+          <a:noFill/>
+          <a:ln>
+            <a:noFill/>
+          </a:ln>
+        </p:spPr>
+        <p:style>
+          <a:lnRef idx="2">
+            <a:schemeClr val="accent1">
+              <a:shade val="15000"/>
+            </a:schemeClr>
+          </a:lnRef>
+          <a:fillRef idx="1">
+            <a:schemeClr val="accent1"/>
+          </a:fillRef>
+          <a:effectRef idx="0">
+            <a:schemeClr val="accent1"/>
+          </a:effectRef>
+          <a:fontRef idx="minor">
+            <a:schemeClr val="lt1"/>
+          </a:fontRef>
+        </p:style>
+        <p:txBody>
+          <a:bodyPr rtlCol="0" anchor="ctr"/>
+          <a:lstStyle/>
+          <a:p>
+            <a:r>
+              <a:rPr lang="en-US" sz="1100" dirty="0">
+                <a:solidFill>
+                  <a:schemeClr val="tx1"/>
+                </a:solidFill>
+                <a:latin typeface="Times New Roman" panose="02020603050405020304" pitchFamily="18" charset="0"/>
+                <a:cs typeface="Times New Roman" panose="02020603050405020304" pitchFamily="18" charset="0"/>
+              </a:rPr>
+              <a:t>Injecting noise:</a:t>
+            </a:r>
+          </a:p>
+          <a:p>
+            <a:r>
+              <a:rPr lang="en-US" sz="1100" dirty="0">
+                <a:solidFill>
+                  <a:schemeClr val="tx1"/>
+                </a:solidFill>
+                <a:latin typeface="Times New Roman" panose="02020603050405020304" pitchFamily="18" charset="0"/>
+                <a:cs typeface="Times New Roman" panose="02020603050405020304" pitchFamily="18" charset="0"/>
+              </a:rPr>
+              <a:t>Simulating human interruption; </a:t>
+            </a:r>
+          </a:p>
+          <a:p>
+            <a:r>
+              <a:rPr lang="en-US" sz="1100" dirty="0">
+                <a:solidFill>
+                  <a:schemeClr val="tx1"/>
+                </a:solidFill>
+                <a:latin typeface="Times New Roman" panose="02020603050405020304" pitchFamily="18" charset="0"/>
+                <a:cs typeface="Times New Roman" panose="02020603050405020304" pitchFamily="18" charset="0"/>
+              </a:rPr>
+              <a:t>Evaluating model robustness.</a:t>
+            </a:r>
+          </a:p>
+        </p:txBody>
+      </p:sp>
+      <p:sp>
+        <p:nvSpPr>
+          <p:cNvPr id="32" name="Rectangle 31">
+            <a:extLst>
+              <a:ext uri="{FF2B5EF4-FFF2-40B4-BE49-F238E27FC236}">
+                <a16:creationId xmlns:a16="http://schemas.microsoft.com/office/drawing/2014/main" id="{9AFA0584-F53F-B01E-5673-261D861A5816}"/>
+              </a:ext>
+            </a:extLst>
+          </p:cNvPr>
+          <p:cNvSpPr/>
+          <p:nvPr/>
+        </p:nvSpPr>
+        <p:spPr>
+          <a:xfrm>
+            <a:off x="5118505" y="4350179"/>
+            <a:ext cx="1375170" cy="584977"/>
+          </a:xfrm>
+          <a:prstGeom prst="rect">
+            <a:avLst/>
+          </a:prstGeom>
+          <a:noFill/>
+          <a:ln>
+            <a:noFill/>
+          </a:ln>
+        </p:spPr>
+        <p:style>
+          <a:lnRef idx="2">
+            <a:schemeClr val="accent1">
+              <a:shade val="15000"/>
+            </a:schemeClr>
+          </a:lnRef>
+          <a:fillRef idx="1">
+            <a:schemeClr val="accent1"/>
+          </a:fillRef>
+          <a:effectRef idx="0">
+            <a:schemeClr val="accent1"/>
+          </a:effectRef>
+          <a:fontRef idx="minor">
+            <a:schemeClr val="lt1"/>
+          </a:fontRef>
+        </p:style>
+        <p:txBody>
+          <a:bodyPr rtlCol="0" anchor="ctr"/>
+          <a:lstStyle/>
+          <a:p>
+            <a:pPr marL="171450" indent="-171450">
+              <a:buFont typeface="Wingdings" panose="05000000000000000000" pitchFamily="2" charset="2"/>
+              <a:buChar char="Ø"/>
+            </a:pPr>
+            <a:r>
+              <a:rPr lang="en-US" sz="1000" dirty="0">
+                <a:solidFill>
+                  <a:schemeClr val="tx1"/>
+                </a:solidFill>
+                <a:latin typeface="Times New Roman" panose="02020603050405020304" pitchFamily="18" charset="0"/>
+                <a:cs typeface="Times New Roman" panose="02020603050405020304" pitchFamily="18" charset="0"/>
+              </a:rPr>
+              <a:t>Notification</a:t>
+            </a:r>
+          </a:p>
+          <a:p>
+            <a:pPr marL="171450" indent="-171450">
+              <a:buFont typeface="Wingdings" panose="05000000000000000000" pitchFamily="2" charset="2"/>
+              <a:buChar char="Ø"/>
+            </a:pPr>
+            <a:r>
+              <a:rPr lang="en-US" sz="1000" dirty="0">
+                <a:solidFill>
+                  <a:schemeClr val="tx1"/>
+                </a:solidFill>
+                <a:latin typeface="Times New Roman" panose="02020603050405020304" pitchFamily="18" charset="0"/>
+                <a:cs typeface="Times New Roman" panose="02020603050405020304" pitchFamily="18" charset="0"/>
+              </a:rPr>
+              <a:t>System Warning</a:t>
+            </a:r>
+          </a:p>
+          <a:p>
+            <a:pPr marL="171450" indent="-171450">
+              <a:buFont typeface="Wingdings" panose="05000000000000000000" pitchFamily="2" charset="2"/>
+              <a:buChar char="Ø"/>
+            </a:pPr>
+            <a:r>
+              <a:rPr lang="en-US" sz="1000" dirty="0">
+                <a:solidFill>
+                  <a:schemeClr val="tx1"/>
+                </a:solidFill>
+                <a:latin typeface="Times New Roman" panose="02020603050405020304" pitchFamily="18" charset="0"/>
+                <a:cs typeface="Times New Roman" panose="02020603050405020304" pitchFamily="18" charset="0"/>
+              </a:rPr>
+              <a:t>Concurrent App</a:t>
+            </a:r>
+          </a:p>
+          <a:p>
+            <a:pPr marL="171450" indent="-171450">
+              <a:buFont typeface="Wingdings" panose="05000000000000000000" pitchFamily="2" charset="2"/>
+              <a:buChar char="Ø"/>
+            </a:pPr>
+            <a:r>
+              <a:rPr lang="en-US" sz="1000" dirty="0">
+                <a:solidFill>
+                  <a:schemeClr val="tx1"/>
+                </a:solidFill>
+                <a:latin typeface="Times New Roman" panose="02020603050405020304" pitchFamily="18" charset="0"/>
+                <a:cs typeface="Times New Roman" panose="02020603050405020304" pitchFamily="18" charset="0"/>
+              </a:rPr>
+              <a:t>etc.</a:t>
+            </a:r>
+          </a:p>
+        </p:txBody>
+      </p:sp>
+      <p:pic>
+        <p:nvPicPr>
+          <p:cNvPr id="34" name="Picture 33">
+            <a:extLst>
+              <a:ext uri="{FF2B5EF4-FFF2-40B4-BE49-F238E27FC236}">
+                <a16:creationId xmlns:a16="http://schemas.microsoft.com/office/drawing/2014/main" id="{36C33EA3-D14E-2536-BA19-0637F03486AE}"/>
+              </a:ext>
+            </a:extLst>
+          </p:cNvPr>
+          <p:cNvPicPr>
+            <a:picLocks noChangeAspect="1"/>
+          </p:cNvPicPr>
+          <p:nvPr/>
+        </p:nvPicPr>
+        <p:blipFill>
+          <a:blip r:embed="rId4"/>
+          <a:srcRect l="84729" t="18580" b="19155"/>
+          <a:stretch>
+            <a:fillRect/>
+          </a:stretch>
+        </p:blipFill>
+        <p:spPr>
+          <a:xfrm>
+            <a:off x="8140701" y="1287148"/>
+            <a:ext cx="1013761" cy="1368689"/>
+          </a:xfrm>
+          <a:prstGeom prst="rect">
+            <a:avLst/>
+          </a:prstGeom>
+        </p:spPr>
+      </p:pic>
+      <p:pic>
+        <p:nvPicPr>
+          <p:cNvPr id="40" name="Picture 39">
+            <a:extLst>
+              <a:ext uri="{FF2B5EF4-FFF2-40B4-BE49-F238E27FC236}">
+                <a16:creationId xmlns:a16="http://schemas.microsoft.com/office/drawing/2014/main" id="{CCD8FD45-2C5C-D4C3-623D-9D56421F1B1F}"/>
+              </a:ext>
+            </a:extLst>
+          </p:cNvPr>
+          <p:cNvPicPr>
+            <a:picLocks noChangeAspect="1"/>
+          </p:cNvPicPr>
+          <p:nvPr/>
+        </p:nvPicPr>
+        <p:blipFill>
+          <a:blip r:embed="rId5"/>
+          <a:stretch>
+            <a:fillRect/>
+          </a:stretch>
+        </p:blipFill>
+        <p:spPr>
+          <a:xfrm>
+            <a:off x="6453059" y="3741709"/>
+            <a:ext cx="1559892" cy="877439"/>
+          </a:xfrm>
+          <a:prstGeom prst="rect">
+            <a:avLst/>
+          </a:prstGeom>
+          <a:ln w="15875">
+            <a:solidFill>
+              <a:schemeClr val="tx1"/>
+            </a:solidFill>
+          </a:ln>
+        </p:spPr>
+      </p:pic>
+      <p:sp>
+        <p:nvSpPr>
+          <p:cNvPr id="42" name="Rectangle 41">
+            <a:extLst>
+              <a:ext uri="{FF2B5EF4-FFF2-40B4-BE49-F238E27FC236}">
+                <a16:creationId xmlns:a16="http://schemas.microsoft.com/office/drawing/2014/main" id="{760C1593-4372-63C9-61C0-6EA4BFBD6720}"/>
+              </a:ext>
+            </a:extLst>
+          </p:cNvPr>
+          <p:cNvSpPr/>
+          <p:nvPr/>
+        </p:nvSpPr>
+        <p:spPr>
+          <a:xfrm>
+            <a:off x="6472109" y="3772177"/>
+            <a:ext cx="1399688" cy="450056"/>
+          </a:xfrm>
+          <a:prstGeom prst="rect">
+            <a:avLst/>
+          </a:prstGeom>
+          <a:noFill/>
+          <a:ln w="22225">
+            <a:solidFill>
+              <a:srgbClr val="FF0000"/>
+            </a:solidFill>
+          </a:ln>
+        </p:spPr>
+        <p:style>
+          <a:lnRef idx="2">
+            <a:schemeClr val="accent1">
+              <a:shade val="15000"/>
+            </a:schemeClr>
+          </a:lnRef>
+          <a:fillRef idx="1">
+            <a:schemeClr val="accent1"/>
+          </a:fillRef>
+          <a:effectRef idx="0">
+            <a:schemeClr val="accent1"/>
+          </a:effectRef>
+          <a:fontRef idx="minor">
+            <a:schemeClr val="lt1"/>
+          </a:fontRef>
+        </p:style>
+        <p:txBody>
+          <a:bodyPr rtlCol="0" anchor="ctr"/>
+          <a:lstStyle/>
+          <a:p>
+            <a:pPr algn="ctr"/>
+            <a:endParaRPr lang="en-US"/>
+          </a:p>
+        </p:txBody>
+      </p:sp>
+      <p:pic>
+        <p:nvPicPr>
+          <p:cNvPr id="44" name="Picture 43">
+            <a:extLst>
+              <a:ext uri="{FF2B5EF4-FFF2-40B4-BE49-F238E27FC236}">
+                <a16:creationId xmlns:a16="http://schemas.microsoft.com/office/drawing/2014/main" id="{63ED1AFE-20E5-D2AE-5D61-4164BE7C51A4}"/>
+              </a:ext>
+            </a:extLst>
+          </p:cNvPr>
+          <p:cNvPicPr>
+            <a:picLocks noChangeAspect="1"/>
+          </p:cNvPicPr>
+          <p:nvPr/>
+        </p:nvPicPr>
+        <p:blipFill>
+          <a:blip r:embed="rId6"/>
+          <a:stretch>
+            <a:fillRect/>
+          </a:stretch>
+        </p:blipFill>
+        <p:spPr>
+          <a:xfrm>
+            <a:off x="2389839" y="1069080"/>
+            <a:ext cx="5523651" cy="1922447"/>
+          </a:xfrm>
+          <a:prstGeom prst="rect">
+            <a:avLst/>
+          </a:prstGeom>
+        </p:spPr>
+      </p:pic>
+      <p:pic>
+        <p:nvPicPr>
+          <p:cNvPr id="36" name="Picture 35">
+            <a:extLst>
+              <a:ext uri="{FF2B5EF4-FFF2-40B4-BE49-F238E27FC236}">
+                <a16:creationId xmlns:a16="http://schemas.microsoft.com/office/drawing/2014/main" id="{2F657A7C-0268-FC65-BBC5-E789997CF2CE}"/>
+              </a:ext>
+            </a:extLst>
+          </p:cNvPr>
+          <p:cNvPicPr>
+            <a:picLocks noChangeAspect="1"/>
+          </p:cNvPicPr>
+          <p:nvPr/>
+        </p:nvPicPr>
+        <p:blipFill>
+          <a:blip r:embed="rId7"/>
+          <a:stretch>
+            <a:fillRect/>
+          </a:stretch>
+        </p:blipFill>
+        <p:spPr>
+          <a:xfrm>
+            <a:off x="7640097" y="4027685"/>
+            <a:ext cx="1559892" cy="877439"/>
+          </a:xfrm>
+          <a:prstGeom prst="rect">
+            <a:avLst/>
+          </a:prstGeom>
+          <a:ln w="15875">
+            <a:solidFill>
+              <a:schemeClr val="tx1"/>
+            </a:solidFill>
+          </a:ln>
+        </p:spPr>
+      </p:pic>
+      <p:sp>
+        <p:nvSpPr>
+          <p:cNvPr id="38" name="Rectangle 37">
+            <a:extLst>
+              <a:ext uri="{FF2B5EF4-FFF2-40B4-BE49-F238E27FC236}">
+                <a16:creationId xmlns:a16="http://schemas.microsoft.com/office/drawing/2014/main" id="{C8F5BC6F-E5D0-AD47-7F3C-31C4F547D42D}"/>
+              </a:ext>
+            </a:extLst>
+          </p:cNvPr>
+          <p:cNvSpPr/>
+          <p:nvPr/>
+        </p:nvSpPr>
+        <p:spPr>
+          <a:xfrm>
+            <a:off x="8209569" y="4399389"/>
+            <a:ext cx="420948" cy="163418"/>
+          </a:xfrm>
+          <a:prstGeom prst="rect">
+            <a:avLst/>
+          </a:prstGeom>
+          <a:noFill/>
+          <a:ln w="22225">
+            <a:solidFill>
+              <a:srgbClr val="FF0000"/>
+            </a:solidFill>
+          </a:ln>
+        </p:spPr>
+        <p:style>
+          <a:lnRef idx="2">
+            <a:schemeClr val="accent1">
+              <a:shade val="15000"/>
+            </a:schemeClr>
+          </a:lnRef>
+          <a:fillRef idx="1">
+            <a:schemeClr val="accent1"/>
+          </a:fillRef>
+          <a:effectRef idx="0">
+            <a:schemeClr val="accent1"/>
+          </a:effectRef>
+          <a:fontRef idx="minor">
+            <a:schemeClr val="lt1"/>
+          </a:fontRef>
+        </p:style>
+        <p:txBody>
+          <a:bodyPr rtlCol="0" anchor="ctr"/>
+          <a:lstStyle/>
+          <a:p>
+            <a:pPr algn="ctr"/>
+            <a:endParaRPr lang="en-US"/>
           </a:p>
         </p:txBody>
       </p:sp>
     </p:spTree>
     <p:extLst>
       <p:ext uri="{BB962C8B-B14F-4D97-AF65-F5344CB8AC3E}">
-        <p14:creationId xmlns:p14="http://schemas.microsoft.com/office/powerpoint/2010/main" val="2408883325"/>
+        <p14:creationId xmlns:p14="http://schemas.microsoft.com/office/powerpoint/2010/main" val="3936731523"/>
+      </p:ext>
+    </p:extLst>
+  </p:cSld>
+  <p:clrMapOvr>
+    <a:masterClrMapping/>
+  </p:clrMapOvr>
+</p:sld>
+</file>
+
+<file path=ppt/slides/slide4.xml><?xml version="1.0" encoding="utf-8"?>
+<p:sld xmlns:a="http://schemas.openxmlformats.org/drawingml/2006/main" xmlns:r="http://schemas.openxmlformats.org/officeDocument/2006/relationships" xmlns:p="http://schemas.openxmlformats.org/presentationml/2006/main">
+  <p:cSld>
+    <p:spTree>
+      <p:nvGrpSpPr>
+        <p:cNvPr id="1" name=""/>
+        <p:cNvGrpSpPr/>
+        <p:nvPr/>
+      </p:nvGrpSpPr>
+      <p:grpSpPr>
+        <a:xfrm>
+          <a:off x="0" y="0"/>
+          <a:ext cx="0" cy="0"/>
+          <a:chOff x="0" y="0"/>
+          <a:chExt cx="0" cy="0"/>
+        </a:xfrm>
+      </p:grpSpPr>
+      <p:sp>
+        <p:nvSpPr>
+          <p:cNvPr id="4" name="Rectangle: Rounded Corners 3">
+            <a:extLst>
+              <a:ext uri="{FF2B5EF4-FFF2-40B4-BE49-F238E27FC236}">
+                <a16:creationId xmlns:a16="http://schemas.microsoft.com/office/drawing/2014/main" id="{121121F2-3694-216B-DFFB-F7421577C46C}"/>
+              </a:ext>
+            </a:extLst>
+          </p:cNvPr>
+          <p:cNvSpPr/>
+          <p:nvPr/>
+        </p:nvSpPr>
+        <p:spPr>
+          <a:xfrm>
+            <a:off x="2118178" y="809176"/>
+            <a:ext cx="7294336" cy="2186975"/>
+          </a:xfrm>
+          <a:prstGeom prst="roundRect">
+            <a:avLst>
+              <a:gd name="adj" fmla="val 2750"/>
+            </a:avLst>
+          </a:prstGeom>
+          <a:solidFill>
+            <a:schemeClr val="bg1"/>
+          </a:solidFill>
+          <a:ln w="19050">
+            <a:solidFill>
+              <a:srgbClr val="40BBFD"/>
+            </a:solidFill>
+            <a:prstDash val="sysDot"/>
+          </a:ln>
+          <a:effectLst/>
+        </p:spPr>
+        <p:style>
+          <a:lnRef idx="2">
+            <a:schemeClr val="accent1">
+              <a:shade val="15000"/>
+            </a:schemeClr>
+          </a:lnRef>
+          <a:fillRef idx="1">
+            <a:schemeClr val="accent1"/>
+          </a:fillRef>
+          <a:effectRef idx="0">
+            <a:schemeClr val="accent1"/>
+          </a:effectRef>
+          <a:fontRef idx="minor">
+            <a:schemeClr val="lt1"/>
+          </a:fontRef>
+        </p:style>
+        <p:txBody>
+          <a:bodyPr rtlCol="0" anchor="ctr"/>
+          <a:lstStyle/>
+          <a:p>
+            <a:pPr algn="ctr"/>
+            <a:endParaRPr lang="en-US" dirty="0"/>
+          </a:p>
+        </p:txBody>
+      </p:sp>
+      <p:pic>
+        <p:nvPicPr>
+          <p:cNvPr id="28" name="Picture 27">
+            <a:extLst>
+              <a:ext uri="{FF2B5EF4-FFF2-40B4-BE49-F238E27FC236}">
+                <a16:creationId xmlns:a16="http://schemas.microsoft.com/office/drawing/2014/main" id="{84EA1895-1829-FB57-27C8-18FEC7223E7B}"/>
+              </a:ext>
+            </a:extLst>
+          </p:cNvPr>
+          <p:cNvPicPr>
+            <a:picLocks noChangeAspect="1"/>
+          </p:cNvPicPr>
+          <p:nvPr/>
+        </p:nvPicPr>
+        <p:blipFill>
+          <a:blip r:embed="rId2"/>
+          <a:srcRect l="12894"/>
+          <a:stretch>
+            <a:fillRect/>
+          </a:stretch>
+        </p:blipFill>
+        <p:spPr>
+          <a:xfrm>
+            <a:off x="3177497" y="1046051"/>
+            <a:ext cx="4826185" cy="1922770"/>
+          </a:xfrm>
+          <a:prstGeom prst="rect">
+            <a:avLst/>
+          </a:prstGeom>
+        </p:spPr>
+      </p:pic>
+      <p:sp>
+        <p:nvSpPr>
+          <p:cNvPr id="5" name="Rectangle: Rounded Corners 4">
+            <a:extLst>
+              <a:ext uri="{FF2B5EF4-FFF2-40B4-BE49-F238E27FC236}">
+                <a16:creationId xmlns:a16="http://schemas.microsoft.com/office/drawing/2014/main" id="{437993DD-FFC3-F420-7815-0643B93DBDA4}"/>
+              </a:ext>
+            </a:extLst>
+          </p:cNvPr>
+          <p:cNvSpPr/>
+          <p:nvPr/>
+        </p:nvSpPr>
+        <p:spPr>
+          <a:xfrm>
+            <a:off x="2118178" y="3120322"/>
+            <a:ext cx="2828980" cy="1890963"/>
+          </a:xfrm>
+          <a:prstGeom prst="roundRect">
+            <a:avLst>
+              <a:gd name="adj" fmla="val 2750"/>
+            </a:avLst>
+          </a:prstGeom>
+          <a:solidFill>
+            <a:schemeClr val="bg1"/>
+          </a:solidFill>
+          <a:ln w="19050">
+            <a:solidFill>
+              <a:srgbClr val="40BBFD"/>
+            </a:solidFill>
+            <a:prstDash val="sysDot"/>
+          </a:ln>
+          <a:effectLst/>
+        </p:spPr>
+        <p:style>
+          <a:lnRef idx="2">
+            <a:schemeClr val="accent1">
+              <a:shade val="15000"/>
+            </a:schemeClr>
+          </a:lnRef>
+          <a:fillRef idx="1">
+            <a:schemeClr val="accent1"/>
+          </a:fillRef>
+          <a:effectRef idx="0">
+            <a:schemeClr val="accent1"/>
+          </a:effectRef>
+          <a:fontRef idx="minor">
+            <a:schemeClr val="lt1"/>
+          </a:fontRef>
+        </p:style>
+        <p:txBody>
+          <a:bodyPr rtlCol="0" anchor="ctr"/>
+          <a:lstStyle/>
+          <a:p>
+            <a:pPr algn="ctr"/>
+            <a:endParaRPr lang="en-US" dirty="0"/>
+          </a:p>
+        </p:txBody>
+      </p:sp>
+      <p:sp>
+        <p:nvSpPr>
+          <p:cNvPr id="6" name="Rectangle: Rounded Corners 5">
+            <a:extLst>
+              <a:ext uri="{FF2B5EF4-FFF2-40B4-BE49-F238E27FC236}">
+                <a16:creationId xmlns:a16="http://schemas.microsoft.com/office/drawing/2014/main" id="{C710792D-6B0D-E39A-F856-8A41648F9687}"/>
+              </a:ext>
+            </a:extLst>
+          </p:cNvPr>
+          <p:cNvSpPr/>
+          <p:nvPr/>
+        </p:nvSpPr>
+        <p:spPr>
+          <a:xfrm>
+            <a:off x="5048276" y="3121364"/>
+            <a:ext cx="4364239" cy="1889922"/>
+          </a:xfrm>
+          <a:prstGeom prst="roundRect">
+            <a:avLst>
+              <a:gd name="adj" fmla="val 2750"/>
+            </a:avLst>
+          </a:prstGeom>
+          <a:solidFill>
+            <a:schemeClr val="bg1"/>
+          </a:solidFill>
+          <a:ln w="19050">
+            <a:solidFill>
+              <a:schemeClr val="accent6">
+                <a:lumMod val="60000"/>
+                <a:lumOff val="40000"/>
+              </a:schemeClr>
+            </a:solidFill>
+            <a:prstDash val="sysDot"/>
+          </a:ln>
+          <a:effectLst/>
+        </p:spPr>
+        <p:style>
+          <a:lnRef idx="2">
+            <a:schemeClr val="accent1">
+              <a:shade val="15000"/>
+            </a:schemeClr>
+          </a:lnRef>
+          <a:fillRef idx="1">
+            <a:schemeClr val="accent1"/>
+          </a:fillRef>
+          <a:effectRef idx="0">
+            <a:schemeClr val="accent1"/>
+          </a:effectRef>
+          <a:fontRef idx="minor">
+            <a:schemeClr val="lt1"/>
+          </a:fontRef>
+        </p:style>
+        <p:txBody>
+          <a:bodyPr rtlCol="0" anchor="ctr"/>
+          <a:lstStyle/>
+          <a:p>
+            <a:pPr algn="ctr"/>
+            <a:endParaRPr lang="en-US" dirty="0"/>
+          </a:p>
+        </p:txBody>
+      </p:sp>
+      <p:pic>
+        <p:nvPicPr>
+          <p:cNvPr id="7" name="Picture 6">
+            <a:extLst>
+              <a:ext uri="{FF2B5EF4-FFF2-40B4-BE49-F238E27FC236}">
+                <a16:creationId xmlns:a16="http://schemas.microsoft.com/office/drawing/2014/main" id="{0F5526EA-2D99-2C02-650F-27EB6D9E7B01}"/>
+              </a:ext>
+            </a:extLst>
+          </p:cNvPr>
+          <p:cNvPicPr>
+            <a:picLocks noChangeAspect="1"/>
+          </p:cNvPicPr>
+          <p:nvPr/>
+        </p:nvPicPr>
+        <p:blipFill>
+          <a:blip r:embed="rId3"/>
+          <a:stretch>
+            <a:fillRect/>
+          </a:stretch>
+        </p:blipFill>
+        <p:spPr>
+          <a:xfrm>
+            <a:off x="2262531" y="3383572"/>
+            <a:ext cx="2526485" cy="1565914"/>
+          </a:xfrm>
+          <a:prstGeom prst="rect">
+            <a:avLst/>
+          </a:prstGeom>
+        </p:spPr>
+      </p:pic>
+      <p:sp>
+        <p:nvSpPr>
+          <p:cNvPr id="8" name="Rounded Rectangle 16">
+            <a:extLst>
+              <a:ext uri="{FF2B5EF4-FFF2-40B4-BE49-F238E27FC236}">
+                <a16:creationId xmlns:a16="http://schemas.microsoft.com/office/drawing/2014/main" id="{F7DAC2CC-CE53-1058-00AA-23A4BA1A47F5}"/>
+              </a:ext>
+            </a:extLst>
+          </p:cNvPr>
+          <p:cNvSpPr/>
+          <p:nvPr/>
+        </p:nvSpPr>
+        <p:spPr>
+          <a:xfrm>
+            <a:off x="2389622" y="3083995"/>
+            <a:ext cx="2286093" cy="273568"/>
+          </a:xfrm>
+          <a:prstGeom prst="roundRect">
+            <a:avLst/>
+          </a:prstGeom>
+          <a:solidFill>
+            <a:schemeClr val="bg1"/>
+          </a:solidFill>
+          <a:ln w="15875">
+            <a:solidFill>
+              <a:srgbClr val="B6D5FA"/>
+            </a:solidFill>
+          </a:ln>
+        </p:spPr>
+        <p:style>
+          <a:lnRef idx="2">
+            <a:schemeClr val="accent1">
+              <a:shade val="15000"/>
+            </a:schemeClr>
+          </a:lnRef>
+          <a:fillRef idx="1">
+            <a:schemeClr val="accent1"/>
+          </a:fillRef>
+          <a:effectRef idx="0">
+            <a:schemeClr val="accent1"/>
+          </a:effectRef>
+          <a:fontRef idx="minor">
+            <a:schemeClr val="lt1"/>
+          </a:fontRef>
+        </p:style>
+        <p:txBody>
+          <a:bodyPr rtlCol="0" anchor="ctr"/>
+          <a:lstStyle/>
+          <a:p>
+            <a:pPr algn="ctr"/>
+            <a:r>
+              <a:rPr lang="en-US" sz="1200" dirty="0">
+                <a:solidFill>
+                  <a:schemeClr val="tx1"/>
+                </a:solidFill>
+                <a:latin typeface="Calibri" panose="020F0502020204030204" pitchFamily="34" charset="0"/>
+                <a:cs typeface="Calibri" panose="020F0502020204030204" pitchFamily="34" charset="0"/>
+              </a:rPr>
+              <a:t>(b) Compute accuracy frontier</a:t>
+            </a:r>
+          </a:p>
+        </p:txBody>
+      </p:sp>
+      <p:sp>
+        <p:nvSpPr>
+          <p:cNvPr id="9" name="Rounded Rectangle 22">
+            <a:extLst>
+              <a:ext uri="{FF2B5EF4-FFF2-40B4-BE49-F238E27FC236}">
+                <a16:creationId xmlns:a16="http://schemas.microsoft.com/office/drawing/2014/main" id="{E5F96F51-BDAC-2C93-1915-454C48C9B360}"/>
+              </a:ext>
+            </a:extLst>
+          </p:cNvPr>
+          <p:cNvSpPr/>
+          <p:nvPr/>
+        </p:nvSpPr>
+        <p:spPr>
+          <a:xfrm>
+            <a:off x="6115523" y="3083995"/>
+            <a:ext cx="2229744" cy="263545"/>
+          </a:xfrm>
+          <a:prstGeom prst="roundRect">
+            <a:avLst/>
+          </a:prstGeom>
+          <a:solidFill>
+            <a:schemeClr val="bg1"/>
+          </a:solidFill>
+          <a:ln w="15875">
+            <a:solidFill>
+              <a:schemeClr val="accent6">
+                <a:lumMod val="60000"/>
+                <a:lumOff val="40000"/>
+              </a:schemeClr>
+            </a:solidFill>
+          </a:ln>
+        </p:spPr>
+        <p:style>
+          <a:lnRef idx="2">
+            <a:schemeClr val="accent1">
+              <a:shade val="15000"/>
+            </a:schemeClr>
+          </a:lnRef>
+          <a:fillRef idx="1">
+            <a:schemeClr val="accent1"/>
+          </a:fillRef>
+          <a:effectRef idx="0">
+            <a:schemeClr val="accent1"/>
+          </a:effectRef>
+          <a:fontRef idx="minor">
+            <a:schemeClr val="lt1"/>
+          </a:fontRef>
+        </p:style>
+        <p:txBody>
+          <a:bodyPr rtlCol="0" anchor="ctr"/>
+          <a:lstStyle/>
+          <a:p>
+            <a:pPr algn="ctr"/>
+            <a:r>
+              <a:rPr lang="en-US" sz="1200" dirty="0">
+                <a:solidFill>
+                  <a:schemeClr val="tx1"/>
+                </a:solidFill>
+                <a:latin typeface="Calibri" panose="020F0502020204030204" pitchFamily="34" charset="0"/>
+                <a:cs typeface="Calibri" panose="020F0502020204030204" pitchFamily="34" charset="0"/>
+              </a:rPr>
+              <a:t>(c) </a:t>
+            </a:r>
+            <a:r>
+              <a:rPr lang="en-US" sz="1200" dirty="0" err="1">
+                <a:solidFill>
+                  <a:schemeClr val="tx1"/>
+                </a:solidFill>
+                <a:latin typeface="Calibri" panose="020F0502020204030204" pitchFamily="34" charset="0"/>
+                <a:cs typeface="Calibri" panose="020F0502020204030204" pitchFamily="34" charset="0"/>
+              </a:rPr>
+              <a:t>OSWorld</a:t>
+            </a:r>
+            <a:r>
+              <a:rPr lang="en-US" sz="1200" dirty="0">
+                <a:solidFill>
+                  <a:schemeClr val="tx1"/>
+                </a:solidFill>
+                <a:latin typeface="Calibri" panose="020F0502020204030204" pitchFamily="34" charset="0"/>
+                <a:cs typeface="Calibri" panose="020F0502020204030204" pitchFamily="34" charset="0"/>
+              </a:rPr>
+              <a:t>-Noisy Contribution</a:t>
+            </a:r>
+          </a:p>
+        </p:txBody>
+      </p:sp>
+      <p:pic>
+        <p:nvPicPr>
+          <p:cNvPr id="10" name="Picture 9">
+            <a:extLst>
+              <a:ext uri="{FF2B5EF4-FFF2-40B4-BE49-F238E27FC236}">
+                <a16:creationId xmlns:a16="http://schemas.microsoft.com/office/drawing/2014/main" id="{0B721778-9C17-679E-3145-AEA155A00C52}"/>
+              </a:ext>
+            </a:extLst>
+          </p:cNvPr>
+          <p:cNvPicPr>
+            <a:picLocks noChangeAspect="1"/>
+          </p:cNvPicPr>
+          <p:nvPr/>
+        </p:nvPicPr>
+        <p:blipFill>
+          <a:blip r:embed="rId4"/>
+          <a:stretch>
+            <a:fillRect/>
+          </a:stretch>
+        </p:blipFill>
+        <p:spPr>
+          <a:xfrm>
+            <a:off x="5230590" y="3608198"/>
+            <a:ext cx="1542520" cy="867667"/>
+          </a:xfrm>
+          <a:prstGeom prst="rect">
+            <a:avLst/>
+          </a:prstGeom>
+          <a:ln w="15875">
+            <a:noFill/>
+          </a:ln>
+        </p:spPr>
+      </p:pic>
+      <p:sp>
+        <p:nvSpPr>
+          <p:cNvPr id="11" name="Rectangle 10">
+            <a:extLst>
+              <a:ext uri="{FF2B5EF4-FFF2-40B4-BE49-F238E27FC236}">
+                <a16:creationId xmlns:a16="http://schemas.microsoft.com/office/drawing/2014/main" id="{99DC6EFD-2D44-7BF4-D48F-3733FEE3A582}"/>
+              </a:ext>
+            </a:extLst>
+          </p:cNvPr>
+          <p:cNvSpPr/>
+          <p:nvPr/>
+        </p:nvSpPr>
+        <p:spPr>
+          <a:xfrm>
+            <a:off x="5242173" y="3648101"/>
+            <a:ext cx="730777" cy="599508"/>
+          </a:xfrm>
+          <a:prstGeom prst="rect">
+            <a:avLst/>
+          </a:prstGeom>
+          <a:noFill/>
+          <a:ln w="44450">
+            <a:solidFill>
+              <a:schemeClr val="accent6">
+                <a:lumMod val="60000"/>
+                <a:lumOff val="40000"/>
+              </a:schemeClr>
+            </a:solidFill>
+          </a:ln>
+        </p:spPr>
+        <p:style>
+          <a:lnRef idx="2">
+            <a:schemeClr val="accent1">
+              <a:shade val="15000"/>
+            </a:schemeClr>
+          </a:lnRef>
+          <a:fillRef idx="1">
+            <a:schemeClr val="accent1"/>
+          </a:fillRef>
+          <a:effectRef idx="0">
+            <a:schemeClr val="accent1"/>
+          </a:effectRef>
+          <a:fontRef idx="minor">
+            <a:schemeClr val="lt1"/>
+          </a:fontRef>
+        </p:style>
+        <p:txBody>
+          <a:bodyPr rtlCol="0" anchor="ctr"/>
+          <a:lstStyle/>
+          <a:p>
+            <a:pPr algn="ctr"/>
+            <a:endParaRPr lang="en-US"/>
+          </a:p>
+        </p:txBody>
+      </p:sp>
+      <p:pic>
+        <p:nvPicPr>
+          <p:cNvPr id="12" name="Picture 11">
+            <a:extLst>
+              <a:ext uri="{FF2B5EF4-FFF2-40B4-BE49-F238E27FC236}">
+                <a16:creationId xmlns:a16="http://schemas.microsoft.com/office/drawing/2014/main" id="{72055582-46CF-4D61-C54C-C055374E48F2}"/>
+              </a:ext>
+            </a:extLst>
+          </p:cNvPr>
+          <p:cNvPicPr>
+            <a:picLocks noChangeAspect="1"/>
+          </p:cNvPicPr>
+          <p:nvPr/>
+        </p:nvPicPr>
+        <p:blipFill>
+          <a:blip r:embed="rId5"/>
+          <a:srcRect l="84729" t="18580" b="19155"/>
+          <a:stretch>
+            <a:fillRect/>
+          </a:stretch>
+        </p:blipFill>
+        <p:spPr>
+          <a:xfrm>
+            <a:off x="8140701" y="1243438"/>
+            <a:ext cx="1013761" cy="1368689"/>
+          </a:xfrm>
+          <a:prstGeom prst="rect">
+            <a:avLst/>
+          </a:prstGeom>
+        </p:spPr>
+      </p:pic>
+      <p:pic>
+        <p:nvPicPr>
+          <p:cNvPr id="13" name="Picture 12">
+            <a:extLst>
+              <a:ext uri="{FF2B5EF4-FFF2-40B4-BE49-F238E27FC236}">
+                <a16:creationId xmlns:a16="http://schemas.microsoft.com/office/drawing/2014/main" id="{CA70FDD6-2B96-C104-66C3-E70321114F88}"/>
+              </a:ext>
+            </a:extLst>
+          </p:cNvPr>
+          <p:cNvPicPr>
+            <a:picLocks noChangeAspect="1"/>
+          </p:cNvPicPr>
+          <p:nvPr/>
+        </p:nvPicPr>
+        <p:blipFill>
+          <a:blip r:embed="rId6"/>
+          <a:stretch>
+            <a:fillRect/>
+          </a:stretch>
+        </p:blipFill>
+        <p:spPr>
+          <a:xfrm>
+            <a:off x="6507563" y="3758077"/>
+            <a:ext cx="1542520" cy="867667"/>
+          </a:xfrm>
+          <a:prstGeom prst="rect">
+            <a:avLst/>
+          </a:prstGeom>
+          <a:ln w="15875">
+            <a:noFill/>
+          </a:ln>
+        </p:spPr>
+      </p:pic>
+      <p:sp>
+        <p:nvSpPr>
+          <p:cNvPr id="14" name="Rectangle 13">
+            <a:extLst>
+              <a:ext uri="{FF2B5EF4-FFF2-40B4-BE49-F238E27FC236}">
+                <a16:creationId xmlns:a16="http://schemas.microsoft.com/office/drawing/2014/main" id="{48B89C5D-F63B-D6FE-8123-92F9244A376C}"/>
+              </a:ext>
+            </a:extLst>
+          </p:cNvPr>
+          <p:cNvSpPr/>
+          <p:nvPr/>
+        </p:nvSpPr>
+        <p:spPr>
+          <a:xfrm>
+            <a:off x="6526613" y="3783785"/>
+            <a:ext cx="1384101" cy="445044"/>
+          </a:xfrm>
+          <a:prstGeom prst="rect">
+            <a:avLst/>
+          </a:prstGeom>
+          <a:noFill/>
+          <a:ln w="44450">
+            <a:solidFill>
+              <a:schemeClr val="accent6">
+                <a:lumMod val="60000"/>
+                <a:lumOff val="40000"/>
+              </a:schemeClr>
+            </a:solidFill>
+          </a:ln>
+        </p:spPr>
+        <p:style>
+          <a:lnRef idx="2">
+            <a:schemeClr val="accent1">
+              <a:shade val="15000"/>
+            </a:schemeClr>
+          </a:lnRef>
+          <a:fillRef idx="1">
+            <a:schemeClr val="accent1"/>
+          </a:fillRef>
+          <a:effectRef idx="0">
+            <a:schemeClr val="accent1"/>
+          </a:effectRef>
+          <a:fontRef idx="minor">
+            <a:schemeClr val="lt1"/>
+          </a:fontRef>
+        </p:style>
+        <p:txBody>
+          <a:bodyPr rtlCol="0" anchor="ctr"/>
+          <a:lstStyle/>
+          <a:p>
+            <a:pPr algn="ctr"/>
+            <a:endParaRPr lang="en-US"/>
+          </a:p>
+        </p:txBody>
+      </p:sp>
+      <p:pic>
+        <p:nvPicPr>
+          <p:cNvPr id="16" name="Picture 15">
+            <a:extLst>
+              <a:ext uri="{FF2B5EF4-FFF2-40B4-BE49-F238E27FC236}">
+                <a16:creationId xmlns:a16="http://schemas.microsoft.com/office/drawing/2014/main" id="{49C3641E-1CD6-A1CB-A049-B218F2E58003}"/>
+              </a:ext>
+            </a:extLst>
+          </p:cNvPr>
+          <p:cNvPicPr>
+            <a:picLocks noChangeAspect="1"/>
+          </p:cNvPicPr>
+          <p:nvPr/>
+        </p:nvPicPr>
+        <p:blipFill>
+          <a:blip r:embed="rId7"/>
+          <a:stretch>
+            <a:fillRect/>
+          </a:stretch>
+        </p:blipFill>
+        <p:spPr>
+          <a:xfrm>
+            <a:off x="7790670" y="4059683"/>
+            <a:ext cx="1542520" cy="867667"/>
+          </a:xfrm>
+          <a:prstGeom prst="rect">
+            <a:avLst/>
+          </a:prstGeom>
+          <a:ln w="15875">
+            <a:noFill/>
+          </a:ln>
+        </p:spPr>
+      </p:pic>
+      <p:sp>
+        <p:nvSpPr>
+          <p:cNvPr id="17" name="Rectangle 16">
+            <a:extLst>
+              <a:ext uri="{FF2B5EF4-FFF2-40B4-BE49-F238E27FC236}">
+                <a16:creationId xmlns:a16="http://schemas.microsoft.com/office/drawing/2014/main" id="{6D092FC6-1FDA-3011-33BA-55C4CB61D703}"/>
+              </a:ext>
+            </a:extLst>
+          </p:cNvPr>
+          <p:cNvSpPr/>
+          <p:nvPr/>
+        </p:nvSpPr>
+        <p:spPr>
+          <a:xfrm>
+            <a:off x="8359669" y="4423435"/>
+            <a:ext cx="416732" cy="168654"/>
+          </a:xfrm>
+          <a:prstGeom prst="rect">
+            <a:avLst/>
+          </a:prstGeom>
+          <a:noFill/>
+          <a:ln w="44450">
+            <a:solidFill>
+              <a:schemeClr val="accent6">
+                <a:lumMod val="60000"/>
+                <a:lumOff val="40000"/>
+              </a:schemeClr>
+            </a:solidFill>
+          </a:ln>
+        </p:spPr>
+        <p:style>
+          <a:lnRef idx="2">
+            <a:schemeClr val="accent1">
+              <a:shade val="15000"/>
+            </a:schemeClr>
+          </a:lnRef>
+          <a:fillRef idx="1">
+            <a:schemeClr val="accent1"/>
+          </a:fillRef>
+          <a:effectRef idx="0">
+            <a:schemeClr val="accent1"/>
+          </a:effectRef>
+          <a:fontRef idx="minor">
+            <a:schemeClr val="lt1"/>
+          </a:fontRef>
+        </p:style>
+        <p:txBody>
+          <a:bodyPr rtlCol="0" anchor="ctr"/>
+          <a:lstStyle/>
+          <a:p>
+            <a:pPr algn="ctr"/>
+            <a:endParaRPr lang="en-US"/>
+          </a:p>
+        </p:txBody>
+      </p:sp>
+      <p:sp>
+        <p:nvSpPr>
+          <p:cNvPr id="18" name="Rounded Rectangle 10">
+            <a:extLst>
+              <a:ext uri="{FF2B5EF4-FFF2-40B4-BE49-F238E27FC236}">
+                <a16:creationId xmlns:a16="http://schemas.microsoft.com/office/drawing/2014/main" id="{AC205AA4-E1D2-2E34-BAAF-EB1919BB00D8}"/>
+              </a:ext>
+            </a:extLst>
+          </p:cNvPr>
+          <p:cNvSpPr/>
+          <p:nvPr/>
+        </p:nvSpPr>
+        <p:spPr>
+          <a:xfrm>
+            <a:off x="3593734" y="771115"/>
+            <a:ext cx="4343224" cy="263545"/>
+          </a:xfrm>
+          <a:prstGeom prst="roundRect">
+            <a:avLst/>
+          </a:prstGeom>
+          <a:solidFill>
+            <a:schemeClr val="bg1"/>
+          </a:solidFill>
+          <a:ln w="15875">
+            <a:solidFill>
+              <a:srgbClr val="B6D5FA"/>
+            </a:solidFill>
+          </a:ln>
+        </p:spPr>
+        <p:style>
+          <a:lnRef idx="2">
+            <a:schemeClr val="accent1">
+              <a:shade val="15000"/>
+            </a:schemeClr>
+          </a:lnRef>
+          <a:fillRef idx="1">
+            <a:schemeClr val="accent1"/>
+          </a:fillRef>
+          <a:effectRef idx="0">
+            <a:schemeClr val="accent1"/>
+          </a:effectRef>
+          <a:fontRef idx="minor">
+            <a:schemeClr val="lt1"/>
+          </a:fontRef>
+        </p:style>
+        <p:txBody>
+          <a:bodyPr rtlCol="0" anchor="ctr"/>
+          <a:lstStyle/>
+          <a:p>
+            <a:pPr algn="ctr"/>
+            <a:r>
+              <a:rPr lang="en-US" sz="1200" dirty="0">
+                <a:solidFill>
+                  <a:schemeClr val="tx1"/>
+                </a:solidFill>
+                <a:latin typeface="Calibri" panose="020F0502020204030204" pitchFamily="34" charset="0"/>
+                <a:cs typeface="Calibri" panose="020F0502020204030204" pitchFamily="34" charset="0"/>
+              </a:rPr>
+              <a:t>(a) ENVS vs. RL: Decoupling data collection from model training</a:t>
+            </a:r>
+          </a:p>
+        </p:txBody>
+      </p:sp>
+      <p:cxnSp>
+        <p:nvCxnSpPr>
+          <p:cNvPr id="19" name="Straight Connector 18">
+            <a:extLst>
+              <a:ext uri="{FF2B5EF4-FFF2-40B4-BE49-F238E27FC236}">
+                <a16:creationId xmlns:a16="http://schemas.microsoft.com/office/drawing/2014/main" id="{855498D0-7DD5-C754-9185-024B2167ECD7}"/>
+              </a:ext>
+            </a:extLst>
+          </p:cNvPr>
+          <p:cNvCxnSpPr>
+            <a:cxnSpLocks/>
+          </p:cNvCxnSpPr>
+          <p:nvPr/>
+        </p:nvCxnSpPr>
+        <p:spPr>
+          <a:xfrm>
+            <a:off x="2313945" y="1869900"/>
+            <a:ext cx="4637367" cy="0"/>
+          </a:xfrm>
+          <a:prstGeom prst="line">
+            <a:avLst/>
+          </a:prstGeom>
+          <a:ln w="15875">
+            <a:solidFill>
+              <a:srgbClr val="3F0E24"/>
+            </a:solidFill>
+            <a:prstDash val="dash"/>
+          </a:ln>
+        </p:spPr>
+        <p:style>
+          <a:lnRef idx="1">
+            <a:schemeClr val="accent1"/>
+          </a:lnRef>
+          <a:fillRef idx="0">
+            <a:schemeClr val="accent1"/>
+          </a:fillRef>
+          <a:effectRef idx="0">
+            <a:schemeClr val="accent1"/>
+          </a:effectRef>
+          <a:fontRef idx="minor">
+            <a:schemeClr val="tx1"/>
+          </a:fontRef>
+        </p:style>
+      </p:cxnSp>
+      <p:sp>
+        <p:nvSpPr>
+          <p:cNvPr id="20" name="TextBox 19">
+            <a:extLst>
+              <a:ext uri="{FF2B5EF4-FFF2-40B4-BE49-F238E27FC236}">
+                <a16:creationId xmlns:a16="http://schemas.microsoft.com/office/drawing/2014/main" id="{B7553A5B-B533-F3B1-8776-BBF885F159CB}"/>
+              </a:ext>
+            </a:extLst>
+          </p:cNvPr>
+          <p:cNvSpPr txBox="1"/>
+          <p:nvPr/>
+        </p:nvSpPr>
+        <p:spPr>
+          <a:xfrm>
+            <a:off x="2238833" y="1299085"/>
+            <a:ext cx="973608" cy="340519"/>
+          </a:xfrm>
+          <a:prstGeom prst="roundRect">
+            <a:avLst/>
+          </a:prstGeom>
+          <a:solidFill>
+            <a:schemeClr val="bg1"/>
+          </a:solidFill>
+        </p:spPr>
+        <p:txBody>
+          <a:bodyPr wrap="none" rtlCol="0">
+            <a:spAutoFit/>
+          </a:bodyPr>
+          <a:lstStyle/>
+          <a:p>
+            <a:r>
+              <a:rPr lang="en-CN" sz="1400" dirty="0"/>
+              <a:t>Agentic RL</a:t>
+            </a:r>
+          </a:p>
+        </p:txBody>
+      </p:sp>
+      <p:sp>
+        <p:nvSpPr>
+          <p:cNvPr id="22" name="TextBox 21">
+            <a:extLst>
+              <a:ext uri="{FF2B5EF4-FFF2-40B4-BE49-F238E27FC236}">
+                <a16:creationId xmlns:a16="http://schemas.microsoft.com/office/drawing/2014/main" id="{29B0C7B3-E652-D365-236D-620D62C61E10}"/>
+              </a:ext>
+            </a:extLst>
+          </p:cNvPr>
+          <p:cNvSpPr txBox="1"/>
+          <p:nvPr/>
+        </p:nvSpPr>
+        <p:spPr>
+          <a:xfrm>
+            <a:off x="5230590" y="3328213"/>
+            <a:ext cx="3999652" cy="305693"/>
+          </a:xfrm>
+          <a:prstGeom prst="rightArrow">
+            <a:avLst>
+              <a:gd name="adj1" fmla="val 50000"/>
+              <a:gd name="adj2" fmla="val 56232"/>
+            </a:avLst>
+          </a:prstGeom>
+          <a:gradFill flip="none" rotWithShape="1">
+            <a:gsLst>
+              <a:gs pos="0">
+                <a:schemeClr val="accent6">
+                  <a:lumMod val="20000"/>
+                  <a:lumOff val="80000"/>
+                </a:schemeClr>
+              </a:gs>
+              <a:gs pos="32000">
+                <a:schemeClr val="accent6">
+                  <a:lumMod val="40000"/>
+                  <a:lumOff val="60000"/>
+                </a:schemeClr>
+              </a:gs>
+              <a:gs pos="72000">
+                <a:schemeClr val="accent6">
+                  <a:lumMod val="60000"/>
+                  <a:lumOff val="40000"/>
+                </a:schemeClr>
+              </a:gs>
+              <a:gs pos="100000">
+                <a:schemeClr val="accent6">
+                  <a:lumMod val="75000"/>
+                </a:schemeClr>
+              </a:gs>
+            </a:gsLst>
+            <a:lin ang="0" scaled="1"/>
+            <a:tileRect/>
+          </a:gradFill>
+        </p:spPr>
+        <p:txBody>
+          <a:bodyPr wrap="square" lIns="0" tIns="0" rIns="0" bIns="0" anchor="ctr">
+            <a:spAutoFit/>
+          </a:bodyPr>
+          <a:lstStyle/>
+          <a:p>
+            <a:pPr algn="ctr"/>
+            <a:r>
+              <a:rPr lang="en-US" sz="1000" dirty="0">
+                <a:solidFill>
+                  <a:schemeClr val="tx1"/>
+                </a:solidFill>
+                <a:latin typeface="Times New Roman" panose="02020603050405020304" pitchFamily="18" charset="0"/>
+                <a:cs typeface="Times New Roman" panose="02020603050405020304" pitchFamily="18" charset="0"/>
+              </a:rPr>
+              <a:t>Injecting noise, simulating human interruption, eval robustness</a:t>
+            </a:r>
+          </a:p>
+        </p:txBody>
+      </p:sp>
+      <p:sp>
+        <p:nvSpPr>
+          <p:cNvPr id="23" name="Rectangle 22">
+            <a:extLst>
+              <a:ext uri="{FF2B5EF4-FFF2-40B4-BE49-F238E27FC236}">
+                <a16:creationId xmlns:a16="http://schemas.microsoft.com/office/drawing/2014/main" id="{AA5E879C-927F-4512-595C-24A35C32E9C9}"/>
+              </a:ext>
+            </a:extLst>
+          </p:cNvPr>
+          <p:cNvSpPr/>
+          <p:nvPr/>
+        </p:nvSpPr>
+        <p:spPr>
+          <a:xfrm>
+            <a:off x="5152933" y="4449920"/>
+            <a:ext cx="1417674" cy="442216"/>
+          </a:xfrm>
+          <a:prstGeom prst="rect">
+            <a:avLst/>
+          </a:prstGeom>
+          <a:solidFill>
+            <a:schemeClr val="bg1"/>
+          </a:solidFill>
+          <a:ln>
+            <a:noFill/>
+          </a:ln>
+          <a:effectLst>
+            <a:outerShdw blurRad="50800" dist="76200" dir="2700000" algn="tl" rotWithShape="0">
+              <a:schemeClr val="accent6">
+                <a:lumMod val="60000"/>
+                <a:lumOff val="40000"/>
+                <a:alpha val="40000"/>
+              </a:schemeClr>
+            </a:outerShdw>
+          </a:effectLst>
+        </p:spPr>
+        <p:style>
+          <a:lnRef idx="2">
+            <a:schemeClr val="accent1">
+              <a:shade val="15000"/>
+            </a:schemeClr>
+          </a:lnRef>
+          <a:fillRef idx="1">
+            <a:schemeClr val="accent1"/>
+          </a:fillRef>
+          <a:effectRef idx="0">
+            <a:schemeClr val="accent1"/>
+          </a:effectRef>
+          <a:fontRef idx="minor">
+            <a:schemeClr val="lt1"/>
+          </a:fontRef>
+        </p:style>
+        <p:txBody>
+          <a:bodyPr rtlCol="0" anchor="ctr"/>
+          <a:lstStyle/>
+          <a:p>
+            <a:pPr algn="ctr"/>
+            <a:r>
+              <a:rPr lang="en-US" sz="800" dirty="0">
+                <a:solidFill>
+                  <a:schemeClr val="tx1"/>
+                </a:solidFill>
+                <a:latin typeface="Times New Roman" panose="02020603050405020304" pitchFamily="18" charset="0"/>
+                <a:cs typeface="Times New Roman" panose="02020603050405020304" pitchFamily="18" charset="0"/>
+              </a:rPr>
+              <a:t>Noise type: pop-ups, resizing, concurrent app, etc. </a:t>
+            </a:r>
+          </a:p>
+        </p:txBody>
+      </p:sp>
+      <p:pic>
+        <p:nvPicPr>
+          <p:cNvPr id="26" name="Picture 25">
+            <a:extLst>
+              <a:ext uri="{FF2B5EF4-FFF2-40B4-BE49-F238E27FC236}">
+                <a16:creationId xmlns:a16="http://schemas.microsoft.com/office/drawing/2014/main" id="{AE0273BA-ECE0-0806-82C0-77B2AF31E695}"/>
+              </a:ext>
+            </a:extLst>
+          </p:cNvPr>
+          <p:cNvPicPr>
+            <a:picLocks noChangeAspect="1"/>
+          </p:cNvPicPr>
+          <p:nvPr/>
+        </p:nvPicPr>
+        <p:blipFill>
+          <a:blip r:embed="rId8"/>
+          <a:stretch>
+            <a:fillRect/>
+          </a:stretch>
+        </p:blipFill>
+        <p:spPr>
+          <a:xfrm>
+            <a:off x="2498056" y="2069303"/>
+            <a:ext cx="657230" cy="742955"/>
+          </a:xfrm>
+          <a:prstGeom prst="rect">
+            <a:avLst/>
+          </a:prstGeom>
+        </p:spPr>
+      </p:pic>
+      <p:sp>
+        <p:nvSpPr>
+          <p:cNvPr id="21" name="TextBox 20">
+            <a:extLst>
+              <a:ext uri="{FF2B5EF4-FFF2-40B4-BE49-F238E27FC236}">
+                <a16:creationId xmlns:a16="http://schemas.microsoft.com/office/drawing/2014/main" id="{3B27E1B0-D5AD-E0D8-9CB3-BACF1B892663}"/>
+              </a:ext>
+            </a:extLst>
+          </p:cNvPr>
+          <p:cNvSpPr txBox="1"/>
+          <p:nvPr/>
+        </p:nvSpPr>
+        <p:spPr>
+          <a:xfrm>
+            <a:off x="2188942" y="2243851"/>
+            <a:ext cx="1119414" cy="340519"/>
+          </a:xfrm>
+          <a:prstGeom prst="roundRect">
+            <a:avLst/>
+          </a:prstGeom>
+          <a:noFill/>
+        </p:spPr>
+        <p:txBody>
+          <a:bodyPr wrap="square" rtlCol="0">
+            <a:spAutoFit/>
+          </a:bodyPr>
+          <a:lstStyle/>
+          <a:p>
+            <a:r>
+              <a:rPr lang="en-CN" sz="1400" dirty="0"/>
+              <a:t>ENVS (Ours)</a:t>
+            </a:r>
+          </a:p>
+        </p:txBody>
+      </p:sp>
+    </p:spTree>
+    <p:extLst>
+      <p:ext uri="{BB962C8B-B14F-4D97-AF65-F5344CB8AC3E}">
+        <p14:creationId xmlns:p14="http://schemas.microsoft.com/office/powerpoint/2010/main" val="1713691526"/>
       </p:ext>
     </p:extLst>
   </p:cSld>

--- a/docs/pipeline.pptx
+++ b/docs/pipeline.pptx
@@ -2910,7 +2910,7 @@
         </p:nvSpPr>
         <p:spPr>
           <a:xfrm>
-            <a:off x="1759800" y="1634481"/>
+            <a:off x="1705146" y="1635574"/>
             <a:ext cx="2122368" cy="395236"/>
           </a:xfrm>
           <a:prstGeom prst="rect">
@@ -2961,74 +2961,6 @@
                 </a:solidFill>
               </a:rPr>
               <a:t>ample &amp; cluster actions</a:t>
-            </a:r>
-            <a:endParaRPr lang="en-US" sz="1200" b="1" dirty="0">
-              <a:solidFill>
-                <a:srgbClr val="444FCD"/>
-              </a:solidFill>
-            </a:endParaRPr>
-          </a:p>
-        </p:txBody>
-      </p:sp>
-      <p:sp>
-        <p:nvSpPr>
-          <p:cNvPr id="7" name="Rectangle 6"/>
-          <p:cNvSpPr/>
-          <p:nvPr/>
-        </p:nvSpPr>
-        <p:spPr>
-          <a:xfrm>
-            <a:off x="6580745" y="1623231"/>
-            <a:ext cx="1067721" cy="456575"/>
-          </a:xfrm>
-          <a:prstGeom prst="rect">
-            <a:avLst/>
-          </a:prstGeom>
-          <a:solidFill>
-            <a:schemeClr val="bg1"/>
-          </a:solidFill>
-          <a:ln>
-            <a:solidFill>
-              <a:schemeClr val="bg1"/>
-            </a:solidFill>
-          </a:ln>
-        </p:spPr>
-        <p:style>
-          <a:lnRef idx="2">
-            <a:schemeClr val="accent1">
-              <a:shade val="15000"/>
-            </a:schemeClr>
-          </a:lnRef>
-          <a:fillRef idx="1">
-            <a:schemeClr val="accent1"/>
-          </a:fillRef>
-          <a:effectRef idx="0">
-            <a:schemeClr val="accent1"/>
-          </a:effectRef>
-          <a:fontRef idx="minor">
-            <a:schemeClr val="lt1"/>
-          </a:fontRef>
-        </p:style>
-        <p:txBody>
-          <a:bodyPr rtlCol="0" anchor="ctr"/>
-          <a:lstStyle/>
-          <a:p>
-            <a:pPr algn="ctr"/>
-            <a:r>
-              <a:rPr lang="en-US" sz="1200" b="1" dirty="0">
-                <a:solidFill>
-                  <a:srgbClr val="444FCD"/>
-                </a:solidFill>
-              </a:rPr>
-              <a:t>D. </a:t>
-            </a:r>
-            <a:r>
-              <a:rPr lang="en-US" altLang="zh-CN" sz="1200" b="1" dirty="0">
-                <a:solidFill>
-                  <a:srgbClr val="444FCD"/>
-                </a:solidFill>
-              </a:rPr>
-              <a:t>score</a:t>
             </a:r>
             <a:endParaRPr lang="en-US" sz="1200" b="1" dirty="0">
               <a:solidFill>
@@ -3754,12 +3686,12 @@
         </p:nvSpPr>
         <p:spPr>
           <a:xfrm>
-            <a:off x="7866703" y="1292113"/>
-            <a:ext cx="2662030" cy="1817570"/>
+            <a:off x="7866703" y="1277580"/>
+            <a:ext cx="2662030" cy="1809437"/>
           </a:xfrm>
           <a:prstGeom prst="roundRect">
             <a:avLst>
-              <a:gd name="adj" fmla="val 3680"/>
+              <a:gd name="adj" fmla="val 5308"/>
             </a:avLst>
           </a:prstGeom>
           <a:noFill/>
@@ -3802,7 +3734,7 @@
         </p:nvSpPr>
         <p:spPr>
           <a:xfrm>
-            <a:off x="4064802" y="1642281"/>
+            <a:off x="4138134" y="1635574"/>
             <a:ext cx="1098713" cy="395236"/>
           </a:xfrm>
           <a:prstGeom prst="rect">
@@ -3857,7 +3789,7 @@
         </p:nvSpPr>
         <p:spPr>
           <a:xfrm>
-            <a:off x="5461287" y="1695100"/>
+            <a:off x="5581449" y="1685266"/>
             <a:ext cx="1067721" cy="300248"/>
           </a:xfrm>
           <a:prstGeom prst="rect">
@@ -3912,10 +3844,10 @@
         </p:nvGrpSpPr>
         <p:grpSpPr>
           <a:xfrm>
-            <a:off x="1588770" y="2003062"/>
-            <a:ext cx="5980160" cy="2886439"/>
-            <a:chOff x="1570699" y="2012995"/>
-            <a:chExt cx="5919950" cy="2886439"/>
+            <a:off x="1588769" y="2040215"/>
+            <a:ext cx="5980161" cy="2855126"/>
+            <a:chOff x="1570698" y="2009532"/>
+            <a:chExt cx="5919951" cy="2855126"/>
           </a:xfrm>
         </p:grpSpPr>
         <p:sp>
@@ -3926,7 +3858,7 @@
           </p:nvSpPr>
           <p:spPr>
             <a:xfrm>
-              <a:off x="6636874" y="3536842"/>
+              <a:off x="6636874" y="3507022"/>
               <a:ext cx="853775" cy="280315"/>
             </a:xfrm>
             <a:prstGeom prst="rect">
@@ -3977,10 +3909,10 @@
           </p:nvGrpSpPr>
           <p:grpSpPr>
             <a:xfrm>
-              <a:off x="1570699" y="2012995"/>
-              <a:ext cx="5919950" cy="2886439"/>
-              <a:chOff x="1436335" y="3074709"/>
-              <a:chExt cx="5919950" cy="2886439"/>
+              <a:off x="1570698" y="2009532"/>
+              <a:ext cx="5919951" cy="2855126"/>
+              <a:chOff x="1436334" y="3071246"/>
+              <a:chExt cx="5919951" cy="2855126"/>
             </a:xfrm>
           </p:grpSpPr>
           <p:grpSp>
@@ -3991,10 +3923,10 @@
             </p:nvGrpSpPr>
             <p:grpSpPr>
               <a:xfrm>
-                <a:off x="1436335" y="3074709"/>
-                <a:ext cx="5919950" cy="2886439"/>
-                <a:chOff x="1650664" y="2095135"/>
-                <a:chExt cx="5919950" cy="2886439"/>
+                <a:off x="1436334" y="3071246"/>
+                <a:ext cx="5919951" cy="2855126"/>
+                <a:chOff x="1650663" y="2091672"/>
+                <a:chExt cx="5919951" cy="2855126"/>
               </a:xfrm>
             </p:grpSpPr>
             <p:sp>
@@ -4005,8 +3937,8 @@
               </p:nvSpPr>
               <p:spPr>
                 <a:xfrm>
-                  <a:off x="1650664" y="2095135"/>
-                  <a:ext cx="3805195" cy="2886439"/>
+                  <a:off x="1650663" y="2091672"/>
+                  <a:ext cx="3833527" cy="2855126"/>
                 </a:xfrm>
                 <a:prstGeom prst="roundRect">
                   <a:avLst>
@@ -4021,9 +3953,7 @@
                   </a:schemeClr>
                 </a:solidFill>
                 <a:ln w="15875">
-                  <a:solidFill>
-                    <a:srgbClr val="0E17C8"/>
-                  </a:solidFill>
+                  <a:noFill/>
                 </a:ln>
               </p:spPr>
               <p:style>
@@ -4685,7 +4615,7 @@
                             <a:schemeClr val="tx1"/>
                           </a:solidFill>
                         </a:rPr>
-                        <a:t>Same prompt</a:t>
+                        <a:t>Same Prompt</a:t>
                       </a:r>
                     </a:p>
                   </p:txBody>
@@ -4698,9 +4628,9 @@
                   </p:nvGrpSpPr>
                   <p:grpSpPr>
                     <a:xfrm>
-                      <a:off x="3388441" y="3984100"/>
+                      <a:off x="3388441" y="3979847"/>
                       <a:ext cx="464766" cy="427393"/>
-                      <a:chOff x="3928845" y="3600415"/>
+                      <a:chOff x="3928845" y="3596162"/>
                       <a:chExt cx="464766" cy="427393"/>
                     </a:xfrm>
                   </p:grpSpPr>
@@ -4712,7 +4642,7 @@
                     </p:nvSpPr>
                     <p:spPr>
                       <a:xfrm>
-                        <a:off x="3928845" y="3632572"/>
+                        <a:off x="3928845" y="3628319"/>
                         <a:ext cx="464766" cy="395236"/>
                       </a:xfrm>
                       <a:prstGeom prst="roundRect">
@@ -4752,8 +4682,8 @@
                       </a:p>
                     </p:txBody>
                   </p:sp>
-                  <mc:AlternateContent xmlns:mc="http://schemas.openxmlformats.org/markup-compatibility/2006" xmlns:a14="http://schemas.microsoft.com/office/drawing/2010/main">
-                    <mc:Choice Requires="a14">
+                  <mc:AlternateContent xmlns:mc="http://schemas.openxmlformats.org/markup-compatibility/2006">
+                    <mc:Choice xmlns:a14="http://schemas.microsoft.com/office/drawing/2010/main" Requires="a14">
                       <p:sp>
                         <p:nvSpPr>
                           <p:cNvPr id="69" name="Rectangle 68"/>
@@ -4762,7 +4692,7 @@
                         </p:nvSpPr>
                         <p:spPr>
                           <a:xfrm>
-                            <a:off x="4074700" y="3600415"/>
+                            <a:off x="4074700" y="3596162"/>
                             <a:ext cx="227807" cy="395236"/>
                           </a:xfrm>
                           <a:prstGeom prst="rect">
@@ -4846,7 +4776,7 @@
                         </p:txBody>
                       </p:sp>
                     </mc:Choice>
-                    <mc:Fallback xmlns="">
+                    <mc:Fallback>
                       <p:sp>
                         <p:nvSpPr>
                           <p:cNvPr id="69" name="Rectangle 68"/>
@@ -4857,41 +4787,28 @@
                         </p:nvSpPr>
                         <p:spPr>
                           <a:xfrm>
-                            <a:off x="4074700" y="3600415"/>
+                            <a:off x="4074700" y="3596162"/>
                             <a:ext cx="227807" cy="395236"/>
                           </a:xfrm>
                           <a:prstGeom prst="rect">
                             <a:avLst/>
                           </a:prstGeom>
-                          <a:blipFill rotWithShape="1">
+                          <a:blipFill>
                             <a:blip r:embed="rId6"/>
+                            <a:stretch>
+                              <a:fillRect l="-18421"/>
+                            </a:stretch>
                           </a:blipFill>
                           <a:ln>
                             <a:noFill/>
                           </a:ln>
                         </p:spPr>
-                        <p:style>
-                          <a:lnRef idx="2">
-                            <a:schemeClr val="accent1">
-                              <a:shade val="15000"/>
-                            </a:schemeClr>
-                          </a:lnRef>
-                          <a:fillRef idx="1">
-                            <a:schemeClr val="accent1"/>
-                          </a:fillRef>
-                          <a:effectRef idx="0">
-                            <a:schemeClr val="accent1"/>
-                          </a:effectRef>
-                          <a:fontRef idx="minor">
-                            <a:schemeClr val="lt1"/>
-                          </a:fontRef>
-                        </p:style>
                         <p:txBody>
                           <a:bodyPr/>
                           <a:lstStyle/>
                           <a:p>
                             <a:r>
-                              <a:rPr lang="zh-CN" altLang="en-US">
+                              <a:rPr lang="en-US">
                                 <a:noFill/>
                               </a:rPr>
                               <a:t> </a:t>
@@ -4948,9 +4865,9 @@
                   </p:nvGrpSpPr>
                   <p:grpSpPr>
                     <a:xfrm>
-                      <a:off x="3388441" y="3149059"/>
+                      <a:off x="3388441" y="3139501"/>
                       <a:ext cx="464766" cy="787055"/>
-                      <a:chOff x="3388441" y="2288191"/>
+                      <a:chOff x="3388441" y="2278633"/>
                       <a:chExt cx="464766" cy="787055"/>
                     </a:xfrm>
                   </p:grpSpPr>
@@ -4962,7 +4879,7 @@
                     </p:nvSpPr>
                     <p:spPr>
                       <a:xfrm>
-                        <a:off x="3388441" y="2314087"/>
+                        <a:off x="3388441" y="2304529"/>
                         <a:ext cx="464766" cy="761159"/>
                       </a:xfrm>
                       <a:prstGeom prst="roundRect">
@@ -5005,8 +4922,8 @@
                       </a:p>
                     </p:txBody>
                   </p:sp>
-                  <mc:AlternateContent xmlns:mc="http://schemas.openxmlformats.org/markup-compatibility/2006" xmlns:a14="http://schemas.microsoft.com/office/drawing/2010/main">
-                    <mc:Choice Requires="a14">
+                  <mc:AlternateContent xmlns:mc="http://schemas.openxmlformats.org/markup-compatibility/2006">
+                    <mc:Choice xmlns:a14="http://schemas.microsoft.com/office/drawing/2010/main" Requires="a14">
                       <p:sp>
                         <p:nvSpPr>
                           <p:cNvPr id="66" name="Rectangle 65"/>
@@ -5015,7 +4932,7 @@
                         </p:nvSpPr>
                         <p:spPr>
                           <a:xfrm>
-                            <a:off x="3538872" y="2288191"/>
+                            <a:off x="3538872" y="2278633"/>
                             <a:ext cx="227807" cy="371819"/>
                           </a:xfrm>
                           <a:prstGeom prst="rect">
@@ -5099,7 +5016,7 @@
                         </p:txBody>
                       </p:sp>
                     </mc:Choice>
-                    <mc:Fallback xmlns="">
+                    <mc:Fallback>
                       <p:sp>
                         <p:nvSpPr>
                           <p:cNvPr id="66" name="Rectangle 65"/>
@@ -5110,41 +5027,28 @@
                         </p:nvSpPr>
                         <p:spPr>
                           <a:xfrm>
-                            <a:off x="3538872" y="2288191"/>
+                            <a:off x="3538872" y="2278633"/>
                             <a:ext cx="227807" cy="371819"/>
                           </a:xfrm>
                           <a:prstGeom prst="rect">
                             <a:avLst/>
                           </a:prstGeom>
-                          <a:blipFill rotWithShape="1">
+                          <a:blipFill>
                             <a:blip r:embed="rId7"/>
+                            <a:stretch>
+                              <a:fillRect l="-18919"/>
+                            </a:stretch>
                           </a:blipFill>
                           <a:ln>
                             <a:noFill/>
                           </a:ln>
                         </p:spPr>
-                        <p:style>
-                          <a:lnRef idx="2">
-                            <a:schemeClr val="accent1">
-                              <a:shade val="15000"/>
-                            </a:schemeClr>
-                          </a:lnRef>
-                          <a:fillRef idx="1">
-                            <a:schemeClr val="accent1"/>
-                          </a:fillRef>
-                          <a:effectRef idx="0">
-                            <a:schemeClr val="accent1"/>
-                          </a:effectRef>
-                          <a:fontRef idx="minor">
-                            <a:schemeClr val="lt1"/>
-                          </a:fontRef>
-                        </p:style>
                         <p:txBody>
                           <a:bodyPr/>
                           <a:lstStyle/>
                           <a:p>
                             <a:r>
-                              <a:rPr lang="zh-CN" altLang="en-US">
+                              <a:rPr lang="en-US">
                                 <a:noFill/>
                               </a:rPr>
                               <a:t> </a:t>
@@ -5154,8 +5058,8 @@
                       </p:sp>
                     </mc:Fallback>
                   </mc:AlternateContent>
-                  <mc:AlternateContent xmlns:mc="http://schemas.openxmlformats.org/markup-compatibility/2006" xmlns:a14="http://schemas.microsoft.com/office/drawing/2010/main">
-                    <mc:Choice Requires="a14">
+                  <mc:AlternateContent xmlns:mc="http://schemas.openxmlformats.org/markup-compatibility/2006">
+                    <mc:Choice xmlns:a14="http://schemas.microsoft.com/office/drawing/2010/main" Requires="a14">
                       <p:sp>
                         <p:nvSpPr>
                           <p:cNvPr id="67" name="Rectangle 66"/>
@@ -5164,7 +5068,7 @@
                         </p:nvSpPr>
                         <p:spPr>
                           <a:xfrm>
-                            <a:off x="3538872" y="2657719"/>
+                            <a:off x="3538872" y="2648161"/>
                             <a:ext cx="227807" cy="371819"/>
                           </a:xfrm>
                           <a:prstGeom prst="rect">
@@ -5248,7 +5152,7 @@
                         </p:txBody>
                       </p:sp>
                     </mc:Choice>
-                    <mc:Fallback xmlns="">
+                    <mc:Fallback>
                       <p:sp>
                         <p:nvSpPr>
                           <p:cNvPr id="67" name="Rectangle 66"/>
@@ -5259,41 +5163,28 @@
                         </p:nvSpPr>
                         <p:spPr>
                           <a:xfrm>
-                            <a:off x="3538872" y="2657719"/>
+                            <a:off x="3538872" y="2648161"/>
                             <a:ext cx="227807" cy="371819"/>
                           </a:xfrm>
                           <a:prstGeom prst="rect">
                             <a:avLst/>
                           </a:prstGeom>
-                          <a:blipFill rotWithShape="1">
+                          <a:blipFill>
                             <a:blip r:embed="rId7"/>
+                            <a:stretch>
+                              <a:fillRect l="-18919"/>
+                            </a:stretch>
                           </a:blipFill>
                           <a:ln>
                             <a:noFill/>
                           </a:ln>
                         </p:spPr>
-                        <p:style>
-                          <a:lnRef idx="2">
-                            <a:schemeClr val="accent1">
-                              <a:shade val="15000"/>
-                            </a:schemeClr>
-                          </a:lnRef>
-                          <a:fillRef idx="1">
-                            <a:schemeClr val="accent1"/>
-                          </a:fillRef>
-                          <a:effectRef idx="0">
-                            <a:schemeClr val="accent1"/>
-                          </a:effectRef>
-                          <a:fontRef idx="minor">
-                            <a:schemeClr val="lt1"/>
-                          </a:fontRef>
-                        </p:style>
                         <p:txBody>
                           <a:bodyPr/>
                           <a:lstStyle/>
                           <a:p>
                             <a:r>
-                              <a:rPr lang="zh-CN" altLang="en-US">
+                              <a:rPr lang="en-US">
                                 <a:noFill/>
                               </a:rPr>
                               <a:t> </a:t>
@@ -5690,9 +5581,9 @@
                   </p:nvGrpSpPr>
                   <p:grpSpPr>
                     <a:xfrm>
-                      <a:off x="4433684" y="2235914"/>
+                      <a:off x="4487716" y="2235914"/>
                       <a:ext cx="1348391" cy="599887"/>
-                      <a:chOff x="4457391" y="2245569"/>
+                      <a:chOff x="4511423" y="2245569"/>
                       <a:chExt cx="1348391" cy="599887"/>
                     </a:xfrm>
                   </p:grpSpPr>
@@ -5704,7 +5595,7 @@
                     </p:nvSpPr>
                     <p:spPr>
                       <a:xfrm>
-                        <a:off x="4457391" y="2245569"/>
+                        <a:off x="4511423" y="2245569"/>
                         <a:ext cx="1348391" cy="280315"/>
                       </a:xfrm>
                       <a:prstGeom prst="rect">
@@ -5755,7 +5646,7 @@
                     </p:nvSpPr>
                     <p:spPr>
                       <a:xfrm>
-                        <a:off x="4742451" y="2565141"/>
+                        <a:off x="4796493" y="2565141"/>
                         <a:ext cx="1029432" cy="280315"/>
                       </a:xfrm>
                       <a:prstGeom prst="rect">
@@ -6054,9 +5945,9 @@
                 </p:nvGrpSpPr>
                 <p:grpSpPr>
                   <a:xfrm>
-                    <a:off x="4432991" y="3096782"/>
+                    <a:off x="4487023" y="3096782"/>
                     <a:ext cx="1348391" cy="624842"/>
-                    <a:chOff x="4457391" y="2245569"/>
+                    <a:chOff x="4511423" y="2245569"/>
                     <a:chExt cx="1348391" cy="624842"/>
                   </a:xfrm>
                 </p:grpSpPr>
@@ -6068,7 +5959,7 @@
                   </p:nvSpPr>
                   <p:spPr>
                     <a:xfrm>
-                      <a:off x="4457391" y="2245569"/>
+                      <a:off x="4511423" y="2245569"/>
                       <a:ext cx="1348391" cy="280315"/>
                     </a:xfrm>
                     <a:prstGeom prst="rect">
@@ -6119,7 +6010,7 @@
                   </p:nvSpPr>
                   <p:spPr>
                     <a:xfrm>
-                      <a:off x="4742451" y="2565141"/>
+                      <a:off x="4796493" y="2565141"/>
                       <a:ext cx="1029432" cy="280315"/>
                     </a:xfrm>
                     <a:prstGeom prst="rect">
@@ -6203,7 +6094,7 @@
                   </p:blipFill>
                   <p:spPr>
                     <a:xfrm>
-                      <a:off x="4593493" y="2557103"/>
+                      <a:off x="4647535" y="2557103"/>
                       <a:ext cx="297917" cy="313308"/>
                     </a:xfrm>
                     <a:prstGeom prst="rect">
@@ -6220,7 +6111,7 @@
                 </p:nvSpPr>
                 <p:spPr>
                   <a:xfrm>
-                    <a:off x="7128172" y="2701804"/>
+                    <a:off x="7128172" y="2671984"/>
                     <a:ext cx="853775" cy="280315"/>
                   </a:xfrm>
                   <a:prstGeom prst="rect">
@@ -6656,7 +6547,7 @@
             </p:blipFill>
             <p:spPr>
               <a:xfrm>
-                <a:off x="3943430" y="3610290"/>
+                <a:off x="3997472" y="3610290"/>
                 <a:ext cx="297917" cy="313308"/>
               </a:xfrm>
               <a:prstGeom prst="rect">
@@ -6750,7 +6641,7 @@
             </p:nvSpPr>
             <p:spPr>
               <a:xfrm>
-                <a:off x="7937428" y="929224"/>
+                <a:off x="7937428" y="894280"/>
                 <a:ext cx="2595356" cy="963250"/>
               </a:xfrm>
               <a:prstGeom prst="rect">
@@ -6834,7 +6725,7 @@
             </p:nvSpPr>
             <p:spPr>
               <a:xfrm>
-                <a:off x="7953018" y="729202"/>
+                <a:off x="7950783" y="705887"/>
                 <a:ext cx="2473210" cy="318890"/>
               </a:xfrm>
               <a:prstGeom prst="rect">
@@ -6903,12 +6794,12 @@
           </p:nvSpPr>
           <p:spPr>
             <a:xfrm>
-              <a:off x="7866703" y="1299285"/>
-              <a:ext cx="2662030" cy="1725462"/>
+              <a:off x="7866703" y="1269206"/>
+              <a:ext cx="2662030" cy="1772769"/>
             </a:xfrm>
             <a:prstGeom prst="roundRect">
               <a:avLst>
-                <a:gd name="adj" fmla="val 3680"/>
+                <a:gd name="adj" fmla="val 5676"/>
               </a:avLst>
             </a:prstGeom>
             <a:noFill/>
@@ -6983,13 +6874,17 @@
       <p:cxnSp>
         <p:nvCxnSpPr>
           <p:cNvPr id="83" name="Straight Arrow Connector 82"/>
-          <p:cNvCxnSpPr/>
+          <p:cNvCxnSpPr>
+            <a:cxnSpLocks/>
+            <a:stCxn id="12" idx="2"/>
+            <a:endCxn id="75" idx="0"/>
+          </p:cNvCxnSpPr>
           <p:nvPr/>
         </p:nvCxnSpPr>
         <p:spPr>
           <a:xfrm>
-            <a:off x="9192332" y="3105452"/>
-            <a:ext cx="0" cy="197618"/>
+            <a:off x="9197718" y="3087017"/>
+            <a:ext cx="0" cy="174091"/>
           </a:xfrm>
           <a:prstGeom prst="straightConnector1">
             <a:avLst/>
@@ -7032,7 +6927,7 @@
         </p:blipFill>
         <p:spPr>
           <a:xfrm>
-            <a:off x="7963772" y="4404400"/>
+            <a:off x="7963772" y="4410224"/>
             <a:ext cx="2515316" cy="504250"/>
           </a:xfrm>
           <a:prstGeom prst="rect">
@@ -7056,7 +6951,7 @@
         </p:blipFill>
         <p:spPr>
           <a:xfrm>
-            <a:off x="8076486" y="2477262"/>
+            <a:off x="8076486" y="2471438"/>
             <a:ext cx="2247042" cy="490148"/>
           </a:xfrm>
           <a:prstGeom prst="rect">
@@ -7120,7 +7015,7 @@
         </p:nvSpPr>
         <p:spPr>
           <a:xfrm>
-            <a:off x="5589439" y="3872243"/>
+            <a:off x="5550935" y="3858335"/>
             <a:ext cx="1927691" cy="1017256"/>
           </a:xfrm>
           <a:prstGeom prst="roundRect">
@@ -7128,13 +7023,9 @@
               <a:gd name="adj" fmla="val 7314"/>
             </a:avLst>
           </a:prstGeom>
-          <a:solidFill>
-            <a:srgbClr val="ECF1F9"/>
-          </a:solidFill>
+          <a:noFill/>
           <a:ln w="15875">
-            <a:solidFill>
-              <a:srgbClr val="0E17C8"/>
-            </a:solidFill>
+            <a:noFill/>
           </a:ln>
         </p:spPr>
         <p:style>
@@ -7211,14 +7102,20 @@
       </p:sp>
       <p:sp>
         <p:nvSpPr>
-          <p:cNvPr id="89" name="Rectangle 88"/>
+          <p:cNvPr id="90" name="Rectangle 89">
+            <a:extLst>
+              <a:ext uri="{FF2B5EF4-FFF2-40B4-BE49-F238E27FC236}">
+                <a16:creationId xmlns:a16="http://schemas.microsoft.com/office/drawing/2014/main" id="{5E4DBAFC-8575-15B5-060A-B8318DC1BE35}"/>
+              </a:ext>
+            </a:extLst>
+          </p:cNvPr>
           <p:cNvSpPr/>
           <p:nvPr/>
         </p:nvSpPr>
         <p:spPr>
           <a:xfrm>
-            <a:off x="10123331" y="3131466"/>
-            <a:ext cx="552971" cy="67392"/>
+            <a:off x="6695376" y="1688630"/>
+            <a:ext cx="820249" cy="300248"/>
           </a:xfrm>
           <a:prstGeom prst="rect">
             <a:avLst/>
@@ -7253,7 +7150,14 @@
           <a:lstStyle/>
           <a:p>
             <a:pPr algn="ctr"/>
-            <a:endParaRPr lang="en-US"/>
+            <a:r>
+              <a:rPr lang="en-US" sz="1200" b="1" dirty="0">
+                <a:solidFill>
+                  <a:srgbClr val="444FCD"/>
+                </a:solidFill>
+              </a:rPr>
+              <a:t>D. score</a:t>
+            </a:r>
           </a:p>
         </p:txBody>
       </p:sp>
@@ -7290,7 +7194,7 @@
         </p:nvSpPr>
         <p:spPr>
           <a:xfrm>
-            <a:off x="1824977" y="3382394"/>
+            <a:off x="868632" y="3309632"/>
             <a:ext cx="4841875" cy="1865900"/>
           </a:xfrm>
           <a:prstGeom prst="roundRect">
@@ -7347,7 +7251,7 @@
         </p:nvSpPr>
         <p:spPr>
           <a:xfrm>
-            <a:off x="7057591" y="3382395"/>
+            <a:off x="6101246" y="3309633"/>
             <a:ext cx="1446316" cy="1865900"/>
           </a:xfrm>
           <a:prstGeom prst="roundRect">
@@ -7398,7 +7302,7 @@
         </p:nvSpPr>
         <p:spPr>
           <a:xfrm>
-            <a:off x="1824977" y="1888943"/>
+            <a:off x="868632" y="1816181"/>
             <a:ext cx="6678930" cy="1374763"/>
           </a:xfrm>
           <a:prstGeom prst="roundRect">
@@ -7451,7 +7355,7 @@
         </p:nvCxnSpPr>
         <p:spPr>
           <a:xfrm flipV="1">
-            <a:off x="2866377" y="3728762"/>
+            <a:off x="1910032" y="3656000"/>
             <a:ext cx="499745" cy="595630"/>
           </a:xfrm>
           <a:prstGeom prst="straightConnector1">
@@ -7489,7 +7393,7 @@
         </p:nvCxnSpPr>
         <p:spPr>
           <a:xfrm flipV="1">
-            <a:off x="2866377" y="4089442"/>
+            <a:off x="1910032" y="4016680"/>
             <a:ext cx="511810" cy="234315"/>
           </a:xfrm>
           <a:prstGeom prst="straightConnector1">
@@ -7527,7 +7431,7 @@
         </p:nvCxnSpPr>
         <p:spPr>
           <a:xfrm>
-            <a:off x="2866377" y="4323757"/>
+            <a:off x="1910032" y="4250995"/>
             <a:ext cx="520065" cy="223520"/>
           </a:xfrm>
           <a:prstGeom prst="straightConnector1">
@@ -7563,7 +7467,7 @@
         </p:nvGrpSpPr>
         <p:grpSpPr>
           <a:xfrm>
-            <a:off x="3474072" y="3503337"/>
+            <a:off x="2517727" y="3430575"/>
             <a:ext cx="469265" cy="771525"/>
             <a:chOff x="3388441" y="2303431"/>
             <a:chExt cx="464766" cy="771815"/>
@@ -7901,7 +7805,7 @@
         </p:nvSpPr>
         <p:spPr>
           <a:xfrm>
-            <a:off x="2004047" y="3975777"/>
+            <a:off x="1047702" y="3903015"/>
             <a:ext cx="862330" cy="695325"/>
           </a:xfrm>
           <a:prstGeom prst="roundRect">
@@ -7960,7 +7864,7 @@
         </p:nvCxnSpPr>
         <p:spPr>
           <a:xfrm>
-            <a:off x="2866377" y="4323757"/>
+            <a:off x="1910032" y="4250995"/>
             <a:ext cx="511810" cy="595630"/>
           </a:xfrm>
           <a:prstGeom prst="straightConnector1">
@@ -7996,7 +7900,7 @@
         </p:nvGrpSpPr>
         <p:grpSpPr>
           <a:xfrm>
-            <a:off x="3474072" y="4363762"/>
+            <a:off x="2517727" y="4291000"/>
             <a:ext cx="469265" cy="771525"/>
             <a:chOff x="3388441" y="2303431"/>
             <a:chExt cx="464766" cy="771815"/>
@@ -8336,7 +8240,7 @@
         </p:nvCxnSpPr>
         <p:spPr>
           <a:xfrm>
-            <a:off x="4051287" y="3879257"/>
+            <a:off x="3094942" y="3806495"/>
             <a:ext cx="739775" cy="0"/>
           </a:xfrm>
           <a:prstGeom prst="straightConnector1">
@@ -8372,7 +8276,7 @@
         </p:nvSpPr>
         <p:spPr>
           <a:xfrm>
-            <a:off x="4045572" y="4070392"/>
+            <a:off x="3089227" y="3997630"/>
             <a:ext cx="1042035" cy="465455"/>
           </a:xfrm>
           <a:prstGeom prst="rect">
@@ -8436,7 +8340,7 @@
         </p:nvSpPr>
         <p:spPr>
           <a:xfrm>
-            <a:off x="4791062" y="3782737"/>
+            <a:off x="3834717" y="3709975"/>
             <a:ext cx="194310" cy="192405"/>
           </a:xfrm>
           <a:prstGeom prst="ellipse">
@@ -8480,7 +8384,7 @@
         </p:nvSpPr>
         <p:spPr>
           <a:xfrm>
-            <a:off x="5395582" y="3590967"/>
+            <a:off x="4439237" y="3518205"/>
             <a:ext cx="194310" cy="192405"/>
           </a:xfrm>
           <a:prstGeom prst="ellipse">
@@ -8524,7 +8428,7 @@
         </p:nvSpPr>
         <p:spPr>
           <a:xfrm>
-            <a:off x="5850242" y="3590967"/>
+            <a:off x="4893897" y="3518205"/>
             <a:ext cx="194310" cy="192405"/>
           </a:xfrm>
           <a:prstGeom prst="ellipse">
@@ -8570,7 +8474,7 @@
         </p:nvCxnSpPr>
         <p:spPr>
           <a:xfrm>
-            <a:off x="4045572" y="4767622"/>
+            <a:off x="3089227" y="4694860"/>
             <a:ext cx="734060" cy="0"/>
           </a:xfrm>
           <a:prstGeom prst="straightConnector1">
@@ -8606,7 +8510,7 @@
         </p:nvSpPr>
         <p:spPr>
           <a:xfrm>
-            <a:off x="4779632" y="4671102"/>
+            <a:off x="3823287" y="4598340"/>
             <a:ext cx="194310" cy="192405"/>
           </a:xfrm>
           <a:prstGeom prst="ellipse">
@@ -8653,7 +8557,7 @@
         </p:nvCxnSpPr>
         <p:spPr>
           <a:xfrm>
-            <a:off x="4985372" y="3879257"/>
+            <a:off x="4029027" y="3806495"/>
             <a:ext cx="414020" cy="182245"/>
           </a:xfrm>
           <a:prstGeom prst="straightConnector1">
@@ -8692,7 +8596,7 @@
         </p:nvCxnSpPr>
         <p:spPr>
           <a:xfrm flipV="1">
-            <a:off x="4985372" y="3686852"/>
+            <a:off x="4029027" y="3614090"/>
             <a:ext cx="410210" cy="191770"/>
           </a:xfrm>
           <a:prstGeom prst="straightConnector1">
@@ -8728,7 +8632,7 @@
         </p:nvSpPr>
         <p:spPr>
           <a:xfrm>
-            <a:off x="5399392" y="3964982"/>
+            <a:off x="4443047" y="3892220"/>
             <a:ext cx="194310" cy="192405"/>
           </a:xfrm>
           <a:prstGeom prst="ellipse">
@@ -8772,7 +8676,7 @@
         </p:nvSpPr>
         <p:spPr>
           <a:xfrm>
-            <a:off x="5854052" y="3964982"/>
+            <a:off x="4897707" y="3892220"/>
             <a:ext cx="194310" cy="192405"/>
           </a:xfrm>
           <a:prstGeom prst="ellipse">
@@ -8816,7 +8720,7 @@
         </p:nvSpPr>
         <p:spPr>
           <a:xfrm>
-            <a:off x="5384152" y="4478697"/>
+            <a:off x="4427807" y="4405935"/>
             <a:ext cx="194310" cy="192405"/>
           </a:xfrm>
           <a:prstGeom prst="ellipse">
@@ -8860,7 +8764,7 @@
         </p:nvSpPr>
         <p:spPr>
           <a:xfrm>
-            <a:off x="5838812" y="4478697"/>
+            <a:off x="4882467" y="4405935"/>
             <a:ext cx="194310" cy="192405"/>
           </a:xfrm>
           <a:prstGeom prst="ellipse">
@@ -8906,7 +8810,7 @@
         </p:nvCxnSpPr>
         <p:spPr>
           <a:xfrm>
-            <a:off x="4973942" y="4766987"/>
+            <a:off x="4017597" y="4694225"/>
             <a:ext cx="414020" cy="182245"/>
           </a:xfrm>
           <a:prstGeom prst="straightConnector1">
@@ -8944,7 +8848,7 @@
         </p:nvCxnSpPr>
         <p:spPr>
           <a:xfrm flipV="1">
-            <a:off x="4973942" y="4575217"/>
+            <a:off x="4017597" y="4502455"/>
             <a:ext cx="410210" cy="191770"/>
           </a:xfrm>
           <a:prstGeom prst="straightConnector1">
@@ -8980,7 +8884,7 @@
         </p:nvSpPr>
         <p:spPr>
           <a:xfrm>
-            <a:off x="5387962" y="4853347"/>
+            <a:off x="4431617" y="4780585"/>
             <a:ext cx="194310" cy="192405"/>
           </a:xfrm>
           <a:prstGeom prst="ellipse">
@@ -9024,7 +8928,7 @@
         </p:nvSpPr>
         <p:spPr>
           <a:xfrm>
-            <a:off x="5842622" y="4853347"/>
+            <a:off x="4886277" y="4780585"/>
             <a:ext cx="194310" cy="192405"/>
           </a:xfrm>
           <a:prstGeom prst="ellipse">
@@ -9068,7 +8972,7 @@
         </p:nvCxnSpPr>
         <p:spPr>
           <a:xfrm flipV="1">
-            <a:off x="6048997" y="3685582"/>
+            <a:off x="5092652" y="3612820"/>
             <a:ext cx="1189990" cy="1905"/>
           </a:xfrm>
           <a:prstGeom prst="straightConnector1">
@@ -9106,7 +9010,7 @@
         </p:nvCxnSpPr>
         <p:spPr>
           <a:xfrm flipV="1">
-            <a:off x="6048997" y="4057692"/>
+            <a:off x="5092652" y="3984930"/>
             <a:ext cx="428625" cy="1270"/>
           </a:xfrm>
           <a:prstGeom prst="straightConnector1">
@@ -9145,7 +9049,7 @@
         </p:nvCxnSpPr>
         <p:spPr>
           <a:xfrm flipV="1">
-            <a:off x="6036932" y="4940977"/>
+            <a:off x="5080587" y="4868215"/>
             <a:ext cx="440690" cy="8890"/>
           </a:xfrm>
           <a:prstGeom prst="straightConnector1">
@@ -9184,7 +9088,7 @@
         </p:nvCxnSpPr>
         <p:spPr>
           <a:xfrm>
-            <a:off x="6033122" y="4574900"/>
+            <a:off x="5076777" y="4502138"/>
             <a:ext cx="832166" cy="317"/>
           </a:xfrm>
           <a:prstGeom prst="line">
@@ -9221,7 +9125,7 @@
         </p:nvCxnSpPr>
         <p:spPr>
           <a:xfrm flipV="1">
-            <a:off x="6865288" y="4050707"/>
+            <a:off x="5908943" y="3977945"/>
             <a:ext cx="0" cy="524193"/>
           </a:xfrm>
           <a:prstGeom prst="line">
@@ -9258,7 +9162,7 @@
         </p:nvCxnSpPr>
         <p:spPr>
           <a:xfrm>
-            <a:off x="6865288" y="4050707"/>
+            <a:off x="5908943" y="3977945"/>
             <a:ext cx="374969" cy="0"/>
           </a:xfrm>
           <a:prstGeom prst="straightConnector1">
@@ -9294,7 +9198,7 @@
         </p:nvSpPr>
         <p:spPr>
           <a:xfrm>
-            <a:off x="7241527" y="3509052"/>
+            <a:off x="6285182" y="3436290"/>
             <a:ext cx="1056640" cy="699770"/>
           </a:xfrm>
           <a:prstGeom prst="roundRect">
@@ -9351,7 +9255,7 @@
         </p:nvSpPr>
         <p:spPr>
           <a:xfrm>
-            <a:off x="7241527" y="4436787"/>
+            <a:off x="6285182" y="4364025"/>
             <a:ext cx="1056640" cy="699770"/>
           </a:xfrm>
           <a:prstGeom prst="roundRect">
@@ -9411,7 +9315,7 @@
         </p:nvCxnSpPr>
         <p:spPr>
           <a:xfrm>
-            <a:off x="7769847" y="4208822"/>
+            <a:off x="6813502" y="4136060"/>
             <a:ext cx="0" cy="227965"/>
           </a:xfrm>
           <a:prstGeom prst="straightConnector1">
@@ -9447,7 +9351,7 @@
         </p:nvSpPr>
         <p:spPr>
           <a:xfrm>
-            <a:off x="3366469" y="2056884"/>
+            <a:off x="2410124" y="1984122"/>
             <a:ext cx="194310" cy="192405"/>
           </a:xfrm>
           <a:prstGeom prst="ellipse">
@@ -9491,7 +9395,7 @@
         </p:nvSpPr>
         <p:spPr>
           <a:xfrm>
-            <a:off x="4655519" y="2059424"/>
+            <a:off x="3699174" y="1986662"/>
             <a:ext cx="194310" cy="192405"/>
           </a:xfrm>
           <a:prstGeom prst="ellipse">
@@ -9559,7 +9463,7 @@
         </p:blipFill>
         <p:spPr>
           <a:xfrm>
-            <a:off x="4438349" y="2110224"/>
+            <a:off x="3482004" y="2037462"/>
             <a:ext cx="180340" cy="85725"/>
           </a:xfrm>
           <a:prstGeom prst="rect">
@@ -9575,7 +9479,7 @@
         </p:nvSpPr>
         <p:spPr>
           <a:xfrm>
-            <a:off x="2004048" y="2246749"/>
+            <a:off x="1047703" y="2173987"/>
             <a:ext cx="830292" cy="549275"/>
           </a:xfrm>
           <a:prstGeom prst="roundRect">
@@ -9636,7 +9540,7 @@
         </p:nvCxnSpPr>
         <p:spPr>
           <a:xfrm flipV="1">
-            <a:off x="2834340" y="2153087"/>
+            <a:off x="1877995" y="2080325"/>
             <a:ext cx="532129" cy="368300"/>
           </a:xfrm>
           <a:prstGeom prst="straightConnector1">
@@ -9676,7 +9580,7 @@
         </p:nvCxnSpPr>
         <p:spPr>
           <a:xfrm>
-            <a:off x="2834340" y="2521387"/>
+            <a:off x="1877995" y="2448625"/>
             <a:ext cx="532129" cy="3175"/>
           </a:xfrm>
           <a:prstGeom prst="straightConnector1">
@@ -9716,7 +9620,7 @@
         </p:nvCxnSpPr>
         <p:spPr>
           <a:xfrm>
-            <a:off x="2834340" y="2521387"/>
+            <a:off x="1877995" y="2448625"/>
             <a:ext cx="532129" cy="381000"/>
           </a:xfrm>
           <a:prstGeom prst="straightConnector1">
@@ -9752,7 +9656,7 @@
         </p:nvSpPr>
         <p:spPr>
           <a:xfrm>
-            <a:off x="3366469" y="2428359"/>
+            <a:off x="2410124" y="2355597"/>
             <a:ext cx="194310" cy="192405"/>
           </a:xfrm>
           <a:prstGeom prst="ellipse">
@@ -9796,7 +9700,7 @@
         </p:nvSpPr>
         <p:spPr>
           <a:xfrm>
-            <a:off x="4655519" y="2430899"/>
+            <a:off x="3699174" y="2358137"/>
             <a:ext cx="194310" cy="192405"/>
           </a:xfrm>
           <a:prstGeom prst="ellipse">
@@ -9840,7 +9744,7 @@
         </p:nvSpPr>
         <p:spPr>
           <a:xfrm>
-            <a:off x="3366469" y="2806184"/>
+            <a:off x="2410124" y="2733422"/>
             <a:ext cx="194310" cy="192405"/>
           </a:xfrm>
           <a:prstGeom prst="ellipse">
@@ -9884,7 +9788,7 @@
         </p:nvSpPr>
         <p:spPr>
           <a:xfrm>
-            <a:off x="4655519" y="2808724"/>
+            <a:off x="3699174" y="2735962"/>
             <a:ext cx="194310" cy="192405"/>
           </a:xfrm>
           <a:prstGeom prst="ellipse">
@@ -9931,7 +9835,7 @@
         </p:nvCxnSpPr>
         <p:spPr>
           <a:xfrm flipV="1">
-            <a:off x="3560843" y="2152477"/>
+            <a:off x="2604498" y="2079715"/>
             <a:ext cx="226695" cy="635"/>
           </a:xfrm>
           <a:prstGeom prst="line">
@@ -9966,7 +9870,7 @@
         </p:nvSpPr>
         <p:spPr>
           <a:xfrm>
-            <a:off x="3787606" y="2056883"/>
+            <a:off x="2831261" y="1984121"/>
             <a:ext cx="194414" cy="192457"/>
           </a:xfrm>
           <a:prstGeom prst="ellipse">
@@ -10010,7 +9914,7 @@
         </p:nvCxnSpPr>
         <p:spPr>
           <a:xfrm>
-            <a:off x="3567162" y="2527311"/>
+            <a:off x="2610817" y="2454549"/>
             <a:ext cx="221303" cy="0"/>
           </a:xfrm>
           <a:prstGeom prst="line">
@@ -10045,7 +9949,7 @@
         </p:nvSpPr>
         <p:spPr>
           <a:xfrm>
-            <a:off x="3787576" y="2431082"/>
+            <a:off x="2831231" y="2358320"/>
             <a:ext cx="194414" cy="192457"/>
           </a:xfrm>
           <a:prstGeom prst="ellipse">
@@ -10091,7 +9995,7 @@
         </p:nvCxnSpPr>
         <p:spPr>
           <a:xfrm flipV="1">
-            <a:off x="3562113" y="2902412"/>
+            <a:off x="2605768" y="2829650"/>
             <a:ext cx="226695" cy="635"/>
           </a:xfrm>
           <a:prstGeom prst="line">
@@ -10126,7 +10030,7 @@
         </p:nvSpPr>
         <p:spPr>
           <a:xfrm>
-            <a:off x="3788876" y="2806183"/>
+            <a:off x="2832531" y="2733421"/>
             <a:ext cx="194414" cy="192457"/>
           </a:xfrm>
           <a:prstGeom prst="ellipse">
@@ -10172,7 +10076,7 @@
         </p:nvCxnSpPr>
         <p:spPr>
           <a:xfrm flipV="1">
-            <a:off x="3973593" y="2150572"/>
+            <a:off x="3017248" y="2077810"/>
             <a:ext cx="226695" cy="635"/>
           </a:xfrm>
           <a:prstGeom prst="line">
@@ -10207,7 +10111,7 @@
         </p:nvSpPr>
         <p:spPr>
           <a:xfrm>
-            <a:off x="4200356" y="2054343"/>
+            <a:off x="3244011" y="1981581"/>
             <a:ext cx="194414" cy="192457"/>
           </a:xfrm>
           <a:prstGeom prst="ellipse">
@@ -10251,7 +10155,7 @@
         </p:nvCxnSpPr>
         <p:spPr>
           <a:xfrm>
-            <a:off x="3979912" y="2524771"/>
+            <a:off x="3023567" y="2452009"/>
             <a:ext cx="221303" cy="0"/>
           </a:xfrm>
           <a:prstGeom prst="line">
@@ -10286,7 +10190,7 @@
         </p:nvSpPr>
         <p:spPr>
           <a:xfrm>
-            <a:off x="4200326" y="2428542"/>
+            <a:off x="3243981" y="2355780"/>
             <a:ext cx="194414" cy="192457"/>
           </a:xfrm>
           <a:prstGeom prst="ellipse">
@@ -10332,7 +10236,7 @@
         </p:nvCxnSpPr>
         <p:spPr>
           <a:xfrm flipV="1">
-            <a:off x="3974863" y="2899872"/>
+            <a:off x="3018518" y="2827110"/>
             <a:ext cx="226695" cy="635"/>
           </a:xfrm>
           <a:prstGeom prst="line">
@@ -10367,7 +10271,7 @@
         </p:nvSpPr>
         <p:spPr>
           <a:xfrm>
-            <a:off x="4201626" y="2803643"/>
+            <a:off x="3245281" y="2730881"/>
             <a:ext cx="194414" cy="192457"/>
           </a:xfrm>
           <a:prstGeom prst="ellipse">
@@ -10411,7 +10315,7 @@
         </p:nvSpPr>
         <p:spPr>
           <a:xfrm>
-            <a:off x="5587352" y="2019358"/>
+            <a:off x="4631007" y="1946596"/>
             <a:ext cx="988314" cy="1024044"/>
           </a:xfrm>
           <a:prstGeom prst="roundRect">
@@ -10471,7 +10375,7 @@
         </p:nvCxnSpPr>
         <p:spPr>
           <a:xfrm>
-            <a:off x="4849829" y="2904927"/>
+            <a:off x="3893484" y="2832165"/>
             <a:ext cx="740063" cy="317"/>
           </a:xfrm>
           <a:prstGeom prst="straightConnector1">
@@ -10510,7 +10414,7 @@
         </p:nvCxnSpPr>
         <p:spPr>
           <a:xfrm flipV="1">
-            <a:off x="4849829" y="2150572"/>
+            <a:off x="3893484" y="2077810"/>
             <a:ext cx="740063" cy="5055"/>
           </a:xfrm>
           <a:prstGeom prst="straightConnector1">
@@ -10566,7 +10470,7 @@
         </p:blipFill>
         <p:spPr>
           <a:xfrm>
-            <a:off x="6209866" y="3525475"/>
+            <a:off x="5253521" y="3452713"/>
             <a:ext cx="300947" cy="313308"/>
           </a:xfrm>
           <a:prstGeom prst="rect">
@@ -10602,7 +10506,7 @@
         </p:blipFill>
         <p:spPr>
           <a:xfrm>
-            <a:off x="6209866" y="4422095"/>
+            <a:off x="5253521" y="4349333"/>
             <a:ext cx="300947" cy="313308"/>
           </a:xfrm>
           <a:prstGeom prst="rect">
@@ -10643,7 +10547,7 @@
         </p:blipFill>
         <p:spPr>
           <a:xfrm>
-            <a:off x="6216985" y="3909959"/>
+            <a:off x="5260640" y="3837197"/>
             <a:ext cx="300947" cy="285890"/>
           </a:xfrm>
           <a:prstGeom prst="rect">
@@ -10684,7 +10588,7 @@
         </p:blipFill>
         <p:spPr>
           <a:xfrm>
-            <a:off x="6216985" y="4802769"/>
+            <a:off x="5260640" y="4730007"/>
             <a:ext cx="300947" cy="285890"/>
           </a:xfrm>
           <a:prstGeom prst="rect">
@@ -10720,7 +10624,7 @@
         </p:blipFill>
         <p:spPr>
           <a:xfrm>
-            <a:off x="5015778" y="1987582"/>
+            <a:off x="4059433" y="1914820"/>
             <a:ext cx="300947" cy="313308"/>
           </a:xfrm>
           <a:prstGeom prst="rect">
@@ -10761,7 +10665,7 @@
         </p:blipFill>
         <p:spPr>
           <a:xfrm>
-            <a:off x="5015277" y="2757511"/>
+            <a:off x="4058932" y="2684749"/>
             <a:ext cx="300947" cy="285890"/>
           </a:xfrm>
           <a:prstGeom prst="rect">
@@ -10779,7 +10683,7 @@
         </p:nvCxnSpPr>
         <p:spPr>
           <a:xfrm flipV="1">
-            <a:off x="4855544" y="2521387"/>
+            <a:off x="3899199" y="2448625"/>
             <a:ext cx="734348" cy="6032"/>
           </a:xfrm>
           <a:prstGeom prst="straightConnector1">
@@ -10840,7 +10744,7 @@
         </p:blipFill>
         <p:spPr>
           <a:xfrm>
-            <a:off x="5014642" y="2378416"/>
+            <a:off x="4058297" y="2305654"/>
             <a:ext cx="300947" cy="285890"/>
           </a:xfrm>
           <a:prstGeom prst="rect">
@@ -10886,7 +10790,7 @@
         </p:blipFill>
         <p:spPr>
           <a:xfrm>
-            <a:off x="4438349" y="2484239"/>
+            <a:off x="3482004" y="2411477"/>
             <a:ext cx="180340" cy="85725"/>
           </a:xfrm>
           <a:prstGeom prst="rect">
@@ -10932,7 +10836,7 @@
         </p:blipFill>
         <p:spPr>
           <a:xfrm>
-            <a:off x="4438349" y="2863651"/>
+            <a:off x="3482004" y="2790889"/>
             <a:ext cx="180340" cy="85725"/>
           </a:xfrm>
           <a:prstGeom prst="rect">
@@ -10978,7 +10882,7 @@
         </p:blipFill>
         <p:spPr>
           <a:xfrm>
-            <a:off x="5637040" y="3642402"/>
+            <a:off x="4680695" y="3569640"/>
             <a:ext cx="180340" cy="85725"/>
           </a:xfrm>
           <a:prstGeom prst="rect">
@@ -11024,7 +10928,7 @@
         </p:blipFill>
         <p:spPr>
           <a:xfrm>
-            <a:off x="5636325" y="4016417"/>
+            <a:off x="4679980" y="3943655"/>
             <a:ext cx="180340" cy="85725"/>
           </a:xfrm>
           <a:prstGeom prst="rect">
@@ -11070,7 +10974,7 @@
         </p:blipFill>
         <p:spPr>
           <a:xfrm>
-            <a:off x="5629658" y="4532354"/>
+            <a:off x="4673313" y="4459592"/>
             <a:ext cx="180340" cy="85725"/>
           </a:xfrm>
           <a:prstGeom prst="rect">
@@ -11116,7 +11020,7 @@
         </p:blipFill>
         <p:spPr>
           <a:xfrm>
-            <a:off x="5624181" y="4906369"/>
+            <a:off x="4667836" y="4833607"/>
             <a:ext cx="180340" cy="85725"/>
           </a:xfrm>
           <a:prstGeom prst="rect">
@@ -11124,124 +11028,6 @@
           </a:prstGeom>
         </p:spPr>
       </p:pic>
-      <p:sp>
-        <p:nvSpPr>
-          <p:cNvPr id="82" name="Rectangle 81">
-            <a:extLst>
-              <a:ext uri="{FF2B5EF4-FFF2-40B4-BE49-F238E27FC236}">
-                <a16:creationId xmlns:a16="http://schemas.microsoft.com/office/drawing/2014/main" id="{7A0D0379-568E-CC2C-B771-EBDE7A814995}"/>
-              </a:ext>
-            </a:extLst>
-          </p:cNvPr>
-          <p:cNvSpPr/>
-          <p:nvPr/>
-        </p:nvSpPr>
-        <p:spPr>
-          <a:xfrm>
-            <a:off x="394692" y="2379407"/>
-            <a:ext cx="1354311" cy="318890"/>
-          </a:xfrm>
-          <a:prstGeom prst="rect">
-            <a:avLst/>
-          </a:prstGeom>
-          <a:noFill/>
-          <a:ln>
-            <a:noFill/>
-          </a:ln>
-        </p:spPr>
-        <p:style>
-          <a:lnRef idx="2">
-            <a:schemeClr val="accent1">
-              <a:shade val="15000"/>
-            </a:schemeClr>
-          </a:lnRef>
-          <a:fillRef idx="1">
-            <a:schemeClr val="accent1"/>
-          </a:fillRef>
-          <a:effectRef idx="0">
-            <a:schemeClr val="accent1"/>
-          </a:effectRef>
-          <a:fontRef idx="minor">
-            <a:schemeClr val="lt1"/>
-          </a:fontRef>
-        </p:style>
-        <p:txBody>
-          <a:bodyPr rtlCol="0" anchor="ctr"/>
-          <a:lstStyle/>
-          <a:p>
-            <a:pPr algn="ctr"/>
-            <a:r>
-              <a:rPr lang="en-US" sz="2000" b="1" dirty="0">
-                <a:solidFill>
-                  <a:schemeClr val="tx1"/>
-                </a:solidFill>
-              </a:rPr>
-              <a:t>Agentic RL</a:t>
-            </a:r>
-          </a:p>
-        </p:txBody>
-      </p:sp>
-      <p:sp>
-        <p:nvSpPr>
-          <p:cNvPr id="84" name="Rectangle 83">
-            <a:extLst>
-              <a:ext uri="{FF2B5EF4-FFF2-40B4-BE49-F238E27FC236}">
-                <a16:creationId xmlns:a16="http://schemas.microsoft.com/office/drawing/2014/main" id="{144EE931-6664-9B76-24CD-87372CA521ED}"/>
-              </a:ext>
-            </a:extLst>
-          </p:cNvPr>
-          <p:cNvSpPr/>
-          <p:nvPr/>
-        </p:nvSpPr>
-        <p:spPr>
-          <a:xfrm>
-            <a:off x="976524" y="4164312"/>
-            <a:ext cx="785412" cy="318890"/>
-          </a:xfrm>
-          <a:prstGeom prst="rect">
-            <a:avLst/>
-          </a:prstGeom>
-          <a:solidFill>
-            <a:schemeClr val="bg1"/>
-          </a:solidFill>
-          <a:ln>
-            <a:solidFill>
-              <a:schemeClr val="bg1"/>
-            </a:solidFill>
-          </a:ln>
-        </p:spPr>
-        <p:style>
-          <a:lnRef idx="2">
-            <a:schemeClr val="accent1">
-              <a:shade val="15000"/>
-            </a:schemeClr>
-          </a:lnRef>
-          <a:fillRef idx="1">
-            <a:schemeClr val="accent1"/>
-          </a:fillRef>
-          <a:effectRef idx="0">
-            <a:schemeClr val="accent1"/>
-          </a:effectRef>
-          <a:fontRef idx="minor">
-            <a:schemeClr val="lt1"/>
-          </a:fontRef>
-        </p:style>
-        <p:txBody>
-          <a:bodyPr rtlCol="0" anchor="ctr"/>
-          <a:lstStyle/>
-          <a:p>
-            <a:pPr algn="ctr"/>
-            <a:r>
-              <a:rPr lang="en-US" sz="2000" b="1" dirty="0">
-                <a:solidFill>
-                  <a:schemeClr val="tx1"/>
-                </a:solidFill>
-              </a:rPr>
-              <a:t>ENVS</a:t>
-            </a:r>
-          </a:p>
-        </p:txBody>
-      </p:sp>
       <p:cxnSp>
         <p:nvCxnSpPr>
           <p:cNvPr id="96" name="Straight Connector 95">
@@ -11259,7 +11045,7 @@
         </p:nvCxnSpPr>
         <p:spPr>
           <a:xfrm flipV="1">
-            <a:off x="7568870" y="2803643"/>
+            <a:off x="6612525" y="2730881"/>
             <a:ext cx="0" cy="349189"/>
           </a:xfrm>
           <a:prstGeom prst="line">
@@ -11303,7 +11089,7 @@
         </p:nvCxnSpPr>
         <p:spPr>
           <a:xfrm flipV="1">
-            <a:off x="2419194" y="2796024"/>
+            <a:off x="1462849" y="2723262"/>
             <a:ext cx="0" cy="356808"/>
           </a:xfrm>
           <a:prstGeom prst="straightConnector1">
@@ -11347,7 +11133,7 @@
         </p:nvCxnSpPr>
         <p:spPr>
           <a:xfrm>
-            <a:off x="2411869" y="3150359"/>
+            <a:off x="1455524" y="3077597"/>
             <a:ext cx="5157001" cy="2473"/>
           </a:xfrm>
           <a:prstGeom prst="line">
@@ -11388,7 +11174,7 @@
         </p:nvSpPr>
         <p:spPr>
           <a:xfrm>
-            <a:off x="6839572" y="2256208"/>
+            <a:off x="5883227" y="2183446"/>
             <a:ext cx="1458595" cy="547435"/>
           </a:xfrm>
           <a:prstGeom prst="roundRect">
@@ -11455,7 +11241,7 @@
         </p:nvCxnSpPr>
         <p:spPr>
           <a:xfrm flipV="1">
-            <a:off x="6575666" y="2529926"/>
+            <a:off x="5619321" y="2457164"/>
             <a:ext cx="263906" cy="1454"/>
           </a:xfrm>
           <a:prstGeom prst="straightConnector1">
@@ -11497,7 +11283,7 @@
         </p:nvSpPr>
         <p:spPr>
           <a:xfrm>
-            <a:off x="10867901" y="5305824"/>
+            <a:off x="10033735" y="3217042"/>
             <a:ext cx="515545" cy="403382"/>
           </a:xfrm>
           <a:prstGeom prst="roundRect">
@@ -11556,7 +11342,7 @@
         </p:nvSpPr>
         <p:spPr>
           <a:xfrm>
-            <a:off x="11291226" y="5188000"/>
+            <a:off x="10457060" y="3099218"/>
             <a:ext cx="1331840" cy="625278"/>
           </a:xfrm>
           <a:prstGeom prst="rect">
@@ -11613,7 +11399,7 @@
         </p:nvSpPr>
         <p:spPr>
           <a:xfrm>
-            <a:off x="10863088" y="4631128"/>
+            <a:off x="10028922" y="2542346"/>
             <a:ext cx="515545" cy="403382"/>
           </a:xfrm>
           <a:prstGeom prst="roundRect">
@@ -11672,7 +11458,7 @@
         </p:nvSpPr>
         <p:spPr>
           <a:xfrm>
-            <a:off x="11286413" y="4513304"/>
+            <a:off x="10452247" y="2424522"/>
             <a:ext cx="1331840" cy="625278"/>
           </a:xfrm>
           <a:prstGeom prst="rect">
@@ -11729,7 +11515,7 @@
         </p:nvSpPr>
         <p:spPr>
           <a:xfrm>
-            <a:off x="8242979" y="2202471"/>
+            <a:off x="7286634" y="2129709"/>
             <a:ext cx="521920" cy="318890"/>
           </a:xfrm>
           <a:prstGeom prst="rect">
@@ -11786,7 +11572,7 @@
         </p:nvSpPr>
         <p:spPr>
           <a:xfrm>
-            <a:off x="7062194" y="2798507"/>
+            <a:off x="6105849" y="2725745"/>
             <a:ext cx="521920" cy="318890"/>
           </a:xfrm>
           <a:prstGeom prst="rect">
@@ -11843,7 +11629,7 @@
         </p:nvSpPr>
         <p:spPr>
           <a:xfrm>
-            <a:off x="10864289" y="5978666"/>
+            <a:off x="10030123" y="3889884"/>
             <a:ext cx="515545" cy="403382"/>
           </a:xfrm>
           <a:prstGeom prst="roundRect">
@@ -11902,7 +11688,7 @@
         </p:nvSpPr>
         <p:spPr>
           <a:xfrm>
-            <a:off x="11283958" y="5857895"/>
+            <a:off x="10449792" y="3769113"/>
             <a:ext cx="1331840" cy="625278"/>
           </a:xfrm>
           <a:prstGeom prst="rect">
@@ -11959,7 +11745,7 @@
         </p:nvGrpSpPr>
         <p:grpSpPr>
           <a:xfrm>
-            <a:off x="8991318" y="2468309"/>
+            <a:off x="8034973" y="2395547"/>
             <a:ext cx="1418319" cy="2066905"/>
             <a:chOff x="8661295" y="2101095"/>
             <a:chExt cx="1418319" cy="2066905"/>
@@ -12096,7 +11882,7 @@
           </p:nvSpPr>
           <p:spPr>
             <a:xfrm>
-              <a:off x="8692139" y="2521271"/>
+              <a:off x="8702204" y="2532657"/>
               <a:ext cx="1350912" cy="1602219"/>
             </a:xfrm>
             <a:prstGeom prst="rect">
@@ -12212,8 +11998,8 @@
         </p:nvCxnSpPr>
         <p:spPr>
           <a:xfrm>
-            <a:off x="8304893" y="4794270"/>
-            <a:ext cx="455329" cy="0"/>
+            <a:off x="7348548" y="4721508"/>
+            <a:ext cx="448582" cy="0"/>
           </a:xfrm>
           <a:prstGeom prst="line">
             <a:avLst/>
@@ -12255,7 +12041,7 @@
         </p:nvCxnSpPr>
         <p:spPr>
           <a:xfrm flipV="1">
-            <a:off x="8763564" y="3838783"/>
+            <a:off x="7794712" y="3766021"/>
             <a:ext cx="0" cy="963986"/>
           </a:xfrm>
           <a:prstGeom prst="line">
@@ -12298,8 +12084,8 @@
         </p:nvCxnSpPr>
         <p:spPr>
           <a:xfrm>
-            <a:off x="8757927" y="3837800"/>
-            <a:ext cx="230895" cy="983"/>
+            <a:off x="7794380" y="3766021"/>
+            <a:ext cx="238097" cy="0"/>
           </a:xfrm>
           <a:prstGeom prst="straightConnector1">
             <a:avLst/>
@@ -12342,8 +12128,8 @@
         </p:nvCxnSpPr>
         <p:spPr>
           <a:xfrm>
-            <a:off x="8304893" y="2531702"/>
-            <a:ext cx="459377" cy="0"/>
+            <a:off x="7348548" y="2458940"/>
+            <a:ext cx="443052" cy="0"/>
           </a:xfrm>
           <a:prstGeom prst="line">
             <a:avLst/>
@@ -12385,8 +12171,8 @@
         </p:nvCxnSpPr>
         <p:spPr>
           <a:xfrm flipV="1">
-            <a:off x="8771422" y="2521387"/>
-            <a:ext cx="0" cy="750129"/>
+            <a:off x="7795617" y="2460598"/>
+            <a:ext cx="0" cy="738156"/>
           </a:xfrm>
           <a:prstGeom prst="line">
             <a:avLst/>
@@ -12428,8 +12214,8 @@
         </p:nvCxnSpPr>
         <p:spPr>
           <a:xfrm>
-            <a:off x="8767453" y="3273659"/>
-            <a:ext cx="220178" cy="0"/>
+            <a:off x="7792990" y="3200897"/>
+            <a:ext cx="238296" cy="0"/>
           </a:xfrm>
           <a:prstGeom prst="straightConnector1">
             <a:avLst/>
@@ -13426,7 +13212,7 @@
         <p:spPr>
           <a:xfrm>
             <a:off x="2118178" y="809176"/>
-            <a:ext cx="7294336" cy="2186975"/>
+            <a:ext cx="7294336" cy="2198105"/>
           </a:xfrm>
           <a:prstGeom prst="roundRect">
             <a:avLst>
@@ -13469,37 +13255,6 @@
           </a:p>
         </p:txBody>
       </p:sp>
-      <p:pic>
-        <p:nvPicPr>
-          <p:cNvPr id="28" name="Picture 27">
-            <a:extLst>
-              <a:ext uri="{FF2B5EF4-FFF2-40B4-BE49-F238E27FC236}">
-                <a16:creationId xmlns:a16="http://schemas.microsoft.com/office/drawing/2014/main" id="{84EA1895-1829-FB57-27C8-18FEC7223E7B}"/>
-              </a:ext>
-            </a:extLst>
-          </p:cNvPr>
-          <p:cNvPicPr>
-            <a:picLocks noChangeAspect="1"/>
-          </p:cNvPicPr>
-          <p:nvPr/>
-        </p:nvPicPr>
-        <p:blipFill>
-          <a:blip r:embed="rId2"/>
-          <a:srcRect l="12894"/>
-          <a:stretch>
-            <a:fillRect/>
-          </a:stretch>
-        </p:blipFill>
-        <p:spPr>
-          <a:xfrm>
-            <a:off x="3177497" y="1046051"/>
-            <a:ext cx="4826185" cy="1922770"/>
-          </a:xfrm>
-          <a:prstGeom prst="rect">
-            <a:avLst/>
-          </a:prstGeom>
-        </p:spPr>
-      </p:pic>
       <p:sp>
         <p:nvSpPr>
           <p:cNvPr id="5" name="Rectangle: Rounded Corners 4">
@@ -13634,7 +13389,7 @@
           <p:nvPr/>
         </p:nvPicPr>
         <p:blipFill>
-          <a:blip r:embed="rId3"/>
+          <a:blip r:embed="rId2"/>
           <a:stretch>
             <a:fillRect/>
           </a:stretch>
@@ -13663,8 +13418,8 @@
         </p:nvSpPr>
         <p:spPr>
           <a:xfrm>
-            <a:off x="2389622" y="3083995"/>
-            <a:ext cx="2286093" cy="273568"/>
+            <a:off x="2382726" y="3083995"/>
+            <a:ext cx="2286093" cy="258776"/>
           </a:xfrm>
           <a:prstGeom prst="roundRect">
             <a:avLst/>
@@ -13813,7 +13568,7 @@
           <p:nvPr/>
         </p:nvPicPr>
         <p:blipFill>
-          <a:blip r:embed="rId4"/>
+          <a:blip r:embed="rId3"/>
           <a:stretch>
             <a:fillRect/>
           </a:stretch>
@@ -13901,7 +13656,7 @@
           <p:nvPr/>
         </p:nvPicPr>
         <p:blipFill>
-          <a:blip r:embed="rId5"/>
+          <a:blip r:embed="rId4"/>
           <a:srcRect l="84729" t="18580" b="19155"/>
           <a:stretch>
             <a:fillRect/>
@@ -13909,7 +13664,7 @@
         </p:blipFill>
         <p:spPr>
           <a:xfrm>
-            <a:off x="8140701" y="1243438"/>
+            <a:off x="8165551" y="1268288"/>
             <a:ext cx="1013761" cy="1368689"/>
           </a:xfrm>
           <a:prstGeom prst="rect">
@@ -13932,14 +13687,14 @@
           <p:nvPr/>
         </p:nvPicPr>
         <p:blipFill>
-          <a:blip r:embed="rId6"/>
+          <a:blip r:embed="rId5"/>
           <a:stretch>
             <a:fillRect/>
           </a:stretch>
         </p:blipFill>
         <p:spPr>
           <a:xfrm>
-            <a:off x="6507563" y="3758077"/>
+            <a:off x="6507563" y="3822687"/>
             <a:ext cx="1542520" cy="867667"/>
           </a:xfrm>
           <a:prstGeom prst="rect">
@@ -13964,7 +13719,7 @@
         </p:nvSpPr>
         <p:spPr>
           <a:xfrm>
-            <a:off x="6526613" y="3783785"/>
+            <a:off x="6526613" y="3848395"/>
             <a:ext cx="1384101" cy="445044"/>
           </a:xfrm>
           <a:prstGeom prst="rect">
@@ -14020,7 +13775,7 @@
           <p:nvPr/>
         </p:nvPicPr>
         <p:blipFill>
-          <a:blip r:embed="rId7"/>
+          <a:blip r:embed="rId6"/>
           <a:stretch>
             <a:fillRect/>
           </a:stretch>
@@ -14052,7 +13807,7 @@
         </p:nvSpPr>
         <p:spPr>
           <a:xfrm>
-            <a:off x="8359669" y="4423435"/>
+            <a:off x="8349729" y="4423435"/>
             <a:ext cx="416732" cy="168654"/>
           </a:xfrm>
           <a:prstGeom prst="rect">
@@ -14156,50 +13911,6 @@
           </a:p>
         </p:txBody>
       </p:sp>
-      <p:cxnSp>
-        <p:nvCxnSpPr>
-          <p:cNvPr id="19" name="Straight Connector 18">
-            <a:extLst>
-              <a:ext uri="{FF2B5EF4-FFF2-40B4-BE49-F238E27FC236}">
-                <a16:creationId xmlns:a16="http://schemas.microsoft.com/office/drawing/2014/main" id="{855498D0-7DD5-C754-9185-024B2167ECD7}"/>
-              </a:ext>
-            </a:extLst>
-          </p:cNvPr>
-          <p:cNvCxnSpPr>
-            <a:cxnSpLocks/>
-          </p:cNvCxnSpPr>
-          <p:nvPr/>
-        </p:nvCxnSpPr>
-        <p:spPr>
-          <a:xfrm>
-            <a:off x="2313945" y="1869900"/>
-            <a:ext cx="4637367" cy="0"/>
-          </a:xfrm>
-          <a:prstGeom prst="line">
-            <a:avLst/>
-          </a:prstGeom>
-          <a:ln w="15875">
-            <a:solidFill>
-              <a:srgbClr val="3F0E24"/>
-            </a:solidFill>
-            <a:prstDash val="dash"/>
-          </a:ln>
-        </p:spPr>
-        <p:style>
-          <a:lnRef idx="1">
-            <a:schemeClr val="accent1"/>
-          </a:lnRef>
-          <a:fillRef idx="0">
-            <a:schemeClr val="accent1"/>
-          </a:fillRef>
-          <a:effectRef idx="0">
-            <a:schemeClr val="accent1"/>
-          </a:effectRef>
-          <a:fontRef idx="minor">
-            <a:schemeClr val="tx1"/>
-          </a:fontRef>
-        </p:style>
-      </p:cxnSp>
       <p:sp>
         <p:nvSpPr>
           <p:cNvPr id="20" name="TextBox 19">
@@ -14214,8 +13925,8 @@
         </p:nvSpPr>
         <p:spPr>
           <a:xfrm>
-            <a:off x="2238833" y="1299085"/>
-            <a:ext cx="973608" cy="340519"/>
+            <a:off x="2294065" y="1299085"/>
+            <a:ext cx="903466" cy="306467"/>
           </a:xfrm>
           <a:prstGeom prst="roundRect">
             <a:avLst/>
@@ -14225,13 +13936,13 @@
           </a:solidFill>
         </p:spPr>
         <p:txBody>
-          <a:bodyPr wrap="none" rtlCol="0">
+          <a:bodyPr wrap="square" rtlCol="0">
             <a:spAutoFit/>
           </a:bodyPr>
           <a:lstStyle/>
           <a:p>
             <a:r>
-              <a:rPr lang="en-CN" sz="1400" dirty="0"/>
+              <a:rPr lang="en-CN" sz="1200" dirty="0"/>
               <a:t>Agentic RL</a:t>
             </a:r>
           </a:p>
@@ -14395,7 +14106,7 @@
           <p:nvPr/>
         </p:nvPicPr>
         <p:blipFill>
-          <a:blip r:embed="rId8"/>
+          <a:blip r:embed="rId7"/>
           <a:stretch>
             <a:fillRect/>
           </a:stretch>
@@ -14424,8 +14135,8 @@
         </p:nvSpPr>
         <p:spPr>
           <a:xfrm>
-            <a:off x="2188942" y="2243851"/>
-            <a:ext cx="1119414" cy="340519"/>
+            <a:off x="2247084" y="2276761"/>
+            <a:ext cx="1119414" cy="306467"/>
           </a:xfrm>
           <a:prstGeom prst="roundRect">
             <a:avLst/>
@@ -14439,12 +14150,86 @@
           <a:lstStyle/>
           <a:p>
             <a:r>
-              <a:rPr lang="en-CN" sz="1400" dirty="0"/>
+              <a:rPr lang="en-CN" sz="1200" dirty="0"/>
               <a:t>ENVS (Ours)</a:t>
             </a:r>
           </a:p>
         </p:txBody>
       </p:sp>
+      <p:pic>
+        <p:nvPicPr>
+          <p:cNvPr id="3" name="Picture 2">
+            <a:extLst>
+              <a:ext uri="{FF2B5EF4-FFF2-40B4-BE49-F238E27FC236}">
+                <a16:creationId xmlns:a16="http://schemas.microsoft.com/office/drawing/2014/main" id="{8910557A-FCE2-789A-8AD3-A24FD97E1B3D}"/>
+              </a:ext>
+            </a:extLst>
+          </p:cNvPr>
+          <p:cNvPicPr>
+            <a:picLocks noChangeAspect="1"/>
+          </p:cNvPicPr>
+          <p:nvPr/>
+        </p:nvPicPr>
+        <p:blipFill>
+          <a:blip r:embed="rId8"/>
+          <a:stretch>
+            <a:fillRect/>
+          </a:stretch>
+        </p:blipFill>
+        <p:spPr>
+          <a:xfrm>
+            <a:off x="3217411" y="1053824"/>
+            <a:ext cx="4801252" cy="1906445"/>
+          </a:xfrm>
+          <a:prstGeom prst="rect">
+            <a:avLst/>
+          </a:prstGeom>
+        </p:spPr>
+      </p:pic>
+      <p:cxnSp>
+        <p:nvCxnSpPr>
+          <p:cNvPr id="19" name="Straight Connector 18">
+            <a:extLst>
+              <a:ext uri="{FF2B5EF4-FFF2-40B4-BE49-F238E27FC236}">
+                <a16:creationId xmlns:a16="http://schemas.microsoft.com/office/drawing/2014/main" id="{855498D0-7DD5-C754-9185-024B2167ECD7}"/>
+              </a:ext>
+            </a:extLst>
+          </p:cNvPr>
+          <p:cNvCxnSpPr>
+            <a:cxnSpLocks/>
+          </p:cNvCxnSpPr>
+          <p:nvPr/>
+        </p:nvCxnSpPr>
+        <p:spPr>
+          <a:xfrm>
+            <a:off x="2313945" y="1869900"/>
+            <a:ext cx="4637367" cy="0"/>
+          </a:xfrm>
+          <a:prstGeom prst="line">
+            <a:avLst/>
+          </a:prstGeom>
+          <a:ln w="15875">
+            <a:solidFill>
+              <a:srgbClr val="3F0E24"/>
+            </a:solidFill>
+            <a:prstDash val="dash"/>
+          </a:ln>
+        </p:spPr>
+        <p:style>
+          <a:lnRef idx="1">
+            <a:schemeClr val="accent1"/>
+          </a:lnRef>
+          <a:fillRef idx="0">
+            <a:schemeClr val="accent1"/>
+          </a:fillRef>
+          <a:effectRef idx="0">
+            <a:schemeClr val="accent1"/>
+          </a:effectRef>
+          <a:fontRef idx="minor">
+            <a:schemeClr val="tx1"/>
+          </a:fontRef>
+        </p:style>
+      </p:cxnSp>
     </p:spTree>
     <p:extLst>
       <p:ext uri="{BB962C8B-B14F-4D97-AF65-F5344CB8AC3E}">
